--- a/assets/files/Struktur-Organisasi.pptx
+++ b/assets/files/Struktur-Organisasi.pptx
@@ -110,15 +110,15 @@
 </file>
 
 <file path=ppt/diagrams/colors1.xml><?xml version="1.0" encoding="utf-8"?>
-<dgm:colorsDef xmlns:dgm="http://schemas.openxmlformats.org/drawingml/2006/diagram" xmlns:a="http://schemas.openxmlformats.org/drawingml/2006/main" uniqueId="urn:microsoft.com/office/officeart/2005/8/colors/accent2_2">
+<dgm:colorsDef xmlns:dgm="http://schemas.openxmlformats.org/drawingml/2006/diagram" xmlns:a="http://schemas.openxmlformats.org/drawingml/2006/main" uniqueId="urn:microsoft.com/office/officeart/2005/8/colors/colorful1">
   <dgm:title val=""/>
   <dgm:desc val=""/>
   <dgm:catLst>
-    <dgm:cat type="accent2" pri="11200"/>
+    <dgm:cat type="colorful" pri="10100"/>
   </dgm:catLst>
   <dgm:styleLbl name="node0">
     <dgm:fillClrLst meth="repeat">
-      <a:schemeClr val="accent2"/>
+      <a:schemeClr val="accent1"/>
     </dgm:fillClrLst>
     <dgm:linClrLst meth="repeat">
       <a:schemeClr val="lt1"/>
@@ -131,6 +131,10 @@
   <dgm:styleLbl name="node1">
     <dgm:fillClrLst meth="repeat">
       <a:schemeClr val="accent2"/>
+      <a:schemeClr val="accent3"/>
+      <a:schemeClr val="accent4"/>
+      <a:schemeClr val="accent5"/>
+      <a:schemeClr val="accent6"/>
     </dgm:fillClrLst>
     <dgm:linClrLst meth="repeat">
       <a:schemeClr val="lt1"/>
@@ -143,9 +147,17 @@
   <dgm:styleLbl name="alignNode1">
     <dgm:fillClrLst meth="repeat">
       <a:schemeClr val="accent2"/>
+      <a:schemeClr val="accent3"/>
+      <a:schemeClr val="accent4"/>
+      <a:schemeClr val="accent5"/>
+      <a:schemeClr val="accent6"/>
     </dgm:fillClrLst>
     <dgm:linClrLst meth="repeat">
       <a:schemeClr val="accent2"/>
+      <a:schemeClr val="accent3"/>
+      <a:schemeClr val="accent4"/>
+      <a:schemeClr val="accent5"/>
+      <a:schemeClr val="accent6"/>
     </dgm:linClrLst>
     <dgm:effectClrLst/>
     <dgm:txLinClrLst/>
@@ -155,6 +167,10 @@
   <dgm:styleLbl name="lnNode1">
     <dgm:fillClrLst meth="repeat">
       <a:schemeClr val="accent2"/>
+      <a:schemeClr val="accent3"/>
+      <a:schemeClr val="accent4"/>
+      <a:schemeClr val="accent5"/>
+      <a:schemeClr val="accent6"/>
     </dgm:fillClrLst>
     <dgm:linClrLst meth="repeat">
       <a:schemeClr val="lt1"/>
@@ -167,6 +183,18 @@
   <dgm:styleLbl name="vennNode1">
     <dgm:fillClrLst meth="repeat">
       <a:schemeClr val="accent2">
+        <a:alpha val="50000"/>
+      </a:schemeClr>
+      <a:schemeClr val="accent3">
+        <a:alpha val="50000"/>
+      </a:schemeClr>
+      <a:schemeClr val="accent4">
+        <a:alpha val="50000"/>
+      </a:schemeClr>
+      <a:schemeClr val="accent5">
+        <a:alpha val="50000"/>
+      </a:schemeClr>
+      <a:schemeClr val="accent6">
         <a:alpha val="50000"/>
       </a:schemeClr>
     </dgm:fillClrLst>
@@ -179,7 +207,7 @@
     <dgm:txEffectClrLst/>
   </dgm:styleLbl>
   <dgm:styleLbl name="node2">
-    <dgm:fillClrLst meth="repeat">
+    <dgm:fillClrLst>
       <a:schemeClr val="accent2"/>
     </dgm:fillClrLst>
     <dgm:linClrLst meth="repeat">
@@ -191,8 +219,8 @@
     <dgm:txEffectClrLst/>
   </dgm:styleLbl>
   <dgm:styleLbl name="node3">
-    <dgm:fillClrLst meth="repeat">
-      <a:schemeClr val="accent2"/>
+    <dgm:fillClrLst>
+      <a:schemeClr val="accent3"/>
     </dgm:fillClrLst>
     <dgm:linClrLst meth="repeat">
       <a:schemeClr val="lt1"/>
@@ -203,8 +231,8 @@
     <dgm:txEffectClrLst/>
   </dgm:styleLbl>
   <dgm:styleLbl name="node4">
-    <dgm:fillClrLst meth="repeat">
-      <a:schemeClr val="accent2"/>
+    <dgm:fillClrLst>
+      <a:schemeClr val="accent4"/>
     </dgm:fillClrLst>
     <dgm:linClrLst meth="repeat">
       <a:schemeClr val="lt1"/>
@@ -217,6 +245,18 @@
   <dgm:styleLbl name="fgImgPlace1">
     <dgm:fillClrLst meth="repeat">
       <a:schemeClr val="accent2">
+        <a:tint val="50000"/>
+      </a:schemeClr>
+      <a:schemeClr val="accent3">
+        <a:tint val="50000"/>
+      </a:schemeClr>
+      <a:schemeClr val="accent4">
+        <a:tint val="50000"/>
+      </a:schemeClr>
+      <a:schemeClr val="accent5">
+        <a:tint val="50000"/>
+      </a:schemeClr>
+      <a:schemeClr val="accent6">
         <a:tint val="50000"/>
       </a:schemeClr>
     </dgm:fillClrLst>
@@ -231,9 +271,12 @@
     <dgm:txEffectClrLst/>
   </dgm:styleLbl>
   <dgm:styleLbl name="alignImgPlace1">
-    <dgm:fillClrLst meth="repeat">
+    <dgm:fillClrLst>
+      <a:schemeClr val="accent1">
+        <a:tint val="50000"/>
+      </a:schemeClr>
       <a:schemeClr val="accent2">
-        <a:tint val="50000"/>
+        <a:tint val="20000"/>
       </a:schemeClr>
     </dgm:fillClrLst>
     <dgm:linClrLst meth="repeat">
@@ -247,9 +290,12 @@
     <dgm:txEffectClrLst/>
   </dgm:styleLbl>
   <dgm:styleLbl name="bgImgPlace1">
-    <dgm:fillClrLst meth="repeat">
+    <dgm:fillClrLst>
+      <a:schemeClr val="accent1">
+        <a:tint val="50000"/>
+      </a:schemeClr>
       <a:schemeClr val="accent2">
-        <a:tint val="50000"/>
+        <a:tint val="20000"/>
       </a:schemeClr>
     </dgm:fillClrLst>
     <dgm:linClrLst meth="repeat">
@@ -264,14 +310,14 @@
   </dgm:styleLbl>
   <dgm:styleLbl name="sibTrans2D1">
     <dgm:fillClrLst meth="repeat">
-      <a:schemeClr val="accent2">
-        <a:tint val="60000"/>
-      </a:schemeClr>
+      <a:schemeClr val="accent2"/>
+      <a:schemeClr val="accent3"/>
+      <a:schemeClr val="accent4"/>
+      <a:schemeClr val="accent5"/>
+      <a:schemeClr val="accent6"/>
     </dgm:fillClrLst>
-    <dgm:linClrLst meth="repeat">
-      <a:schemeClr val="accent2">
-        <a:tint val="60000"/>
-      </a:schemeClr>
+    <dgm:linClrLst meth="cycle">
+      <a:schemeClr val="lt1"/>
     </dgm:linClrLst>
     <dgm:effectClrLst/>
     <dgm:txLinClrLst/>
@@ -280,42 +326,54 @@
   </dgm:styleLbl>
   <dgm:styleLbl name="fgSibTrans2D1">
     <dgm:fillClrLst meth="repeat">
-      <a:schemeClr val="accent2">
-        <a:tint val="60000"/>
-      </a:schemeClr>
+      <a:schemeClr val="accent2"/>
+      <a:schemeClr val="accent3"/>
+      <a:schemeClr val="accent4"/>
+      <a:schemeClr val="accent5"/>
+      <a:schemeClr val="accent6"/>
     </dgm:fillClrLst>
-    <dgm:linClrLst meth="repeat">
-      <a:schemeClr val="accent2">
-        <a:tint val="60000"/>
-      </a:schemeClr>
+    <dgm:linClrLst meth="cycle">
+      <a:schemeClr val="lt1"/>
     </dgm:linClrLst>
     <dgm:effectClrLst/>
     <dgm:txLinClrLst/>
-    <dgm:txFillClrLst/>
+    <dgm:txFillClrLst meth="repeat">
+      <a:schemeClr val="lt1"/>
+    </dgm:txFillClrLst>
     <dgm:txEffectClrLst/>
   </dgm:styleLbl>
   <dgm:styleLbl name="bgSibTrans2D1">
     <dgm:fillClrLst meth="repeat">
-      <a:schemeClr val="accent2">
-        <a:tint val="60000"/>
-      </a:schemeClr>
+      <a:schemeClr val="accent2"/>
+      <a:schemeClr val="accent3"/>
+      <a:schemeClr val="accent4"/>
+      <a:schemeClr val="accent5"/>
+      <a:schemeClr val="accent6"/>
     </dgm:fillClrLst>
-    <dgm:linClrLst meth="repeat">
-      <a:schemeClr val="accent2">
-        <a:tint val="60000"/>
-      </a:schemeClr>
+    <dgm:linClrLst meth="cycle">
+      <a:schemeClr val="lt1"/>
     </dgm:linClrLst>
     <dgm:effectClrLst/>
     <dgm:txLinClrLst/>
-    <dgm:txFillClrLst/>
+    <dgm:txFillClrLst meth="repeat">
+      <a:schemeClr val="lt1"/>
+    </dgm:txFillClrLst>
     <dgm:txEffectClrLst/>
   </dgm:styleLbl>
   <dgm:styleLbl name="sibTrans1D1">
     <dgm:fillClrLst meth="repeat">
       <a:schemeClr val="accent2"/>
+      <a:schemeClr val="accent3"/>
+      <a:schemeClr val="accent4"/>
+      <a:schemeClr val="accent5"/>
+      <a:schemeClr val="accent6"/>
     </dgm:fillClrLst>
     <dgm:linClrLst meth="repeat">
       <a:schemeClr val="accent2"/>
+      <a:schemeClr val="accent3"/>
+      <a:schemeClr val="accent4"/>
+      <a:schemeClr val="accent5"/>
+      <a:schemeClr val="accent6"/>
     </dgm:linClrLst>
     <dgm:effectClrLst/>
     <dgm:txLinClrLst/>
@@ -342,7 +400,7 @@
   </dgm:styleLbl>
   <dgm:styleLbl name="asst0">
     <dgm:fillClrLst meth="repeat">
-      <a:schemeClr val="accent2"/>
+      <a:schemeClr val="accent1"/>
     </dgm:fillClrLst>
     <dgm:linClrLst meth="repeat">
       <a:schemeClr val="lt1"/>
@@ -365,6 +423,42 @@
     <dgm:txEffectClrLst/>
   </dgm:styleLbl>
   <dgm:styleLbl name="asst2">
+    <dgm:fillClrLst>
+      <a:schemeClr val="accent3"/>
+    </dgm:fillClrLst>
+    <dgm:linClrLst meth="repeat">
+      <a:schemeClr val="lt1"/>
+    </dgm:linClrLst>
+    <dgm:effectClrLst/>
+    <dgm:txLinClrLst/>
+    <dgm:txFillClrLst/>
+    <dgm:txEffectClrLst/>
+  </dgm:styleLbl>
+  <dgm:styleLbl name="asst3">
+    <dgm:fillClrLst>
+      <a:schemeClr val="accent4"/>
+    </dgm:fillClrLst>
+    <dgm:linClrLst meth="repeat">
+      <a:schemeClr val="lt1"/>
+    </dgm:linClrLst>
+    <dgm:effectClrLst/>
+    <dgm:txLinClrLst/>
+    <dgm:txFillClrLst/>
+    <dgm:txEffectClrLst/>
+  </dgm:styleLbl>
+  <dgm:styleLbl name="asst4">
+    <dgm:fillClrLst>
+      <a:schemeClr val="accent5"/>
+    </dgm:fillClrLst>
+    <dgm:linClrLst meth="repeat">
+      <a:schemeClr val="lt1"/>
+    </dgm:linClrLst>
+    <dgm:effectClrLst/>
+    <dgm:txLinClrLst/>
+    <dgm:txFillClrLst/>
+    <dgm:txEffectClrLst/>
+  </dgm:styleLbl>
+  <dgm:styleLbl name="parChTrans2D1">
     <dgm:fillClrLst meth="repeat">
       <a:schemeClr val="accent2"/>
     </dgm:fillClrLst>
@@ -373,12 +467,14 @@
     </dgm:linClrLst>
     <dgm:effectClrLst/>
     <dgm:txLinClrLst/>
-    <dgm:txFillClrLst/>
+    <dgm:txFillClrLst meth="repeat">
+      <a:schemeClr val="lt1"/>
+    </dgm:txFillClrLst>
     <dgm:txEffectClrLst/>
   </dgm:styleLbl>
-  <dgm:styleLbl name="asst3">
+  <dgm:styleLbl name="parChTrans2D2">
     <dgm:fillClrLst meth="repeat">
-      <a:schemeClr val="accent2"/>
+      <a:schemeClr val="accent3"/>
     </dgm:fillClrLst>
     <dgm:linClrLst meth="repeat">
       <a:schemeClr val="lt1"/>
@@ -388,9 +484,9 @@
     <dgm:txFillClrLst/>
     <dgm:txEffectClrLst/>
   </dgm:styleLbl>
-  <dgm:styleLbl name="asst4">
+  <dgm:styleLbl name="parChTrans2D3">
     <dgm:fillClrLst meth="repeat">
-      <a:schemeClr val="accent2"/>
+      <a:schemeClr val="accent4"/>
     </dgm:fillClrLst>
     <dgm:linClrLst meth="repeat">
       <a:schemeClr val="lt1"/>
@@ -400,16 +496,12 @@
     <dgm:txFillClrLst/>
     <dgm:txEffectClrLst/>
   </dgm:styleLbl>
-  <dgm:styleLbl name="parChTrans2D1">
+  <dgm:styleLbl name="parChTrans2D4">
     <dgm:fillClrLst meth="repeat">
-      <a:schemeClr val="accent2">
-        <a:tint val="60000"/>
-      </a:schemeClr>
+      <a:schemeClr val="accent5"/>
     </dgm:fillClrLst>
     <dgm:linClrLst meth="repeat">
-      <a:schemeClr val="accent2">
-        <a:tint val="60000"/>
-      </a:schemeClr>
+      <a:schemeClr val="lt1"/>
     </dgm:linClrLst>
     <dgm:effectClrLst/>
     <dgm:txLinClrLst/>
@@ -418,9 +510,25 @@
     </dgm:txFillClrLst>
     <dgm:txEffectClrLst/>
   </dgm:styleLbl>
-  <dgm:styleLbl name="parChTrans2D2">
+  <dgm:styleLbl name="parChTrans1D1">
     <dgm:fillClrLst meth="repeat">
       <a:schemeClr val="accent2"/>
+    </dgm:fillClrLst>
+    <dgm:linClrLst meth="repeat">
+      <a:schemeClr val="accent1"/>
+    </dgm:linClrLst>
+    <dgm:effectClrLst/>
+    <dgm:txLinClrLst/>
+    <dgm:txFillClrLst meth="repeat">
+      <a:schemeClr val="tx1"/>
+    </dgm:txFillClrLst>
+    <dgm:txEffectClrLst/>
+  </dgm:styleLbl>
+  <dgm:styleLbl name="parChTrans1D2">
+    <dgm:fillClrLst meth="repeat">
+      <a:schemeClr val="accent3">
+        <a:tint val="90000"/>
+      </a:schemeClr>
     </dgm:fillClrLst>
     <dgm:linClrLst meth="repeat">
       <a:schemeClr val="accent2"/>
@@ -428,46 +536,18 @@
     <dgm:effectClrLst/>
     <dgm:txLinClrLst/>
     <dgm:txFillClrLst meth="repeat">
-      <a:schemeClr val="lt1"/>
+      <a:schemeClr val="tx1"/>
     </dgm:txFillClrLst>
     <dgm:txEffectClrLst/>
   </dgm:styleLbl>
-  <dgm:styleLbl name="parChTrans2D3">
+  <dgm:styleLbl name="parChTrans1D3">
     <dgm:fillClrLst meth="repeat">
-      <a:schemeClr val="accent2"/>
+      <a:schemeClr val="accent4">
+        <a:tint val="70000"/>
+      </a:schemeClr>
     </dgm:fillClrLst>
     <dgm:linClrLst meth="repeat">
-      <a:schemeClr val="accent2"/>
-    </dgm:linClrLst>
-    <dgm:effectClrLst/>
-    <dgm:txLinClrLst/>
-    <dgm:txFillClrLst meth="repeat">
-      <a:schemeClr val="lt1"/>
-    </dgm:txFillClrLst>
-    <dgm:txEffectClrLst/>
-  </dgm:styleLbl>
-  <dgm:styleLbl name="parChTrans2D4">
-    <dgm:fillClrLst meth="repeat">
-      <a:schemeClr val="accent2"/>
-    </dgm:fillClrLst>
-    <dgm:linClrLst meth="repeat">
-      <a:schemeClr val="accent2"/>
-    </dgm:linClrLst>
-    <dgm:effectClrLst/>
-    <dgm:txLinClrLst/>
-    <dgm:txFillClrLst meth="repeat">
-      <a:schemeClr val="lt1"/>
-    </dgm:txFillClrLst>
-    <dgm:txEffectClrLst/>
-  </dgm:styleLbl>
-  <dgm:styleLbl name="parChTrans1D1">
-    <dgm:fillClrLst meth="repeat">
-      <a:schemeClr val="accent2"/>
-    </dgm:fillClrLst>
-    <dgm:linClrLst meth="repeat">
-      <a:schemeClr val="accent2">
-        <a:shade val="60000"/>
-      </a:schemeClr>
+      <a:schemeClr val="accent3"/>
     </dgm:linClrLst>
     <dgm:effectClrLst/>
     <dgm:txLinClrLst/>
@@ -476,46 +556,14 @@
     </dgm:txFillClrLst>
     <dgm:txEffectClrLst/>
   </dgm:styleLbl>
-  <dgm:styleLbl name="parChTrans1D2">
+  <dgm:styleLbl name="parChTrans1D4">
     <dgm:fillClrLst meth="repeat">
-      <a:schemeClr val="accent2"/>
+      <a:schemeClr val="accent5">
+        <a:tint val="50000"/>
+      </a:schemeClr>
     </dgm:fillClrLst>
     <dgm:linClrLst meth="repeat">
-      <a:schemeClr val="accent2">
-        <a:shade val="60000"/>
-      </a:schemeClr>
-    </dgm:linClrLst>
-    <dgm:effectClrLst/>
-    <dgm:txLinClrLst/>
-    <dgm:txFillClrLst meth="repeat">
-      <a:schemeClr val="tx1"/>
-    </dgm:txFillClrLst>
-    <dgm:txEffectClrLst/>
-  </dgm:styleLbl>
-  <dgm:styleLbl name="parChTrans1D3">
-    <dgm:fillClrLst meth="repeat">
-      <a:schemeClr val="accent2"/>
-    </dgm:fillClrLst>
-    <dgm:linClrLst meth="repeat">
-      <a:schemeClr val="accent2">
-        <a:shade val="80000"/>
-      </a:schemeClr>
-    </dgm:linClrLst>
-    <dgm:effectClrLst/>
-    <dgm:txLinClrLst/>
-    <dgm:txFillClrLst meth="repeat">
-      <a:schemeClr val="tx1"/>
-    </dgm:txFillClrLst>
-    <dgm:txEffectClrLst/>
-  </dgm:styleLbl>
-  <dgm:styleLbl name="parChTrans1D4">
-    <dgm:fillClrLst meth="repeat">
-      <a:schemeClr val="accent2"/>
-    </dgm:fillClrLst>
-    <dgm:linClrLst meth="repeat">
-      <a:schemeClr val="accent2">
-        <a:shade val="80000"/>
-      </a:schemeClr>
+      <a:schemeClr val="accent4"/>
     </dgm:linClrLst>
     <dgm:effectClrLst/>
     <dgm:txLinClrLst/>
@@ -532,6 +580,10 @@
     </dgm:fillClrLst>
     <dgm:linClrLst meth="repeat">
       <a:schemeClr val="accent2"/>
+      <a:schemeClr val="accent3"/>
+      <a:schemeClr val="accent4"/>
+      <a:schemeClr val="accent5"/>
+      <a:schemeClr val="accent6"/>
     </dgm:linClrLst>
     <dgm:effectClrLst/>
     <dgm:txLinClrLst/>
@@ -548,6 +600,10 @@
     </dgm:fillClrLst>
     <dgm:linClrLst meth="repeat">
       <a:schemeClr val="accent2"/>
+      <a:schemeClr val="accent3"/>
+      <a:schemeClr val="accent4"/>
+      <a:schemeClr val="accent5"/>
+      <a:schemeClr val="accent6"/>
     </dgm:linClrLst>
     <dgm:effectClrLst/>
     <dgm:txLinClrLst/>
@@ -564,6 +620,10 @@
     </dgm:fillClrLst>
     <dgm:linClrLst meth="repeat">
       <a:schemeClr val="accent2"/>
+      <a:schemeClr val="accent3"/>
+      <a:schemeClr val="accent4"/>
+      <a:schemeClr val="accent5"/>
+      <a:schemeClr val="accent6"/>
     </dgm:linClrLst>
     <dgm:effectClrLst/>
     <dgm:txLinClrLst/>
@@ -579,6 +639,268 @@
       </a:schemeClr>
     </dgm:fillClrLst>
     <dgm:linClrLst meth="repeat">
+      <a:schemeClr val="accent1"/>
+    </dgm:linClrLst>
+    <dgm:effectClrLst/>
+    <dgm:txLinClrLst/>
+    <dgm:txFillClrLst meth="repeat">
+      <a:schemeClr val="dk1"/>
+    </dgm:txFillClrLst>
+    <dgm:txEffectClrLst/>
+  </dgm:styleLbl>
+  <dgm:styleLbl name="bgAcc1">
+    <dgm:fillClrLst meth="repeat">
+      <a:schemeClr val="lt1">
+        <a:alpha val="90000"/>
+      </a:schemeClr>
+    </dgm:fillClrLst>
+    <dgm:linClrLst meth="repeat">
+      <a:schemeClr val="accent2"/>
+      <a:schemeClr val="accent3"/>
+      <a:schemeClr val="accent4"/>
+      <a:schemeClr val="accent5"/>
+      <a:schemeClr val="accent6"/>
+    </dgm:linClrLst>
+    <dgm:effectClrLst/>
+    <dgm:txLinClrLst/>
+    <dgm:txFillClrLst meth="repeat">
+      <a:schemeClr val="dk1"/>
+    </dgm:txFillClrLst>
+    <dgm:txEffectClrLst/>
+  </dgm:styleLbl>
+  <dgm:styleLbl name="solidFgAcc1">
+    <dgm:fillClrLst meth="repeat">
+      <a:schemeClr val="lt1"/>
+    </dgm:fillClrLst>
+    <dgm:linClrLst meth="repeat">
+      <a:schemeClr val="accent2"/>
+      <a:schemeClr val="accent3"/>
+      <a:schemeClr val="accent4"/>
+      <a:schemeClr val="accent5"/>
+      <a:schemeClr val="accent6"/>
+    </dgm:linClrLst>
+    <dgm:effectClrLst/>
+    <dgm:txLinClrLst/>
+    <dgm:txFillClrLst meth="repeat">
+      <a:schemeClr val="dk1"/>
+    </dgm:txFillClrLst>
+    <dgm:txEffectClrLst/>
+  </dgm:styleLbl>
+  <dgm:styleLbl name="solidAlignAcc1">
+    <dgm:fillClrLst meth="repeat">
+      <a:schemeClr val="lt1"/>
+    </dgm:fillClrLst>
+    <dgm:linClrLst meth="repeat">
+      <a:schemeClr val="accent2"/>
+      <a:schemeClr val="accent3"/>
+      <a:schemeClr val="accent4"/>
+      <a:schemeClr val="accent5"/>
+      <a:schemeClr val="accent6"/>
+    </dgm:linClrLst>
+    <dgm:effectClrLst/>
+    <dgm:txLinClrLst/>
+    <dgm:txFillClrLst meth="repeat">
+      <a:schemeClr val="dk1"/>
+    </dgm:txFillClrLst>
+    <dgm:txEffectClrLst/>
+  </dgm:styleLbl>
+  <dgm:styleLbl name="solidBgAcc1">
+    <dgm:fillClrLst meth="repeat">
+      <a:schemeClr val="lt1"/>
+    </dgm:fillClrLst>
+    <dgm:linClrLst meth="repeat">
+      <a:schemeClr val="accent2"/>
+      <a:schemeClr val="accent3"/>
+      <a:schemeClr val="accent4"/>
+      <a:schemeClr val="accent5"/>
+      <a:schemeClr val="accent6"/>
+    </dgm:linClrLst>
+    <dgm:effectClrLst/>
+    <dgm:txLinClrLst/>
+    <dgm:txFillClrLst meth="repeat">
+      <a:schemeClr val="dk1"/>
+    </dgm:txFillClrLst>
+    <dgm:txEffectClrLst/>
+  </dgm:styleLbl>
+  <dgm:styleLbl name="fgAccFollowNode1">
+    <dgm:fillClrLst meth="repeat">
+      <a:schemeClr val="accent2">
+        <a:tint val="40000"/>
+        <a:alpha val="90000"/>
+      </a:schemeClr>
+      <a:schemeClr val="accent3">
+        <a:tint val="40000"/>
+        <a:alpha val="90000"/>
+      </a:schemeClr>
+      <a:schemeClr val="accent4">
+        <a:tint val="40000"/>
+        <a:alpha val="90000"/>
+      </a:schemeClr>
+      <a:schemeClr val="accent5">
+        <a:tint val="40000"/>
+        <a:alpha val="90000"/>
+      </a:schemeClr>
+      <a:schemeClr val="accent6">
+        <a:tint val="40000"/>
+        <a:alpha val="90000"/>
+      </a:schemeClr>
+    </dgm:fillClrLst>
+    <dgm:linClrLst meth="repeat">
+      <a:schemeClr val="accent2">
+        <a:tint val="40000"/>
+        <a:alpha val="90000"/>
+      </a:schemeClr>
+      <a:schemeClr val="accent3">
+        <a:tint val="40000"/>
+        <a:alpha val="90000"/>
+      </a:schemeClr>
+      <a:schemeClr val="accent4">
+        <a:tint val="40000"/>
+        <a:alpha val="90000"/>
+      </a:schemeClr>
+      <a:schemeClr val="accent5">
+        <a:tint val="40000"/>
+        <a:alpha val="90000"/>
+      </a:schemeClr>
+      <a:schemeClr val="accent6">
+        <a:tint val="40000"/>
+        <a:alpha val="90000"/>
+      </a:schemeClr>
+    </dgm:linClrLst>
+    <dgm:effectClrLst/>
+    <dgm:txLinClrLst/>
+    <dgm:txFillClrLst meth="repeat">
+      <a:schemeClr val="dk1"/>
+    </dgm:txFillClrLst>
+    <dgm:txEffectClrLst/>
+  </dgm:styleLbl>
+  <dgm:styleLbl name="alignAccFollowNode1">
+    <dgm:fillClrLst meth="repeat">
+      <a:schemeClr val="accent2">
+        <a:tint val="40000"/>
+        <a:alpha val="90000"/>
+      </a:schemeClr>
+      <a:schemeClr val="accent3">
+        <a:tint val="40000"/>
+        <a:alpha val="90000"/>
+      </a:schemeClr>
+      <a:schemeClr val="accent4">
+        <a:tint val="40000"/>
+        <a:alpha val="90000"/>
+      </a:schemeClr>
+      <a:schemeClr val="accent5">
+        <a:tint val="40000"/>
+        <a:alpha val="90000"/>
+      </a:schemeClr>
+      <a:schemeClr val="accent6">
+        <a:tint val="40000"/>
+        <a:alpha val="90000"/>
+      </a:schemeClr>
+    </dgm:fillClrLst>
+    <dgm:linClrLst meth="repeat">
+      <a:schemeClr val="accent2">
+        <a:tint val="40000"/>
+        <a:alpha val="90000"/>
+      </a:schemeClr>
+      <a:schemeClr val="accent3">
+        <a:tint val="40000"/>
+        <a:alpha val="90000"/>
+      </a:schemeClr>
+      <a:schemeClr val="accent4">
+        <a:tint val="40000"/>
+        <a:alpha val="90000"/>
+      </a:schemeClr>
+      <a:schemeClr val="accent5">
+        <a:tint val="40000"/>
+        <a:alpha val="90000"/>
+      </a:schemeClr>
+      <a:schemeClr val="accent6">
+        <a:tint val="40000"/>
+        <a:alpha val="90000"/>
+      </a:schemeClr>
+    </dgm:linClrLst>
+    <dgm:effectClrLst/>
+    <dgm:txLinClrLst/>
+    <dgm:txFillClrLst meth="repeat">
+      <a:schemeClr val="dk1"/>
+    </dgm:txFillClrLst>
+    <dgm:txEffectClrLst/>
+  </dgm:styleLbl>
+  <dgm:styleLbl name="bgAccFollowNode1">
+    <dgm:fillClrLst meth="repeat">
+      <a:schemeClr val="accent2">
+        <a:tint val="40000"/>
+        <a:alpha val="90000"/>
+      </a:schemeClr>
+      <a:schemeClr val="accent3">
+        <a:tint val="40000"/>
+        <a:alpha val="90000"/>
+      </a:schemeClr>
+      <a:schemeClr val="accent4">
+        <a:tint val="40000"/>
+        <a:alpha val="90000"/>
+      </a:schemeClr>
+      <a:schemeClr val="accent5">
+        <a:tint val="40000"/>
+        <a:alpha val="90000"/>
+      </a:schemeClr>
+      <a:schemeClr val="accent6">
+        <a:tint val="40000"/>
+        <a:alpha val="90000"/>
+      </a:schemeClr>
+    </dgm:fillClrLst>
+    <dgm:linClrLst meth="repeat">
+      <a:schemeClr val="accent2">
+        <a:tint val="40000"/>
+        <a:alpha val="90000"/>
+      </a:schemeClr>
+      <a:schemeClr val="accent3">
+        <a:tint val="40000"/>
+        <a:alpha val="90000"/>
+      </a:schemeClr>
+      <a:schemeClr val="accent4">
+        <a:tint val="40000"/>
+        <a:alpha val="90000"/>
+      </a:schemeClr>
+      <a:schemeClr val="accent5">
+        <a:tint val="40000"/>
+        <a:alpha val="90000"/>
+      </a:schemeClr>
+      <a:schemeClr val="accent6">
+        <a:tint val="40000"/>
+        <a:alpha val="90000"/>
+      </a:schemeClr>
+    </dgm:linClrLst>
+    <dgm:effectClrLst/>
+    <dgm:txLinClrLst/>
+    <dgm:txFillClrLst meth="repeat">
+      <a:schemeClr val="dk1"/>
+    </dgm:txFillClrLst>
+    <dgm:txEffectClrLst/>
+  </dgm:styleLbl>
+  <dgm:styleLbl name="fgAcc0">
+    <dgm:fillClrLst meth="repeat">
+      <a:schemeClr val="lt1">
+        <a:alpha val="90000"/>
+      </a:schemeClr>
+    </dgm:fillClrLst>
+    <dgm:linClrLst>
+      <a:schemeClr val="accent1"/>
+    </dgm:linClrLst>
+    <dgm:effectClrLst/>
+    <dgm:txLinClrLst/>
+    <dgm:txFillClrLst meth="repeat">
+      <a:schemeClr val="dk1"/>
+    </dgm:txFillClrLst>
+    <dgm:txEffectClrLst/>
+  </dgm:styleLbl>
+  <dgm:styleLbl name="fgAcc2">
+    <dgm:fillClrLst meth="repeat">
+      <a:schemeClr val="lt1">
+        <a:alpha val="90000"/>
+      </a:schemeClr>
+    </dgm:fillClrLst>
+    <dgm:linClrLst>
       <a:schemeClr val="accent2"/>
     </dgm:linClrLst>
     <dgm:effectClrLst/>
@@ -588,14 +910,14 @@
     </dgm:txFillClrLst>
     <dgm:txEffectClrLst/>
   </dgm:styleLbl>
-  <dgm:styleLbl name="bgAcc1">
+  <dgm:styleLbl name="fgAcc3">
     <dgm:fillClrLst meth="repeat">
       <a:schemeClr val="lt1">
         <a:alpha val="90000"/>
       </a:schemeClr>
     </dgm:fillClrLst>
-    <dgm:linClrLst meth="repeat">
-      <a:schemeClr val="accent2"/>
+    <dgm:linClrLst>
+      <a:schemeClr val="accent3"/>
     </dgm:linClrLst>
     <dgm:effectClrLst/>
     <dgm:txLinClrLst/>
@@ -604,12 +926,14 @@
     </dgm:txFillClrLst>
     <dgm:txEffectClrLst/>
   </dgm:styleLbl>
-  <dgm:styleLbl name="solidFgAcc1">
+  <dgm:styleLbl name="fgAcc4">
     <dgm:fillClrLst meth="repeat">
-      <a:schemeClr val="lt1"/>
+      <a:schemeClr val="lt1">
+        <a:alpha val="90000"/>
+      </a:schemeClr>
     </dgm:fillClrLst>
-    <dgm:linClrLst meth="repeat">
-      <a:schemeClr val="accent2"/>
+    <dgm:linClrLst>
+      <a:schemeClr val="accent4"/>
     </dgm:linClrLst>
     <dgm:effectClrLst/>
     <dgm:txLinClrLst/>
@@ -618,12 +942,14 @@
     </dgm:txFillClrLst>
     <dgm:txEffectClrLst/>
   </dgm:styleLbl>
-  <dgm:styleLbl name="solidAlignAcc1">
+  <dgm:styleLbl name="bgShp">
     <dgm:fillClrLst meth="repeat">
-      <a:schemeClr val="lt1"/>
+      <a:schemeClr val="accent2">
+        <a:tint val="40000"/>
+      </a:schemeClr>
     </dgm:fillClrLst>
     <dgm:linClrLst meth="repeat">
-      <a:schemeClr val="accent2"/>
+      <a:schemeClr val="dk1"/>
     </dgm:linClrLst>
     <dgm:effectClrLst/>
     <dgm:txLinClrLst/>
@@ -632,168 +958,14 @@
     </dgm:txFillClrLst>
     <dgm:txEffectClrLst/>
   </dgm:styleLbl>
-  <dgm:styleLbl name="solidBgAcc1">
-    <dgm:fillClrLst meth="repeat">
-      <a:schemeClr val="lt1"/>
-    </dgm:fillClrLst>
-    <dgm:linClrLst meth="repeat">
-      <a:schemeClr val="accent2"/>
-    </dgm:linClrLst>
-    <dgm:effectClrLst/>
-    <dgm:txLinClrLst/>
-    <dgm:txFillClrLst meth="repeat">
-      <a:schemeClr val="dk1"/>
-    </dgm:txFillClrLst>
-    <dgm:txEffectClrLst/>
-  </dgm:styleLbl>
-  <dgm:styleLbl name="fgAccFollowNode1">
+  <dgm:styleLbl name="dkBgShp">
     <dgm:fillClrLst meth="repeat">
       <a:schemeClr val="accent2">
-        <a:alpha val="90000"/>
-        <a:tint val="40000"/>
+        <a:shade val="90000"/>
       </a:schemeClr>
     </dgm:fillClrLst>
     <dgm:linClrLst meth="repeat">
-      <a:schemeClr val="accent2">
-        <a:alpha val="90000"/>
-        <a:tint val="40000"/>
-      </a:schemeClr>
-    </dgm:linClrLst>
-    <dgm:effectClrLst/>
-    <dgm:txLinClrLst/>
-    <dgm:txFillClrLst meth="repeat">
       <a:schemeClr val="dk1"/>
-    </dgm:txFillClrLst>
-    <dgm:txEffectClrLst/>
-  </dgm:styleLbl>
-  <dgm:styleLbl name="alignAccFollowNode1">
-    <dgm:fillClrLst meth="repeat">
-      <a:schemeClr val="accent2">
-        <a:alpha val="90000"/>
-        <a:tint val="40000"/>
-      </a:schemeClr>
-    </dgm:fillClrLst>
-    <dgm:linClrLst meth="repeat">
-      <a:schemeClr val="accent2">
-        <a:alpha val="90000"/>
-        <a:tint val="40000"/>
-      </a:schemeClr>
-    </dgm:linClrLst>
-    <dgm:effectClrLst/>
-    <dgm:txLinClrLst/>
-    <dgm:txFillClrLst meth="repeat">
-      <a:schemeClr val="dk1"/>
-    </dgm:txFillClrLst>
-    <dgm:txEffectClrLst/>
-  </dgm:styleLbl>
-  <dgm:styleLbl name="bgAccFollowNode1">
-    <dgm:fillClrLst meth="repeat">
-      <a:schemeClr val="accent2">
-        <a:alpha val="90000"/>
-        <a:tint val="40000"/>
-      </a:schemeClr>
-    </dgm:fillClrLst>
-    <dgm:linClrLst meth="repeat">
-      <a:schemeClr val="accent2">
-        <a:alpha val="90000"/>
-        <a:tint val="40000"/>
-      </a:schemeClr>
-    </dgm:linClrLst>
-    <dgm:effectClrLst/>
-    <dgm:txLinClrLst/>
-    <dgm:txFillClrLst meth="repeat">
-      <a:schemeClr val="dk1"/>
-    </dgm:txFillClrLst>
-    <dgm:txEffectClrLst/>
-  </dgm:styleLbl>
-  <dgm:styleLbl name="fgAcc0">
-    <dgm:fillClrLst meth="repeat">
-      <a:schemeClr val="lt1">
-        <a:alpha val="90000"/>
-      </a:schemeClr>
-    </dgm:fillClrLst>
-    <dgm:linClrLst meth="repeat">
-      <a:schemeClr val="accent2"/>
-    </dgm:linClrLst>
-    <dgm:effectClrLst/>
-    <dgm:txLinClrLst/>
-    <dgm:txFillClrLst meth="repeat">
-      <a:schemeClr val="dk1"/>
-    </dgm:txFillClrLst>
-    <dgm:txEffectClrLst/>
-  </dgm:styleLbl>
-  <dgm:styleLbl name="fgAcc2">
-    <dgm:fillClrLst meth="repeat">
-      <a:schemeClr val="lt1">
-        <a:alpha val="90000"/>
-      </a:schemeClr>
-    </dgm:fillClrLst>
-    <dgm:linClrLst meth="repeat">
-      <a:schemeClr val="accent2"/>
-    </dgm:linClrLst>
-    <dgm:effectClrLst/>
-    <dgm:txLinClrLst/>
-    <dgm:txFillClrLst meth="repeat">
-      <a:schemeClr val="dk1"/>
-    </dgm:txFillClrLst>
-    <dgm:txEffectClrLst/>
-  </dgm:styleLbl>
-  <dgm:styleLbl name="fgAcc3">
-    <dgm:fillClrLst meth="repeat">
-      <a:schemeClr val="lt1">
-        <a:alpha val="90000"/>
-      </a:schemeClr>
-    </dgm:fillClrLst>
-    <dgm:linClrLst meth="repeat">
-      <a:schemeClr val="accent2"/>
-    </dgm:linClrLst>
-    <dgm:effectClrLst/>
-    <dgm:txLinClrLst/>
-    <dgm:txFillClrLst meth="repeat">
-      <a:schemeClr val="dk1"/>
-    </dgm:txFillClrLst>
-    <dgm:txEffectClrLst/>
-  </dgm:styleLbl>
-  <dgm:styleLbl name="fgAcc4">
-    <dgm:fillClrLst meth="repeat">
-      <a:schemeClr val="lt1">
-        <a:alpha val="90000"/>
-      </a:schemeClr>
-    </dgm:fillClrLst>
-    <dgm:linClrLst meth="repeat">
-      <a:schemeClr val="accent2"/>
-    </dgm:linClrLst>
-    <dgm:effectClrLst/>
-    <dgm:txLinClrLst/>
-    <dgm:txFillClrLst meth="repeat">
-      <a:schemeClr val="dk1"/>
-    </dgm:txFillClrLst>
-    <dgm:txEffectClrLst/>
-  </dgm:styleLbl>
-  <dgm:styleLbl name="bgShp">
-    <dgm:fillClrLst meth="repeat">
-      <a:schemeClr val="accent2">
-        <a:tint val="40000"/>
-      </a:schemeClr>
-    </dgm:fillClrLst>
-    <dgm:linClrLst meth="repeat">
-      <a:schemeClr val="accent2"/>
-    </dgm:linClrLst>
-    <dgm:effectClrLst/>
-    <dgm:txLinClrLst/>
-    <dgm:txFillClrLst meth="repeat">
-      <a:schemeClr val="dk1"/>
-    </dgm:txFillClrLst>
-    <dgm:txEffectClrLst/>
-  </dgm:styleLbl>
-  <dgm:styleLbl name="dkBgShp">
-    <dgm:fillClrLst meth="repeat">
-      <a:schemeClr val="accent2">
-        <a:shade val="80000"/>
-      </a:schemeClr>
-    </dgm:fillClrLst>
-    <dgm:linClrLst meth="repeat">
-      <a:schemeClr val="accent2"/>
     </dgm:linClrLst>
     <dgm:effectClrLst/>
     <dgm:txLinClrLst/>
@@ -804,7 +976,7 @@
   </dgm:styleLbl>
   <dgm:styleLbl name="trBgShp">
     <dgm:fillClrLst meth="repeat">
-      <a:schemeClr val="accent2">
+      <a:schemeClr val="accent1">
         <a:tint val="50000"/>
         <a:alpha val="40000"/>
       </a:schemeClr>
@@ -822,7 +994,7 @@
   <dgm:styleLbl name="fgShp">
     <dgm:fillClrLst meth="repeat">
       <a:schemeClr val="accent2">
-        <a:tint val="60000"/>
+        <a:tint val="40000"/>
       </a:schemeClr>
     </dgm:fillClrLst>
     <dgm:linClrLst meth="repeat">
@@ -1606,8 +1778,8 @@
 <file path=ppt/diagrams/data1.xml><?xml version="1.0" encoding="utf-8"?>
 <dgm:dataModel xmlns:dgm="http://schemas.openxmlformats.org/drawingml/2006/diagram" xmlns:a="http://schemas.openxmlformats.org/drawingml/2006/main">
   <dgm:ptLst>
-    <dgm:pt modelId="{F4CBB54E-3109-461B-BD42-F5E19C6E48A5}" type="doc">
-      <dgm:prSet loTypeId="urn:microsoft.com/office/officeart/2005/8/layout/orgChart1" loCatId="hierarchy" qsTypeId="urn:microsoft.com/office/officeart/2005/8/quickstyle/simple5" qsCatId="simple" csTypeId="urn:microsoft.com/office/officeart/2005/8/colors/accent2_2" csCatId="accent2" phldr="1"/>
+    <dgm:pt modelId="{EA41A2E5-88E2-4D29-A39A-96D0D39F74BD}" type="doc">
+      <dgm:prSet loTypeId="urn:microsoft.com/office/officeart/2005/8/layout/orgChart1" loCatId="hierarchy" qsTypeId="urn:microsoft.com/office/officeart/2005/8/quickstyle/simple5" qsCatId="simple" csTypeId="urn:microsoft.com/office/officeart/2005/8/colors/colorful1" csCatId="colorful" phldr="1"/>
       <dgm:spPr/>
       <dgm:t>
         <a:bodyPr/>
@@ -1617,279 +1789,220 @@
         </a:p>
       </dgm:t>
     </dgm:pt>
-    <dgm:pt modelId="{AEB04863-CB82-4620-85BC-9CFBFCACF82C}">
+    <dgm:pt modelId="{2DA4F466-EE9C-4963-9539-C29C96763B8F}">
       <dgm:prSet phldrT="[Text]" custT="1"/>
       <dgm:spPr/>
       <dgm:t>
         <a:bodyPr/>
         <a:lstStyle/>
         <a:p>
+          <a:pPr>
+            <a:buNone/>
+          </a:pPr>
           <a:r>
-            <a:rPr lang="id-ID" sz="2400" b="1" i="0" dirty="0"/>
+            <a:rPr lang="id-ID" sz="3600" b="1" i="0" dirty="0"/>
             <a:t>Direktur</a:t>
           </a:r>
-          <a:endParaRPr lang="id-ID" sz="2400" dirty="0"/>
+          <a:endParaRPr lang="id-ID" sz="3600" dirty="0"/>
         </a:p>
       </dgm:t>
     </dgm:pt>
-    <dgm:pt modelId="{12A32FCF-1613-44D7-AC40-EA8545D4E843}" type="parTrans" cxnId="{4AD9E4E4-89BB-4B02-A9DE-82425AA28455}">
+    <dgm:pt modelId="{AB4E8FAE-BDAC-437F-BBE6-D59931791227}" type="parTrans" cxnId="{6F3D938E-3AF4-4774-83C8-CB13725B47FC}">
       <dgm:prSet/>
       <dgm:spPr/>
       <dgm:t>
         <a:bodyPr/>
         <a:lstStyle/>
         <a:p>
-          <a:endParaRPr lang="id-ID"/>
+          <a:endParaRPr lang="id-ID" sz="1200"/>
         </a:p>
       </dgm:t>
     </dgm:pt>
-    <dgm:pt modelId="{4576E36E-EC2F-460E-9C94-CC1445198CFC}" type="sibTrans" cxnId="{4AD9E4E4-89BB-4B02-A9DE-82425AA28455}">
+    <dgm:pt modelId="{D1CC015D-55A8-468D-A5D4-DF56DFDBFCBF}" type="sibTrans" cxnId="{6F3D938E-3AF4-4774-83C8-CB13725B47FC}">
       <dgm:prSet/>
       <dgm:spPr/>
       <dgm:t>
         <a:bodyPr/>
         <a:lstStyle/>
         <a:p>
-          <a:endParaRPr lang="id-ID"/>
+          <a:endParaRPr lang="id-ID" sz="1200"/>
         </a:p>
       </dgm:t>
     </dgm:pt>
-    <dgm:pt modelId="{0C23373B-B271-4FF9-892B-FC7271E3AB06}" type="asst">
+    <dgm:pt modelId="{D3AEF5B0-9774-4F00-BB04-72C3611DFE76}" type="asst">
       <dgm:prSet phldrT="[Text]" custT="1"/>
       <dgm:spPr/>
       <dgm:t>
         <a:bodyPr/>
         <a:lstStyle/>
         <a:p>
+          <a:pPr>
+            <a:buNone/>
+          </a:pPr>
           <a:r>
-            <a:rPr lang="id-ID" sz="2400" b="1" i="0" dirty="0"/>
+            <a:rPr lang="id-ID" sz="3600" b="1" i="0" dirty="0"/>
             <a:t>Manager</a:t>
           </a:r>
-          <a:endParaRPr lang="id-ID" sz="2400" dirty="0"/>
+          <a:endParaRPr lang="id-ID" sz="3600" dirty="0"/>
         </a:p>
       </dgm:t>
     </dgm:pt>
-    <dgm:pt modelId="{C8DF4F86-B923-4585-8998-C9109020C38D}" type="parTrans" cxnId="{2E740E6C-61A3-4DAA-87AF-BF35CEE79A7D}">
+    <dgm:pt modelId="{B17EFD54-07EA-4E37-9DEA-79C5DAADAA51}" type="parTrans" cxnId="{024934BE-515D-4F31-A946-D576536BCF64}">
       <dgm:prSet/>
       <dgm:spPr/>
       <dgm:t>
         <a:bodyPr/>
         <a:lstStyle/>
         <a:p>
-          <a:endParaRPr lang="id-ID"/>
+          <a:endParaRPr lang="id-ID" sz="1200"/>
         </a:p>
       </dgm:t>
     </dgm:pt>
-    <dgm:pt modelId="{C9687FEB-E051-478E-B971-4CC39BE29562}" type="sibTrans" cxnId="{2E740E6C-61A3-4DAA-87AF-BF35CEE79A7D}">
+    <dgm:pt modelId="{80D9523B-9757-4FF8-80E3-955B340892EA}" type="sibTrans" cxnId="{024934BE-515D-4F31-A946-D576536BCF64}">
       <dgm:prSet/>
       <dgm:spPr/>
       <dgm:t>
         <a:bodyPr/>
         <a:lstStyle/>
         <a:p>
-          <a:endParaRPr lang="id-ID"/>
+          <a:endParaRPr lang="id-ID" sz="1200"/>
         </a:p>
       </dgm:t>
     </dgm:pt>
-    <dgm:pt modelId="{FBE276E3-620E-4B3E-8BB5-7A4BA01A2A35}">
+    <dgm:pt modelId="{32C335E0-B88A-45A4-BC05-91EBAB9FD28C}">
       <dgm:prSet phldrT="[Text]" custT="1"/>
       <dgm:spPr/>
       <dgm:t>
         <a:bodyPr/>
         <a:lstStyle/>
         <a:p>
+          <a:pPr>
+            <a:buNone/>
+          </a:pPr>
           <a:r>
-            <a:rPr lang="id-ID" sz="2400" b="1" i="0" dirty="0"/>
+            <a:rPr lang="id-ID" sz="3600" b="1" i="0" dirty="0"/>
             <a:t>Staff</a:t>
           </a:r>
           <a:r>
-            <a:rPr lang="id-ID" sz="5200" b="0" i="0" dirty="0"/>
+            <a:rPr lang="id-ID" sz="3600" b="0" i="0" dirty="0"/>
             <a:t> </a:t>
           </a:r>
-          <a:endParaRPr lang="id-ID" sz="5200" dirty="0"/>
+          <a:endParaRPr lang="id-ID" sz="3600" dirty="0"/>
         </a:p>
       </dgm:t>
     </dgm:pt>
-    <dgm:pt modelId="{832943AB-A9C8-4269-B190-1442B7E4955C}" type="parTrans" cxnId="{193FEE96-C3BF-4995-AB01-E52FCD6DB430}">
+    <dgm:pt modelId="{667CE224-6671-41BF-9859-8297E611F61A}" type="parTrans" cxnId="{EC102111-B768-474D-B952-68FEA8F09C97}">
       <dgm:prSet/>
       <dgm:spPr/>
       <dgm:t>
         <a:bodyPr/>
         <a:lstStyle/>
         <a:p>
-          <a:endParaRPr lang="id-ID"/>
+          <a:endParaRPr lang="id-ID" sz="1200"/>
         </a:p>
       </dgm:t>
     </dgm:pt>
-    <dgm:pt modelId="{AB74CEE9-2CE3-4AF7-B98A-2AD60E109C3A}" type="sibTrans" cxnId="{193FEE96-C3BF-4995-AB01-E52FCD6DB430}">
+    <dgm:pt modelId="{019A3D74-062F-4721-BCC1-07C8CDDEB7A7}" type="sibTrans" cxnId="{EC102111-B768-474D-B952-68FEA8F09C97}">
       <dgm:prSet/>
       <dgm:spPr/>
       <dgm:t>
         <a:bodyPr/>
         <a:lstStyle/>
         <a:p>
-          <a:endParaRPr lang="id-ID"/>
+          <a:endParaRPr lang="id-ID" sz="1200"/>
         </a:p>
       </dgm:t>
     </dgm:pt>
-    <dgm:pt modelId="{FA3193E2-83C6-4C9F-AF6D-7717C616A033}">
+    <dgm:pt modelId="{83B8869F-1752-4F06-AC7E-AA2559AAF9CF}">
       <dgm:prSet phldrT="[Text]" custT="1"/>
       <dgm:spPr/>
       <dgm:t>
         <a:bodyPr/>
         <a:lstStyle/>
         <a:p>
+          <a:pPr>
+            <a:buNone/>
+          </a:pPr>
           <a:r>
-            <a:rPr lang="id-ID" sz="2400" b="1" i="0" dirty="0"/>
+            <a:rPr lang="id-ID" sz="3600" b="1" i="0" dirty="0"/>
             <a:t>Staff</a:t>
           </a:r>
           <a:r>
-            <a:rPr lang="id-ID" sz="5200" b="0" i="0" dirty="0"/>
+            <a:rPr lang="id-ID" sz="3600" b="0" i="0" dirty="0"/>
             <a:t> </a:t>
           </a:r>
-          <a:endParaRPr lang="id-ID" sz="5200" dirty="0"/>
+          <a:endParaRPr lang="id-ID" sz="3600" dirty="0"/>
         </a:p>
       </dgm:t>
     </dgm:pt>
-    <dgm:pt modelId="{608294B1-0151-4C38-AB05-6EC07A480365}" type="parTrans" cxnId="{56D48181-35E3-4C4E-AB91-251E4EF0012F}">
+    <dgm:pt modelId="{8A8BCA98-1470-4E49-84B4-1AEA587248F2}" type="parTrans" cxnId="{B24C933F-36EA-44BF-B838-A91705A2A7A7}">
       <dgm:prSet/>
       <dgm:spPr/>
       <dgm:t>
         <a:bodyPr/>
         <a:lstStyle/>
         <a:p>
-          <a:endParaRPr lang="id-ID"/>
+          <a:endParaRPr lang="id-ID" sz="1200"/>
         </a:p>
       </dgm:t>
     </dgm:pt>
-    <dgm:pt modelId="{ABF1A276-1618-45B8-B6AA-24E0D972149D}" type="sibTrans" cxnId="{56D48181-35E3-4C4E-AB91-251E4EF0012F}">
+    <dgm:pt modelId="{30330D62-B51F-4B47-9343-DD7ACF4354CB}" type="sibTrans" cxnId="{B24C933F-36EA-44BF-B838-A91705A2A7A7}">
       <dgm:prSet/>
       <dgm:spPr/>
       <dgm:t>
         <a:bodyPr/>
         <a:lstStyle/>
         <a:p>
-          <a:endParaRPr lang="id-ID"/>
+          <a:endParaRPr lang="id-ID" sz="1200"/>
         </a:p>
       </dgm:t>
     </dgm:pt>
-    <dgm:pt modelId="{B67320DC-07BB-481C-88AD-283B777A0403}">
+    <dgm:pt modelId="{CB1F19A7-D312-40FF-9CF7-6BCA7B60554C}">
       <dgm:prSet phldrT="[Text]" custT="1"/>
       <dgm:spPr/>
       <dgm:t>
         <a:bodyPr/>
         <a:lstStyle/>
         <a:p>
+          <a:pPr>
+            <a:buNone/>
+          </a:pPr>
           <a:r>
-            <a:rPr lang="id-ID" sz="2400" b="1" i="0" dirty="0"/>
+            <a:rPr lang="id-ID" sz="3600" b="1" i="0" dirty="0"/>
             <a:t>Staff</a:t>
           </a:r>
           <a:r>
-            <a:rPr lang="id-ID" sz="5200" b="0" i="0" dirty="0"/>
+            <a:rPr lang="id-ID" sz="3600" b="0" i="0" dirty="0"/>
             <a:t> </a:t>
           </a:r>
-          <a:endParaRPr lang="id-ID" sz="5200" dirty="0"/>
+          <a:endParaRPr lang="id-ID" sz="3600" dirty="0"/>
         </a:p>
       </dgm:t>
     </dgm:pt>
-    <dgm:pt modelId="{037F124A-A571-485A-ACB4-30B098BEAD50}" type="parTrans" cxnId="{A25A705F-4453-45E8-BCB1-B989DCA6CF4C}">
+    <dgm:pt modelId="{60508447-050E-47BB-8A3A-55E2E6BEC482}" type="parTrans" cxnId="{DAAD2CD8-0D38-4CDD-A424-5FAEA66BDC1A}">
       <dgm:prSet/>
       <dgm:spPr/>
       <dgm:t>
         <a:bodyPr/>
         <a:lstStyle/>
         <a:p>
-          <a:endParaRPr lang="id-ID"/>
+          <a:endParaRPr lang="id-ID" sz="1200"/>
         </a:p>
       </dgm:t>
     </dgm:pt>
-    <dgm:pt modelId="{CD8A88B6-0D59-4215-8803-32A6B1985CAD}" type="sibTrans" cxnId="{A25A705F-4453-45E8-BCB1-B989DCA6CF4C}">
+    <dgm:pt modelId="{DFD8A7F3-D0BF-4BD0-8EC5-3344B9A1917F}" type="sibTrans" cxnId="{DAAD2CD8-0D38-4CDD-A424-5FAEA66BDC1A}">
       <dgm:prSet/>
       <dgm:spPr/>
       <dgm:t>
         <a:bodyPr/>
         <a:lstStyle/>
         <a:p>
-          <a:endParaRPr lang="id-ID"/>
+          <a:endParaRPr lang="id-ID" sz="1200"/>
         </a:p>
       </dgm:t>
     </dgm:pt>
-    <dgm:pt modelId="{DC657197-EC41-407A-9819-3D20C92C77F7}" type="asst">
-      <dgm:prSet custT="1"/>
-      <dgm:spPr/>
-      <dgm:t>
-        <a:bodyPr/>
-        <a:lstStyle/>
-        <a:p>
-          <a:r>
-            <a:rPr lang="en-US" sz="2400" dirty="0"/>
-            <a:t>Staff</a:t>
-          </a:r>
-          <a:endParaRPr lang="id-ID" sz="2400" dirty="0"/>
-        </a:p>
-      </dgm:t>
-    </dgm:pt>
-    <dgm:pt modelId="{F49AFBDA-978C-49FE-9118-3272A929A005}" type="parTrans" cxnId="{9F0672E7-2C00-4ADA-976D-97218A459F52}">
-      <dgm:prSet/>
-      <dgm:spPr/>
-      <dgm:t>
-        <a:bodyPr/>
-        <a:lstStyle/>
-        <a:p>
-          <a:endParaRPr lang="id-ID"/>
-        </a:p>
-      </dgm:t>
-    </dgm:pt>
-    <dgm:pt modelId="{3E848630-52DF-4A07-8AB8-41E95A7662B6}" type="sibTrans" cxnId="{9F0672E7-2C00-4ADA-976D-97218A459F52}">
-      <dgm:prSet/>
-      <dgm:spPr/>
-      <dgm:t>
-        <a:bodyPr/>
-        <a:lstStyle/>
-        <a:p>
-          <a:endParaRPr lang="id-ID"/>
-        </a:p>
-      </dgm:t>
-    </dgm:pt>
-    <dgm:pt modelId="{26EB62F7-735B-4A53-9F77-B308802CD13F}" type="asst">
-      <dgm:prSet custT="1"/>
-      <dgm:spPr/>
-      <dgm:t>
-        <a:bodyPr/>
-        <a:lstStyle/>
-        <a:p>
-          <a:r>
-            <a:rPr lang="en-US" sz="2400" dirty="0"/>
-            <a:t>Staff</a:t>
-          </a:r>
-          <a:endParaRPr lang="id-ID" sz="2400" dirty="0"/>
-        </a:p>
-      </dgm:t>
-    </dgm:pt>
-    <dgm:pt modelId="{4C9655B1-A44D-4B03-912B-286CBAE62F11}" type="parTrans" cxnId="{4B7E33F6-9C6D-4F48-A742-E536C6784F2F}">
-      <dgm:prSet/>
-      <dgm:spPr/>
-      <dgm:t>
-        <a:bodyPr/>
-        <a:lstStyle/>
-        <a:p>
-          <a:endParaRPr lang="id-ID"/>
-        </a:p>
-      </dgm:t>
-    </dgm:pt>
-    <dgm:pt modelId="{526A2B24-2729-4B84-B891-F4EDDFA96B60}" type="sibTrans" cxnId="{4B7E33F6-9C6D-4F48-A742-E536C6784F2F}">
-      <dgm:prSet/>
-      <dgm:spPr/>
-      <dgm:t>
-        <a:bodyPr/>
-        <a:lstStyle/>
-        <a:p>
-          <a:endParaRPr lang="id-ID"/>
-        </a:p>
-      </dgm:t>
-    </dgm:pt>
-    <dgm:pt modelId="{E1A021EE-6810-459B-9F2B-6F7605676E1B}" type="pres">
-      <dgm:prSet presAssocID="{F4CBB54E-3109-461B-BD42-F5E19C6E48A5}" presName="hierChild1" presStyleCnt="0">
+    <dgm:pt modelId="{4D17D909-039C-43C7-BB7E-AF66DD07EDD5}" type="pres">
+      <dgm:prSet presAssocID="{EA41A2E5-88E2-4D29-A39A-96D0D39F74BD}" presName="hierChild1" presStyleCnt="0">
         <dgm:presLayoutVars>
           <dgm:orgChart val="1"/>
           <dgm:chPref val="1"/>
@@ -1901,332 +2014,238 @@
       </dgm:prSet>
       <dgm:spPr/>
     </dgm:pt>
-    <dgm:pt modelId="{D1096400-8A64-424F-9985-82DDCC009DE8}" type="pres">
-      <dgm:prSet presAssocID="{AEB04863-CB82-4620-85BC-9CFBFCACF82C}" presName="hierRoot1" presStyleCnt="0">
+    <dgm:pt modelId="{6B65A61B-22C0-4CB7-845E-F8ECC936BF2C}" type="pres">
+      <dgm:prSet presAssocID="{2DA4F466-EE9C-4963-9539-C29C96763B8F}" presName="hierRoot1" presStyleCnt="0">
         <dgm:presLayoutVars>
           <dgm:hierBranch val="init"/>
         </dgm:presLayoutVars>
       </dgm:prSet>
       <dgm:spPr/>
     </dgm:pt>
-    <dgm:pt modelId="{4F2C1717-0167-4A1C-8F97-F1E1AE4D094B}" type="pres">
-      <dgm:prSet presAssocID="{AEB04863-CB82-4620-85BC-9CFBFCACF82C}" presName="rootComposite1" presStyleCnt="0"/>
+    <dgm:pt modelId="{5E07C6C5-A29E-4AE3-B9C8-836B1958E350}" type="pres">
+      <dgm:prSet presAssocID="{2DA4F466-EE9C-4963-9539-C29C96763B8F}" presName="rootComposite1" presStyleCnt="0"/>
       <dgm:spPr/>
     </dgm:pt>
-    <dgm:pt modelId="{DB310313-A257-405A-AF26-47470C0176EA}" type="pres">
-      <dgm:prSet presAssocID="{AEB04863-CB82-4620-85BC-9CFBFCACF82C}" presName="rootText1" presStyleLbl="node0" presStyleIdx="0" presStyleCnt="1" custScaleX="145971">
+    <dgm:pt modelId="{4B1F0272-BF1A-4779-88BA-492E13DACC51}" type="pres">
+      <dgm:prSet presAssocID="{2DA4F466-EE9C-4963-9539-C29C96763B8F}" presName="rootText1" presStyleLbl="node0" presStyleIdx="0" presStyleCnt="1">
         <dgm:presLayoutVars>
           <dgm:chPref val="3"/>
         </dgm:presLayoutVars>
       </dgm:prSet>
       <dgm:spPr/>
     </dgm:pt>
-    <dgm:pt modelId="{42C77321-2B22-4FC2-A9F3-649F150B260E}" type="pres">
-      <dgm:prSet presAssocID="{AEB04863-CB82-4620-85BC-9CFBFCACF82C}" presName="rootConnector1" presStyleLbl="node1" presStyleIdx="0" presStyleCnt="0"/>
+    <dgm:pt modelId="{84ACC0DD-1880-419C-8313-BD7DBD061486}" type="pres">
+      <dgm:prSet presAssocID="{2DA4F466-EE9C-4963-9539-C29C96763B8F}" presName="rootConnector1" presStyleLbl="node1" presStyleIdx="0" presStyleCnt="0"/>
       <dgm:spPr/>
     </dgm:pt>
-    <dgm:pt modelId="{A5832474-53D0-4BA9-B72B-5080E9553C53}" type="pres">
-      <dgm:prSet presAssocID="{AEB04863-CB82-4620-85BC-9CFBFCACF82C}" presName="hierChild2" presStyleCnt="0"/>
+    <dgm:pt modelId="{DD0A2324-4247-4CEE-A099-99F6F2941D0F}" type="pres">
+      <dgm:prSet presAssocID="{2DA4F466-EE9C-4963-9539-C29C96763B8F}" presName="hierChild2" presStyleCnt="0"/>
       <dgm:spPr/>
     </dgm:pt>
-    <dgm:pt modelId="{C3597C58-1F61-4DDC-BEC1-27787EEEFA09}" type="pres">
-      <dgm:prSet presAssocID="{832943AB-A9C8-4269-B190-1442B7E4955C}" presName="Name37" presStyleLbl="parChTrans1D2" presStyleIdx="0" presStyleCnt="4"/>
+    <dgm:pt modelId="{4E350251-E89F-4B92-BEF0-97957B57F1A6}" type="pres">
+      <dgm:prSet presAssocID="{667CE224-6671-41BF-9859-8297E611F61A}" presName="Name37" presStyleLbl="parChTrans1D2" presStyleIdx="0" presStyleCnt="4"/>
       <dgm:spPr/>
     </dgm:pt>
-    <dgm:pt modelId="{7442BC69-E977-427E-9EAA-A97232A1944B}" type="pres">
-      <dgm:prSet presAssocID="{FBE276E3-620E-4B3E-8BB5-7A4BA01A2A35}" presName="hierRoot2" presStyleCnt="0">
+    <dgm:pt modelId="{3F9F4CFD-D540-4C8C-B9CF-02B9D6C90312}" type="pres">
+      <dgm:prSet presAssocID="{32C335E0-B88A-45A4-BC05-91EBAB9FD28C}" presName="hierRoot2" presStyleCnt="0">
         <dgm:presLayoutVars>
           <dgm:hierBranch val="init"/>
         </dgm:presLayoutVars>
       </dgm:prSet>
       <dgm:spPr/>
     </dgm:pt>
-    <dgm:pt modelId="{0EA5F5CA-EA01-4FA2-ABB2-9FA235383A26}" type="pres">
-      <dgm:prSet presAssocID="{FBE276E3-620E-4B3E-8BB5-7A4BA01A2A35}" presName="rootComposite" presStyleCnt="0"/>
+    <dgm:pt modelId="{377D238A-9714-4EBE-88CB-E5CD7359CFCA}" type="pres">
+      <dgm:prSet presAssocID="{32C335E0-B88A-45A4-BC05-91EBAB9FD28C}" presName="rootComposite" presStyleCnt="0"/>
       <dgm:spPr/>
     </dgm:pt>
-    <dgm:pt modelId="{4B26B9A9-A87D-4876-8571-3448B4A84B9C}" type="pres">
-      <dgm:prSet presAssocID="{FBE276E3-620E-4B3E-8BB5-7A4BA01A2A35}" presName="rootText" presStyleLbl="node2" presStyleIdx="0" presStyleCnt="3">
+    <dgm:pt modelId="{E02CE35F-D62C-4755-B29E-7616747C1F83}" type="pres">
+      <dgm:prSet presAssocID="{32C335E0-B88A-45A4-BC05-91EBAB9FD28C}" presName="rootText" presStyleLbl="node2" presStyleIdx="0" presStyleCnt="3">
         <dgm:presLayoutVars>
           <dgm:chPref val="3"/>
         </dgm:presLayoutVars>
       </dgm:prSet>
       <dgm:spPr/>
     </dgm:pt>
-    <dgm:pt modelId="{0282373E-7906-48FB-A27A-08091CC46168}" type="pres">
-      <dgm:prSet presAssocID="{FBE276E3-620E-4B3E-8BB5-7A4BA01A2A35}" presName="rootConnector" presStyleLbl="node2" presStyleIdx="0" presStyleCnt="3"/>
+    <dgm:pt modelId="{B26B9216-49FD-4A2A-BB31-A206CD82B124}" type="pres">
+      <dgm:prSet presAssocID="{32C335E0-B88A-45A4-BC05-91EBAB9FD28C}" presName="rootConnector" presStyleLbl="node2" presStyleIdx="0" presStyleCnt="3"/>
       <dgm:spPr/>
     </dgm:pt>
-    <dgm:pt modelId="{A98062D2-F539-4DB1-AFF7-B7FEB7A62C3A}" type="pres">
-      <dgm:prSet presAssocID="{FBE276E3-620E-4B3E-8BB5-7A4BA01A2A35}" presName="hierChild4" presStyleCnt="0"/>
+    <dgm:pt modelId="{C3F9498F-93B9-4DEC-AE76-1CD3E1286CB8}" type="pres">
+      <dgm:prSet presAssocID="{32C335E0-B88A-45A4-BC05-91EBAB9FD28C}" presName="hierChild4" presStyleCnt="0"/>
       <dgm:spPr/>
     </dgm:pt>
-    <dgm:pt modelId="{E65D8D6E-5EC9-4DD9-9E98-AC9B2BB732B0}" type="pres">
-      <dgm:prSet presAssocID="{FBE276E3-620E-4B3E-8BB5-7A4BA01A2A35}" presName="hierChild5" presStyleCnt="0"/>
+    <dgm:pt modelId="{8FDB5328-2B9D-41DA-BE2C-0A30BAF2A0E2}" type="pres">
+      <dgm:prSet presAssocID="{32C335E0-B88A-45A4-BC05-91EBAB9FD28C}" presName="hierChild5" presStyleCnt="0"/>
       <dgm:spPr/>
     </dgm:pt>
-    <dgm:pt modelId="{B257BC38-2C98-4B37-88B4-8CC0B048D56A}" type="pres">
-      <dgm:prSet presAssocID="{608294B1-0151-4C38-AB05-6EC07A480365}" presName="Name37" presStyleLbl="parChTrans1D2" presStyleIdx="1" presStyleCnt="4"/>
+    <dgm:pt modelId="{23B445D1-403E-401C-849E-DA7E490462F7}" type="pres">
+      <dgm:prSet presAssocID="{8A8BCA98-1470-4E49-84B4-1AEA587248F2}" presName="Name37" presStyleLbl="parChTrans1D2" presStyleIdx="1" presStyleCnt="4"/>
       <dgm:spPr/>
     </dgm:pt>
-    <dgm:pt modelId="{9148D591-F967-447A-846C-3FA057B1B309}" type="pres">
-      <dgm:prSet presAssocID="{FA3193E2-83C6-4C9F-AF6D-7717C616A033}" presName="hierRoot2" presStyleCnt="0">
+    <dgm:pt modelId="{A687A36C-8D76-490E-9915-B45EA02A226F}" type="pres">
+      <dgm:prSet presAssocID="{83B8869F-1752-4F06-AC7E-AA2559AAF9CF}" presName="hierRoot2" presStyleCnt="0">
         <dgm:presLayoutVars>
           <dgm:hierBranch val="init"/>
         </dgm:presLayoutVars>
       </dgm:prSet>
       <dgm:spPr/>
     </dgm:pt>
-    <dgm:pt modelId="{D3C035FF-603F-434D-8EA7-B3F14608476D}" type="pres">
-      <dgm:prSet presAssocID="{FA3193E2-83C6-4C9F-AF6D-7717C616A033}" presName="rootComposite" presStyleCnt="0"/>
+    <dgm:pt modelId="{5B70F29F-7374-4E1C-8D3B-581E8E7CC45C}" type="pres">
+      <dgm:prSet presAssocID="{83B8869F-1752-4F06-AC7E-AA2559AAF9CF}" presName="rootComposite" presStyleCnt="0"/>
       <dgm:spPr/>
     </dgm:pt>
-    <dgm:pt modelId="{72CEFE29-F240-4345-8B3C-09FF34FF4917}" type="pres">
-      <dgm:prSet presAssocID="{FA3193E2-83C6-4C9F-AF6D-7717C616A033}" presName="rootText" presStyleLbl="node2" presStyleIdx="1" presStyleCnt="3">
+    <dgm:pt modelId="{44C7A7C0-95D0-4BFF-A1FB-EA3FAC629288}" type="pres">
+      <dgm:prSet presAssocID="{83B8869F-1752-4F06-AC7E-AA2559AAF9CF}" presName="rootText" presStyleLbl="node2" presStyleIdx="1" presStyleCnt="3">
         <dgm:presLayoutVars>
           <dgm:chPref val="3"/>
         </dgm:presLayoutVars>
       </dgm:prSet>
       <dgm:spPr/>
     </dgm:pt>
-    <dgm:pt modelId="{737A126E-E37F-47ED-AE1B-8DF63EEED146}" type="pres">
-      <dgm:prSet presAssocID="{FA3193E2-83C6-4C9F-AF6D-7717C616A033}" presName="rootConnector" presStyleLbl="node2" presStyleIdx="1" presStyleCnt="3"/>
+    <dgm:pt modelId="{7149AEEA-A3E1-4709-9979-5BBC76EB4A6C}" type="pres">
+      <dgm:prSet presAssocID="{83B8869F-1752-4F06-AC7E-AA2559AAF9CF}" presName="rootConnector" presStyleLbl="node2" presStyleIdx="1" presStyleCnt="3"/>
       <dgm:spPr/>
     </dgm:pt>
-    <dgm:pt modelId="{5DFEBD76-E295-41E5-9993-A8082C3EFD65}" type="pres">
-      <dgm:prSet presAssocID="{FA3193E2-83C6-4C9F-AF6D-7717C616A033}" presName="hierChild4" presStyleCnt="0"/>
+    <dgm:pt modelId="{3F61A6AA-DA64-4F1C-8605-555148801F2B}" type="pres">
+      <dgm:prSet presAssocID="{83B8869F-1752-4F06-AC7E-AA2559AAF9CF}" presName="hierChild4" presStyleCnt="0"/>
       <dgm:spPr/>
     </dgm:pt>
-    <dgm:pt modelId="{4A76573C-6BF9-48AA-9E26-8A0ED910F6FB}" type="pres">
-      <dgm:prSet presAssocID="{FA3193E2-83C6-4C9F-AF6D-7717C616A033}" presName="hierChild5" presStyleCnt="0"/>
+    <dgm:pt modelId="{16539471-95C6-4E9B-BA19-63BF6B36DD3C}" type="pres">
+      <dgm:prSet presAssocID="{83B8869F-1752-4F06-AC7E-AA2559AAF9CF}" presName="hierChild5" presStyleCnt="0"/>
       <dgm:spPr/>
     </dgm:pt>
-    <dgm:pt modelId="{5C34514A-0C79-47CA-B9F1-D85DCA7CF3A7}" type="pres">
-      <dgm:prSet presAssocID="{037F124A-A571-485A-ACB4-30B098BEAD50}" presName="Name37" presStyleLbl="parChTrans1D2" presStyleIdx="2" presStyleCnt="4"/>
+    <dgm:pt modelId="{25F1C600-4FF4-4426-8463-065F19B92D09}" type="pres">
+      <dgm:prSet presAssocID="{60508447-050E-47BB-8A3A-55E2E6BEC482}" presName="Name37" presStyleLbl="parChTrans1D2" presStyleIdx="2" presStyleCnt="4"/>
       <dgm:spPr/>
     </dgm:pt>
-    <dgm:pt modelId="{DD1723B3-03FE-4288-B393-8C9394B2CAD3}" type="pres">
-      <dgm:prSet presAssocID="{B67320DC-07BB-481C-88AD-283B777A0403}" presName="hierRoot2" presStyleCnt="0">
+    <dgm:pt modelId="{3B33800A-E0A8-4913-A6A1-EB3EAF658AC6}" type="pres">
+      <dgm:prSet presAssocID="{CB1F19A7-D312-40FF-9CF7-6BCA7B60554C}" presName="hierRoot2" presStyleCnt="0">
         <dgm:presLayoutVars>
           <dgm:hierBranch val="init"/>
         </dgm:presLayoutVars>
       </dgm:prSet>
       <dgm:spPr/>
     </dgm:pt>
-    <dgm:pt modelId="{27C4179C-A896-4502-8A19-25DCB6E4C9B7}" type="pres">
-      <dgm:prSet presAssocID="{B67320DC-07BB-481C-88AD-283B777A0403}" presName="rootComposite" presStyleCnt="0"/>
+    <dgm:pt modelId="{8B056BE7-9954-4602-8BCF-35A9278B7C18}" type="pres">
+      <dgm:prSet presAssocID="{CB1F19A7-D312-40FF-9CF7-6BCA7B60554C}" presName="rootComposite" presStyleCnt="0"/>
       <dgm:spPr/>
     </dgm:pt>
-    <dgm:pt modelId="{9AF7F27A-16CA-490C-A17B-2F77A568AD6A}" type="pres">
-      <dgm:prSet presAssocID="{B67320DC-07BB-481C-88AD-283B777A0403}" presName="rootText" presStyleLbl="node2" presStyleIdx="2" presStyleCnt="3">
+    <dgm:pt modelId="{91E08EDF-18BB-4F4C-A6CA-E9878E099671}" type="pres">
+      <dgm:prSet presAssocID="{CB1F19A7-D312-40FF-9CF7-6BCA7B60554C}" presName="rootText" presStyleLbl="node2" presStyleIdx="2" presStyleCnt="3">
         <dgm:presLayoutVars>
           <dgm:chPref val="3"/>
         </dgm:presLayoutVars>
       </dgm:prSet>
       <dgm:spPr/>
     </dgm:pt>
-    <dgm:pt modelId="{BB221EC3-CEE0-4B54-AA6E-01806E500F79}" type="pres">
-      <dgm:prSet presAssocID="{B67320DC-07BB-481C-88AD-283B777A0403}" presName="rootConnector" presStyleLbl="node2" presStyleIdx="2" presStyleCnt="3"/>
+    <dgm:pt modelId="{B636EEA4-76C2-41E5-99FB-5C8F608B0226}" type="pres">
+      <dgm:prSet presAssocID="{CB1F19A7-D312-40FF-9CF7-6BCA7B60554C}" presName="rootConnector" presStyleLbl="node2" presStyleIdx="2" presStyleCnt="3"/>
       <dgm:spPr/>
     </dgm:pt>
-    <dgm:pt modelId="{DD286CC0-2D41-48DE-8CFB-0855C18783EA}" type="pres">
-      <dgm:prSet presAssocID="{B67320DC-07BB-481C-88AD-283B777A0403}" presName="hierChild4" presStyleCnt="0"/>
+    <dgm:pt modelId="{1A81D720-FC8E-452C-804B-C3386D6AF657}" type="pres">
+      <dgm:prSet presAssocID="{CB1F19A7-D312-40FF-9CF7-6BCA7B60554C}" presName="hierChild4" presStyleCnt="0"/>
       <dgm:spPr/>
     </dgm:pt>
-    <dgm:pt modelId="{AEE03163-0B54-4AF5-B508-625F6406E432}" type="pres">
-      <dgm:prSet presAssocID="{B67320DC-07BB-481C-88AD-283B777A0403}" presName="hierChild5" presStyleCnt="0"/>
+    <dgm:pt modelId="{CA89DF1B-127D-4FC9-BC57-B37F70C76D2E}" type="pres">
+      <dgm:prSet presAssocID="{CB1F19A7-D312-40FF-9CF7-6BCA7B60554C}" presName="hierChild5" presStyleCnt="0"/>
       <dgm:spPr/>
     </dgm:pt>
-    <dgm:pt modelId="{B9A7FA2A-A5C9-49C6-80B4-AE20714C2333}" type="pres">
-      <dgm:prSet presAssocID="{F49AFBDA-978C-49FE-9118-3272A929A005}" presName="Name111" presStyleLbl="parChTrans1D3" presStyleIdx="0" presStyleCnt="2"/>
+    <dgm:pt modelId="{5804E76D-0C51-4F8A-91B1-036257C65DC2}" type="pres">
+      <dgm:prSet presAssocID="{2DA4F466-EE9C-4963-9539-C29C96763B8F}" presName="hierChild3" presStyleCnt="0"/>
       <dgm:spPr/>
     </dgm:pt>
-    <dgm:pt modelId="{CE8C5B05-98BB-4A79-8A61-846DA87A4E02}" type="pres">
-      <dgm:prSet presAssocID="{DC657197-EC41-407A-9819-3D20C92C77F7}" presName="hierRoot3" presStyleCnt="0">
+    <dgm:pt modelId="{5556880F-3F88-416B-8FCA-71244B74F3D3}" type="pres">
+      <dgm:prSet presAssocID="{B17EFD54-07EA-4E37-9DEA-79C5DAADAA51}" presName="Name111" presStyleLbl="parChTrans1D2" presStyleIdx="3" presStyleCnt="4"/>
+      <dgm:spPr/>
+    </dgm:pt>
+    <dgm:pt modelId="{D35F20FD-BB29-4F66-B97F-CBA74F393E93}" type="pres">
+      <dgm:prSet presAssocID="{D3AEF5B0-9774-4F00-BB04-72C3611DFE76}" presName="hierRoot3" presStyleCnt="0">
         <dgm:presLayoutVars>
           <dgm:hierBranch val="init"/>
         </dgm:presLayoutVars>
       </dgm:prSet>
       <dgm:spPr/>
     </dgm:pt>
-    <dgm:pt modelId="{00FC7318-9F38-4804-A4E3-9D033079AAEC}" type="pres">
-      <dgm:prSet presAssocID="{DC657197-EC41-407A-9819-3D20C92C77F7}" presName="rootComposite3" presStyleCnt="0"/>
+    <dgm:pt modelId="{7C430DB2-4CF8-4495-B28F-CD3B97802989}" type="pres">
+      <dgm:prSet presAssocID="{D3AEF5B0-9774-4F00-BB04-72C3611DFE76}" presName="rootComposite3" presStyleCnt="0"/>
       <dgm:spPr/>
     </dgm:pt>
-    <dgm:pt modelId="{D81F79E2-EC97-49A8-8EF9-5E50C42D7A57}" type="pres">
-      <dgm:prSet presAssocID="{DC657197-EC41-407A-9819-3D20C92C77F7}" presName="rootText3" presStyleLbl="asst2" presStyleIdx="0" presStyleCnt="2">
+    <dgm:pt modelId="{4AB33A37-8968-451F-BDAF-6191A394821C}" type="pres">
+      <dgm:prSet presAssocID="{D3AEF5B0-9774-4F00-BB04-72C3611DFE76}" presName="rootText3" presStyleLbl="asst1" presStyleIdx="0" presStyleCnt="1">
         <dgm:presLayoutVars>
           <dgm:chPref val="3"/>
         </dgm:presLayoutVars>
       </dgm:prSet>
       <dgm:spPr/>
     </dgm:pt>
-    <dgm:pt modelId="{39F59746-11C4-4D48-A8B7-328F65080D24}" type="pres">
-      <dgm:prSet presAssocID="{DC657197-EC41-407A-9819-3D20C92C77F7}" presName="rootConnector3" presStyleLbl="asst2" presStyleIdx="0" presStyleCnt="2"/>
+    <dgm:pt modelId="{B91E63A5-0A30-4048-A83E-1C7852006C79}" type="pres">
+      <dgm:prSet presAssocID="{D3AEF5B0-9774-4F00-BB04-72C3611DFE76}" presName="rootConnector3" presStyleLbl="asst1" presStyleIdx="0" presStyleCnt="1"/>
       <dgm:spPr/>
     </dgm:pt>
-    <dgm:pt modelId="{4D923C00-2A3D-4308-B3B1-3FB3072053C5}" type="pres">
-      <dgm:prSet presAssocID="{DC657197-EC41-407A-9819-3D20C92C77F7}" presName="hierChild6" presStyleCnt="0"/>
+    <dgm:pt modelId="{C7F059E7-D6E3-4FA9-A516-866CCF92243D}" type="pres">
+      <dgm:prSet presAssocID="{D3AEF5B0-9774-4F00-BB04-72C3611DFE76}" presName="hierChild6" presStyleCnt="0"/>
       <dgm:spPr/>
     </dgm:pt>
-    <dgm:pt modelId="{5214B1F3-AA72-4049-B892-5ED101F61768}" type="pres">
-      <dgm:prSet presAssocID="{DC657197-EC41-407A-9819-3D20C92C77F7}" presName="hierChild7" presStyleCnt="0"/>
-      <dgm:spPr/>
-    </dgm:pt>
-    <dgm:pt modelId="{933C4A81-A3E9-476B-BC31-ACA7F2FC00D7}" type="pres">
-      <dgm:prSet presAssocID="{4C9655B1-A44D-4B03-912B-286CBAE62F11}" presName="Name111" presStyleLbl="parChTrans1D3" presStyleIdx="1" presStyleCnt="2"/>
-      <dgm:spPr/>
-    </dgm:pt>
-    <dgm:pt modelId="{81305018-2C6B-4AC9-B8DC-AA4B471988B7}" type="pres">
-      <dgm:prSet presAssocID="{26EB62F7-735B-4A53-9F77-B308802CD13F}" presName="hierRoot3" presStyleCnt="0">
-        <dgm:presLayoutVars>
-          <dgm:hierBranch val="init"/>
-        </dgm:presLayoutVars>
-      </dgm:prSet>
-      <dgm:spPr/>
-    </dgm:pt>
-    <dgm:pt modelId="{9139E988-7F97-4DC5-97B5-FD391F141D2E}" type="pres">
-      <dgm:prSet presAssocID="{26EB62F7-735B-4A53-9F77-B308802CD13F}" presName="rootComposite3" presStyleCnt="0"/>
-      <dgm:spPr/>
-    </dgm:pt>
-    <dgm:pt modelId="{8C5A41A4-A674-4693-9A65-03BA9B33B3D9}" type="pres">
-      <dgm:prSet presAssocID="{26EB62F7-735B-4A53-9F77-B308802CD13F}" presName="rootText3" presStyleLbl="asst2" presStyleIdx="1" presStyleCnt="2">
-        <dgm:presLayoutVars>
-          <dgm:chPref val="3"/>
-        </dgm:presLayoutVars>
-      </dgm:prSet>
-      <dgm:spPr/>
-    </dgm:pt>
-    <dgm:pt modelId="{300B6252-7FDC-4897-BB78-0CA7E9EFD764}" type="pres">
-      <dgm:prSet presAssocID="{26EB62F7-735B-4A53-9F77-B308802CD13F}" presName="rootConnector3" presStyleLbl="asst2" presStyleIdx="1" presStyleCnt="2"/>
-      <dgm:spPr/>
-    </dgm:pt>
-    <dgm:pt modelId="{9FD28D25-386A-475B-AC56-F5B329FFAFBF}" type="pres">
-      <dgm:prSet presAssocID="{26EB62F7-735B-4A53-9F77-B308802CD13F}" presName="hierChild6" presStyleCnt="0"/>
-      <dgm:spPr/>
-    </dgm:pt>
-    <dgm:pt modelId="{CA647507-0D87-4CA1-8668-95566A62C205}" type="pres">
-      <dgm:prSet presAssocID="{26EB62F7-735B-4A53-9F77-B308802CD13F}" presName="hierChild7" presStyleCnt="0"/>
-      <dgm:spPr/>
-    </dgm:pt>
-    <dgm:pt modelId="{C3E5B7EB-7366-4630-9944-965E56EEE08A}" type="pres">
-      <dgm:prSet presAssocID="{AEB04863-CB82-4620-85BC-9CFBFCACF82C}" presName="hierChild3" presStyleCnt="0"/>
-      <dgm:spPr/>
-    </dgm:pt>
-    <dgm:pt modelId="{451ADE3D-338A-4C1B-8ADD-B1C1AC9F496C}" type="pres">
-      <dgm:prSet presAssocID="{C8DF4F86-B923-4585-8998-C9109020C38D}" presName="Name111" presStyleLbl="parChTrans1D2" presStyleIdx="3" presStyleCnt="4"/>
-      <dgm:spPr/>
-    </dgm:pt>
-    <dgm:pt modelId="{7F102A00-2978-4D35-8E3C-FEDBA8EACA2F}" type="pres">
-      <dgm:prSet presAssocID="{0C23373B-B271-4FF9-892B-FC7271E3AB06}" presName="hierRoot3" presStyleCnt="0">
-        <dgm:presLayoutVars>
-          <dgm:hierBranch val="init"/>
-        </dgm:presLayoutVars>
-      </dgm:prSet>
-      <dgm:spPr/>
-    </dgm:pt>
-    <dgm:pt modelId="{904BDBC6-9528-4FDE-AB4A-172632B8B72B}" type="pres">
-      <dgm:prSet presAssocID="{0C23373B-B271-4FF9-892B-FC7271E3AB06}" presName="rootComposite3" presStyleCnt="0"/>
-      <dgm:spPr/>
-    </dgm:pt>
-    <dgm:pt modelId="{FA7F3C41-75C2-47B7-8C00-CFC38AA87095}" type="pres">
-      <dgm:prSet presAssocID="{0C23373B-B271-4FF9-892B-FC7271E3AB06}" presName="rootText3" presStyleLbl="asst1" presStyleIdx="0" presStyleCnt="1" custScaleX="158712">
-        <dgm:presLayoutVars>
-          <dgm:chPref val="3"/>
-        </dgm:presLayoutVars>
-      </dgm:prSet>
-      <dgm:spPr/>
-    </dgm:pt>
-    <dgm:pt modelId="{F8530CE4-28DE-4C6F-8D8F-3DACAA7931DF}" type="pres">
-      <dgm:prSet presAssocID="{0C23373B-B271-4FF9-892B-FC7271E3AB06}" presName="rootConnector3" presStyleLbl="asst1" presStyleIdx="0" presStyleCnt="1"/>
-      <dgm:spPr/>
-    </dgm:pt>
-    <dgm:pt modelId="{ECC2FECB-0400-41A9-8304-DBC05E9C79E9}" type="pres">
-      <dgm:prSet presAssocID="{0C23373B-B271-4FF9-892B-FC7271E3AB06}" presName="hierChild6" presStyleCnt="0"/>
-      <dgm:spPr/>
-    </dgm:pt>
-    <dgm:pt modelId="{A2F1E7B3-471F-4833-9751-DB2075D65D4C}" type="pres">
-      <dgm:prSet presAssocID="{0C23373B-B271-4FF9-892B-FC7271E3AB06}" presName="hierChild7" presStyleCnt="0"/>
+    <dgm:pt modelId="{2FFC3E57-F9D1-47D4-9494-A8B155DE7FF6}" type="pres">
+      <dgm:prSet presAssocID="{D3AEF5B0-9774-4F00-BB04-72C3611DFE76}" presName="hierChild7" presStyleCnt="0"/>
       <dgm:spPr/>
     </dgm:pt>
   </dgm:ptLst>
   <dgm:cxnLst>
-    <dgm:cxn modelId="{7B768908-ACAD-415F-A226-B857CFC1A2C3}" type="presOf" srcId="{037F124A-A571-485A-ACB4-30B098BEAD50}" destId="{5C34514A-0C79-47CA-B9F1-D85DCA7CF3A7}" srcOrd="0" destOrd="0" presId="urn:microsoft.com/office/officeart/2005/8/layout/orgChart1"/>
-    <dgm:cxn modelId="{9C80470B-BC2A-4631-A3E1-D498DCBBB58A}" type="presOf" srcId="{4C9655B1-A44D-4B03-912B-286CBAE62F11}" destId="{933C4A81-A3E9-476B-BC31-ACA7F2FC00D7}" srcOrd="0" destOrd="0" presId="urn:microsoft.com/office/officeart/2005/8/layout/orgChart1"/>
-    <dgm:cxn modelId="{B469D90C-4D90-427F-9C67-2A30B7FE7D3C}" type="presOf" srcId="{0C23373B-B271-4FF9-892B-FC7271E3AB06}" destId="{FA7F3C41-75C2-47B7-8C00-CFC38AA87095}" srcOrd="0" destOrd="0" presId="urn:microsoft.com/office/officeart/2005/8/layout/orgChart1"/>
-    <dgm:cxn modelId="{D8EBAD20-C568-4B3B-A54A-431BB6606753}" type="presOf" srcId="{FA3193E2-83C6-4C9F-AF6D-7717C616A033}" destId="{737A126E-E37F-47ED-AE1B-8DF63EEED146}" srcOrd="1" destOrd="0" presId="urn:microsoft.com/office/officeart/2005/8/layout/orgChart1"/>
-    <dgm:cxn modelId="{77F6B52A-658D-4575-8063-EA0D56545A20}" type="presOf" srcId="{FBE276E3-620E-4B3E-8BB5-7A4BA01A2A35}" destId="{4B26B9A9-A87D-4876-8571-3448B4A84B9C}" srcOrd="0" destOrd="0" presId="urn:microsoft.com/office/officeart/2005/8/layout/orgChart1"/>
-    <dgm:cxn modelId="{A25A705F-4453-45E8-BCB1-B989DCA6CF4C}" srcId="{AEB04863-CB82-4620-85BC-9CFBFCACF82C}" destId="{B67320DC-07BB-481C-88AD-283B777A0403}" srcOrd="3" destOrd="0" parTransId="{037F124A-A571-485A-ACB4-30B098BEAD50}" sibTransId="{CD8A88B6-0D59-4215-8803-32A6B1985CAD}"/>
-    <dgm:cxn modelId="{B602BC62-E3A8-4727-BE0A-04194EFA24F1}" type="presOf" srcId="{B67320DC-07BB-481C-88AD-283B777A0403}" destId="{9AF7F27A-16CA-490C-A17B-2F77A568AD6A}" srcOrd="0" destOrd="0" presId="urn:microsoft.com/office/officeart/2005/8/layout/orgChart1"/>
-    <dgm:cxn modelId="{EDFB3F45-FE97-4BEC-BDDA-18386AD10E2F}" type="presOf" srcId="{C8DF4F86-B923-4585-8998-C9109020C38D}" destId="{451ADE3D-338A-4C1B-8ADD-B1C1AC9F496C}" srcOrd="0" destOrd="0" presId="urn:microsoft.com/office/officeart/2005/8/layout/orgChart1"/>
-    <dgm:cxn modelId="{C062C368-3E6E-4A3D-B6D8-9E5035548DD2}" type="presOf" srcId="{AEB04863-CB82-4620-85BC-9CFBFCACF82C}" destId="{42C77321-2B22-4FC2-A9F3-649F150B260E}" srcOrd="1" destOrd="0" presId="urn:microsoft.com/office/officeart/2005/8/layout/orgChart1"/>
-    <dgm:cxn modelId="{2E740E6C-61A3-4DAA-87AF-BF35CEE79A7D}" srcId="{AEB04863-CB82-4620-85BC-9CFBFCACF82C}" destId="{0C23373B-B271-4FF9-892B-FC7271E3AB06}" srcOrd="0" destOrd="0" parTransId="{C8DF4F86-B923-4585-8998-C9109020C38D}" sibTransId="{C9687FEB-E051-478E-B971-4CC39BE29562}"/>
-    <dgm:cxn modelId="{9912C151-048D-48C9-93CA-1FDB17B7E3FA}" type="presOf" srcId="{F49AFBDA-978C-49FE-9118-3272A929A005}" destId="{B9A7FA2A-A5C9-49C6-80B4-AE20714C2333}" srcOrd="0" destOrd="0" presId="urn:microsoft.com/office/officeart/2005/8/layout/orgChart1"/>
-    <dgm:cxn modelId="{856D9B53-EBDA-4F9C-B577-CC383ACAF9BF}" type="presOf" srcId="{FA3193E2-83C6-4C9F-AF6D-7717C616A033}" destId="{72CEFE29-F240-4345-8B3C-09FF34FF4917}" srcOrd="0" destOrd="0" presId="urn:microsoft.com/office/officeart/2005/8/layout/orgChart1"/>
-    <dgm:cxn modelId="{8B755A57-CEC1-4DD9-80F8-841C6B8BFF50}" type="presOf" srcId="{26EB62F7-735B-4A53-9F77-B308802CD13F}" destId="{300B6252-7FDC-4897-BB78-0CA7E9EFD764}" srcOrd="1" destOrd="0" presId="urn:microsoft.com/office/officeart/2005/8/layout/orgChart1"/>
-    <dgm:cxn modelId="{56D48181-35E3-4C4E-AB91-251E4EF0012F}" srcId="{AEB04863-CB82-4620-85BC-9CFBFCACF82C}" destId="{FA3193E2-83C6-4C9F-AF6D-7717C616A033}" srcOrd="2" destOrd="0" parTransId="{608294B1-0151-4C38-AB05-6EC07A480365}" sibTransId="{ABF1A276-1618-45B8-B6AA-24E0D972149D}"/>
-    <dgm:cxn modelId="{59C0F185-488E-4B12-AE6A-5D7B0D6122A8}" type="presOf" srcId="{26EB62F7-735B-4A53-9F77-B308802CD13F}" destId="{8C5A41A4-A674-4693-9A65-03BA9B33B3D9}" srcOrd="0" destOrd="0" presId="urn:microsoft.com/office/officeart/2005/8/layout/orgChart1"/>
-    <dgm:cxn modelId="{9789E58C-730D-40B6-8AFA-B2E0AE4848AB}" type="presOf" srcId="{B67320DC-07BB-481C-88AD-283B777A0403}" destId="{BB221EC3-CEE0-4B54-AA6E-01806E500F79}" srcOrd="1" destOrd="0" presId="urn:microsoft.com/office/officeart/2005/8/layout/orgChart1"/>
-    <dgm:cxn modelId="{193FEE96-C3BF-4995-AB01-E52FCD6DB430}" srcId="{AEB04863-CB82-4620-85BC-9CFBFCACF82C}" destId="{FBE276E3-620E-4B3E-8BB5-7A4BA01A2A35}" srcOrd="1" destOrd="0" parTransId="{832943AB-A9C8-4269-B190-1442B7E4955C}" sibTransId="{AB74CEE9-2CE3-4AF7-B98A-2AD60E109C3A}"/>
-    <dgm:cxn modelId="{507713A3-8455-41C5-B6E9-1EABFF8F4407}" type="presOf" srcId="{F4CBB54E-3109-461B-BD42-F5E19C6E48A5}" destId="{E1A021EE-6810-459B-9F2B-6F7605676E1B}" srcOrd="0" destOrd="0" presId="urn:microsoft.com/office/officeart/2005/8/layout/orgChart1"/>
-    <dgm:cxn modelId="{4D3572A5-4A9E-44F4-A745-E34FFFB76299}" type="presOf" srcId="{DC657197-EC41-407A-9819-3D20C92C77F7}" destId="{39F59746-11C4-4D48-A8B7-328F65080D24}" srcOrd="1" destOrd="0" presId="urn:microsoft.com/office/officeart/2005/8/layout/orgChart1"/>
-    <dgm:cxn modelId="{7F2408D9-E08C-40B0-8830-CC7EED46A3E8}" type="presOf" srcId="{0C23373B-B271-4FF9-892B-FC7271E3AB06}" destId="{F8530CE4-28DE-4C6F-8D8F-3DACAA7931DF}" srcOrd="1" destOrd="0" presId="urn:microsoft.com/office/officeart/2005/8/layout/orgChart1"/>
-    <dgm:cxn modelId="{A3F07EDD-4ECB-478B-B119-166142E6CC70}" type="presOf" srcId="{832943AB-A9C8-4269-B190-1442B7E4955C}" destId="{C3597C58-1F61-4DDC-BEC1-27787EEEFA09}" srcOrd="0" destOrd="0" presId="urn:microsoft.com/office/officeart/2005/8/layout/orgChart1"/>
-    <dgm:cxn modelId="{4AD9E4E4-89BB-4B02-A9DE-82425AA28455}" srcId="{F4CBB54E-3109-461B-BD42-F5E19C6E48A5}" destId="{AEB04863-CB82-4620-85BC-9CFBFCACF82C}" srcOrd="0" destOrd="0" parTransId="{12A32FCF-1613-44D7-AC40-EA8545D4E843}" sibTransId="{4576E36E-EC2F-460E-9C94-CC1445198CFC}"/>
-    <dgm:cxn modelId="{FE165CE6-41E5-4946-A8F8-825A44338A45}" type="presOf" srcId="{608294B1-0151-4C38-AB05-6EC07A480365}" destId="{B257BC38-2C98-4B37-88B4-8CC0B048D56A}" srcOrd="0" destOrd="0" presId="urn:microsoft.com/office/officeart/2005/8/layout/orgChart1"/>
-    <dgm:cxn modelId="{9F0672E7-2C00-4ADA-976D-97218A459F52}" srcId="{B67320DC-07BB-481C-88AD-283B777A0403}" destId="{DC657197-EC41-407A-9819-3D20C92C77F7}" srcOrd="0" destOrd="0" parTransId="{F49AFBDA-978C-49FE-9118-3272A929A005}" sibTransId="{3E848630-52DF-4A07-8AB8-41E95A7662B6}"/>
-    <dgm:cxn modelId="{A96148E8-A284-4AE1-A501-F7FCFD1A42C7}" type="presOf" srcId="{AEB04863-CB82-4620-85BC-9CFBFCACF82C}" destId="{DB310313-A257-405A-AF26-47470C0176EA}" srcOrd="0" destOrd="0" presId="urn:microsoft.com/office/officeart/2005/8/layout/orgChart1"/>
-    <dgm:cxn modelId="{4B7E33F6-9C6D-4F48-A742-E536C6784F2F}" srcId="{B67320DC-07BB-481C-88AD-283B777A0403}" destId="{26EB62F7-735B-4A53-9F77-B308802CD13F}" srcOrd="1" destOrd="0" parTransId="{4C9655B1-A44D-4B03-912B-286CBAE62F11}" sibTransId="{526A2B24-2729-4B84-B891-F4EDDFA96B60}"/>
-    <dgm:cxn modelId="{8D46A1F8-FCC8-4653-B2BD-B76316AB0EBF}" type="presOf" srcId="{DC657197-EC41-407A-9819-3D20C92C77F7}" destId="{D81F79E2-EC97-49A8-8EF9-5E50C42D7A57}" srcOrd="0" destOrd="0" presId="urn:microsoft.com/office/officeart/2005/8/layout/orgChart1"/>
-    <dgm:cxn modelId="{29A9E2FD-461C-429D-8CBF-170BECDF8E6D}" type="presOf" srcId="{FBE276E3-620E-4B3E-8BB5-7A4BA01A2A35}" destId="{0282373E-7906-48FB-A27A-08091CC46168}" srcOrd="1" destOrd="0" presId="urn:microsoft.com/office/officeart/2005/8/layout/orgChart1"/>
-    <dgm:cxn modelId="{28F1982D-AEEC-49B3-970F-DF50F45F09AF}" type="presParOf" srcId="{E1A021EE-6810-459B-9F2B-6F7605676E1B}" destId="{D1096400-8A64-424F-9985-82DDCC009DE8}" srcOrd="0" destOrd="0" presId="urn:microsoft.com/office/officeart/2005/8/layout/orgChart1"/>
-    <dgm:cxn modelId="{DC86096C-9A05-48FA-B435-239AD55C8A79}" type="presParOf" srcId="{D1096400-8A64-424F-9985-82DDCC009DE8}" destId="{4F2C1717-0167-4A1C-8F97-F1E1AE4D094B}" srcOrd="0" destOrd="0" presId="urn:microsoft.com/office/officeart/2005/8/layout/orgChart1"/>
-    <dgm:cxn modelId="{7E722267-8F36-4EDA-A853-6A23836A7CC5}" type="presParOf" srcId="{4F2C1717-0167-4A1C-8F97-F1E1AE4D094B}" destId="{DB310313-A257-405A-AF26-47470C0176EA}" srcOrd="0" destOrd="0" presId="urn:microsoft.com/office/officeart/2005/8/layout/orgChart1"/>
-    <dgm:cxn modelId="{325B4A45-5781-4EA4-BFD9-38AB20261575}" type="presParOf" srcId="{4F2C1717-0167-4A1C-8F97-F1E1AE4D094B}" destId="{42C77321-2B22-4FC2-A9F3-649F150B260E}" srcOrd="1" destOrd="0" presId="urn:microsoft.com/office/officeart/2005/8/layout/orgChart1"/>
-    <dgm:cxn modelId="{08E39E4B-A754-4D61-BCE7-7D54B369A21A}" type="presParOf" srcId="{D1096400-8A64-424F-9985-82DDCC009DE8}" destId="{A5832474-53D0-4BA9-B72B-5080E9553C53}" srcOrd="1" destOrd="0" presId="urn:microsoft.com/office/officeart/2005/8/layout/orgChart1"/>
-    <dgm:cxn modelId="{ED990C68-7C8B-4713-A61B-8249E3352B0B}" type="presParOf" srcId="{A5832474-53D0-4BA9-B72B-5080E9553C53}" destId="{C3597C58-1F61-4DDC-BEC1-27787EEEFA09}" srcOrd="0" destOrd="0" presId="urn:microsoft.com/office/officeart/2005/8/layout/orgChart1"/>
-    <dgm:cxn modelId="{16A9C8AC-FEE0-4C3C-A0E5-67834FC26563}" type="presParOf" srcId="{A5832474-53D0-4BA9-B72B-5080E9553C53}" destId="{7442BC69-E977-427E-9EAA-A97232A1944B}" srcOrd="1" destOrd="0" presId="urn:microsoft.com/office/officeart/2005/8/layout/orgChart1"/>
-    <dgm:cxn modelId="{2C4EC2B6-E36B-4F14-845D-E5756BE0477C}" type="presParOf" srcId="{7442BC69-E977-427E-9EAA-A97232A1944B}" destId="{0EA5F5CA-EA01-4FA2-ABB2-9FA235383A26}" srcOrd="0" destOrd="0" presId="urn:microsoft.com/office/officeart/2005/8/layout/orgChart1"/>
-    <dgm:cxn modelId="{B6AEDF53-D846-45DB-8C17-B22135C15BD8}" type="presParOf" srcId="{0EA5F5CA-EA01-4FA2-ABB2-9FA235383A26}" destId="{4B26B9A9-A87D-4876-8571-3448B4A84B9C}" srcOrd="0" destOrd="0" presId="urn:microsoft.com/office/officeart/2005/8/layout/orgChart1"/>
-    <dgm:cxn modelId="{36B167C4-9984-4B33-9053-36209B90E3E5}" type="presParOf" srcId="{0EA5F5CA-EA01-4FA2-ABB2-9FA235383A26}" destId="{0282373E-7906-48FB-A27A-08091CC46168}" srcOrd="1" destOrd="0" presId="urn:microsoft.com/office/officeart/2005/8/layout/orgChart1"/>
-    <dgm:cxn modelId="{9408A105-0B0D-46D8-BC02-22751F21ADE0}" type="presParOf" srcId="{7442BC69-E977-427E-9EAA-A97232A1944B}" destId="{A98062D2-F539-4DB1-AFF7-B7FEB7A62C3A}" srcOrd="1" destOrd="0" presId="urn:microsoft.com/office/officeart/2005/8/layout/orgChart1"/>
-    <dgm:cxn modelId="{2B147CE1-65F2-49E6-A8E6-2CA6417B2137}" type="presParOf" srcId="{7442BC69-E977-427E-9EAA-A97232A1944B}" destId="{E65D8D6E-5EC9-4DD9-9E98-AC9B2BB732B0}" srcOrd="2" destOrd="0" presId="urn:microsoft.com/office/officeart/2005/8/layout/orgChart1"/>
-    <dgm:cxn modelId="{0D6AFDCD-0900-44F1-B32E-FA07F0AB2C8C}" type="presParOf" srcId="{A5832474-53D0-4BA9-B72B-5080E9553C53}" destId="{B257BC38-2C98-4B37-88B4-8CC0B048D56A}" srcOrd="2" destOrd="0" presId="urn:microsoft.com/office/officeart/2005/8/layout/orgChart1"/>
-    <dgm:cxn modelId="{9B3C4CE5-B194-4EA7-A84D-D7232DF0510E}" type="presParOf" srcId="{A5832474-53D0-4BA9-B72B-5080E9553C53}" destId="{9148D591-F967-447A-846C-3FA057B1B309}" srcOrd="3" destOrd="0" presId="urn:microsoft.com/office/officeart/2005/8/layout/orgChart1"/>
-    <dgm:cxn modelId="{BACF3D7C-DF95-4F2F-828E-CF0E1E933E71}" type="presParOf" srcId="{9148D591-F967-447A-846C-3FA057B1B309}" destId="{D3C035FF-603F-434D-8EA7-B3F14608476D}" srcOrd="0" destOrd="0" presId="urn:microsoft.com/office/officeart/2005/8/layout/orgChart1"/>
-    <dgm:cxn modelId="{773F5EE7-6083-4067-B226-D6F835F38450}" type="presParOf" srcId="{D3C035FF-603F-434D-8EA7-B3F14608476D}" destId="{72CEFE29-F240-4345-8B3C-09FF34FF4917}" srcOrd="0" destOrd="0" presId="urn:microsoft.com/office/officeart/2005/8/layout/orgChart1"/>
-    <dgm:cxn modelId="{B9E70B4E-2DEF-4841-90D9-00362BBDFFF6}" type="presParOf" srcId="{D3C035FF-603F-434D-8EA7-B3F14608476D}" destId="{737A126E-E37F-47ED-AE1B-8DF63EEED146}" srcOrd="1" destOrd="0" presId="urn:microsoft.com/office/officeart/2005/8/layout/orgChart1"/>
-    <dgm:cxn modelId="{14785F67-7036-4724-8E10-F99900A3E115}" type="presParOf" srcId="{9148D591-F967-447A-846C-3FA057B1B309}" destId="{5DFEBD76-E295-41E5-9993-A8082C3EFD65}" srcOrd="1" destOrd="0" presId="urn:microsoft.com/office/officeart/2005/8/layout/orgChart1"/>
-    <dgm:cxn modelId="{B7F44922-F931-409E-A466-0F087B465BC9}" type="presParOf" srcId="{9148D591-F967-447A-846C-3FA057B1B309}" destId="{4A76573C-6BF9-48AA-9E26-8A0ED910F6FB}" srcOrd="2" destOrd="0" presId="urn:microsoft.com/office/officeart/2005/8/layout/orgChart1"/>
-    <dgm:cxn modelId="{C2604DFE-CEF9-464D-AC75-4C51DB0D1396}" type="presParOf" srcId="{A5832474-53D0-4BA9-B72B-5080E9553C53}" destId="{5C34514A-0C79-47CA-B9F1-D85DCA7CF3A7}" srcOrd="4" destOrd="0" presId="urn:microsoft.com/office/officeart/2005/8/layout/orgChart1"/>
-    <dgm:cxn modelId="{69462AFE-9FE0-4296-98B0-19A61C987EA3}" type="presParOf" srcId="{A5832474-53D0-4BA9-B72B-5080E9553C53}" destId="{DD1723B3-03FE-4288-B393-8C9394B2CAD3}" srcOrd="5" destOrd="0" presId="urn:microsoft.com/office/officeart/2005/8/layout/orgChart1"/>
-    <dgm:cxn modelId="{FA2529BF-C2F5-44A6-A410-F2326686AF50}" type="presParOf" srcId="{DD1723B3-03FE-4288-B393-8C9394B2CAD3}" destId="{27C4179C-A896-4502-8A19-25DCB6E4C9B7}" srcOrd="0" destOrd="0" presId="urn:microsoft.com/office/officeart/2005/8/layout/orgChart1"/>
-    <dgm:cxn modelId="{6AC33B5D-97FB-41E4-9881-447BA38688F8}" type="presParOf" srcId="{27C4179C-A896-4502-8A19-25DCB6E4C9B7}" destId="{9AF7F27A-16CA-490C-A17B-2F77A568AD6A}" srcOrd="0" destOrd="0" presId="urn:microsoft.com/office/officeart/2005/8/layout/orgChart1"/>
-    <dgm:cxn modelId="{B2977BCF-453B-40A9-B9D6-09496250970D}" type="presParOf" srcId="{27C4179C-A896-4502-8A19-25DCB6E4C9B7}" destId="{BB221EC3-CEE0-4B54-AA6E-01806E500F79}" srcOrd="1" destOrd="0" presId="urn:microsoft.com/office/officeart/2005/8/layout/orgChart1"/>
-    <dgm:cxn modelId="{0333D8EC-EC70-4C6B-B747-E04CCB263EF3}" type="presParOf" srcId="{DD1723B3-03FE-4288-B393-8C9394B2CAD3}" destId="{DD286CC0-2D41-48DE-8CFB-0855C18783EA}" srcOrd="1" destOrd="0" presId="urn:microsoft.com/office/officeart/2005/8/layout/orgChart1"/>
-    <dgm:cxn modelId="{CFFB9F9C-1274-4600-9547-CE87809269F5}" type="presParOf" srcId="{DD1723B3-03FE-4288-B393-8C9394B2CAD3}" destId="{AEE03163-0B54-4AF5-B508-625F6406E432}" srcOrd="2" destOrd="0" presId="urn:microsoft.com/office/officeart/2005/8/layout/orgChart1"/>
-    <dgm:cxn modelId="{BAE63D6B-669B-4754-9083-A645ECB993CC}" type="presParOf" srcId="{AEE03163-0B54-4AF5-B508-625F6406E432}" destId="{B9A7FA2A-A5C9-49C6-80B4-AE20714C2333}" srcOrd="0" destOrd="0" presId="urn:microsoft.com/office/officeart/2005/8/layout/orgChart1"/>
-    <dgm:cxn modelId="{2BB01624-06D9-4DA2-BD9F-EBF833000B34}" type="presParOf" srcId="{AEE03163-0B54-4AF5-B508-625F6406E432}" destId="{CE8C5B05-98BB-4A79-8A61-846DA87A4E02}" srcOrd="1" destOrd="0" presId="urn:microsoft.com/office/officeart/2005/8/layout/orgChart1"/>
-    <dgm:cxn modelId="{943A1ACB-7755-4012-A2CB-6A976AF0C0D5}" type="presParOf" srcId="{CE8C5B05-98BB-4A79-8A61-846DA87A4E02}" destId="{00FC7318-9F38-4804-A4E3-9D033079AAEC}" srcOrd="0" destOrd="0" presId="urn:microsoft.com/office/officeart/2005/8/layout/orgChart1"/>
-    <dgm:cxn modelId="{68434F1E-0F26-4785-A9B3-FF0F11164F0A}" type="presParOf" srcId="{00FC7318-9F38-4804-A4E3-9D033079AAEC}" destId="{D81F79E2-EC97-49A8-8EF9-5E50C42D7A57}" srcOrd="0" destOrd="0" presId="urn:microsoft.com/office/officeart/2005/8/layout/orgChart1"/>
-    <dgm:cxn modelId="{28397819-711B-4061-B8EF-3C414F2B7E82}" type="presParOf" srcId="{00FC7318-9F38-4804-A4E3-9D033079AAEC}" destId="{39F59746-11C4-4D48-A8B7-328F65080D24}" srcOrd="1" destOrd="0" presId="urn:microsoft.com/office/officeart/2005/8/layout/orgChart1"/>
-    <dgm:cxn modelId="{002A1582-897A-4B67-9E0C-A68C6893DB64}" type="presParOf" srcId="{CE8C5B05-98BB-4A79-8A61-846DA87A4E02}" destId="{4D923C00-2A3D-4308-B3B1-3FB3072053C5}" srcOrd="1" destOrd="0" presId="urn:microsoft.com/office/officeart/2005/8/layout/orgChart1"/>
-    <dgm:cxn modelId="{0B6E3518-386C-4A0D-8C8A-1DABF4F656E9}" type="presParOf" srcId="{CE8C5B05-98BB-4A79-8A61-846DA87A4E02}" destId="{5214B1F3-AA72-4049-B892-5ED101F61768}" srcOrd="2" destOrd="0" presId="urn:microsoft.com/office/officeart/2005/8/layout/orgChart1"/>
-    <dgm:cxn modelId="{EA99EE12-1A9A-467E-A2BC-EFF9170F13AD}" type="presParOf" srcId="{AEE03163-0B54-4AF5-B508-625F6406E432}" destId="{933C4A81-A3E9-476B-BC31-ACA7F2FC00D7}" srcOrd="2" destOrd="0" presId="urn:microsoft.com/office/officeart/2005/8/layout/orgChart1"/>
-    <dgm:cxn modelId="{327F4A09-02BC-4CD3-B794-C294350F7E0E}" type="presParOf" srcId="{AEE03163-0B54-4AF5-B508-625F6406E432}" destId="{81305018-2C6B-4AC9-B8DC-AA4B471988B7}" srcOrd="3" destOrd="0" presId="urn:microsoft.com/office/officeart/2005/8/layout/orgChart1"/>
-    <dgm:cxn modelId="{B1B56B4B-E2FC-4154-8A02-9A5BD22BBA9F}" type="presParOf" srcId="{81305018-2C6B-4AC9-B8DC-AA4B471988B7}" destId="{9139E988-7F97-4DC5-97B5-FD391F141D2E}" srcOrd="0" destOrd="0" presId="urn:microsoft.com/office/officeart/2005/8/layout/orgChart1"/>
-    <dgm:cxn modelId="{9BD1E357-5603-4144-AA18-A6DC29612925}" type="presParOf" srcId="{9139E988-7F97-4DC5-97B5-FD391F141D2E}" destId="{8C5A41A4-A674-4693-9A65-03BA9B33B3D9}" srcOrd="0" destOrd="0" presId="urn:microsoft.com/office/officeart/2005/8/layout/orgChart1"/>
-    <dgm:cxn modelId="{3E049871-6173-487C-B3B2-C40A4B0399AB}" type="presParOf" srcId="{9139E988-7F97-4DC5-97B5-FD391F141D2E}" destId="{300B6252-7FDC-4897-BB78-0CA7E9EFD764}" srcOrd="1" destOrd="0" presId="urn:microsoft.com/office/officeart/2005/8/layout/orgChart1"/>
-    <dgm:cxn modelId="{F36F2020-CDC5-4350-BB63-22CF42D0F91A}" type="presParOf" srcId="{81305018-2C6B-4AC9-B8DC-AA4B471988B7}" destId="{9FD28D25-386A-475B-AC56-F5B329FFAFBF}" srcOrd="1" destOrd="0" presId="urn:microsoft.com/office/officeart/2005/8/layout/orgChart1"/>
-    <dgm:cxn modelId="{6B23B06C-4C05-4581-A5D8-4C76FEBD3677}" type="presParOf" srcId="{81305018-2C6B-4AC9-B8DC-AA4B471988B7}" destId="{CA647507-0D87-4CA1-8668-95566A62C205}" srcOrd="2" destOrd="0" presId="urn:microsoft.com/office/officeart/2005/8/layout/orgChart1"/>
-    <dgm:cxn modelId="{D13EEFFE-681B-46A1-B33E-9BBA109A8327}" type="presParOf" srcId="{D1096400-8A64-424F-9985-82DDCC009DE8}" destId="{C3E5B7EB-7366-4630-9944-965E56EEE08A}" srcOrd="2" destOrd="0" presId="urn:microsoft.com/office/officeart/2005/8/layout/orgChart1"/>
-    <dgm:cxn modelId="{60ABFC89-DBFC-4D07-B298-2FC5086784E7}" type="presParOf" srcId="{C3E5B7EB-7366-4630-9944-965E56EEE08A}" destId="{451ADE3D-338A-4C1B-8ADD-B1C1AC9F496C}" srcOrd="0" destOrd="0" presId="urn:microsoft.com/office/officeart/2005/8/layout/orgChart1"/>
-    <dgm:cxn modelId="{CBFB79A4-2687-4DFB-AADE-146237DE2327}" type="presParOf" srcId="{C3E5B7EB-7366-4630-9944-965E56EEE08A}" destId="{7F102A00-2978-4D35-8E3C-FEDBA8EACA2F}" srcOrd="1" destOrd="0" presId="urn:microsoft.com/office/officeart/2005/8/layout/orgChart1"/>
-    <dgm:cxn modelId="{361E4E6C-9006-4104-BB75-6058B6C2EFA0}" type="presParOf" srcId="{7F102A00-2978-4D35-8E3C-FEDBA8EACA2F}" destId="{904BDBC6-9528-4FDE-AB4A-172632B8B72B}" srcOrd="0" destOrd="0" presId="urn:microsoft.com/office/officeart/2005/8/layout/orgChart1"/>
-    <dgm:cxn modelId="{FF24B60F-289E-45CF-A8C2-71BC63E9BB8C}" type="presParOf" srcId="{904BDBC6-9528-4FDE-AB4A-172632B8B72B}" destId="{FA7F3C41-75C2-47B7-8C00-CFC38AA87095}" srcOrd="0" destOrd="0" presId="urn:microsoft.com/office/officeart/2005/8/layout/orgChart1"/>
-    <dgm:cxn modelId="{FAECC0AD-DCFF-4FE3-A3ED-2B0ECEC82B3D}" type="presParOf" srcId="{904BDBC6-9528-4FDE-AB4A-172632B8B72B}" destId="{F8530CE4-28DE-4C6F-8D8F-3DACAA7931DF}" srcOrd="1" destOrd="0" presId="urn:microsoft.com/office/officeart/2005/8/layout/orgChart1"/>
-    <dgm:cxn modelId="{6489A9AC-B1C4-49E4-B5CF-C424A76C073D}" type="presParOf" srcId="{7F102A00-2978-4D35-8E3C-FEDBA8EACA2F}" destId="{ECC2FECB-0400-41A9-8304-DBC05E9C79E9}" srcOrd="1" destOrd="0" presId="urn:microsoft.com/office/officeart/2005/8/layout/orgChart1"/>
-    <dgm:cxn modelId="{FC421CC8-33A4-4CD9-9AC8-6E871AE9CB4D}" type="presParOf" srcId="{7F102A00-2978-4D35-8E3C-FEDBA8EACA2F}" destId="{A2F1E7B3-471F-4833-9751-DB2075D65D4C}" srcOrd="2" destOrd="0" presId="urn:microsoft.com/office/officeart/2005/8/layout/orgChart1"/>
+    <dgm:cxn modelId="{EC102111-B768-474D-B952-68FEA8F09C97}" srcId="{2DA4F466-EE9C-4963-9539-C29C96763B8F}" destId="{32C335E0-B88A-45A4-BC05-91EBAB9FD28C}" srcOrd="1" destOrd="0" parTransId="{667CE224-6671-41BF-9859-8297E611F61A}" sibTransId="{019A3D74-062F-4721-BCC1-07C8CDDEB7A7}"/>
+    <dgm:cxn modelId="{BBA5151C-84B3-4FA4-8226-1A26C6DFFD95}" type="presOf" srcId="{83B8869F-1752-4F06-AC7E-AA2559AAF9CF}" destId="{7149AEEA-A3E1-4709-9979-5BBC76EB4A6C}" srcOrd="1" destOrd="0" presId="urn:microsoft.com/office/officeart/2005/8/layout/orgChart1"/>
+    <dgm:cxn modelId="{F0F01824-0EA2-494F-AB1C-0374F6625AAD}" type="presOf" srcId="{D3AEF5B0-9774-4F00-BB04-72C3611DFE76}" destId="{B91E63A5-0A30-4048-A83E-1C7852006C79}" srcOrd="1" destOrd="0" presId="urn:microsoft.com/office/officeart/2005/8/layout/orgChart1"/>
+    <dgm:cxn modelId="{A8AA4429-A62B-4E3A-9656-6A45E9603122}" type="presOf" srcId="{CB1F19A7-D312-40FF-9CF7-6BCA7B60554C}" destId="{91E08EDF-18BB-4F4C-A6CA-E9878E099671}" srcOrd="0" destOrd="0" presId="urn:microsoft.com/office/officeart/2005/8/layout/orgChart1"/>
+    <dgm:cxn modelId="{E7A3D02D-59A3-4A3F-9E78-17332673E5DC}" type="presOf" srcId="{2DA4F466-EE9C-4963-9539-C29C96763B8F}" destId="{4B1F0272-BF1A-4779-88BA-492E13DACC51}" srcOrd="0" destOrd="0" presId="urn:microsoft.com/office/officeart/2005/8/layout/orgChart1"/>
+    <dgm:cxn modelId="{76C86E35-6E02-402D-AD2F-840DBA787475}" type="presOf" srcId="{60508447-050E-47BB-8A3A-55E2E6BEC482}" destId="{25F1C600-4FF4-4426-8463-065F19B92D09}" srcOrd="0" destOrd="0" presId="urn:microsoft.com/office/officeart/2005/8/layout/orgChart1"/>
+    <dgm:cxn modelId="{63E0B337-A653-4373-B63B-CDC975C1E7CE}" type="presOf" srcId="{EA41A2E5-88E2-4D29-A39A-96D0D39F74BD}" destId="{4D17D909-039C-43C7-BB7E-AF66DD07EDD5}" srcOrd="0" destOrd="0" presId="urn:microsoft.com/office/officeart/2005/8/layout/orgChart1"/>
+    <dgm:cxn modelId="{9F649838-F637-4C3B-AC11-78F79DF1E990}" type="presOf" srcId="{2DA4F466-EE9C-4963-9539-C29C96763B8F}" destId="{84ACC0DD-1880-419C-8313-BD7DBD061486}" srcOrd="1" destOrd="0" presId="urn:microsoft.com/office/officeart/2005/8/layout/orgChart1"/>
+    <dgm:cxn modelId="{B24C933F-36EA-44BF-B838-A91705A2A7A7}" srcId="{2DA4F466-EE9C-4963-9539-C29C96763B8F}" destId="{83B8869F-1752-4F06-AC7E-AA2559AAF9CF}" srcOrd="2" destOrd="0" parTransId="{8A8BCA98-1470-4E49-84B4-1AEA587248F2}" sibTransId="{30330D62-B51F-4B47-9343-DD7ACF4354CB}"/>
+    <dgm:cxn modelId="{AC50CB64-30EF-41D1-8770-FA33C5F6F45F}" type="presOf" srcId="{667CE224-6671-41BF-9859-8297E611F61A}" destId="{4E350251-E89F-4B92-BEF0-97957B57F1A6}" srcOrd="0" destOrd="0" presId="urn:microsoft.com/office/officeart/2005/8/layout/orgChart1"/>
+    <dgm:cxn modelId="{7D92674F-2C6B-4AEA-8095-E8A7134AF822}" type="presOf" srcId="{83B8869F-1752-4F06-AC7E-AA2559AAF9CF}" destId="{44C7A7C0-95D0-4BFF-A1FB-EA3FAC629288}" srcOrd="0" destOrd="0" presId="urn:microsoft.com/office/officeart/2005/8/layout/orgChart1"/>
+    <dgm:cxn modelId="{35749D7B-E944-4610-B838-623FC0BE7640}" type="presOf" srcId="{32C335E0-B88A-45A4-BC05-91EBAB9FD28C}" destId="{E02CE35F-D62C-4755-B29E-7616747C1F83}" srcOrd="0" destOrd="0" presId="urn:microsoft.com/office/officeart/2005/8/layout/orgChart1"/>
+    <dgm:cxn modelId="{7C71B87B-8D8F-435A-A851-3D2153411D2D}" type="presOf" srcId="{32C335E0-B88A-45A4-BC05-91EBAB9FD28C}" destId="{B26B9216-49FD-4A2A-BB31-A206CD82B124}" srcOrd="1" destOrd="0" presId="urn:microsoft.com/office/officeart/2005/8/layout/orgChart1"/>
+    <dgm:cxn modelId="{6F3D938E-3AF4-4774-83C8-CB13725B47FC}" srcId="{EA41A2E5-88E2-4D29-A39A-96D0D39F74BD}" destId="{2DA4F466-EE9C-4963-9539-C29C96763B8F}" srcOrd="0" destOrd="0" parTransId="{AB4E8FAE-BDAC-437F-BBE6-D59931791227}" sibTransId="{D1CC015D-55A8-468D-A5D4-DF56DFDBFCBF}"/>
+    <dgm:cxn modelId="{D9ECF492-0C2F-482A-B78C-ACA3FC0D4F49}" type="presOf" srcId="{CB1F19A7-D312-40FF-9CF7-6BCA7B60554C}" destId="{B636EEA4-76C2-41E5-99FB-5C8F608B0226}" srcOrd="1" destOrd="0" presId="urn:microsoft.com/office/officeart/2005/8/layout/orgChart1"/>
+    <dgm:cxn modelId="{E8DB5BB1-FC5D-4B49-A88D-58C6451D71F7}" type="presOf" srcId="{8A8BCA98-1470-4E49-84B4-1AEA587248F2}" destId="{23B445D1-403E-401C-849E-DA7E490462F7}" srcOrd="0" destOrd="0" presId="urn:microsoft.com/office/officeart/2005/8/layout/orgChart1"/>
+    <dgm:cxn modelId="{024934BE-515D-4F31-A946-D576536BCF64}" srcId="{2DA4F466-EE9C-4963-9539-C29C96763B8F}" destId="{D3AEF5B0-9774-4F00-BB04-72C3611DFE76}" srcOrd="0" destOrd="0" parTransId="{B17EFD54-07EA-4E37-9DEA-79C5DAADAA51}" sibTransId="{80D9523B-9757-4FF8-80E3-955B340892EA}"/>
+    <dgm:cxn modelId="{07B005C0-D6D7-4D80-93FF-532ADAF3FBB1}" type="presOf" srcId="{B17EFD54-07EA-4E37-9DEA-79C5DAADAA51}" destId="{5556880F-3F88-416B-8FCA-71244B74F3D3}" srcOrd="0" destOrd="0" presId="urn:microsoft.com/office/officeart/2005/8/layout/orgChart1"/>
+    <dgm:cxn modelId="{DAAD2CD8-0D38-4CDD-A424-5FAEA66BDC1A}" srcId="{2DA4F466-EE9C-4963-9539-C29C96763B8F}" destId="{CB1F19A7-D312-40FF-9CF7-6BCA7B60554C}" srcOrd="3" destOrd="0" parTransId="{60508447-050E-47BB-8A3A-55E2E6BEC482}" sibTransId="{DFD8A7F3-D0BF-4BD0-8EC5-3344B9A1917F}"/>
+    <dgm:cxn modelId="{698737DC-4E96-4CF2-A8E0-79B8927CEDA7}" type="presOf" srcId="{D3AEF5B0-9774-4F00-BB04-72C3611DFE76}" destId="{4AB33A37-8968-451F-BDAF-6191A394821C}" srcOrd="0" destOrd="0" presId="urn:microsoft.com/office/officeart/2005/8/layout/orgChart1"/>
+    <dgm:cxn modelId="{F9F77DA9-6593-453C-8AB8-AF6CD1F303B1}" type="presParOf" srcId="{4D17D909-039C-43C7-BB7E-AF66DD07EDD5}" destId="{6B65A61B-22C0-4CB7-845E-F8ECC936BF2C}" srcOrd="0" destOrd="0" presId="urn:microsoft.com/office/officeart/2005/8/layout/orgChart1"/>
+    <dgm:cxn modelId="{89DF04FD-E040-4AB8-BD0E-F12BEBA938E3}" type="presParOf" srcId="{6B65A61B-22C0-4CB7-845E-F8ECC936BF2C}" destId="{5E07C6C5-A29E-4AE3-B9C8-836B1958E350}" srcOrd="0" destOrd="0" presId="urn:microsoft.com/office/officeart/2005/8/layout/orgChart1"/>
+    <dgm:cxn modelId="{764288BF-70E8-45B8-8C03-1562F25100F0}" type="presParOf" srcId="{5E07C6C5-A29E-4AE3-B9C8-836B1958E350}" destId="{4B1F0272-BF1A-4779-88BA-492E13DACC51}" srcOrd="0" destOrd="0" presId="urn:microsoft.com/office/officeart/2005/8/layout/orgChart1"/>
+    <dgm:cxn modelId="{7D706B7A-32F5-47A5-9AEA-AA594320B260}" type="presParOf" srcId="{5E07C6C5-A29E-4AE3-B9C8-836B1958E350}" destId="{84ACC0DD-1880-419C-8313-BD7DBD061486}" srcOrd="1" destOrd="0" presId="urn:microsoft.com/office/officeart/2005/8/layout/orgChart1"/>
+    <dgm:cxn modelId="{5666B44B-243F-4C0E-8CB6-5559BDDB9957}" type="presParOf" srcId="{6B65A61B-22C0-4CB7-845E-F8ECC936BF2C}" destId="{DD0A2324-4247-4CEE-A099-99F6F2941D0F}" srcOrd="1" destOrd="0" presId="urn:microsoft.com/office/officeart/2005/8/layout/orgChart1"/>
+    <dgm:cxn modelId="{EA651A5A-DB0A-49E5-A2AF-0D219BC55E04}" type="presParOf" srcId="{DD0A2324-4247-4CEE-A099-99F6F2941D0F}" destId="{4E350251-E89F-4B92-BEF0-97957B57F1A6}" srcOrd="0" destOrd="0" presId="urn:microsoft.com/office/officeart/2005/8/layout/orgChart1"/>
+    <dgm:cxn modelId="{E8FDBE5A-BC68-4D13-96D3-89B63C60F0DA}" type="presParOf" srcId="{DD0A2324-4247-4CEE-A099-99F6F2941D0F}" destId="{3F9F4CFD-D540-4C8C-B9CF-02B9D6C90312}" srcOrd="1" destOrd="0" presId="urn:microsoft.com/office/officeart/2005/8/layout/orgChart1"/>
+    <dgm:cxn modelId="{33DD10EF-41EB-4557-93AE-945AA51DCB67}" type="presParOf" srcId="{3F9F4CFD-D540-4C8C-B9CF-02B9D6C90312}" destId="{377D238A-9714-4EBE-88CB-E5CD7359CFCA}" srcOrd="0" destOrd="0" presId="urn:microsoft.com/office/officeart/2005/8/layout/orgChart1"/>
+    <dgm:cxn modelId="{D57D0E38-4749-4213-ACF0-9DBEFD84D2F3}" type="presParOf" srcId="{377D238A-9714-4EBE-88CB-E5CD7359CFCA}" destId="{E02CE35F-D62C-4755-B29E-7616747C1F83}" srcOrd="0" destOrd="0" presId="urn:microsoft.com/office/officeart/2005/8/layout/orgChart1"/>
+    <dgm:cxn modelId="{3BE62474-8C38-4D92-BF36-7DCF941871BE}" type="presParOf" srcId="{377D238A-9714-4EBE-88CB-E5CD7359CFCA}" destId="{B26B9216-49FD-4A2A-BB31-A206CD82B124}" srcOrd="1" destOrd="0" presId="urn:microsoft.com/office/officeart/2005/8/layout/orgChart1"/>
+    <dgm:cxn modelId="{D0E4B33E-398F-4ACE-8762-A61C3AEDBAB1}" type="presParOf" srcId="{3F9F4CFD-D540-4C8C-B9CF-02B9D6C90312}" destId="{C3F9498F-93B9-4DEC-AE76-1CD3E1286CB8}" srcOrd="1" destOrd="0" presId="urn:microsoft.com/office/officeart/2005/8/layout/orgChart1"/>
+    <dgm:cxn modelId="{B77507A4-39F2-4868-AD5B-82B12DEF6E0E}" type="presParOf" srcId="{3F9F4CFD-D540-4C8C-B9CF-02B9D6C90312}" destId="{8FDB5328-2B9D-41DA-BE2C-0A30BAF2A0E2}" srcOrd="2" destOrd="0" presId="urn:microsoft.com/office/officeart/2005/8/layout/orgChart1"/>
+    <dgm:cxn modelId="{012BEA51-197E-45C7-97D1-6C110E55AE05}" type="presParOf" srcId="{DD0A2324-4247-4CEE-A099-99F6F2941D0F}" destId="{23B445D1-403E-401C-849E-DA7E490462F7}" srcOrd="2" destOrd="0" presId="urn:microsoft.com/office/officeart/2005/8/layout/orgChart1"/>
+    <dgm:cxn modelId="{2EC1C811-4AA7-4417-99F5-65E6DEB3D9C8}" type="presParOf" srcId="{DD0A2324-4247-4CEE-A099-99F6F2941D0F}" destId="{A687A36C-8D76-490E-9915-B45EA02A226F}" srcOrd="3" destOrd="0" presId="urn:microsoft.com/office/officeart/2005/8/layout/orgChart1"/>
+    <dgm:cxn modelId="{E138761A-11E9-428D-95D8-F55F156AFB95}" type="presParOf" srcId="{A687A36C-8D76-490E-9915-B45EA02A226F}" destId="{5B70F29F-7374-4E1C-8D3B-581E8E7CC45C}" srcOrd="0" destOrd="0" presId="urn:microsoft.com/office/officeart/2005/8/layout/orgChart1"/>
+    <dgm:cxn modelId="{6DF74E53-BA88-41FF-AA60-FDBE1B585956}" type="presParOf" srcId="{5B70F29F-7374-4E1C-8D3B-581E8E7CC45C}" destId="{44C7A7C0-95D0-4BFF-A1FB-EA3FAC629288}" srcOrd="0" destOrd="0" presId="urn:microsoft.com/office/officeart/2005/8/layout/orgChart1"/>
+    <dgm:cxn modelId="{ED19EC84-8011-49D0-AACA-18ABAC351937}" type="presParOf" srcId="{5B70F29F-7374-4E1C-8D3B-581E8E7CC45C}" destId="{7149AEEA-A3E1-4709-9979-5BBC76EB4A6C}" srcOrd="1" destOrd="0" presId="urn:microsoft.com/office/officeart/2005/8/layout/orgChart1"/>
+    <dgm:cxn modelId="{6307CBD1-58F0-49A1-86AC-A6C841C6B68A}" type="presParOf" srcId="{A687A36C-8D76-490E-9915-B45EA02A226F}" destId="{3F61A6AA-DA64-4F1C-8605-555148801F2B}" srcOrd="1" destOrd="0" presId="urn:microsoft.com/office/officeart/2005/8/layout/orgChart1"/>
+    <dgm:cxn modelId="{5D26C87F-A2ED-4DFF-8A82-BB14FE4EC35A}" type="presParOf" srcId="{A687A36C-8D76-490E-9915-B45EA02A226F}" destId="{16539471-95C6-4E9B-BA19-63BF6B36DD3C}" srcOrd="2" destOrd="0" presId="urn:microsoft.com/office/officeart/2005/8/layout/orgChart1"/>
+    <dgm:cxn modelId="{DD55C747-B25A-4890-B1F1-6512E63DD2B1}" type="presParOf" srcId="{DD0A2324-4247-4CEE-A099-99F6F2941D0F}" destId="{25F1C600-4FF4-4426-8463-065F19B92D09}" srcOrd="4" destOrd="0" presId="urn:microsoft.com/office/officeart/2005/8/layout/orgChart1"/>
+    <dgm:cxn modelId="{6A582B93-13D9-4659-AAD3-D90D2731925C}" type="presParOf" srcId="{DD0A2324-4247-4CEE-A099-99F6F2941D0F}" destId="{3B33800A-E0A8-4913-A6A1-EB3EAF658AC6}" srcOrd="5" destOrd="0" presId="urn:microsoft.com/office/officeart/2005/8/layout/orgChart1"/>
+    <dgm:cxn modelId="{1FE182EE-00FE-4C2C-BB83-5BBF8556B1CC}" type="presParOf" srcId="{3B33800A-E0A8-4913-A6A1-EB3EAF658AC6}" destId="{8B056BE7-9954-4602-8BCF-35A9278B7C18}" srcOrd="0" destOrd="0" presId="urn:microsoft.com/office/officeart/2005/8/layout/orgChart1"/>
+    <dgm:cxn modelId="{C58F06BF-C7DA-4D69-AAAC-FEC582B4CF44}" type="presParOf" srcId="{8B056BE7-9954-4602-8BCF-35A9278B7C18}" destId="{91E08EDF-18BB-4F4C-A6CA-E9878E099671}" srcOrd="0" destOrd="0" presId="urn:microsoft.com/office/officeart/2005/8/layout/orgChart1"/>
+    <dgm:cxn modelId="{F08416E4-8754-4D15-AF7B-897516440FF2}" type="presParOf" srcId="{8B056BE7-9954-4602-8BCF-35A9278B7C18}" destId="{B636EEA4-76C2-41E5-99FB-5C8F608B0226}" srcOrd="1" destOrd="0" presId="urn:microsoft.com/office/officeart/2005/8/layout/orgChart1"/>
+    <dgm:cxn modelId="{D99D239F-E6DF-4996-B497-3BFD70656EB5}" type="presParOf" srcId="{3B33800A-E0A8-4913-A6A1-EB3EAF658AC6}" destId="{1A81D720-FC8E-452C-804B-C3386D6AF657}" srcOrd="1" destOrd="0" presId="urn:microsoft.com/office/officeart/2005/8/layout/orgChart1"/>
+    <dgm:cxn modelId="{0A9FC0B9-CBB1-4262-9C74-0F52212B8011}" type="presParOf" srcId="{3B33800A-E0A8-4913-A6A1-EB3EAF658AC6}" destId="{CA89DF1B-127D-4FC9-BC57-B37F70C76D2E}" srcOrd="2" destOrd="0" presId="urn:microsoft.com/office/officeart/2005/8/layout/orgChart1"/>
+    <dgm:cxn modelId="{F1D8A251-C958-49CC-9F06-4F8F4A88DF23}" type="presParOf" srcId="{6B65A61B-22C0-4CB7-845E-F8ECC936BF2C}" destId="{5804E76D-0C51-4F8A-91B1-036257C65DC2}" srcOrd="2" destOrd="0" presId="urn:microsoft.com/office/officeart/2005/8/layout/orgChart1"/>
+    <dgm:cxn modelId="{35A99BAA-1057-4EAA-86FE-9B52C6AF1C4D}" type="presParOf" srcId="{5804E76D-0C51-4F8A-91B1-036257C65DC2}" destId="{5556880F-3F88-416B-8FCA-71244B74F3D3}" srcOrd="0" destOrd="0" presId="urn:microsoft.com/office/officeart/2005/8/layout/orgChart1"/>
+    <dgm:cxn modelId="{B03DC0A0-BFE4-4492-8CB6-1A2384D18168}" type="presParOf" srcId="{5804E76D-0C51-4F8A-91B1-036257C65DC2}" destId="{D35F20FD-BB29-4F66-B97F-CBA74F393E93}" srcOrd="1" destOrd="0" presId="urn:microsoft.com/office/officeart/2005/8/layout/orgChart1"/>
+    <dgm:cxn modelId="{1295826D-F1F1-4BA2-801B-4B870FBF5CE9}" type="presParOf" srcId="{D35F20FD-BB29-4F66-B97F-CBA74F393E93}" destId="{7C430DB2-4CF8-4495-B28F-CD3B97802989}" srcOrd="0" destOrd="0" presId="urn:microsoft.com/office/officeart/2005/8/layout/orgChart1"/>
+    <dgm:cxn modelId="{9C06F7F5-5B35-4BA8-A3A9-84CA05294FD4}" type="presParOf" srcId="{7C430DB2-4CF8-4495-B28F-CD3B97802989}" destId="{4AB33A37-8968-451F-BDAF-6191A394821C}" srcOrd="0" destOrd="0" presId="urn:microsoft.com/office/officeart/2005/8/layout/orgChart1"/>
+    <dgm:cxn modelId="{97243748-C503-4262-B842-2C35BBD4E943}" type="presParOf" srcId="{7C430DB2-4CF8-4495-B28F-CD3B97802989}" destId="{B91E63A5-0A30-4048-A83E-1C7852006C79}" srcOrd="1" destOrd="0" presId="urn:microsoft.com/office/officeart/2005/8/layout/orgChart1"/>
+    <dgm:cxn modelId="{6F1E9DA8-6733-4042-BAB7-9BE63BD2A7E8}" type="presParOf" srcId="{D35F20FD-BB29-4F66-B97F-CBA74F393E93}" destId="{C7F059E7-D6E3-4FA9-A516-866CCF92243D}" srcOrd="1" destOrd="0" presId="urn:microsoft.com/office/officeart/2005/8/layout/orgChart1"/>
+    <dgm:cxn modelId="{C04CC9F0-1234-46FD-9D14-17A30634255A}" type="presParOf" srcId="{D35F20FD-BB29-4F66-B97F-CBA74F393E93}" destId="{2FFC3E57-F9D1-47D4-9494-A8B155DE7FF6}" srcOrd="2" destOrd="0" presId="urn:microsoft.com/office/officeart/2005/8/layout/orgChart1"/>
   </dgm:cxnLst>
   <dgm:bg/>
   <dgm:whole/>
@@ -2241,8 +2260,8 @@
 <file path=ppt/diagrams/data2.xml><?xml version="1.0" encoding="utf-8"?>
 <dgm:dataModel xmlns:dgm="http://schemas.openxmlformats.org/drawingml/2006/diagram" xmlns:a="http://schemas.openxmlformats.org/drawingml/2006/main">
   <dgm:ptLst>
-    <dgm:pt modelId="{7B673B5A-5318-4934-BBDF-29EDBA62B40B}" type="doc">
-      <dgm:prSet loTypeId="urn:microsoft.com/office/officeart/2005/8/layout/cycle3" loCatId="cycle" qsTypeId="urn:microsoft.com/office/officeart/2005/8/quickstyle/3d9" qsCatId="3D" csTypeId="urn:microsoft.com/office/officeart/2005/8/colors/accent1_2" csCatId="accent1" phldr="1"/>
+    <dgm:pt modelId="{50AD22D8-3616-4E38-96E3-5477574F3B96}" type="doc">
+      <dgm:prSet loTypeId="urn:microsoft.com/office/officeart/2005/8/layout/cycle2" loCatId="cycle" qsTypeId="urn:microsoft.com/office/officeart/2005/8/quickstyle/3d9" qsCatId="3D" csTypeId="urn:microsoft.com/office/officeart/2005/8/colors/accent1_2" csCatId="accent1" phldr="1"/>
       <dgm:spPr/>
       <dgm:t>
         <a:bodyPr/>
@@ -2252,22 +2271,25 @@
         </a:p>
       </dgm:t>
     </dgm:pt>
-    <dgm:pt modelId="{0279EC57-505A-4A78-8CDC-831526E9E5E5}">
-      <dgm:prSet phldrT="[Text]" custT="1"/>
+    <dgm:pt modelId="{95D7F460-46F6-48BD-8EE6-B2E8A12901B3}">
+      <dgm:prSet phldrT="[Text]"/>
       <dgm:spPr/>
       <dgm:t>
         <a:bodyPr/>
         <a:lstStyle/>
         <a:p>
+          <a:pPr>
+            <a:buNone/>
+          </a:pPr>
           <a:r>
-            <a:rPr lang="id-ID" sz="2400" b="1" i="0"/>
-            <a:t>PROSPEK</a:t>
+            <a:rPr lang="id-ID" b="1" i="0" dirty="0"/>
+            <a:t>Prospek</a:t>
           </a:r>
-          <a:endParaRPr lang="id-ID" sz="2400" dirty="0"/>
+          <a:endParaRPr lang="id-ID" dirty="0"/>
         </a:p>
       </dgm:t>
     </dgm:pt>
-    <dgm:pt modelId="{9450DDB3-9E81-45EC-B2C7-04C3B83EE90A}" type="parTrans" cxnId="{2BD10EF5-EED4-4B3C-869A-699C28B0C076}">
+    <dgm:pt modelId="{0ABA4E42-D692-42C0-99C6-7DFB98BEA66B}" type="parTrans" cxnId="{2056F60D-8A24-47E5-BA0B-321520C5632B}">
       <dgm:prSet/>
       <dgm:spPr/>
       <dgm:t>
@@ -2278,7 +2300,7 @@
         </a:p>
       </dgm:t>
     </dgm:pt>
-    <dgm:pt modelId="{6182E585-79FB-42C0-AC32-65971541177F}" type="sibTrans" cxnId="{2BD10EF5-EED4-4B3C-869A-699C28B0C076}">
+    <dgm:pt modelId="{4236E39F-D901-4259-9412-DCB5548348C0}" type="sibTrans" cxnId="{2056F60D-8A24-47E5-BA0B-321520C5632B}">
       <dgm:prSet/>
       <dgm:spPr/>
       <dgm:t>
@@ -2289,22 +2311,25 @@
         </a:p>
       </dgm:t>
     </dgm:pt>
-    <dgm:pt modelId="{8C3A2B73-526D-4A35-A7AA-25549FAFE834}">
-      <dgm:prSet phldrT="[Text]" custT="1"/>
+    <dgm:pt modelId="{FA796511-CCB5-40B2-8114-458028458783}">
+      <dgm:prSet phldrT="[Text]"/>
       <dgm:spPr/>
       <dgm:t>
         <a:bodyPr/>
         <a:lstStyle/>
         <a:p>
+          <a:pPr>
+            <a:buNone/>
+          </a:pPr>
           <a:r>
-            <a:rPr lang="id-ID" sz="2400" b="1" i="0" dirty="0"/>
-            <a:t>PENAWARAN</a:t>
+            <a:rPr lang="id-ID" b="1" i="0" dirty="0"/>
+            <a:t>Penawaran</a:t>
           </a:r>
-          <a:endParaRPr lang="id-ID" sz="2400" dirty="0"/>
+          <a:endParaRPr lang="id-ID" dirty="0"/>
         </a:p>
       </dgm:t>
     </dgm:pt>
-    <dgm:pt modelId="{8D5328AB-D8D1-48AA-8B46-B6C2321D87C2}" type="parTrans" cxnId="{FFF4A094-2B15-426C-97BB-FE263ADE6EC1}">
+    <dgm:pt modelId="{EEC1F73A-FB57-4E58-B28F-619EBC8AD7AF}" type="parTrans" cxnId="{6CD5AC8B-F40C-4B1A-BBE8-E56137B722D8}">
       <dgm:prSet/>
       <dgm:spPr/>
       <dgm:t>
@@ -2315,7 +2340,7 @@
         </a:p>
       </dgm:t>
     </dgm:pt>
-    <dgm:pt modelId="{5A8DA660-0894-4EED-9002-19A3B4A360BF}" type="sibTrans" cxnId="{FFF4A094-2B15-426C-97BB-FE263ADE6EC1}">
+    <dgm:pt modelId="{C750B9B4-BF58-4135-91E3-890565796D34}" type="sibTrans" cxnId="{6CD5AC8B-F40C-4B1A-BBE8-E56137B722D8}">
       <dgm:prSet/>
       <dgm:spPr/>
       <dgm:t>
@@ -2326,22 +2351,25 @@
         </a:p>
       </dgm:t>
     </dgm:pt>
-    <dgm:pt modelId="{FBEF7D98-DC60-4618-8477-059471C7B9E2}">
-      <dgm:prSet phldrT="[Text]" custT="1"/>
+    <dgm:pt modelId="{B076759B-D3B0-47D9-81EB-3288F05188CF}">
+      <dgm:prSet phldrT="[Text]"/>
       <dgm:spPr/>
       <dgm:t>
         <a:bodyPr/>
         <a:lstStyle/>
         <a:p>
+          <a:pPr>
+            <a:buNone/>
+          </a:pPr>
           <a:r>
-            <a:rPr lang="id-ID" sz="2400" b="1" i="0" dirty="0"/>
-            <a:t>NEGOSIASI</a:t>
+            <a:rPr lang="id-ID" b="1" i="0" dirty="0"/>
+            <a:t>Negosiasi</a:t>
           </a:r>
-          <a:endParaRPr lang="id-ID" sz="2400" dirty="0"/>
+          <a:endParaRPr lang="id-ID" dirty="0"/>
         </a:p>
       </dgm:t>
     </dgm:pt>
-    <dgm:pt modelId="{984C3053-00EC-4AFB-9975-4D20338E96B5}" type="parTrans" cxnId="{FF286B07-8C51-4B06-9313-44C639B546FF}">
+    <dgm:pt modelId="{0507D515-D2EC-4A1A-8033-D31532D14EAE}" type="parTrans" cxnId="{941361E5-1CE2-49F9-80EE-321B9AA0CB0C}">
       <dgm:prSet/>
       <dgm:spPr/>
       <dgm:t>
@@ -2352,7 +2380,7 @@
         </a:p>
       </dgm:t>
     </dgm:pt>
-    <dgm:pt modelId="{155D0379-AF8C-4B51-AF0D-D91BE09C1485}" type="sibTrans" cxnId="{FF286B07-8C51-4B06-9313-44C639B546FF}">
+    <dgm:pt modelId="{794F6A75-4831-48CB-8F3E-C8E7DEFB3A13}" type="sibTrans" cxnId="{941361E5-1CE2-49F9-80EE-321B9AA0CB0C}">
       <dgm:prSet/>
       <dgm:spPr/>
       <dgm:t>
@@ -2363,22 +2391,25 @@
         </a:p>
       </dgm:t>
     </dgm:pt>
-    <dgm:pt modelId="{C43ADD35-F5E9-47C8-87DE-FB44EFEA3155}">
-      <dgm:prSet phldrT="[Text]" custT="1"/>
+    <dgm:pt modelId="{D4A326C8-B7F2-48C0-8A52-4D4FEA626BC5}">
+      <dgm:prSet phldrT="[Text]"/>
       <dgm:spPr/>
       <dgm:t>
         <a:bodyPr/>
         <a:lstStyle/>
         <a:p>
+          <a:pPr>
+            <a:buNone/>
+          </a:pPr>
           <a:r>
-            <a:rPr lang="id-ID" sz="2400" b="1" i="0" dirty="0"/>
-            <a:t>DEAL</a:t>
+            <a:rPr lang="id-ID" b="1" i="0" dirty="0"/>
+            <a:t>Deal</a:t>
           </a:r>
-          <a:endParaRPr lang="id-ID" sz="2400" dirty="0"/>
+          <a:endParaRPr lang="id-ID" dirty="0"/>
         </a:p>
       </dgm:t>
     </dgm:pt>
-    <dgm:pt modelId="{BF6BD47F-3C82-4C2B-895D-923236596B94}" type="parTrans" cxnId="{3AD25FEE-9CBA-4261-A9AC-8A9AA0034DF2}">
+    <dgm:pt modelId="{89E94D69-1A1B-4097-8305-02C88CA7D05D}" type="parTrans" cxnId="{21529DC6-DDC7-4128-A551-C566ABC1781E}">
       <dgm:prSet/>
       <dgm:spPr/>
       <dgm:t>
@@ -2389,7 +2420,7 @@
         </a:p>
       </dgm:t>
     </dgm:pt>
-    <dgm:pt modelId="{9914AB74-DFEE-44A7-9BD6-50EAE4ABCDBE}" type="sibTrans" cxnId="{3AD25FEE-9CBA-4261-A9AC-8A9AA0034DF2}">
+    <dgm:pt modelId="{5611B919-0FF5-484E-85EA-C03760D6F5AD}" type="sibTrans" cxnId="{21529DC6-DDC7-4128-A551-C566ABC1781E}">
       <dgm:prSet/>
       <dgm:spPr/>
       <dgm:t>
@@ -2400,8 +2431,8 @@
         </a:p>
       </dgm:t>
     </dgm:pt>
-    <dgm:pt modelId="{3CE1D113-7D9F-4A5A-B042-73A2CA894B9C}" type="pres">
-      <dgm:prSet presAssocID="{7B673B5A-5318-4934-BBDF-29EDBA62B40B}" presName="Name0" presStyleCnt="0">
+    <dgm:pt modelId="{69A3F112-B972-4EEE-A108-22F1E87E64A2}" type="pres">
+      <dgm:prSet presAssocID="{50AD22D8-3616-4E38-96E3-5477574F3B96}" presName="cycle" presStyleCnt="0">
         <dgm:presLayoutVars>
           <dgm:dir/>
           <dgm:resizeHandles val="exact"/>
@@ -2409,64 +2440,101 @@
       </dgm:prSet>
       <dgm:spPr/>
     </dgm:pt>
-    <dgm:pt modelId="{98E1748C-D93F-44E9-8765-7ED3EF4451F9}" type="pres">
-      <dgm:prSet presAssocID="{7B673B5A-5318-4934-BBDF-29EDBA62B40B}" presName="cycle" presStyleCnt="0"/>
-      <dgm:spPr/>
-    </dgm:pt>
-    <dgm:pt modelId="{8A0353CC-C72B-40FE-908C-D2499F68FCF3}" type="pres">
-      <dgm:prSet presAssocID="{0279EC57-505A-4A78-8CDC-831526E9E5E5}" presName="nodeFirstNode" presStyleLbl="node1" presStyleIdx="0" presStyleCnt="4">
+    <dgm:pt modelId="{EAAAD7C4-03E2-4C9D-95A7-7B871B5E81F5}" type="pres">
+      <dgm:prSet presAssocID="{95D7F460-46F6-48BD-8EE6-B2E8A12901B3}" presName="node" presStyleLbl="node1" presStyleIdx="0" presStyleCnt="4">
         <dgm:presLayoutVars>
           <dgm:bulletEnabled val="1"/>
         </dgm:presLayoutVars>
       </dgm:prSet>
       <dgm:spPr/>
     </dgm:pt>
-    <dgm:pt modelId="{1F95FA60-AE41-4C92-8499-F576586D710A}" type="pres">
-      <dgm:prSet presAssocID="{6182E585-79FB-42C0-AC32-65971541177F}" presName="sibTransFirstNode" presStyleLbl="bgShp" presStyleIdx="0" presStyleCnt="1"/>
+    <dgm:pt modelId="{CDF85A18-49E0-4103-9489-60B2351C1683}" type="pres">
+      <dgm:prSet presAssocID="{4236E39F-D901-4259-9412-DCB5548348C0}" presName="sibTrans" presStyleLbl="sibTrans2D1" presStyleIdx="0" presStyleCnt="4"/>
       <dgm:spPr/>
     </dgm:pt>
-    <dgm:pt modelId="{62174D5B-66F9-48CA-90B6-51A6A15A8368}" type="pres">
-      <dgm:prSet presAssocID="{8C3A2B73-526D-4A35-A7AA-25549FAFE834}" presName="nodeFollowingNodes" presStyleLbl="node1" presStyleIdx="1" presStyleCnt="4">
+    <dgm:pt modelId="{2D9E3984-BA4F-4510-9BED-7B67F9CBA361}" type="pres">
+      <dgm:prSet presAssocID="{4236E39F-D901-4259-9412-DCB5548348C0}" presName="connectorText" presStyleLbl="sibTrans2D1" presStyleIdx="0" presStyleCnt="4"/>
+      <dgm:spPr/>
+    </dgm:pt>
+    <dgm:pt modelId="{67308124-F5EE-46B2-BCA4-3527CFE2A501}" type="pres">
+      <dgm:prSet presAssocID="{FA796511-CCB5-40B2-8114-458028458783}" presName="node" presStyleLbl="node1" presStyleIdx="1" presStyleCnt="4">
         <dgm:presLayoutVars>
           <dgm:bulletEnabled val="1"/>
         </dgm:presLayoutVars>
       </dgm:prSet>
       <dgm:spPr/>
     </dgm:pt>
-    <dgm:pt modelId="{5B5F3E72-C8C8-46A7-8749-34F4EB968170}" type="pres">
-      <dgm:prSet presAssocID="{FBEF7D98-DC60-4618-8477-059471C7B9E2}" presName="nodeFollowingNodes" presStyleLbl="node1" presStyleIdx="2" presStyleCnt="4">
+    <dgm:pt modelId="{67CC3EA2-82BF-487B-89AE-936C86DE084E}" type="pres">
+      <dgm:prSet presAssocID="{C750B9B4-BF58-4135-91E3-890565796D34}" presName="sibTrans" presStyleLbl="sibTrans2D1" presStyleIdx="1" presStyleCnt="4"/>
+      <dgm:spPr/>
+    </dgm:pt>
+    <dgm:pt modelId="{62DC38B3-AC76-408E-AA3F-20DCC44C7997}" type="pres">
+      <dgm:prSet presAssocID="{C750B9B4-BF58-4135-91E3-890565796D34}" presName="connectorText" presStyleLbl="sibTrans2D1" presStyleIdx="1" presStyleCnt="4"/>
+      <dgm:spPr/>
+    </dgm:pt>
+    <dgm:pt modelId="{9131C37D-B921-4D6E-8F9A-EC44BE7C792E}" type="pres">
+      <dgm:prSet presAssocID="{B076759B-D3B0-47D9-81EB-3288F05188CF}" presName="node" presStyleLbl="node1" presStyleIdx="2" presStyleCnt="4">
         <dgm:presLayoutVars>
           <dgm:bulletEnabled val="1"/>
         </dgm:presLayoutVars>
       </dgm:prSet>
       <dgm:spPr/>
     </dgm:pt>
-    <dgm:pt modelId="{81BD5BF2-0A03-4E3C-9088-4B124F76B357}" type="pres">
-      <dgm:prSet presAssocID="{C43ADD35-F5E9-47C8-87DE-FB44EFEA3155}" presName="nodeFollowingNodes" presStyleLbl="node1" presStyleIdx="3" presStyleCnt="4">
+    <dgm:pt modelId="{C65104E5-0018-4EEB-A9D8-81C06F8E0AFD}" type="pres">
+      <dgm:prSet presAssocID="{794F6A75-4831-48CB-8F3E-C8E7DEFB3A13}" presName="sibTrans" presStyleLbl="sibTrans2D1" presStyleIdx="2" presStyleCnt="4"/>
+      <dgm:spPr/>
+    </dgm:pt>
+    <dgm:pt modelId="{3CEEEE76-0F59-445D-B76D-18CEE8B9F6D1}" type="pres">
+      <dgm:prSet presAssocID="{794F6A75-4831-48CB-8F3E-C8E7DEFB3A13}" presName="connectorText" presStyleLbl="sibTrans2D1" presStyleIdx="2" presStyleCnt="4"/>
+      <dgm:spPr/>
+    </dgm:pt>
+    <dgm:pt modelId="{3868C6B5-6E70-4AB9-91DF-B475DC572BC9}" type="pres">
+      <dgm:prSet presAssocID="{D4A326C8-B7F2-48C0-8A52-4D4FEA626BC5}" presName="node" presStyleLbl="node1" presStyleIdx="3" presStyleCnt="4">
         <dgm:presLayoutVars>
           <dgm:bulletEnabled val="1"/>
         </dgm:presLayoutVars>
       </dgm:prSet>
       <dgm:spPr/>
     </dgm:pt>
+    <dgm:pt modelId="{2ABB50DD-D854-43FE-883D-0B801DB34FD6}" type="pres">
+      <dgm:prSet presAssocID="{5611B919-0FF5-484E-85EA-C03760D6F5AD}" presName="sibTrans" presStyleLbl="sibTrans2D1" presStyleIdx="3" presStyleCnt="4"/>
+      <dgm:spPr/>
+    </dgm:pt>
+    <dgm:pt modelId="{C3ACCE8C-76FA-4A09-B135-32F778FF51F7}" type="pres">
+      <dgm:prSet presAssocID="{5611B919-0FF5-484E-85EA-C03760D6F5AD}" presName="connectorText" presStyleLbl="sibTrans2D1" presStyleIdx="3" presStyleCnt="4"/>
+      <dgm:spPr/>
+    </dgm:pt>
   </dgm:ptLst>
   <dgm:cxnLst>
-    <dgm:cxn modelId="{FF286B07-8C51-4B06-9313-44C639B546FF}" srcId="{7B673B5A-5318-4934-BBDF-29EDBA62B40B}" destId="{FBEF7D98-DC60-4618-8477-059471C7B9E2}" srcOrd="2" destOrd="0" parTransId="{984C3053-00EC-4AFB-9975-4D20338E96B5}" sibTransId="{155D0379-AF8C-4B51-AF0D-D91BE09C1485}"/>
-    <dgm:cxn modelId="{DEA4B620-6667-4156-A7FB-6E8A62DE742B}" type="presOf" srcId="{8C3A2B73-526D-4A35-A7AA-25549FAFE834}" destId="{62174D5B-66F9-48CA-90B6-51A6A15A8368}" srcOrd="0" destOrd="0" presId="urn:microsoft.com/office/officeart/2005/8/layout/cycle3"/>
-    <dgm:cxn modelId="{4DA06738-A030-4721-8095-BF5D679547B9}" type="presOf" srcId="{C43ADD35-F5E9-47C8-87DE-FB44EFEA3155}" destId="{81BD5BF2-0A03-4E3C-9088-4B124F76B357}" srcOrd="0" destOrd="0" presId="urn:microsoft.com/office/officeart/2005/8/layout/cycle3"/>
-    <dgm:cxn modelId="{2E7D983F-8016-483A-A4F2-35740E09BCC7}" type="presOf" srcId="{FBEF7D98-DC60-4618-8477-059471C7B9E2}" destId="{5B5F3E72-C8C8-46A7-8749-34F4EB968170}" srcOrd="0" destOrd="0" presId="urn:microsoft.com/office/officeart/2005/8/layout/cycle3"/>
-    <dgm:cxn modelId="{3F92F64E-64FA-49A5-96FC-02C6577919F1}" type="presOf" srcId="{0279EC57-505A-4A78-8CDC-831526E9E5E5}" destId="{8A0353CC-C72B-40FE-908C-D2499F68FCF3}" srcOrd="0" destOrd="0" presId="urn:microsoft.com/office/officeart/2005/8/layout/cycle3"/>
-    <dgm:cxn modelId="{8A4E9576-2D7B-4D1C-94D1-210ABD62238D}" type="presOf" srcId="{7B673B5A-5318-4934-BBDF-29EDBA62B40B}" destId="{3CE1D113-7D9F-4A5A-B042-73A2CA894B9C}" srcOrd="0" destOrd="0" presId="urn:microsoft.com/office/officeart/2005/8/layout/cycle3"/>
-    <dgm:cxn modelId="{FFF4A094-2B15-426C-97BB-FE263ADE6EC1}" srcId="{7B673B5A-5318-4934-BBDF-29EDBA62B40B}" destId="{8C3A2B73-526D-4A35-A7AA-25549FAFE834}" srcOrd="1" destOrd="0" parTransId="{8D5328AB-D8D1-48AA-8B46-B6C2321D87C2}" sibTransId="{5A8DA660-0894-4EED-9002-19A3B4A360BF}"/>
-    <dgm:cxn modelId="{3AD25FEE-9CBA-4261-A9AC-8A9AA0034DF2}" srcId="{7B673B5A-5318-4934-BBDF-29EDBA62B40B}" destId="{C43ADD35-F5E9-47C8-87DE-FB44EFEA3155}" srcOrd="3" destOrd="0" parTransId="{BF6BD47F-3C82-4C2B-895D-923236596B94}" sibTransId="{9914AB74-DFEE-44A7-9BD6-50EAE4ABCDBE}"/>
-    <dgm:cxn modelId="{2BD10EF5-EED4-4B3C-869A-699C28B0C076}" srcId="{7B673B5A-5318-4934-BBDF-29EDBA62B40B}" destId="{0279EC57-505A-4A78-8CDC-831526E9E5E5}" srcOrd="0" destOrd="0" parTransId="{9450DDB3-9E81-45EC-B2C7-04C3B83EE90A}" sibTransId="{6182E585-79FB-42C0-AC32-65971541177F}"/>
-    <dgm:cxn modelId="{F05C40FE-C093-4D69-A088-65E5A82F964E}" type="presOf" srcId="{6182E585-79FB-42C0-AC32-65971541177F}" destId="{1F95FA60-AE41-4C92-8499-F576586D710A}" srcOrd="0" destOrd="0" presId="urn:microsoft.com/office/officeart/2005/8/layout/cycle3"/>
-    <dgm:cxn modelId="{1F1ED611-CDC3-4E64-8FD5-37EEC27DC97C}" type="presParOf" srcId="{3CE1D113-7D9F-4A5A-B042-73A2CA894B9C}" destId="{98E1748C-D93F-44E9-8765-7ED3EF4451F9}" srcOrd="0" destOrd="0" presId="urn:microsoft.com/office/officeart/2005/8/layout/cycle3"/>
-    <dgm:cxn modelId="{6DC5674D-003C-4E24-8F55-03E3C30F9175}" type="presParOf" srcId="{98E1748C-D93F-44E9-8765-7ED3EF4451F9}" destId="{8A0353CC-C72B-40FE-908C-D2499F68FCF3}" srcOrd="0" destOrd="0" presId="urn:microsoft.com/office/officeart/2005/8/layout/cycle3"/>
-    <dgm:cxn modelId="{E4AC9C80-7F75-4357-A328-4A11136E67CE}" type="presParOf" srcId="{98E1748C-D93F-44E9-8765-7ED3EF4451F9}" destId="{1F95FA60-AE41-4C92-8499-F576586D710A}" srcOrd="1" destOrd="0" presId="urn:microsoft.com/office/officeart/2005/8/layout/cycle3"/>
-    <dgm:cxn modelId="{45EC379E-4A11-4180-9118-DE885B67EFF1}" type="presParOf" srcId="{98E1748C-D93F-44E9-8765-7ED3EF4451F9}" destId="{62174D5B-66F9-48CA-90B6-51A6A15A8368}" srcOrd="2" destOrd="0" presId="urn:microsoft.com/office/officeart/2005/8/layout/cycle3"/>
-    <dgm:cxn modelId="{CB808184-A306-4975-A6F4-0D3E3DA1E98D}" type="presParOf" srcId="{98E1748C-D93F-44E9-8765-7ED3EF4451F9}" destId="{5B5F3E72-C8C8-46A7-8749-34F4EB968170}" srcOrd="3" destOrd="0" presId="urn:microsoft.com/office/officeart/2005/8/layout/cycle3"/>
-    <dgm:cxn modelId="{121AB967-EA8B-4790-BB6D-EA815A08CB39}" type="presParOf" srcId="{98E1748C-D93F-44E9-8765-7ED3EF4451F9}" destId="{81BD5BF2-0A03-4E3C-9088-4B124F76B357}" srcOrd="4" destOrd="0" presId="urn:microsoft.com/office/officeart/2005/8/layout/cycle3"/>
+    <dgm:cxn modelId="{850EB203-991B-4F85-924B-C7D32C071BC2}" type="presOf" srcId="{794F6A75-4831-48CB-8F3E-C8E7DEFB3A13}" destId="{3CEEEE76-0F59-445D-B76D-18CEE8B9F6D1}" srcOrd="1" destOrd="0" presId="urn:microsoft.com/office/officeart/2005/8/layout/cycle2"/>
+    <dgm:cxn modelId="{2056F60D-8A24-47E5-BA0B-321520C5632B}" srcId="{50AD22D8-3616-4E38-96E3-5477574F3B96}" destId="{95D7F460-46F6-48BD-8EE6-B2E8A12901B3}" srcOrd="0" destOrd="0" parTransId="{0ABA4E42-D692-42C0-99C6-7DFB98BEA66B}" sibTransId="{4236E39F-D901-4259-9412-DCB5548348C0}"/>
+    <dgm:cxn modelId="{353B101E-E8F8-4234-A04C-FDF91C2172C9}" type="presOf" srcId="{5611B919-0FF5-484E-85EA-C03760D6F5AD}" destId="{2ABB50DD-D854-43FE-883D-0B801DB34FD6}" srcOrd="0" destOrd="0" presId="urn:microsoft.com/office/officeart/2005/8/layout/cycle2"/>
+    <dgm:cxn modelId="{F6978D2B-FDAD-4AD4-BA7E-87C7474C384B}" type="presOf" srcId="{D4A326C8-B7F2-48C0-8A52-4D4FEA626BC5}" destId="{3868C6B5-6E70-4AB9-91DF-B475DC572BC9}" srcOrd="0" destOrd="0" presId="urn:microsoft.com/office/officeart/2005/8/layout/cycle2"/>
+    <dgm:cxn modelId="{0B382031-05E7-42D3-8E14-2DFA5B82D9AD}" type="presOf" srcId="{50AD22D8-3616-4E38-96E3-5477574F3B96}" destId="{69A3F112-B972-4EEE-A108-22F1E87E64A2}" srcOrd="0" destOrd="0" presId="urn:microsoft.com/office/officeart/2005/8/layout/cycle2"/>
+    <dgm:cxn modelId="{0ED69834-BEF9-478E-8248-02BADE5BA7E8}" type="presOf" srcId="{95D7F460-46F6-48BD-8EE6-B2E8A12901B3}" destId="{EAAAD7C4-03E2-4C9D-95A7-7B871B5E81F5}" srcOrd="0" destOrd="0" presId="urn:microsoft.com/office/officeart/2005/8/layout/cycle2"/>
+    <dgm:cxn modelId="{65F2C741-5E68-40BB-89A4-BDE61178ACBD}" type="presOf" srcId="{FA796511-CCB5-40B2-8114-458028458783}" destId="{67308124-F5EE-46B2-BCA4-3527CFE2A501}" srcOrd="0" destOrd="0" presId="urn:microsoft.com/office/officeart/2005/8/layout/cycle2"/>
+    <dgm:cxn modelId="{83556463-053A-4ADA-B695-9822695A5523}" type="presOf" srcId="{5611B919-0FF5-484E-85EA-C03760D6F5AD}" destId="{C3ACCE8C-76FA-4A09-B135-32F778FF51F7}" srcOrd="1" destOrd="0" presId="urn:microsoft.com/office/officeart/2005/8/layout/cycle2"/>
+    <dgm:cxn modelId="{0742C846-4449-4229-BBF0-3644F7FE7D44}" type="presOf" srcId="{4236E39F-D901-4259-9412-DCB5548348C0}" destId="{CDF85A18-49E0-4103-9489-60B2351C1683}" srcOrd="0" destOrd="0" presId="urn:microsoft.com/office/officeart/2005/8/layout/cycle2"/>
+    <dgm:cxn modelId="{FAB1FA49-D420-4868-BFDA-96678CDDD132}" type="presOf" srcId="{C750B9B4-BF58-4135-91E3-890565796D34}" destId="{62DC38B3-AC76-408E-AA3F-20DCC44C7997}" srcOrd="1" destOrd="0" presId="urn:microsoft.com/office/officeart/2005/8/layout/cycle2"/>
+    <dgm:cxn modelId="{B9112854-2FC9-4425-9E4B-53A43C3DBAEA}" type="presOf" srcId="{B076759B-D3B0-47D9-81EB-3288F05188CF}" destId="{9131C37D-B921-4D6E-8F9A-EC44BE7C792E}" srcOrd="0" destOrd="0" presId="urn:microsoft.com/office/officeart/2005/8/layout/cycle2"/>
+    <dgm:cxn modelId="{2E4B8157-9F67-4A77-A291-9517DC2BA9D6}" type="presOf" srcId="{4236E39F-D901-4259-9412-DCB5548348C0}" destId="{2D9E3984-BA4F-4510-9BED-7B67F9CBA361}" srcOrd="1" destOrd="0" presId="urn:microsoft.com/office/officeart/2005/8/layout/cycle2"/>
+    <dgm:cxn modelId="{6CD5AC8B-F40C-4B1A-BBE8-E56137B722D8}" srcId="{50AD22D8-3616-4E38-96E3-5477574F3B96}" destId="{FA796511-CCB5-40B2-8114-458028458783}" srcOrd="1" destOrd="0" parTransId="{EEC1F73A-FB57-4E58-B28F-619EBC8AD7AF}" sibTransId="{C750B9B4-BF58-4135-91E3-890565796D34}"/>
+    <dgm:cxn modelId="{8F0B9FB4-BD97-457D-86BB-91F5B89B2C54}" type="presOf" srcId="{C750B9B4-BF58-4135-91E3-890565796D34}" destId="{67CC3EA2-82BF-487B-89AE-936C86DE084E}" srcOrd="0" destOrd="0" presId="urn:microsoft.com/office/officeart/2005/8/layout/cycle2"/>
+    <dgm:cxn modelId="{21529DC6-DDC7-4128-A551-C566ABC1781E}" srcId="{50AD22D8-3616-4E38-96E3-5477574F3B96}" destId="{D4A326C8-B7F2-48C0-8A52-4D4FEA626BC5}" srcOrd="3" destOrd="0" parTransId="{89E94D69-1A1B-4097-8305-02C88CA7D05D}" sibTransId="{5611B919-0FF5-484E-85EA-C03760D6F5AD}"/>
+    <dgm:cxn modelId="{FBFD90CA-AF6E-4F65-A9F1-1DB3D1D69173}" type="presOf" srcId="{794F6A75-4831-48CB-8F3E-C8E7DEFB3A13}" destId="{C65104E5-0018-4EEB-A9D8-81C06F8E0AFD}" srcOrd="0" destOrd="0" presId="urn:microsoft.com/office/officeart/2005/8/layout/cycle2"/>
+    <dgm:cxn modelId="{941361E5-1CE2-49F9-80EE-321B9AA0CB0C}" srcId="{50AD22D8-3616-4E38-96E3-5477574F3B96}" destId="{B076759B-D3B0-47D9-81EB-3288F05188CF}" srcOrd="2" destOrd="0" parTransId="{0507D515-D2EC-4A1A-8033-D31532D14EAE}" sibTransId="{794F6A75-4831-48CB-8F3E-C8E7DEFB3A13}"/>
+    <dgm:cxn modelId="{77AE1C0D-3E22-46CA-96C8-A97081F79468}" type="presParOf" srcId="{69A3F112-B972-4EEE-A108-22F1E87E64A2}" destId="{EAAAD7C4-03E2-4C9D-95A7-7B871B5E81F5}" srcOrd="0" destOrd="0" presId="urn:microsoft.com/office/officeart/2005/8/layout/cycle2"/>
+    <dgm:cxn modelId="{2BC31ADD-4CEA-4D33-B923-8197F317A80D}" type="presParOf" srcId="{69A3F112-B972-4EEE-A108-22F1E87E64A2}" destId="{CDF85A18-49E0-4103-9489-60B2351C1683}" srcOrd="1" destOrd="0" presId="urn:microsoft.com/office/officeart/2005/8/layout/cycle2"/>
+    <dgm:cxn modelId="{10463D73-9B2B-4821-A4F8-34790A4800F9}" type="presParOf" srcId="{CDF85A18-49E0-4103-9489-60B2351C1683}" destId="{2D9E3984-BA4F-4510-9BED-7B67F9CBA361}" srcOrd="0" destOrd="0" presId="urn:microsoft.com/office/officeart/2005/8/layout/cycle2"/>
+    <dgm:cxn modelId="{F0B1B2A6-BE12-4D80-938F-C1B0515B7413}" type="presParOf" srcId="{69A3F112-B972-4EEE-A108-22F1E87E64A2}" destId="{67308124-F5EE-46B2-BCA4-3527CFE2A501}" srcOrd="2" destOrd="0" presId="urn:microsoft.com/office/officeart/2005/8/layout/cycle2"/>
+    <dgm:cxn modelId="{42A746ED-374B-47E3-8DD9-692FB7E1A172}" type="presParOf" srcId="{69A3F112-B972-4EEE-A108-22F1E87E64A2}" destId="{67CC3EA2-82BF-487B-89AE-936C86DE084E}" srcOrd="3" destOrd="0" presId="urn:microsoft.com/office/officeart/2005/8/layout/cycle2"/>
+    <dgm:cxn modelId="{17B273F5-8ED9-42F5-9FD7-9C72470F9464}" type="presParOf" srcId="{67CC3EA2-82BF-487B-89AE-936C86DE084E}" destId="{62DC38B3-AC76-408E-AA3F-20DCC44C7997}" srcOrd="0" destOrd="0" presId="urn:microsoft.com/office/officeart/2005/8/layout/cycle2"/>
+    <dgm:cxn modelId="{A91E9345-22B6-4C45-BADD-4FE4B265A5C8}" type="presParOf" srcId="{69A3F112-B972-4EEE-A108-22F1E87E64A2}" destId="{9131C37D-B921-4D6E-8F9A-EC44BE7C792E}" srcOrd="4" destOrd="0" presId="urn:microsoft.com/office/officeart/2005/8/layout/cycle2"/>
+    <dgm:cxn modelId="{4D4E9EDC-365B-4C26-924E-8B13D5F5E1D7}" type="presParOf" srcId="{69A3F112-B972-4EEE-A108-22F1E87E64A2}" destId="{C65104E5-0018-4EEB-A9D8-81C06F8E0AFD}" srcOrd="5" destOrd="0" presId="urn:microsoft.com/office/officeart/2005/8/layout/cycle2"/>
+    <dgm:cxn modelId="{64FE6880-3841-4E8B-AF44-3030B23F1994}" type="presParOf" srcId="{C65104E5-0018-4EEB-A9D8-81C06F8E0AFD}" destId="{3CEEEE76-0F59-445D-B76D-18CEE8B9F6D1}" srcOrd="0" destOrd="0" presId="urn:microsoft.com/office/officeart/2005/8/layout/cycle2"/>
+    <dgm:cxn modelId="{E6AFE3D6-8B73-4530-8311-38180CAFEC99}" type="presParOf" srcId="{69A3F112-B972-4EEE-A108-22F1E87E64A2}" destId="{3868C6B5-6E70-4AB9-91DF-B475DC572BC9}" srcOrd="6" destOrd="0" presId="urn:microsoft.com/office/officeart/2005/8/layout/cycle2"/>
+    <dgm:cxn modelId="{0E4928E8-22B6-471F-81AC-E9584825B8EF}" type="presParOf" srcId="{69A3F112-B972-4EEE-A108-22F1E87E64A2}" destId="{2ABB50DD-D854-43FE-883D-0B801DB34FD6}" srcOrd="7" destOrd="0" presId="urn:microsoft.com/office/officeart/2005/8/layout/cycle2"/>
+    <dgm:cxn modelId="{7A044691-89D5-49D2-A40D-FDC196C94E10}" type="presParOf" srcId="{2ABB50DD-D854-43FE-883D-0B801DB34FD6}" destId="{C3ACCE8C-76FA-4A09-B135-32F778FF51F7}" srcOrd="0" destOrd="0" presId="urn:microsoft.com/office/officeart/2005/8/layout/cycle2"/>
   </dgm:cxnLst>
   <dgm:bg/>
   <dgm:whole/>
@@ -2486,15 +2554,15 @@
       <dsp:cNvGrpSpPr/>
     </dsp:nvGrpSpPr>
     <dsp:grpSpPr/>
-    <dsp:sp modelId="{451ADE3D-338A-4C1B-8ADD-B1C1AC9F496C}">
+    <dsp:sp modelId="{5556880F-3F88-416B-8FCA-71244B74F3D3}">
       <dsp:nvSpPr>
         <dsp:cNvPr id="0" name=""/>
         <dsp:cNvSpPr/>
       </dsp:nvSpPr>
       <dsp:spPr>
         <a:xfrm>
-          <a:off x="3294558" y="791566"/>
-          <a:ext cx="166114" cy="727740"/>
+          <a:off x="3821000" y="1159254"/>
+          <a:ext cx="242999" cy="1064567"/>
         </a:xfrm>
         <a:custGeom>
           <a:avLst/>
@@ -2505,22 +2573,21 @@
           <a:pathLst>
             <a:path>
               <a:moveTo>
-                <a:pt x="166114" y="0"/>
+                <a:pt x="242999" y="0"/>
               </a:moveTo>
               <a:lnTo>
-                <a:pt x="166114" y="727740"/>
+                <a:pt x="242999" y="1064567"/>
               </a:lnTo>
               <a:lnTo>
-                <a:pt x="0" y="727740"/>
+                <a:pt x="0" y="1064567"/>
               </a:lnTo>
             </a:path>
           </a:pathLst>
         </a:custGeom>
         <a:noFill/>
-        <a:ln w="12700" cap="flat" cmpd="sng" algn="ctr">
+        <a:ln w="19050" cap="flat" cmpd="sng" algn="ctr">
           <a:solidFill>
             <a:schemeClr val="accent2">
-              <a:shade val="60000"/>
               <a:hueOff val="0"/>
               <a:satOff val="0"/>
               <a:lumOff val="0"/>
@@ -2545,15 +2612,15 @@
         <a:fontRef idx="minor"/>
       </dsp:style>
     </dsp:sp>
-    <dsp:sp modelId="{933C4A81-A3E9-476B-BC31-ACA7F2FC00D7}">
+    <dsp:sp modelId="{25F1C600-4FF4-4426-8463-065F19B92D09}">
       <dsp:nvSpPr>
         <dsp:cNvPr id="0" name=""/>
         <dsp:cNvSpPr/>
       </dsp:nvSpPr>
       <dsp:spPr>
         <a:xfrm>
-          <a:off x="5374945" y="3038069"/>
-          <a:ext cx="166114" cy="727740"/>
+          <a:off x="4064000" y="1159254"/>
+          <a:ext cx="2800275" cy="2129135"/>
         </a:xfrm>
         <a:custGeom>
           <a:avLst/>
@@ -2567,19 +2634,21 @@
                 <a:pt x="0" y="0"/>
               </a:moveTo>
               <a:lnTo>
-                <a:pt x="0" y="727740"/>
+                <a:pt x="0" y="1886136"/>
               </a:lnTo>
               <a:lnTo>
-                <a:pt x="166114" y="727740"/>
+                <a:pt x="2800275" y="1886136"/>
+              </a:lnTo>
+              <a:lnTo>
+                <a:pt x="2800275" y="2129135"/>
               </a:lnTo>
             </a:path>
           </a:pathLst>
         </a:custGeom>
         <a:noFill/>
-        <a:ln w="12700" cap="flat" cmpd="sng" algn="ctr">
+        <a:ln w="19050" cap="flat" cmpd="sng" algn="ctr">
           <a:solidFill>
             <a:schemeClr val="accent2">
-              <a:shade val="80000"/>
               <a:hueOff val="0"/>
               <a:satOff val="0"/>
               <a:lumOff val="0"/>
@@ -2604,15 +2673,15 @@
         <a:fontRef idx="minor"/>
       </dsp:style>
     </dsp:sp>
-    <dsp:sp modelId="{B9A7FA2A-A5C9-49C6-80B4-AE20714C2333}">
+    <dsp:sp modelId="{23B445D1-403E-401C-849E-DA7E490462F7}">
       <dsp:nvSpPr>
         <dsp:cNvPr id="0" name=""/>
         <dsp:cNvSpPr/>
       </dsp:nvSpPr>
       <dsp:spPr>
         <a:xfrm>
-          <a:off x="5208831" y="3038069"/>
-          <a:ext cx="166114" cy="727740"/>
+          <a:off x="4018280" y="1159254"/>
+          <a:ext cx="91440" cy="2129135"/>
         </a:xfrm>
         <a:custGeom>
           <a:avLst/>
@@ -2623,22 +2692,18 @@
           <a:pathLst>
             <a:path>
               <a:moveTo>
-                <a:pt x="166114" y="0"/>
+                <a:pt x="45720" y="0"/>
               </a:moveTo>
               <a:lnTo>
-                <a:pt x="166114" y="727740"/>
-              </a:lnTo>
-              <a:lnTo>
-                <a:pt x="0" y="727740"/>
+                <a:pt x="45720" y="2129135"/>
               </a:lnTo>
             </a:path>
           </a:pathLst>
         </a:custGeom>
         <a:noFill/>
-        <a:ln w="12700" cap="flat" cmpd="sng" algn="ctr">
+        <a:ln w="19050" cap="flat" cmpd="sng" algn="ctr">
           <a:solidFill>
             <a:schemeClr val="accent2">
-              <a:shade val="80000"/>
               <a:hueOff val="0"/>
               <a:satOff val="0"/>
               <a:lumOff val="0"/>
@@ -2663,15 +2728,15 @@
         <a:fontRef idx="minor"/>
       </dsp:style>
     </dsp:sp>
-    <dsp:sp modelId="{5C34514A-0C79-47CA-B9F1-D85DCA7CF3A7}">
+    <dsp:sp modelId="{4E350251-E89F-4B92-BEF0-97957B57F1A6}">
       <dsp:nvSpPr>
         <dsp:cNvPr id="0" name=""/>
         <dsp:cNvSpPr/>
       </dsp:nvSpPr>
       <dsp:spPr>
         <a:xfrm>
-          <a:off x="3460672" y="791566"/>
-          <a:ext cx="1914273" cy="1455480"/>
+          <a:off x="1263724" y="1159254"/>
+          <a:ext cx="2800275" cy="2129135"/>
         </a:xfrm>
         <a:custGeom>
           <a:avLst/>
@@ -2682,25 +2747,24 @@
           <a:pathLst>
             <a:path>
               <a:moveTo>
-                <a:pt x="0" y="0"/>
+                <a:pt x="2800275" y="0"/>
               </a:moveTo>
               <a:lnTo>
-                <a:pt x="0" y="1289365"/>
+                <a:pt x="2800275" y="1886136"/>
               </a:lnTo>
               <a:lnTo>
-                <a:pt x="1914273" y="1289365"/>
+                <a:pt x="0" y="1886136"/>
               </a:lnTo>
               <a:lnTo>
-                <a:pt x="1914273" y="1455480"/>
+                <a:pt x="0" y="2129135"/>
               </a:lnTo>
             </a:path>
           </a:pathLst>
         </a:custGeom>
         <a:noFill/>
-        <a:ln w="12700" cap="flat" cmpd="sng" algn="ctr">
+        <a:ln w="19050" cap="flat" cmpd="sng" algn="ctr">
           <a:solidFill>
             <a:schemeClr val="accent2">
-              <a:shade val="60000"/>
               <a:hueOff val="0"/>
               <a:satOff val="0"/>
               <a:lumOff val="0"/>
@@ -2725,133 +2789,121 @@
         <a:fontRef idx="minor"/>
       </dsp:style>
     </dsp:sp>
-    <dsp:sp modelId="{B257BC38-2C98-4B37-88B4-8CC0B048D56A}">
+    <dsp:sp modelId="{4B1F0272-BF1A-4779-88BA-492E13DACC51}">
       <dsp:nvSpPr>
         <dsp:cNvPr id="0" name=""/>
         <dsp:cNvSpPr/>
       </dsp:nvSpPr>
       <dsp:spPr>
         <a:xfrm>
-          <a:off x="3414952" y="791566"/>
-          <a:ext cx="91440" cy="1455480"/>
+          <a:off x="2906861" y="2116"/>
+          <a:ext cx="2314277" cy="1157138"/>
         </a:xfrm>
-        <a:custGeom>
+        <a:prstGeom prst="rect">
           <a:avLst/>
-          <a:gdLst/>
-          <a:ahLst/>
-          <a:cxnLst/>
-          <a:rect l="0" t="0" r="0" b="0"/>
-          <a:pathLst>
-            <a:path>
-              <a:moveTo>
-                <a:pt x="45720" y="0"/>
-              </a:moveTo>
-              <a:lnTo>
-                <a:pt x="45720" y="1455480"/>
-              </a:lnTo>
-            </a:path>
-          </a:pathLst>
-        </a:custGeom>
-        <a:noFill/>
-        <a:ln w="12700" cap="flat" cmpd="sng" algn="ctr">
-          <a:solidFill>
-            <a:schemeClr val="accent2">
-              <a:shade val="60000"/>
-              <a:hueOff val="0"/>
-              <a:satOff val="0"/>
-              <a:lumOff val="0"/>
-              <a:alphaOff val="0"/>
-            </a:schemeClr>
-          </a:solidFill>
-          <a:prstDash val="solid"/>
-          <a:miter lim="800000"/>
+        </a:prstGeom>
+        <a:gradFill rotWithShape="0">
+          <a:gsLst>
+            <a:gs pos="0">
+              <a:schemeClr val="accent1">
+                <a:hueOff val="0"/>
+                <a:satOff val="0"/>
+                <a:lumOff val="0"/>
+                <a:alphaOff val="0"/>
+                <a:satMod val="103000"/>
+                <a:lumMod val="102000"/>
+                <a:tint val="94000"/>
+              </a:schemeClr>
+            </a:gs>
+            <a:gs pos="50000">
+              <a:schemeClr val="accent1">
+                <a:hueOff val="0"/>
+                <a:satOff val="0"/>
+                <a:lumOff val="0"/>
+                <a:alphaOff val="0"/>
+                <a:satMod val="110000"/>
+                <a:lumMod val="100000"/>
+                <a:shade val="100000"/>
+              </a:schemeClr>
+            </a:gs>
+            <a:gs pos="100000">
+              <a:schemeClr val="accent1">
+                <a:hueOff val="0"/>
+                <a:satOff val="0"/>
+                <a:lumOff val="0"/>
+                <a:alphaOff val="0"/>
+                <a:lumMod val="99000"/>
+                <a:satMod val="120000"/>
+                <a:shade val="78000"/>
+              </a:schemeClr>
+            </a:gs>
+          </a:gsLst>
+          <a:lin ang="5400000" scaled="0"/>
+        </a:gradFill>
+        <a:ln>
+          <a:noFill/>
         </a:ln>
-        <a:effectLst/>
+        <a:effectLst>
+          <a:outerShdw blurRad="57150" dist="19050" dir="5400000" algn="ctr" rotWithShape="0">
+            <a:srgbClr val="000000">
+              <a:alpha val="63000"/>
+            </a:srgbClr>
+          </a:outerShdw>
+        </a:effectLst>
       </dsp:spPr>
       <dsp:style>
-        <a:lnRef idx="2">
+        <a:lnRef idx="0">
           <a:scrgbClr r="0" g="0" b="0"/>
         </a:lnRef>
-        <a:fillRef idx="0">
+        <a:fillRef idx="3">
           <a:scrgbClr r="0" g="0" b="0"/>
         </a:fillRef>
-        <a:effectRef idx="0">
+        <a:effectRef idx="3">
           <a:scrgbClr r="0" g="0" b="0"/>
         </a:effectRef>
-        <a:fontRef idx="minor"/>
+        <a:fontRef idx="minor">
+          <a:schemeClr val="lt1"/>
+        </a:fontRef>
       </dsp:style>
+      <dsp:txBody>
+        <a:bodyPr spcFirstLastPara="0" vert="horz" wrap="square" lIns="22860" tIns="22860" rIns="22860" bIns="22860" numCol="1" spcCol="1270" anchor="ctr" anchorCtr="0">
+          <a:noAutofit/>
+        </a:bodyPr>
+        <a:lstStyle/>
+        <a:p>
+          <a:pPr marL="0" lvl="0" indent="0" algn="ctr" defTabSz="1600200">
+            <a:lnSpc>
+              <a:spcPct val="90000"/>
+            </a:lnSpc>
+            <a:spcBef>
+              <a:spcPct val="0"/>
+            </a:spcBef>
+            <a:spcAft>
+              <a:spcPct val="35000"/>
+            </a:spcAft>
+            <a:buNone/>
+          </a:pPr>
+          <a:r>
+            <a:rPr lang="id-ID" sz="3600" b="1" i="0" kern="1200" dirty="0"/>
+            <a:t>Direktur</a:t>
+          </a:r>
+          <a:endParaRPr lang="id-ID" sz="3600" kern="1200" dirty="0"/>
+        </a:p>
+      </dsp:txBody>
+      <dsp:txXfrm>
+        <a:off x="2906861" y="2116"/>
+        <a:ext cx="2314277" cy="1157138"/>
+      </dsp:txXfrm>
     </dsp:sp>
-    <dsp:sp modelId="{C3597C58-1F61-4DDC-BEC1-27787EEEFA09}">
+    <dsp:sp modelId="{E02CE35F-D62C-4755-B29E-7616747C1F83}">
       <dsp:nvSpPr>
         <dsp:cNvPr id="0" name=""/>
         <dsp:cNvSpPr/>
       </dsp:nvSpPr>
       <dsp:spPr>
         <a:xfrm>
-          <a:off x="1546399" y="791566"/>
-          <a:ext cx="1914273" cy="1455480"/>
-        </a:xfrm>
-        <a:custGeom>
-          <a:avLst/>
-          <a:gdLst/>
-          <a:ahLst/>
-          <a:cxnLst/>
-          <a:rect l="0" t="0" r="0" b="0"/>
-          <a:pathLst>
-            <a:path>
-              <a:moveTo>
-                <a:pt x="1914273" y="0"/>
-              </a:moveTo>
-              <a:lnTo>
-                <a:pt x="1914273" y="1289365"/>
-              </a:lnTo>
-              <a:lnTo>
-                <a:pt x="0" y="1289365"/>
-              </a:lnTo>
-              <a:lnTo>
-                <a:pt x="0" y="1455480"/>
-              </a:lnTo>
-            </a:path>
-          </a:pathLst>
-        </a:custGeom>
-        <a:noFill/>
-        <a:ln w="12700" cap="flat" cmpd="sng" algn="ctr">
-          <a:solidFill>
-            <a:schemeClr val="accent2">
-              <a:shade val="60000"/>
-              <a:hueOff val="0"/>
-              <a:satOff val="0"/>
-              <a:lumOff val="0"/>
-              <a:alphaOff val="0"/>
-            </a:schemeClr>
-          </a:solidFill>
-          <a:prstDash val="solid"/>
-          <a:miter lim="800000"/>
-        </a:ln>
-        <a:effectLst/>
-      </dsp:spPr>
-      <dsp:style>
-        <a:lnRef idx="2">
-          <a:scrgbClr r="0" g="0" b="0"/>
-        </a:lnRef>
-        <a:fillRef idx="0">
-          <a:scrgbClr r="0" g="0" b="0"/>
-        </a:fillRef>
-        <a:effectRef idx="0">
-          <a:scrgbClr r="0" g="0" b="0"/>
-        </a:effectRef>
-        <a:fontRef idx="minor"/>
-      </dsp:style>
-    </dsp:sp>
-    <dsp:sp modelId="{DB310313-A257-405A-AF26-47470C0176EA}">
-      <dsp:nvSpPr>
-        <dsp:cNvPr id="0" name=""/>
-        <dsp:cNvSpPr/>
-      </dsp:nvSpPr>
-      <dsp:spPr>
-        <a:xfrm>
-          <a:off x="2306010" y="544"/>
-          <a:ext cx="2309325" cy="791021"/>
+          <a:off x="106585" y="3288390"/>
+          <a:ext cx="2314277" cy="1157138"/>
         </a:xfrm>
         <a:prstGeom prst="rect">
           <a:avLst/>
@@ -2920,12 +2972,12 @@
         </a:fontRef>
       </dsp:style>
       <dsp:txBody>
-        <a:bodyPr spcFirstLastPara="0" vert="horz" wrap="square" lIns="15240" tIns="15240" rIns="15240" bIns="15240" numCol="1" spcCol="1270" anchor="ctr" anchorCtr="0">
+        <a:bodyPr spcFirstLastPara="0" vert="horz" wrap="square" lIns="22860" tIns="22860" rIns="22860" bIns="22860" numCol="1" spcCol="1270" anchor="ctr" anchorCtr="0">
           <a:noAutofit/>
         </a:bodyPr>
         <a:lstStyle/>
         <a:p>
-          <a:pPr marL="0" lvl="0" indent="0" algn="ctr" defTabSz="1066800">
+          <a:pPr marL="0" lvl="0" indent="0" algn="ctr" defTabSz="1600200">
             <a:lnSpc>
               <a:spcPct val="90000"/>
             </a:lnSpc>
@@ -2938,26 +2990,30 @@
             <a:buNone/>
           </a:pPr>
           <a:r>
-            <a:rPr lang="id-ID" sz="2400" b="1" i="0" kern="1200" dirty="0"/>
-            <a:t>Direktur</a:t>
+            <a:rPr lang="id-ID" sz="3600" b="1" i="0" kern="1200" dirty="0"/>
+            <a:t>Staff</a:t>
           </a:r>
-          <a:endParaRPr lang="id-ID" sz="2400" kern="1200" dirty="0"/>
+          <a:r>
+            <a:rPr lang="id-ID" sz="3600" b="0" i="0" kern="1200" dirty="0"/>
+            <a:t> </a:t>
+          </a:r>
+          <a:endParaRPr lang="id-ID" sz="3600" kern="1200" dirty="0"/>
         </a:p>
       </dsp:txBody>
       <dsp:txXfrm>
-        <a:off x="2306010" y="544"/>
-        <a:ext cx="2309325" cy="791021"/>
+        <a:off x="106585" y="3288390"/>
+        <a:ext cx="2314277" cy="1157138"/>
       </dsp:txXfrm>
     </dsp:sp>
-    <dsp:sp modelId="{4B26B9A9-A87D-4876-8571-3448B4A84B9C}">
+    <dsp:sp modelId="{44C7A7C0-95D0-4BFF-A1FB-EA3FAC629288}">
       <dsp:nvSpPr>
         <dsp:cNvPr id="0" name=""/>
         <dsp:cNvSpPr/>
       </dsp:nvSpPr>
       <dsp:spPr>
         <a:xfrm>
-          <a:off x="755377" y="2247047"/>
-          <a:ext cx="1582043" cy="791021"/>
+          <a:off x="2906861" y="3288390"/>
+          <a:ext cx="2314277" cy="1157138"/>
         </a:xfrm>
         <a:prstGeom prst="rect">
           <a:avLst/>
@@ -3026,12 +3082,12 @@
         </a:fontRef>
       </dsp:style>
       <dsp:txBody>
-        <a:bodyPr spcFirstLastPara="0" vert="horz" wrap="square" lIns="15240" tIns="15240" rIns="15240" bIns="15240" numCol="1" spcCol="1270" anchor="ctr" anchorCtr="0">
+        <a:bodyPr spcFirstLastPara="0" vert="horz" wrap="square" lIns="22860" tIns="22860" rIns="22860" bIns="22860" numCol="1" spcCol="1270" anchor="ctr" anchorCtr="0">
           <a:noAutofit/>
         </a:bodyPr>
         <a:lstStyle/>
         <a:p>
-          <a:pPr marL="0" lvl="0" indent="0" algn="ctr" defTabSz="1066800">
+          <a:pPr marL="0" lvl="0" indent="0" algn="ctr" defTabSz="1600200">
             <a:lnSpc>
               <a:spcPct val="90000"/>
             </a:lnSpc>
@@ -3044,30 +3100,30 @@
             <a:buNone/>
           </a:pPr>
           <a:r>
-            <a:rPr lang="id-ID" sz="2400" b="1" i="0" kern="1200" dirty="0"/>
+            <a:rPr lang="id-ID" sz="3600" b="1" i="0" kern="1200" dirty="0"/>
             <a:t>Staff</a:t>
           </a:r>
           <a:r>
-            <a:rPr lang="id-ID" sz="5200" b="0" i="0" kern="1200" dirty="0"/>
+            <a:rPr lang="id-ID" sz="3600" b="0" i="0" kern="1200" dirty="0"/>
             <a:t> </a:t>
           </a:r>
-          <a:endParaRPr lang="id-ID" sz="5200" kern="1200" dirty="0"/>
+          <a:endParaRPr lang="id-ID" sz="3600" kern="1200" dirty="0"/>
         </a:p>
       </dsp:txBody>
       <dsp:txXfrm>
-        <a:off x="755377" y="2247047"/>
-        <a:ext cx="1582043" cy="791021"/>
+        <a:off x="2906861" y="3288390"/>
+        <a:ext cx="2314277" cy="1157138"/>
       </dsp:txXfrm>
     </dsp:sp>
-    <dsp:sp modelId="{72CEFE29-F240-4345-8B3C-09FF34FF4917}">
+    <dsp:sp modelId="{91E08EDF-18BB-4F4C-A6CA-E9878E099671}">
       <dsp:nvSpPr>
         <dsp:cNvPr id="0" name=""/>
         <dsp:cNvSpPr/>
       </dsp:nvSpPr>
       <dsp:spPr>
         <a:xfrm>
-          <a:off x="2669650" y="2247047"/>
-          <a:ext cx="1582043" cy="791021"/>
+          <a:off x="5707136" y="3288390"/>
+          <a:ext cx="2314277" cy="1157138"/>
         </a:xfrm>
         <a:prstGeom prst="rect">
           <a:avLst/>
@@ -3136,12 +3192,12 @@
         </a:fontRef>
       </dsp:style>
       <dsp:txBody>
-        <a:bodyPr spcFirstLastPara="0" vert="horz" wrap="square" lIns="15240" tIns="15240" rIns="15240" bIns="15240" numCol="1" spcCol="1270" anchor="ctr" anchorCtr="0">
+        <a:bodyPr spcFirstLastPara="0" vert="horz" wrap="square" lIns="22860" tIns="22860" rIns="22860" bIns="22860" numCol="1" spcCol="1270" anchor="ctr" anchorCtr="0">
           <a:noAutofit/>
         </a:bodyPr>
         <a:lstStyle/>
         <a:p>
-          <a:pPr marL="0" lvl="0" indent="0" algn="ctr" defTabSz="1066800">
+          <a:pPr marL="0" lvl="0" indent="0" algn="ctr" defTabSz="1600200">
             <a:lnSpc>
               <a:spcPct val="90000"/>
             </a:lnSpc>
@@ -3154,30 +3210,30 @@
             <a:buNone/>
           </a:pPr>
           <a:r>
-            <a:rPr lang="id-ID" sz="2400" b="1" i="0" kern="1200" dirty="0"/>
+            <a:rPr lang="id-ID" sz="3600" b="1" i="0" kern="1200" dirty="0"/>
             <a:t>Staff</a:t>
           </a:r>
           <a:r>
-            <a:rPr lang="id-ID" sz="5200" b="0" i="0" kern="1200" dirty="0"/>
+            <a:rPr lang="id-ID" sz="3600" b="0" i="0" kern="1200" dirty="0"/>
             <a:t> </a:t>
           </a:r>
-          <a:endParaRPr lang="id-ID" sz="5200" kern="1200" dirty="0"/>
+          <a:endParaRPr lang="id-ID" sz="3600" kern="1200" dirty="0"/>
         </a:p>
       </dsp:txBody>
       <dsp:txXfrm>
-        <a:off x="2669650" y="2247047"/>
-        <a:ext cx="1582043" cy="791021"/>
+        <a:off x="5707136" y="3288390"/>
+        <a:ext cx="2314277" cy="1157138"/>
       </dsp:txXfrm>
     </dsp:sp>
-    <dsp:sp modelId="{9AF7F27A-16CA-490C-A17B-2F77A568AD6A}">
+    <dsp:sp modelId="{4AB33A37-8968-451F-BDAF-6191A394821C}">
       <dsp:nvSpPr>
         <dsp:cNvPr id="0" name=""/>
         <dsp:cNvSpPr/>
       </dsp:nvSpPr>
       <dsp:spPr>
         <a:xfrm>
-          <a:off x="4583923" y="2247047"/>
-          <a:ext cx="1582043" cy="791021"/>
+          <a:off x="1506723" y="1645253"/>
+          <a:ext cx="2314277" cy="1157138"/>
         </a:xfrm>
         <a:prstGeom prst="rect">
           <a:avLst/>
@@ -3246,12 +3302,12 @@
         </a:fontRef>
       </dsp:style>
       <dsp:txBody>
-        <a:bodyPr spcFirstLastPara="0" vert="horz" wrap="square" lIns="15240" tIns="15240" rIns="15240" bIns="15240" numCol="1" spcCol="1270" anchor="ctr" anchorCtr="0">
+        <a:bodyPr spcFirstLastPara="0" vert="horz" wrap="square" lIns="22860" tIns="22860" rIns="22860" bIns="22860" numCol="1" spcCol="1270" anchor="ctr" anchorCtr="0">
           <a:noAutofit/>
         </a:bodyPr>
         <a:lstStyle/>
         <a:p>
-          <a:pPr marL="0" lvl="0" indent="0" algn="ctr" defTabSz="1066800">
+          <a:pPr marL="0" lvl="0" indent="0" algn="ctr" defTabSz="1600200">
             <a:lnSpc>
               <a:spcPct val="90000"/>
             </a:lnSpc>
@@ -3264,337 +3320,15 @@
             <a:buNone/>
           </a:pPr>
           <a:r>
-            <a:rPr lang="id-ID" sz="2400" b="1" i="0" kern="1200" dirty="0"/>
-            <a:t>Staff</a:t>
+            <a:rPr lang="id-ID" sz="3600" b="1" i="0" kern="1200" dirty="0"/>
+            <a:t>Manager</a:t>
           </a:r>
-          <a:r>
-            <a:rPr lang="id-ID" sz="5200" b="0" i="0" kern="1200" dirty="0"/>
-            <a:t> </a:t>
-          </a:r>
-          <a:endParaRPr lang="id-ID" sz="5200" kern="1200" dirty="0"/>
+          <a:endParaRPr lang="id-ID" sz="3600" kern="1200" dirty="0"/>
         </a:p>
       </dsp:txBody>
       <dsp:txXfrm>
-        <a:off x="4583923" y="2247047"/>
-        <a:ext cx="1582043" cy="791021"/>
-      </dsp:txXfrm>
-    </dsp:sp>
-    <dsp:sp modelId="{D81F79E2-EC97-49A8-8EF9-5E50C42D7A57}">
-      <dsp:nvSpPr>
-        <dsp:cNvPr id="0" name=""/>
-        <dsp:cNvSpPr/>
-      </dsp:nvSpPr>
-      <dsp:spPr>
-        <a:xfrm>
-          <a:off x="3626787" y="3370298"/>
-          <a:ext cx="1582043" cy="791021"/>
-        </a:xfrm>
-        <a:prstGeom prst="rect">
-          <a:avLst/>
-        </a:prstGeom>
-        <a:gradFill rotWithShape="0">
-          <a:gsLst>
-            <a:gs pos="0">
-              <a:schemeClr val="accent2">
-                <a:hueOff val="0"/>
-                <a:satOff val="0"/>
-                <a:lumOff val="0"/>
-                <a:alphaOff val="0"/>
-                <a:satMod val="103000"/>
-                <a:lumMod val="102000"/>
-                <a:tint val="94000"/>
-              </a:schemeClr>
-            </a:gs>
-            <a:gs pos="50000">
-              <a:schemeClr val="accent2">
-                <a:hueOff val="0"/>
-                <a:satOff val="0"/>
-                <a:lumOff val="0"/>
-                <a:alphaOff val="0"/>
-                <a:satMod val="110000"/>
-                <a:lumMod val="100000"/>
-                <a:shade val="100000"/>
-              </a:schemeClr>
-            </a:gs>
-            <a:gs pos="100000">
-              <a:schemeClr val="accent2">
-                <a:hueOff val="0"/>
-                <a:satOff val="0"/>
-                <a:lumOff val="0"/>
-                <a:alphaOff val="0"/>
-                <a:lumMod val="99000"/>
-                <a:satMod val="120000"/>
-                <a:shade val="78000"/>
-              </a:schemeClr>
-            </a:gs>
-          </a:gsLst>
-          <a:lin ang="5400000" scaled="0"/>
-        </a:gradFill>
-        <a:ln>
-          <a:noFill/>
-        </a:ln>
-        <a:effectLst>
-          <a:outerShdw blurRad="57150" dist="19050" dir="5400000" algn="ctr" rotWithShape="0">
-            <a:srgbClr val="000000">
-              <a:alpha val="63000"/>
-            </a:srgbClr>
-          </a:outerShdw>
-        </a:effectLst>
-      </dsp:spPr>
-      <dsp:style>
-        <a:lnRef idx="0">
-          <a:scrgbClr r="0" g="0" b="0"/>
-        </a:lnRef>
-        <a:fillRef idx="3">
-          <a:scrgbClr r="0" g="0" b="0"/>
-        </a:fillRef>
-        <a:effectRef idx="3">
-          <a:scrgbClr r="0" g="0" b="0"/>
-        </a:effectRef>
-        <a:fontRef idx="minor">
-          <a:schemeClr val="lt1"/>
-        </a:fontRef>
-      </dsp:style>
-      <dsp:txBody>
-        <a:bodyPr spcFirstLastPara="0" vert="horz" wrap="square" lIns="15240" tIns="15240" rIns="15240" bIns="15240" numCol="1" spcCol="1270" anchor="ctr" anchorCtr="0">
-          <a:noAutofit/>
-        </a:bodyPr>
-        <a:lstStyle/>
-        <a:p>
-          <a:pPr marL="0" lvl="0" indent="0" algn="ctr" defTabSz="1066800">
-            <a:lnSpc>
-              <a:spcPct val="90000"/>
-            </a:lnSpc>
-            <a:spcBef>
-              <a:spcPct val="0"/>
-            </a:spcBef>
-            <a:spcAft>
-              <a:spcPct val="35000"/>
-            </a:spcAft>
-            <a:buNone/>
-          </a:pPr>
-          <a:r>
-            <a:rPr lang="en-US" sz="2400" kern="1200" dirty="0"/>
-            <a:t>Staff</a:t>
-          </a:r>
-          <a:endParaRPr lang="id-ID" sz="2400" kern="1200" dirty="0"/>
-        </a:p>
-      </dsp:txBody>
-      <dsp:txXfrm>
-        <a:off x="3626787" y="3370298"/>
-        <a:ext cx="1582043" cy="791021"/>
-      </dsp:txXfrm>
-    </dsp:sp>
-    <dsp:sp modelId="{8C5A41A4-A674-4693-9A65-03BA9B33B3D9}">
-      <dsp:nvSpPr>
-        <dsp:cNvPr id="0" name=""/>
-        <dsp:cNvSpPr/>
-      </dsp:nvSpPr>
-      <dsp:spPr>
-        <a:xfrm>
-          <a:off x="5541060" y="3370298"/>
-          <a:ext cx="1582043" cy="791021"/>
-        </a:xfrm>
-        <a:prstGeom prst="rect">
-          <a:avLst/>
-        </a:prstGeom>
-        <a:gradFill rotWithShape="0">
-          <a:gsLst>
-            <a:gs pos="0">
-              <a:schemeClr val="accent2">
-                <a:hueOff val="0"/>
-                <a:satOff val="0"/>
-                <a:lumOff val="0"/>
-                <a:alphaOff val="0"/>
-                <a:satMod val="103000"/>
-                <a:lumMod val="102000"/>
-                <a:tint val="94000"/>
-              </a:schemeClr>
-            </a:gs>
-            <a:gs pos="50000">
-              <a:schemeClr val="accent2">
-                <a:hueOff val="0"/>
-                <a:satOff val="0"/>
-                <a:lumOff val="0"/>
-                <a:alphaOff val="0"/>
-                <a:satMod val="110000"/>
-                <a:lumMod val="100000"/>
-                <a:shade val="100000"/>
-              </a:schemeClr>
-            </a:gs>
-            <a:gs pos="100000">
-              <a:schemeClr val="accent2">
-                <a:hueOff val="0"/>
-                <a:satOff val="0"/>
-                <a:lumOff val="0"/>
-                <a:alphaOff val="0"/>
-                <a:lumMod val="99000"/>
-                <a:satMod val="120000"/>
-                <a:shade val="78000"/>
-              </a:schemeClr>
-            </a:gs>
-          </a:gsLst>
-          <a:lin ang="5400000" scaled="0"/>
-        </a:gradFill>
-        <a:ln>
-          <a:noFill/>
-        </a:ln>
-        <a:effectLst>
-          <a:outerShdw blurRad="57150" dist="19050" dir="5400000" algn="ctr" rotWithShape="0">
-            <a:srgbClr val="000000">
-              <a:alpha val="63000"/>
-            </a:srgbClr>
-          </a:outerShdw>
-        </a:effectLst>
-      </dsp:spPr>
-      <dsp:style>
-        <a:lnRef idx="0">
-          <a:scrgbClr r="0" g="0" b="0"/>
-        </a:lnRef>
-        <a:fillRef idx="3">
-          <a:scrgbClr r="0" g="0" b="0"/>
-        </a:fillRef>
-        <a:effectRef idx="3">
-          <a:scrgbClr r="0" g="0" b="0"/>
-        </a:effectRef>
-        <a:fontRef idx="minor">
-          <a:schemeClr val="lt1"/>
-        </a:fontRef>
-      </dsp:style>
-      <dsp:txBody>
-        <a:bodyPr spcFirstLastPara="0" vert="horz" wrap="square" lIns="15240" tIns="15240" rIns="15240" bIns="15240" numCol="1" spcCol="1270" anchor="ctr" anchorCtr="0">
-          <a:noAutofit/>
-        </a:bodyPr>
-        <a:lstStyle/>
-        <a:p>
-          <a:pPr marL="0" lvl="0" indent="0" algn="ctr" defTabSz="1066800">
-            <a:lnSpc>
-              <a:spcPct val="90000"/>
-            </a:lnSpc>
-            <a:spcBef>
-              <a:spcPct val="0"/>
-            </a:spcBef>
-            <a:spcAft>
-              <a:spcPct val="35000"/>
-            </a:spcAft>
-            <a:buNone/>
-          </a:pPr>
-          <a:r>
-            <a:rPr lang="en-US" sz="2400" kern="1200" dirty="0"/>
-            <a:t>Staff</a:t>
-          </a:r>
-          <a:endParaRPr lang="id-ID" sz="2400" kern="1200" dirty="0"/>
-        </a:p>
-      </dsp:txBody>
-      <dsp:txXfrm>
-        <a:off x="5541060" y="3370298"/>
-        <a:ext cx="1582043" cy="791021"/>
-      </dsp:txXfrm>
-    </dsp:sp>
-    <dsp:sp modelId="{FA7F3C41-75C2-47B7-8C00-CFC38AA87095}">
-      <dsp:nvSpPr>
-        <dsp:cNvPr id="0" name=""/>
-        <dsp:cNvSpPr/>
-      </dsp:nvSpPr>
-      <dsp:spPr>
-        <a:xfrm>
-          <a:off x="783664" y="1123795"/>
-          <a:ext cx="2510893" cy="791021"/>
-        </a:xfrm>
-        <a:prstGeom prst="rect">
-          <a:avLst/>
-        </a:prstGeom>
-        <a:gradFill rotWithShape="0">
-          <a:gsLst>
-            <a:gs pos="0">
-              <a:schemeClr val="accent2">
-                <a:hueOff val="0"/>
-                <a:satOff val="0"/>
-                <a:lumOff val="0"/>
-                <a:alphaOff val="0"/>
-                <a:satMod val="103000"/>
-                <a:lumMod val="102000"/>
-                <a:tint val="94000"/>
-              </a:schemeClr>
-            </a:gs>
-            <a:gs pos="50000">
-              <a:schemeClr val="accent2">
-                <a:hueOff val="0"/>
-                <a:satOff val="0"/>
-                <a:lumOff val="0"/>
-                <a:alphaOff val="0"/>
-                <a:satMod val="110000"/>
-                <a:lumMod val="100000"/>
-                <a:shade val="100000"/>
-              </a:schemeClr>
-            </a:gs>
-            <a:gs pos="100000">
-              <a:schemeClr val="accent2">
-                <a:hueOff val="0"/>
-                <a:satOff val="0"/>
-                <a:lumOff val="0"/>
-                <a:alphaOff val="0"/>
-                <a:lumMod val="99000"/>
-                <a:satMod val="120000"/>
-                <a:shade val="78000"/>
-              </a:schemeClr>
-            </a:gs>
-          </a:gsLst>
-          <a:lin ang="5400000" scaled="0"/>
-        </a:gradFill>
-        <a:ln>
-          <a:noFill/>
-        </a:ln>
-        <a:effectLst>
-          <a:outerShdw blurRad="57150" dist="19050" dir="5400000" algn="ctr" rotWithShape="0">
-            <a:srgbClr val="000000">
-              <a:alpha val="63000"/>
-            </a:srgbClr>
-          </a:outerShdw>
-        </a:effectLst>
-      </dsp:spPr>
-      <dsp:style>
-        <a:lnRef idx="0">
-          <a:scrgbClr r="0" g="0" b="0"/>
-        </a:lnRef>
-        <a:fillRef idx="3">
-          <a:scrgbClr r="0" g="0" b="0"/>
-        </a:fillRef>
-        <a:effectRef idx="3">
-          <a:scrgbClr r="0" g="0" b="0"/>
-        </a:effectRef>
-        <a:fontRef idx="minor">
-          <a:schemeClr val="lt1"/>
-        </a:fontRef>
-      </dsp:style>
-      <dsp:txBody>
-        <a:bodyPr spcFirstLastPara="0" vert="horz" wrap="square" lIns="15240" tIns="15240" rIns="15240" bIns="15240" numCol="1" spcCol="1270" anchor="ctr" anchorCtr="0">
-          <a:noAutofit/>
-        </a:bodyPr>
-        <a:lstStyle/>
-        <a:p>
-          <a:pPr marL="0" lvl="0" indent="0" algn="ctr" defTabSz="1066800">
-            <a:lnSpc>
-              <a:spcPct val="90000"/>
-            </a:lnSpc>
-            <a:spcBef>
-              <a:spcPct val="0"/>
-            </a:spcBef>
-            <a:spcAft>
-              <a:spcPct val="35000"/>
-            </a:spcAft>
-            <a:buNone/>
-          </a:pPr>
-          <a:r>
-            <a:rPr lang="id-ID" sz="2400" b="1" i="0" kern="1200" dirty="0"/>
-            <a:t>Manager</a:t>
-          </a:r>
-          <a:endParaRPr lang="id-ID" sz="2400" kern="1200" dirty="0"/>
-        </a:p>
-      </dsp:txBody>
-      <dsp:txXfrm>
-        <a:off x="783664" y="1123795"/>
-        <a:ext cx="2510893" cy="791021"/>
+        <a:off x="1506723" y="1645253"/>
+        <a:ext cx="2314277" cy="1157138"/>
       </dsp:txXfrm>
     </dsp:sp>
   </dsp:spTree>
@@ -3609,64 +3343,17 @@
       <dsp:cNvGrpSpPr/>
     </dsp:nvGrpSpPr>
     <dsp:grpSpPr/>
-    <dsp:sp modelId="{1F95FA60-AE41-4C92-8499-F576586D710A}">
+    <dsp:sp modelId="{EAAAD7C4-03E2-4C9D-95A7-7B871B5E81F5}">
       <dsp:nvSpPr>
         <dsp:cNvPr id="0" name=""/>
         <dsp:cNvSpPr/>
       </dsp:nvSpPr>
       <dsp:spPr>
         <a:xfrm>
-          <a:off x="1244010" y="-90560"/>
-          <a:ext cx="4271052" cy="4271052"/>
+          <a:off x="2573067" y="1403"/>
+          <a:ext cx="1573205" cy="1573205"/>
         </a:xfrm>
-        <a:prstGeom prst="circularArrow">
-          <a:avLst>
-            <a:gd name="adj1" fmla="val 4668"/>
-            <a:gd name="adj2" fmla="val 272909"/>
-            <a:gd name="adj3" fmla="val 12952830"/>
-            <a:gd name="adj4" fmla="val 17948581"/>
-            <a:gd name="adj5" fmla="val 4847"/>
-          </a:avLst>
-        </a:prstGeom>
-        <a:solidFill>
-          <a:schemeClr val="accent1">
-            <a:tint val="40000"/>
-            <a:hueOff val="0"/>
-            <a:satOff val="0"/>
-            <a:lumOff val="0"/>
-            <a:alphaOff val="0"/>
-          </a:schemeClr>
-        </a:solidFill>
-        <a:ln>
-          <a:noFill/>
-        </a:ln>
-        <a:effectLst/>
-        <a:sp3d z="-227350" prstMaterial="matte"/>
-      </dsp:spPr>
-      <dsp:style>
-        <a:lnRef idx="0">
-          <a:scrgbClr r="0" g="0" b="0"/>
-        </a:lnRef>
-        <a:fillRef idx="1">
-          <a:scrgbClr r="0" g="0" b="0"/>
-        </a:fillRef>
-        <a:effectRef idx="0">
-          <a:scrgbClr r="0" g="0" b="0"/>
-        </a:effectRef>
-        <a:fontRef idx="minor"/>
-      </dsp:style>
-    </dsp:sp>
-    <dsp:sp modelId="{8A0353CC-C72B-40FE-908C-D2499F68FCF3}">
-      <dsp:nvSpPr>
-        <dsp:cNvPr id="0" name=""/>
-        <dsp:cNvSpPr/>
-      </dsp:nvSpPr>
-      <dsp:spPr>
-        <a:xfrm>
-          <a:off x="2001649" y="1287"/>
-          <a:ext cx="2755774" cy="1377887"/>
-        </a:xfrm>
-        <a:prstGeom prst="roundRect">
+        <a:prstGeom prst="ellipse">
           <a:avLst/>
         </a:prstGeom>
         <a:solidFill>
@@ -3700,13 +3387,13 @@
         </a:fontRef>
       </dsp:style>
       <dsp:txBody>
-        <a:bodyPr spcFirstLastPara="0" vert="horz" wrap="square" lIns="91440" tIns="91440" rIns="91440" bIns="91440" numCol="1" spcCol="1270" anchor="ctr" anchorCtr="0">
+        <a:bodyPr spcFirstLastPara="0" vert="horz" wrap="square" lIns="20320" tIns="20320" rIns="20320" bIns="20320" numCol="1" spcCol="1270" anchor="ctr" anchorCtr="0">
           <a:noAutofit/>
           <a:sp3d extrusionH="28000" prstMaterial="matte"/>
         </a:bodyPr>
         <a:lstStyle/>
         <a:p>
-          <a:pPr marL="0" lvl="0" indent="0" algn="ctr" defTabSz="1066800">
+          <a:pPr marL="0" lvl="0" indent="0" algn="ctr" defTabSz="711200">
             <a:lnSpc>
               <a:spcPct val="90000"/>
             </a:lnSpc>
@@ -3719,28 +3406,99 @@
             <a:buNone/>
           </a:pPr>
           <a:r>
-            <a:rPr lang="id-ID" sz="2400" b="1" i="0" kern="1200"/>
-            <a:t>PROSPEK</a:t>
+            <a:rPr lang="id-ID" sz="1600" b="1" i="0" kern="1200" dirty="0"/>
+            <a:t>Prospek</a:t>
           </a:r>
-          <a:endParaRPr lang="id-ID" sz="2400" kern="1200" dirty="0"/>
+          <a:endParaRPr lang="id-ID" sz="1600" kern="1200" dirty="0"/>
         </a:p>
       </dsp:txBody>
       <dsp:txXfrm>
-        <a:off x="2068912" y="68550"/>
-        <a:ext cx="2621248" cy="1243361"/>
+        <a:off x="2803458" y="231794"/>
+        <a:ext cx="1112423" cy="1112423"/>
       </dsp:txXfrm>
     </dsp:sp>
-    <dsp:sp modelId="{62174D5B-66F9-48CA-90B6-51A6A15A8368}">
+    <dsp:sp modelId="{CDF85A18-49E0-4103-9489-60B2351C1683}">
+      <dsp:nvSpPr>
+        <dsp:cNvPr id="0" name=""/>
+        <dsp:cNvSpPr/>
+      </dsp:nvSpPr>
+      <dsp:spPr>
+        <a:xfrm rot="2700000">
+          <a:off x="3977387" y="1349348"/>
+          <a:ext cx="418207" cy="530956"/>
+        </a:xfrm>
+        <a:prstGeom prst="rightArrow">
+          <a:avLst>
+            <a:gd name="adj1" fmla="val 60000"/>
+            <a:gd name="adj2" fmla="val 50000"/>
+          </a:avLst>
+        </a:prstGeom>
+        <a:solidFill>
+          <a:schemeClr val="accent1">
+            <a:tint val="60000"/>
+            <a:hueOff val="0"/>
+            <a:satOff val="0"/>
+            <a:lumOff val="0"/>
+            <a:alphaOff val="0"/>
+          </a:schemeClr>
+        </a:solidFill>
+        <a:ln>
+          <a:noFill/>
+        </a:ln>
+        <a:effectLst/>
+        <a:sp3d z="-227350" prstMaterial="matte"/>
+      </dsp:spPr>
+      <dsp:style>
+        <a:lnRef idx="0">
+          <a:scrgbClr r="0" g="0" b="0"/>
+        </a:lnRef>
+        <a:fillRef idx="1">
+          <a:scrgbClr r="0" g="0" b="0"/>
+        </a:fillRef>
+        <a:effectRef idx="0">
+          <a:scrgbClr r="0" g="0" b="0"/>
+        </a:effectRef>
+        <a:fontRef idx="minor">
+          <a:schemeClr val="lt1"/>
+        </a:fontRef>
+      </dsp:style>
+      <dsp:txBody>
+        <a:bodyPr spcFirstLastPara="0" vert="horz" wrap="square" lIns="0" tIns="0" rIns="0" bIns="0" numCol="1" spcCol="1270" anchor="ctr" anchorCtr="0">
+          <a:noAutofit/>
+        </a:bodyPr>
+        <a:lstStyle/>
+        <a:p>
+          <a:pPr marL="0" lvl="0" indent="0" algn="ctr" defTabSz="577850">
+            <a:lnSpc>
+              <a:spcPct val="90000"/>
+            </a:lnSpc>
+            <a:spcBef>
+              <a:spcPct val="0"/>
+            </a:spcBef>
+            <a:spcAft>
+              <a:spcPct val="35000"/>
+            </a:spcAft>
+            <a:buNone/>
+          </a:pPr>
+          <a:endParaRPr lang="id-ID" sz="1300" kern="1200"/>
+        </a:p>
+      </dsp:txBody>
+      <dsp:txXfrm>
+        <a:off x="3995760" y="1411181"/>
+        <a:ext cx="292745" cy="318574"/>
+      </dsp:txXfrm>
+    </dsp:sp>
+    <dsp:sp modelId="{67308124-F5EE-46B2-BCA4-3527CFE2A501}">
       <dsp:nvSpPr>
         <dsp:cNvPr id="0" name=""/>
         <dsp:cNvSpPr/>
       </dsp:nvSpPr>
       <dsp:spPr>
         <a:xfrm>
-          <a:off x="3535241" y="1534878"/>
-          <a:ext cx="2755774" cy="1377887"/>
+          <a:off x="4243448" y="1671784"/>
+          <a:ext cx="1573205" cy="1573205"/>
         </a:xfrm>
-        <a:prstGeom prst="roundRect">
+        <a:prstGeom prst="ellipse">
           <a:avLst/>
         </a:prstGeom>
         <a:solidFill>
@@ -3774,13 +3532,13 @@
         </a:fontRef>
       </dsp:style>
       <dsp:txBody>
-        <a:bodyPr spcFirstLastPara="0" vert="horz" wrap="square" lIns="91440" tIns="91440" rIns="91440" bIns="91440" numCol="1" spcCol="1270" anchor="ctr" anchorCtr="0">
+        <a:bodyPr spcFirstLastPara="0" vert="horz" wrap="square" lIns="20320" tIns="20320" rIns="20320" bIns="20320" numCol="1" spcCol="1270" anchor="ctr" anchorCtr="0">
           <a:noAutofit/>
           <a:sp3d extrusionH="28000" prstMaterial="matte"/>
         </a:bodyPr>
         <a:lstStyle/>
         <a:p>
-          <a:pPr marL="0" lvl="0" indent="0" algn="ctr" defTabSz="1066800">
+          <a:pPr marL="0" lvl="0" indent="0" algn="ctr" defTabSz="711200">
             <a:lnSpc>
               <a:spcPct val="90000"/>
             </a:lnSpc>
@@ -3793,28 +3551,99 @@
             <a:buNone/>
           </a:pPr>
           <a:r>
-            <a:rPr lang="id-ID" sz="2400" b="1" i="0" kern="1200" dirty="0"/>
-            <a:t>PENAWARAN</a:t>
+            <a:rPr lang="id-ID" sz="1600" b="1" i="0" kern="1200" dirty="0"/>
+            <a:t>Penawaran</a:t>
           </a:r>
-          <a:endParaRPr lang="id-ID" sz="2400" kern="1200" dirty="0"/>
+          <a:endParaRPr lang="id-ID" sz="1600" kern="1200" dirty="0"/>
         </a:p>
       </dsp:txBody>
       <dsp:txXfrm>
-        <a:off x="3602504" y="1602141"/>
-        <a:ext cx="2621248" cy="1243361"/>
+        <a:off x="4473839" y="1902175"/>
+        <a:ext cx="1112423" cy="1112423"/>
       </dsp:txXfrm>
     </dsp:sp>
-    <dsp:sp modelId="{5B5F3E72-C8C8-46A7-8749-34F4EB968170}">
+    <dsp:sp modelId="{67CC3EA2-82BF-487B-89AE-936C86DE084E}">
+      <dsp:nvSpPr>
+        <dsp:cNvPr id="0" name=""/>
+        <dsp:cNvSpPr/>
+      </dsp:nvSpPr>
+      <dsp:spPr>
+        <a:xfrm rot="8100000">
+          <a:off x="3994126" y="3019729"/>
+          <a:ext cx="418207" cy="530956"/>
+        </a:xfrm>
+        <a:prstGeom prst="rightArrow">
+          <a:avLst>
+            <a:gd name="adj1" fmla="val 60000"/>
+            <a:gd name="adj2" fmla="val 50000"/>
+          </a:avLst>
+        </a:prstGeom>
+        <a:solidFill>
+          <a:schemeClr val="accent1">
+            <a:tint val="60000"/>
+            <a:hueOff val="0"/>
+            <a:satOff val="0"/>
+            <a:lumOff val="0"/>
+            <a:alphaOff val="0"/>
+          </a:schemeClr>
+        </a:solidFill>
+        <a:ln>
+          <a:noFill/>
+        </a:ln>
+        <a:effectLst/>
+        <a:sp3d z="-227350" prstMaterial="matte"/>
+      </dsp:spPr>
+      <dsp:style>
+        <a:lnRef idx="0">
+          <a:scrgbClr r="0" g="0" b="0"/>
+        </a:lnRef>
+        <a:fillRef idx="1">
+          <a:scrgbClr r="0" g="0" b="0"/>
+        </a:fillRef>
+        <a:effectRef idx="0">
+          <a:scrgbClr r="0" g="0" b="0"/>
+        </a:effectRef>
+        <a:fontRef idx="minor">
+          <a:schemeClr val="lt1"/>
+        </a:fontRef>
+      </dsp:style>
+      <dsp:txBody>
+        <a:bodyPr spcFirstLastPara="0" vert="horz" wrap="square" lIns="0" tIns="0" rIns="0" bIns="0" numCol="1" spcCol="1270" anchor="ctr" anchorCtr="0">
+          <a:noAutofit/>
+        </a:bodyPr>
+        <a:lstStyle/>
+        <a:p>
+          <a:pPr marL="0" lvl="0" indent="0" algn="ctr" defTabSz="577850">
+            <a:lnSpc>
+              <a:spcPct val="90000"/>
+            </a:lnSpc>
+            <a:spcBef>
+              <a:spcPct val="0"/>
+            </a:spcBef>
+            <a:spcAft>
+              <a:spcPct val="35000"/>
+            </a:spcAft>
+            <a:buNone/>
+          </a:pPr>
+          <a:endParaRPr lang="id-ID" sz="1300" kern="1200"/>
+        </a:p>
+      </dsp:txBody>
+      <dsp:txXfrm rot="10800000">
+        <a:off x="4101215" y="3081562"/>
+        <a:ext cx="292745" cy="318574"/>
+      </dsp:txXfrm>
+    </dsp:sp>
+    <dsp:sp modelId="{9131C37D-B921-4D6E-8F9A-EC44BE7C792E}">
       <dsp:nvSpPr>
         <dsp:cNvPr id="0" name=""/>
         <dsp:cNvSpPr/>
       </dsp:nvSpPr>
       <dsp:spPr>
         <a:xfrm>
-          <a:off x="2001649" y="3068470"/>
-          <a:ext cx="2755774" cy="1377887"/>
+          <a:off x="2573067" y="3342165"/>
+          <a:ext cx="1573205" cy="1573205"/>
         </a:xfrm>
-        <a:prstGeom prst="roundRect">
+        <a:prstGeom prst="ellipse">
           <a:avLst/>
         </a:prstGeom>
         <a:solidFill>
@@ -3848,13 +3677,13 @@
         </a:fontRef>
       </dsp:style>
       <dsp:txBody>
-        <a:bodyPr spcFirstLastPara="0" vert="horz" wrap="square" lIns="91440" tIns="91440" rIns="91440" bIns="91440" numCol="1" spcCol="1270" anchor="ctr" anchorCtr="0">
+        <a:bodyPr spcFirstLastPara="0" vert="horz" wrap="square" lIns="20320" tIns="20320" rIns="20320" bIns="20320" numCol="1" spcCol="1270" anchor="ctr" anchorCtr="0">
           <a:noAutofit/>
           <a:sp3d extrusionH="28000" prstMaterial="matte"/>
         </a:bodyPr>
         <a:lstStyle/>
         <a:p>
-          <a:pPr marL="0" lvl="0" indent="0" algn="ctr" defTabSz="1066800">
+          <a:pPr marL="0" lvl="0" indent="0" algn="ctr" defTabSz="711200">
             <a:lnSpc>
               <a:spcPct val="90000"/>
             </a:lnSpc>
@@ -3867,28 +3696,99 @@
             <a:buNone/>
           </a:pPr>
           <a:r>
-            <a:rPr lang="id-ID" sz="2400" b="1" i="0" kern="1200" dirty="0"/>
-            <a:t>NEGOSIASI</a:t>
+            <a:rPr lang="id-ID" sz="1600" b="1" i="0" kern="1200" dirty="0"/>
+            <a:t>Negosiasi</a:t>
           </a:r>
-          <a:endParaRPr lang="id-ID" sz="2400" kern="1200" dirty="0"/>
+          <a:endParaRPr lang="id-ID" sz="1600" kern="1200" dirty="0"/>
         </a:p>
       </dsp:txBody>
       <dsp:txXfrm>
-        <a:off x="2068912" y="3135733"/>
-        <a:ext cx="2621248" cy="1243361"/>
+        <a:off x="2803458" y="3572556"/>
+        <a:ext cx="1112423" cy="1112423"/>
       </dsp:txXfrm>
     </dsp:sp>
-    <dsp:sp modelId="{81BD5BF2-0A03-4E3C-9088-4B124F76B357}">
+    <dsp:sp modelId="{C65104E5-0018-4EEB-A9D8-81C06F8E0AFD}">
+      <dsp:nvSpPr>
+        <dsp:cNvPr id="0" name=""/>
+        <dsp:cNvSpPr/>
+      </dsp:nvSpPr>
+      <dsp:spPr>
+        <a:xfrm rot="13500000">
+          <a:off x="2323745" y="3036468"/>
+          <a:ext cx="418207" cy="530956"/>
+        </a:xfrm>
+        <a:prstGeom prst="rightArrow">
+          <a:avLst>
+            <a:gd name="adj1" fmla="val 60000"/>
+            <a:gd name="adj2" fmla="val 50000"/>
+          </a:avLst>
+        </a:prstGeom>
+        <a:solidFill>
+          <a:schemeClr val="accent1">
+            <a:tint val="60000"/>
+            <a:hueOff val="0"/>
+            <a:satOff val="0"/>
+            <a:lumOff val="0"/>
+            <a:alphaOff val="0"/>
+          </a:schemeClr>
+        </a:solidFill>
+        <a:ln>
+          <a:noFill/>
+        </a:ln>
+        <a:effectLst/>
+        <a:sp3d z="-227350" prstMaterial="matte"/>
+      </dsp:spPr>
+      <dsp:style>
+        <a:lnRef idx="0">
+          <a:scrgbClr r="0" g="0" b="0"/>
+        </a:lnRef>
+        <a:fillRef idx="1">
+          <a:scrgbClr r="0" g="0" b="0"/>
+        </a:fillRef>
+        <a:effectRef idx="0">
+          <a:scrgbClr r="0" g="0" b="0"/>
+        </a:effectRef>
+        <a:fontRef idx="minor">
+          <a:schemeClr val="lt1"/>
+        </a:fontRef>
+      </dsp:style>
+      <dsp:txBody>
+        <a:bodyPr spcFirstLastPara="0" vert="horz" wrap="square" lIns="0" tIns="0" rIns="0" bIns="0" numCol="1" spcCol="1270" anchor="ctr" anchorCtr="0">
+          <a:noAutofit/>
+        </a:bodyPr>
+        <a:lstStyle/>
+        <a:p>
+          <a:pPr marL="0" lvl="0" indent="0" algn="ctr" defTabSz="577850">
+            <a:lnSpc>
+              <a:spcPct val="90000"/>
+            </a:lnSpc>
+            <a:spcBef>
+              <a:spcPct val="0"/>
+            </a:spcBef>
+            <a:spcAft>
+              <a:spcPct val="35000"/>
+            </a:spcAft>
+            <a:buNone/>
+          </a:pPr>
+          <a:endParaRPr lang="id-ID" sz="1300" kern="1200"/>
+        </a:p>
+      </dsp:txBody>
+      <dsp:txXfrm rot="10800000">
+        <a:off x="2430834" y="3187017"/>
+        <a:ext cx="292745" cy="318574"/>
+      </dsp:txXfrm>
+    </dsp:sp>
+    <dsp:sp modelId="{3868C6B5-6E70-4AB9-91DF-B475DC572BC9}">
       <dsp:nvSpPr>
         <dsp:cNvPr id="0" name=""/>
         <dsp:cNvSpPr/>
       </dsp:nvSpPr>
       <dsp:spPr>
         <a:xfrm>
-          <a:off x="468057" y="1534878"/>
-          <a:ext cx="2755774" cy="1377887"/>
+          <a:off x="902686" y="1671784"/>
+          <a:ext cx="1573205" cy="1573205"/>
         </a:xfrm>
-        <a:prstGeom prst="roundRect">
+        <a:prstGeom prst="ellipse">
           <a:avLst/>
         </a:prstGeom>
         <a:solidFill>
@@ -3922,13 +3822,13 @@
         </a:fontRef>
       </dsp:style>
       <dsp:txBody>
-        <a:bodyPr spcFirstLastPara="0" vert="horz" wrap="square" lIns="91440" tIns="91440" rIns="91440" bIns="91440" numCol="1" spcCol="1270" anchor="ctr" anchorCtr="0">
+        <a:bodyPr spcFirstLastPara="0" vert="horz" wrap="square" lIns="20320" tIns="20320" rIns="20320" bIns="20320" numCol="1" spcCol="1270" anchor="ctr" anchorCtr="0">
           <a:noAutofit/>
           <a:sp3d extrusionH="28000" prstMaterial="matte"/>
         </a:bodyPr>
         <a:lstStyle/>
         <a:p>
-          <a:pPr marL="0" lvl="0" indent="0" algn="ctr" defTabSz="1066800">
+          <a:pPr marL="0" lvl="0" indent="0" algn="ctr" defTabSz="711200">
             <a:lnSpc>
               <a:spcPct val="90000"/>
             </a:lnSpc>
@@ -3941,15 +3841,86 @@
             <a:buNone/>
           </a:pPr>
           <a:r>
-            <a:rPr lang="id-ID" sz="2400" b="1" i="0" kern="1200" dirty="0"/>
-            <a:t>DEAL</a:t>
+            <a:rPr lang="id-ID" sz="1600" b="1" i="0" kern="1200" dirty="0"/>
+            <a:t>Deal</a:t>
           </a:r>
-          <a:endParaRPr lang="id-ID" sz="2400" kern="1200" dirty="0"/>
+          <a:endParaRPr lang="id-ID" sz="1600" kern="1200" dirty="0"/>
         </a:p>
       </dsp:txBody>
       <dsp:txXfrm>
-        <a:off x="535320" y="1602141"/>
-        <a:ext cx="2621248" cy="1243361"/>
+        <a:off x="1133077" y="1902175"/>
+        <a:ext cx="1112423" cy="1112423"/>
+      </dsp:txXfrm>
+    </dsp:sp>
+    <dsp:sp modelId="{2ABB50DD-D854-43FE-883D-0B801DB34FD6}">
+      <dsp:nvSpPr>
+        <dsp:cNvPr id="0" name=""/>
+        <dsp:cNvSpPr/>
+      </dsp:nvSpPr>
+      <dsp:spPr>
+        <a:xfrm rot="18900000">
+          <a:off x="2307007" y="1366087"/>
+          <a:ext cx="418207" cy="530956"/>
+        </a:xfrm>
+        <a:prstGeom prst="rightArrow">
+          <a:avLst>
+            <a:gd name="adj1" fmla="val 60000"/>
+            <a:gd name="adj2" fmla="val 50000"/>
+          </a:avLst>
+        </a:prstGeom>
+        <a:solidFill>
+          <a:schemeClr val="accent1">
+            <a:tint val="60000"/>
+            <a:hueOff val="0"/>
+            <a:satOff val="0"/>
+            <a:lumOff val="0"/>
+            <a:alphaOff val="0"/>
+          </a:schemeClr>
+        </a:solidFill>
+        <a:ln>
+          <a:noFill/>
+        </a:ln>
+        <a:effectLst/>
+        <a:sp3d z="-227350" prstMaterial="matte"/>
+      </dsp:spPr>
+      <dsp:style>
+        <a:lnRef idx="0">
+          <a:scrgbClr r="0" g="0" b="0"/>
+        </a:lnRef>
+        <a:fillRef idx="1">
+          <a:scrgbClr r="0" g="0" b="0"/>
+        </a:fillRef>
+        <a:effectRef idx="0">
+          <a:scrgbClr r="0" g="0" b="0"/>
+        </a:effectRef>
+        <a:fontRef idx="minor">
+          <a:schemeClr val="lt1"/>
+        </a:fontRef>
+      </dsp:style>
+      <dsp:txBody>
+        <a:bodyPr spcFirstLastPara="0" vert="horz" wrap="square" lIns="0" tIns="0" rIns="0" bIns="0" numCol="1" spcCol="1270" anchor="ctr" anchorCtr="0">
+          <a:noAutofit/>
+        </a:bodyPr>
+        <a:lstStyle/>
+        <a:p>
+          <a:pPr marL="0" lvl="0" indent="0" algn="ctr" defTabSz="577850">
+            <a:lnSpc>
+              <a:spcPct val="90000"/>
+            </a:lnSpc>
+            <a:spcBef>
+              <a:spcPct val="0"/>
+            </a:spcBef>
+            <a:spcAft>
+              <a:spcPct val="35000"/>
+            </a:spcAft>
+            <a:buNone/>
+          </a:pPr>
+          <a:endParaRPr lang="id-ID" sz="1300" kern="1200"/>
+        </a:p>
+      </dsp:txBody>
+      <dsp:txXfrm>
+        <a:off x="2325380" y="1516636"/>
+        <a:ext cx="292745" cy="318574"/>
       </dsp:txXfrm>
     </dsp:sp>
   </dsp:spTree>
@@ -5103,11 +5074,12 @@
 </file>
 
 <file path=ppt/diagrams/layout2.xml><?xml version="1.0" encoding="utf-8"?>
-<dgm:layoutDef xmlns:dgm="http://schemas.openxmlformats.org/drawingml/2006/diagram" xmlns:a="http://schemas.openxmlformats.org/drawingml/2006/main" uniqueId="urn:microsoft.com/office/officeart/2005/8/layout/cycle3">
+<dgm:layoutDef xmlns:dgm="http://schemas.openxmlformats.org/drawingml/2006/diagram" xmlns:a="http://schemas.openxmlformats.org/drawingml/2006/main" uniqueId="urn:microsoft.com/office/officeart/2005/8/layout/cycle2">
   <dgm:title val=""/>
   <dgm:desc val=""/>
   <dgm:catLst>
-    <dgm:cat type="cycle" pri="5000"/>
+    <dgm:cat type="cycle" pri="1000"/>
+    <dgm:cat type="convert" pri="10000"/>
   </dgm:catLst>
   <dgm:sampData>
     <dgm:dataModel>
@@ -5180,327 +5152,134 @@
       <dgm:whole/>
     </dgm:dataModel>
   </dgm:clrData>
-  <dgm:layoutNode name="Name0">
+  <dgm:layoutNode name="cycle">
     <dgm:varLst>
       <dgm:dir/>
       <dgm:resizeHandles val="exact"/>
     </dgm:varLst>
-    <dgm:choose name="Name1">
-      <dgm:if name="Name2" axis="ch" ptType="node" func="cnt" op="equ" val="2">
-        <dgm:alg type="composite">
-          <dgm:param type="ar" val="0.9"/>
+    <dgm:choose name="Name0">
+      <dgm:if name="Name1" func="var" arg="dir" op="equ" val="norm">
+        <dgm:choose name="Name2">
+          <dgm:if name="Name3" axis="ch" ptType="node" func="cnt" op="gt" val="2">
+            <dgm:alg type="cycle">
+              <dgm:param type="stAng" val="0"/>
+              <dgm:param type="spanAng" val="360"/>
+            </dgm:alg>
+          </dgm:if>
+          <dgm:else name="Name4">
+            <dgm:alg type="cycle">
+              <dgm:param type="stAng" val="-90"/>
+              <dgm:param type="spanAng" val="360"/>
+            </dgm:alg>
+          </dgm:else>
+        </dgm:choose>
+      </dgm:if>
+      <dgm:else name="Name5">
+        <dgm:choose name="Name6">
+          <dgm:if name="Name7" axis="ch" ptType="node" func="cnt" op="gt" val="2">
+            <dgm:alg type="cycle">
+              <dgm:param type="stAng" val="0"/>
+              <dgm:param type="spanAng" val="-360"/>
+            </dgm:alg>
+          </dgm:if>
+          <dgm:else name="Name8">
+            <dgm:alg type="cycle">
+              <dgm:param type="stAng" val="90"/>
+              <dgm:param type="spanAng" val="-360"/>
+            </dgm:alg>
+          </dgm:else>
+        </dgm:choose>
+      </dgm:else>
+    </dgm:choose>
+    <dgm:shape xmlns:r="http://schemas.openxmlformats.org/officeDocument/2006/relationships" r:blip="">
+      <dgm:adjLst/>
+    </dgm:shape>
+    <dgm:presOf/>
+    <dgm:constrLst>
+      <dgm:constr type="w" for="ch" ptType="node" refType="w"/>
+      <dgm:constr type="w" for="ch" ptType="sibTrans" refType="w" refFor="ch" refPtType="node" op="equ" fact="0.25"/>
+      <dgm:constr type="sibSp" refType="w" refFor="ch" refPtType="node" fact="0.5"/>
+      <dgm:constr type="primFontSz" for="ch" ptType="node" op="equ" val="65"/>
+      <dgm:constr type="primFontSz" for="des" forName="connectorText" op="equ" val="55"/>
+      <dgm:constr type="primFontSz" for="des" forName="connectorText" refType="primFontSz" refFor="ch" refPtType="node" op="lte" fact="0.8"/>
+    </dgm:constrLst>
+    <dgm:ruleLst/>
+    <dgm:forEach name="nodesForEach" axis="ch" ptType="node">
+      <dgm:layoutNode name="node">
+        <dgm:varLst>
+          <dgm:bulletEnabled val="1"/>
+        </dgm:varLst>
+        <dgm:alg type="tx">
+          <dgm:param type="txAnchorVertCh" val="mid"/>
         </dgm:alg>
-        <dgm:shape xmlns:r="http://schemas.openxmlformats.org/officeDocument/2006/relationships" r:blip="">
+        <dgm:shape xmlns:r="http://schemas.openxmlformats.org/officeDocument/2006/relationships" type="ellipse" r:blip="">
           <dgm:adjLst/>
         </dgm:shape>
-        <dgm:presOf/>
+        <dgm:presOf axis="desOrSelf" ptType="node"/>
         <dgm:constrLst>
-          <dgm:constr type="primFontSz" for="ch" ptType="node" op="equ" val="65"/>
-          <dgm:constr type="ctrX" for="ch" forName="node1" refType="w" fact="0.5"/>
-          <dgm:constr type="t" for="ch" forName="node1"/>
-          <dgm:constr type="w" for="ch" forName="node1" refType="w" fact="0.8"/>
-          <dgm:constr type="h" for="ch" forName="node1" refType="w" refFor="ch" refForName="node1" fact="0.5"/>
-          <dgm:constr type="ctrX" for="ch" forName="sibTrans" refType="w" fact="0.5"/>
-          <dgm:constr type="t" for="ch" forName="sibTrans"/>
-          <dgm:constr type="w" for="ch" forName="sibTrans" refType="w" fact="0.8"/>
-          <dgm:constr type="h" for="ch" forName="sibTrans" refType="w" refFor="ch" refForName="node1" fact="0.5"/>
-          <dgm:constr type="userA" for="ch" forName="sibTrans" refType="w" fact="1.07"/>
-          <dgm:constr type="ctrX" for="ch" forName="node2" refType="w" fact="0.5"/>
-          <dgm:constr type="b" for="ch" forName="node2" refType="h"/>
-          <dgm:constr type="w" for="ch" forName="node2" refType="w" fact="0.8"/>
-          <dgm:constr type="h" for="ch" forName="node2" refType="w" refFor="ch" refForName="node1" fact="0.5"/>
-          <dgm:constr type="l" for="ch" forName="sp1"/>
-          <dgm:constr type="t" for="ch" forName="sp1" refType="h" fact="0.5"/>
-          <dgm:constr type="w" for="ch" forName="sp1" val="1"/>
-          <dgm:constr type="h" for="ch" forName="sp1" val="1"/>
-          <dgm:constr type="r" for="ch" forName="sp2" refType="w"/>
-          <dgm:constr type="t" for="ch" forName="sp2" refType="h" fact="0.5"/>
-          <dgm:constr type="w" for="ch" forName="sp2" val="1"/>
-          <dgm:constr type="h" for="ch" forName="sp2" val="1"/>
+          <dgm:constr type="h" refType="w"/>
+          <dgm:constr type="lMarg" refType="primFontSz" fact="0.1"/>
+          <dgm:constr type="rMarg" refType="primFontSz" fact="0.1"/>
+          <dgm:constr type="tMarg" refType="primFontSz" fact="0.1"/>
+          <dgm:constr type="bMarg" refType="primFontSz" fact="0.1"/>
         </dgm:constrLst>
-        <dgm:ruleLst/>
-      </dgm:if>
-      <dgm:else name="Name3">
-        <dgm:alg type="composite"/>
-        <dgm:shape xmlns:r="http://schemas.openxmlformats.org/officeDocument/2006/relationships" r:blip="">
-          <dgm:adjLst/>
-        </dgm:shape>
-        <dgm:presOf/>
-        <dgm:constrLst>
-          <dgm:constr type="primFontSz" for="ch" ptType="node" op="equ" val="65"/>
-        </dgm:constrLst>
-        <dgm:ruleLst/>
-      </dgm:else>
-    </dgm:choose>
-    <dgm:choose name="Name4">
-      <dgm:if name="Name5" axis="ch" ptType="node" func="cnt" op="equ" val="2">
-        <dgm:layoutNode name="node1">
-          <dgm:varLst>
-            <dgm:bulletEnabled val="1"/>
-          </dgm:varLst>
-          <dgm:alg type="tx"/>
-          <dgm:shape xmlns:r="http://schemas.openxmlformats.org/officeDocument/2006/relationships" type="roundRect" r:blip="">
-            <dgm:adjLst/>
-          </dgm:shape>
-          <dgm:presOf axis="ch desOrSelf" ptType="node node" st="1 1" cnt="1 0"/>
-          <dgm:constrLst>
-            <dgm:constr type="tMarg" refType="primFontSz" fact="0.3"/>
-            <dgm:constr type="bMarg" refType="primFontSz" fact="0.3"/>
-            <dgm:constr type="lMarg" refType="primFontSz" fact="0.3"/>
-            <dgm:constr type="rMarg" refType="primFontSz" fact="0.3"/>
-          </dgm:constrLst>
-          <dgm:ruleLst>
-            <dgm:rule type="primFontSz" val="5" fact="NaN" max="NaN"/>
-          </dgm:ruleLst>
-        </dgm:layoutNode>
-        <dgm:layoutNode name="sibTrans" styleLbl="bgShp">
-          <dgm:choose name="Name6">
-            <dgm:if name="Name7" func="var" arg="dir" op="equ" val="norm">
-              <dgm:alg type="conn">
-                <dgm:param type="connRout" val="longCurve"/>
-                <dgm:param type="begPts" val="midR"/>
-                <dgm:param type="endPts" val="midL"/>
-                <dgm:param type="dstNode" val="node1"/>
-              </dgm:alg>
-              <dgm:shape xmlns:r="http://schemas.openxmlformats.org/officeDocument/2006/relationships" type="conn" r:blip="" zOrderOff="-2">
+        <dgm:ruleLst>
+          <dgm:rule type="primFontSz" val="5" fact="NaN" max="NaN"/>
+        </dgm:ruleLst>
+      </dgm:layoutNode>
+      <dgm:choose name="Name9">
+        <dgm:if name="Name10" axis="par ch" ptType="doc node" func="cnt" op="gt" val="1">
+          <dgm:forEach name="sibTransForEach" axis="followSib" ptType="sibTrans" hideLastTrans="0" cnt="1">
+            <dgm:layoutNode name="sibTrans">
+              <dgm:choose name="Name11">
+                <dgm:if name="Name12" axis="par ch" ptType="doc node" func="cnt" op="lt" val="3">
+                  <dgm:alg type="conn">
+                    <dgm:param type="begPts" val="radial"/>
+                    <dgm:param type="endPts" val="radial"/>
+                  </dgm:alg>
+                </dgm:if>
+                <dgm:else name="Name13">
+                  <dgm:alg type="conn">
+                    <dgm:param type="begPts" val="auto"/>
+                    <dgm:param type="endPts" val="auto"/>
+                  </dgm:alg>
+                </dgm:else>
+              </dgm:choose>
+              <dgm:shape xmlns:r="http://schemas.openxmlformats.org/officeDocument/2006/relationships" type="conn" r:blip="">
                 <dgm:adjLst/>
               </dgm:shape>
-              <dgm:presOf axis="ch" ptType="sibTrans"/>
+              <dgm:presOf axis="self"/>
               <dgm:constrLst>
-                <dgm:constr type="userA"/>
-                <dgm:constr type="diam" refType="userA" fact="-1"/>
-                <dgm:constr type="wArH" refType="userA" fact="0.05"/>
-                <dgm:constr type="hArH" refType="userA" fact="0.1"/>
-                <dgm:constr type="stemThick" refType="userA" fact="0.06"/>
-                <dgm:constr type="begPad" refType="connDist" fact="-0.2"/>
-                <dgm:constr type="endPad" refType="connDist" fact="0.05"/>
+                <dgm:constr type="h" refType="w" fact="1.35"/>
+                <dgm:constr type="connDist"/>
+                <dgm:constr type="w" for="ch" refType="connDist" fact="0.45"/>
+                <dgm:constr type="h" for="ch" refType="h"/>
               </dgm:constrLst>
-            </dgm:if>
-            <dgm:else name="Name8">
-              <dgm:alg type="conn">
-                <dgm:param type="connRout" val="longCurve"/>
-                <dgm:param type="begPts" val="midL"/>
-                <dgm:param type="endPts" val="midR"/>
-                <dgm:param type="dstNode" val="node1"/>
-              </dgm:alg>
-              <dgm:shape xmlns:r="http://schemas.openxmlformats.org/officeDocument/2006/relationships" type="conn" r:blip="" zOrderOff="-2">
-                <dgm:adjLst/>
-              </dgm:shape>
-              <dgm:presOf axis="ch" ptType="sibTrans"/>
-              <dgm:constrLst>
-                <dgm:constr type="userA"/>
-                <dgm:constr type="diam" refType="userA"/>
-                <dgm:constr type="wArH" refType="userA" fact="0.05"/>
-                <dgm:constr type="hArH" refType="userA" fact="0.1"/>
-                <dgm:constr type="stemThick" refType="userA" fact="0.06"/>
-                <dgm:constr type="begPad" refType="connDist" fact="-0.2"/>
-                <dgm:constr type="endPad" refType="connDist" fact="0.05"/>
-              </dgm:constrLst>
-            </dgm:else>
-          </dgm:choose>
-          <dgm:ruleLst/>
-        </dgm:layoutNode>
-        <dgm:layoutNode name="node2">
-          <dgm:varLst>
-            <dgm:bulletEnabled val="1"/>
-          </dgm:varLst>
-          <dgm:alg type="tx"/>
-          <dgm:shape xmlns:r="http://schemas.openxmlformats.org/officeDocument/2006/relationships" type="roundRect" r:blip="">
-            <dgm:adjLst/>
-          </dgm:shape>
-          <dgm:presOf axis="ch desOrSelf" ptType="node node" st="2 1" cnt="1 0"/>
-          <dgm:constrLst>
-            <dgm:constr type="tMarg" refType="primFontSz" fact="0.3"/>
-            <dgm:constr type="bMarg" refType="primFontSz" fact="0.3"/>
-            <dgm:constr type="lMarg" refType="primFontSz" fact="0.3"/>
-            <dgm:constr type="rMarg" refType="primFontSz" fact="0.3"/>
-          </dgm:constrLst>
-          <dgm:ruleLst>
-            <dgm:rule type="primFontSz" val="5" fact="NaN" max="NaN"/>
-          </dgm:ruleLst>
-        </dgm:layoutNode>
-        <dgm:layoutNode name="sp1">
-          <dgm:alg type="sp"/>
-          <dgm:shape xmlns:r="http://schemas.openxmlformats.org/officeDocument/2006/relationships" r:blip="">
-            <dgm:adjLst/>
-          </dgm:shape>
-          <dgm:presOf/>
-          <dgm:constrLst/>
-          <dgm:ruleLst/>
-        </dgm:layoutNode>
-        <dgm:layoutNode name="sp2">
-          <dgm:alg type="sp"/>
-          <dgm:shape xmlns:r="http://schemas.openxmlformats.org/officeDocument/2006/relationships" r:blip="">
-            <dgm:adjLst/>
-          </dgm:shape>
-          <dgm:presOf/>
-          <dgm:constrLst/>
-          <dgm:ruleLst/>
-        </dgm:layoutNode>
-      </dgm:if>
-      <dgm:else name="Name9">
-        <dgm:layoutNode name="cycle">
-          <dgm:choose name="Name10">
-            <dgm:if name="Name11" func="var" arg="dir" op="equ" val="norm">
-              <dgm:alg type="cycle">
-                <dgm:param type="stAng" val="0"/>
-                <dgm:param type="spanAng" val="360"/>
-              </dgm:alg>
-              <dgm:shape xmlns:r="http://schemas.openxmlformats.org/officeDocument/2006/relationships" r:blip="">
-                <dgm:adjLst/>
-              </dgm:shape>
-              <dgm:presOf/>
-              <dgm:constrLst>
-                <dgm:constr type="diam" refType="w"/>
-                <dgm:constr type="w" for="ch" ptType="node" refType="w"/>
-                <dgm:constr type="sibSp" val="15"/>
-                <dgm:constr type="userA" for="ch" ptType="sibTrans" refType="diam" op="equ" fact="-1"/>
-                <dgm:constr type="wArH" for="ch" ptType="sibTrans" refType="diam" op="equ" fact="0.05"/>
-                <dgm:constr type="hArH" for="ch" ptType="sibTrans" refType="diam" op="equ" fact="0.1"/>
-                <dgm:constr type="stemThick" for="ch" ptType="sibTrans" refType="diam" op="equ" fact="0.065"/>
-                <dgm:constr type="primFontSz" for="ch" ptType="node" op="equ"/>
-              </dgm:constrLst>
-            </dgm:if>
-            <dgm:else name="Name12">
-              <dgm:alg type="cycle">
-                <dgm:param type="stAng" val="0"/>
-                <dgm:param type="spanAng" val="-360"/>
-              </dgm:alg>
-              <dgm:shape xmlns:r="http://schemas.openxmlformats.org/officeDocument/2006/relationships" r:blip="">
-                <dgm:adjLst/>
-              </dgm:shape>
-              <dgm:presOf/>
-              <dgm:constrLst>
-                <dgm:constr type="diam" refType="w"/>
-                <dgm:constr type="w" for="ch" ptType="node" refType="w"/>
-                <dgm:constr type="sibSp" val="15"/>
-                <dgm:constr type="userA" for="ch" ptType="sibTrans" refType="diam" op="equ"/>
-                <dgm:constr type="wArH" for="ch" ptType="sibTrans" refType="diam" op="equ" fact="0.05"/>
-                <dgm:constr type="hArH" for="ch" ptType="sibTrans" refType="diam" op="equ" fact="0.1"/>
-                <dgm:constr type="stemThick" for="ch" ptType="sibTrans" refType="diam" op="equ" fact="0.065"/>
-                <dgm:constr type="primFontSz" for="ch" ptType="node" op="equ"/>
-              </dgm:constrLst>
-            </dgm:else>
-          </dgm:choose>
-          <dgm:ruleLst/>
-          <dgm:forEach name="nodesFirstNodeForEach" axis="ch" ptType="node" cnt="1">
-            <dgm:layoutNode name="nodeFirstNode">
-              <dgm:varLst>
-                <dgm:bulletEnabled val="1"/>
-              </dgm:varLst>
-              <dgm:alg type="tx"/>
-              <dgm:shape xmlns:r="http://schemas.openxmlformats.org/officeDocument/2006/relationships" type="roundRect" r:blip="">
-                <dgm:adjLst/>
-              </dgm:shape>
-              <dgm:presOf axis="desOrSelf" ptType="node"/>
-              <dgm:constrLst>
-                <dgm:constr type="h" refType="w" fact="0.5"/>
-                <dgm:constr type="primFontSz" val="65"/>
-                <dgm:constr type="tMarg" refType="primFontSz" fact="0.3"/>
-                <dgm:constr type="bMarg" refType="primFontSz" fact="0.3"/>
-                <dgm:constr type="lMarg" refType="primFontSz" fact="0.3"/>
-                <dgm:constr type="rMarg" refType="primFontSz" fact="0.3"/>
-              </dgm:constrLst>
-              <dgm:ruleLst>
-                <dgm:rule type="primFontSz" val="5" fact="NaN" max="NaN"/>
-              </dgm:ruleLst>
-            </dgm:layoutNode>
-            <dgm:forEach name="sibTransForEach" axis="followSib" ptType="sibTrans" cnt="1">
-              <dgm:layoutNode name="sibTransFirstNode" styleLbl="bgShp">
-                <dgm:choose name="Name13">
-                  <dgm:if name="Name14" func="var" arg="dir" op="equ" val="norm">
-                    <dgm:alg type="conn">
-                      <dgm:param type="connRout" val="longCurve"/>
-                      <dgm:param type="begPts" val="midR"/>
-                      <dgm:param type="endPts" val="midL"/>
-                      <dgm:param type="dstNode" val="nodeFirstNode"/>
-                    </dgm:alg>
-                  </dgm:if>
-                  <dgm:else name="Name15">
-                    <dgm:alg type="conn">
-                      <dgm:param type="connRout" val="longCurve"/>
-                      <dgm:param type="begPts" val="midL"/>
-                      <dgm:param type="endPts" val="midR"/>
-                      <dgm:param type="dstNode" val="nodeFirstNode"/>
-                    </dgm:alg>
-                  </dgm:else>
-                </dgm:choose>
-                <dgm:shape xmlns:r="http://schemas.openxmlformats.org/officeDocument/2006/relationships" type="conn" r:blip="" zOrderOff="-2">
+              <dgm:ruleLst/>
+              <dgm:layoutNode name="connectorText">
+                <dgm:alg type="tx">
+                  <dgm:param type="autoTxRot" val="grav"/>
+                </dgm:alg>
+                <dgm:shape xmlns:r="http://schemas.openxmlformats.org/officeDocument/2006/relationships" type="conn" r:blip="" hideGeom="1">
                   <dgm:adjLst/>
                 </dgm:shape>
                 <dgm:presOf axis="self"/>
-                <dgm:choose name="Name16">
-                  <dgm:if name="Name17" axis="par ch" ptType="doc node" func="cnt" op="equ" val="3">
-                    <dgm:constrLst>
-                      <dgm:constr type="userA"/>
-                      <dgm:constr type="diam" refType="userA" fact="1.01"/>
-                      <dgm:constr type="begPad" refType="connDist" fact="-0.2"/>
-                      <dgm:constr type="endPad" refType="connDist" fact="0.05"/>
-                    </dgm:constrLst>
-                  </dgm:if>
-                  <dgm:if name="Name18" axis="par ch" ptType="doc node" func="cnt" op="equ" val="4">
-                    <dgm:constrLst>
-                      <dgm:constr type="userA"/>
-                      <dgm:constr type="diam" refType="userA" fact="1.26"/>
-                      <dgm:constr type="begPad" refType="connDist" fact="-0.2"/>
-                      <dgm:constr type="endPad" refType="connDist" fact="0.05"/>
-                    </dgm:constrLst>
-                  </dgm:if>
-                  <dgm:if name="Name19" axis="par ch" ptType="doc node" func="cnt" op="equ" val="5">
-                    <dgm:constrLst>
-                      <dgm:constr type="userA"/>
-                      <dgm:constr type="diam" refType="userA" fact="1.04"/>
-                      <dgm:constr type="begPad" refType="connDist" fact="-0.2"/>
-                      <dgm:constr type="endPad" refType="connDist" fact="0.05"/>
-                    </dgm:constrLst>
-                  </dgm:if>
-                  <dgm:if name="Name20" axis="par ch" ptType="doc node" func="cnt" op="equ" val="6">
-                    <dgm:constrLst>
-                      <dgm:constr type="userA"/>
-                      <dgm:constr type="diam" refType="userA" fact="1.1"/>
-                      <dgm:constr type="begPad" refType="connDist" fact="-0.2"/>
-                      <dgm:constr type="endPad" refType="connDist" fact="0.05"/>
-                    </dgm:constrLst>
-                  </dgm:if>
-                  <dgm:else name="Name21">
-                    <dgm:constrLst>
-                      <dgm:constr type="userA"/>
-                      <dgm:constr type="diam" refType="userA" fact="1.04"/>
-                      <dgm:constr type="begPad" refType="connDist" fact="-0.2"/>
-                      <dgm:constr type="endPad" refType="connDist" fact="0.05"/>
-                    </dgm:constrLst>
-                  </dgm:else>
-                </dgm:choose>
-                <dgm:ruleLst/>
+                <dgm:constrLst>
+                  <dgm:constr type="lMarg"/>
+                  <dgm:constr type="rMarg"/>
+                  <dgm:constr type="tMarg"/>
+                  <dgm:constr type="bMarg"/>
+                </dgm:constrLst>
+                <dgm:ruleLst>
+                  <dgm:rule type="primFontSz" val="5" fact="NaN" max="NaN"/>
+                </dgm:ruleLst>
               </dgm:layoutNode>
-            </dgm:forEach>
-          </dgm:forEach>
-          <dgm:forEach name="followingNodesForEach" axis="ch" ptType="node" st="2">
-            <dgm:layoutNode name="nodeFollowingNodes">
-              <dgm:varLst>
-                <dgm:bulletEnabled val="1"/>
-              </dgm:varLst>
-              <dgm:alg type="tx"/>
-              <dgm:shape xmlns:r="http://schemas.openxmlformats.org/officeDocument/2006/relationships" type="roundRect" r:blip="">
-                <dgm:adjLst/>
-              </dgm:shape>
-              <dgm:presOf axis="desOrSelf" ptType="node"/>
-              <dgm:constrLst>
-                <dgm:constr type="h" refType="w" fact="0.5"/>
-                <dgm:constr type="primFontSz" val="65"/>
-                <dgm:constr type="tMarg" refType="primFontSz" fact="0.3"/>
-                <dgm:constr type="bMarg" refType="primFontSz" fact="0.3"/>
-                <dgm:constr type="lMarg" refType="primFontSz" fact="0.3"/>
-                <dgm:constr type="rMarg" refType="primFontSz" fact="0.3"/>
-              </dgm:constrLst>
-              <dgm:ruleLst>
-                <dgm:rule type="primFontSz" val="5" fact="NaN" max="NaN"/>
-              </dgm:ruleLst>
             </dgm:layoutNode>
           </dgm:forEach>
-        </dgm:layoutNode>
-      </dgm:else>
-    </dgm:choose>
+        </dgm:if>
+        <dgm:else name="Name14"/>
+      </dgm:choose>
+    </dgm:forEach>
   </dgm:layoutNode>
 </dgm:layoutDef>
 </file>
@@ -7644,7 +7423,7 @@
           <p:cNvPr id="2" name="Title 1">
             <a:extLst>
               <a:ext uri="{FF2B5EF4-FFF2-40B4-BE49-F238E27FC236}">
-                <a16:creationId xmlns:a16="http://schemas.microsoft.com/office/drawing/2014/main" id="{47EF0D31-E94F-4B1D-A0CC-756D670DE128}"/>
+                <a16:creationId xmlns:a16="http://schemas.microsoft.com/office/drawing/2014/main" id="{A8E2A6E0-A2D5-7D9C-E291-9D9860AC0589}"/>
               </a:ext>
             </a:extLst>
           </p:cNvPr>
@@ -7682,7 +7461,7 @@
           <p:cNvPr id="3" name="Subtitle 2">
             <a:extLst>
               <a:ext uri="{FF2B5EF4-FFF2-40B4-BE49-F238E27FC236}">
-                <a16:creationId xmlns:a16="http://schemas.microsoft.com/office/drawing/2014/main" id="{9F8F240E-9B41-4C11-B5A8-4191D9556922}"/>
+                <a16:creationId xmlns:a16="http://schemas.microsoft.com/office/drawing/2014/main" id="{5F94CC10-53FA-FEE8-929E-B4F2B4E21816}"/>
               </a:ext>
             </a:extLst>
           </p:cNvPr>
@@ -7753,7 +7532,7 @@
           <p:cNvPr id="4" name="Date Placeholder 3">
             <a:extLst>
               <a:ext uri="{FF2B5EF4-FFF2-40B4-BE49-F238E27FC236}">
-                <a16:creationId xmlns:a16="http://schemas.microsoft.com/office/drawing/2014/main" id="{939F08CD-5553-4691-874F-497CBDC55E01}"/>
+                <a16:creationId xmlns:a16="http://schemas.microsoft.com/office/drawing/2014/main" id="{03E43699-D064-7900-83CB-A5105E150F2A}"/>
               </a:ext>
             </a:extLst>
           </p:cNvPr>
@@ -7769,9 +7548,9 @@
           <a:bodyPr/>
           <a:lstStyle/>
           <a:p>
-            <a:fld id="{3277703B-A6CB-462E-B9F5-94471B8B1B1A}" type="datetimeFigureOut">
+            <a:fld id="{7AD79B96-C293-4C0B-9100-58C95BDC99F2}" type="datetimeFigureOut">
               <a:rPr lang="id-ID" smtClean="0"/>
-              <a:t>24/06/2026</a:t>
+              <a:t>03/07/2026</a:t>
             </a:fld>
             <a:endParaRPr lang="id-ID"/>
           </a:p>
@@ -7782,7 +7561,7 @@
           <p:cNvPr id="5" name="Footer Placeholder 4">
             <a:extLst>
               <a:ext uri="{FF2B5EF4-FFF2-40B4-BE49-F238E27FC236}">
-                <a16:creationId xmlns:a16="http://schemas.microsoft.com/office/drawing/2014/main" id="{F2BD47FE-33E2-4984-8693-B8159EF40F94}"/>
+                <a16:creationId xmlns:a16="http://schemas.microsoft.com/office/drawing/2014/main" id="{BCAAC413-98A4-23BD-467B-A2EF8448DFD7}"/>
               </a:ext>
             </a:extLst>
           </p:cNvPr>
@@ -7807,7 +7586,7 @@
           <p:cNvPr id="6" name="Slide Number Placeholder 5">
             <a:extLst>
               <a:ext uri="{FF2B5EF4-FFF2-40B4-BE49-F238E27FC236}">
-                <a16:creationId xmlns:a16="http://schemas.microsoft.com/office/drawing/2014/main" id="{5FCBACE9-23AA-414B-A1C6-AC960A6B0772}"/>
+                <a16:creationId xmlns:a16="http://schemas.microsoft.com/office/drawing/2014/main" id="{1B530BC4-B385-14FF-321A-668D565C48E2}"/>
               </a:ext>
             </a:extLst>
           </p:cNvPr>
@@ -7823,7 +7602,7 @@
           <a:bodyPr/>
           <a:lstStyle/>
           <a:p>
-            <a:fld id="{165CB19E-0F4B-47BD-83A9-35E41AFF97AC}" type="slidenum">
+            <a:fld id="{547ACF67-7EFB-49F1-BF4C-5E8F78770FF5}" type="slidenum">
               <a:rPr lang="id-ID" smtClean="0"/>
               <a:t>‹#›</a:t>
             </a:fld>
@@ -7834,7 +7613,7 @@
     </p:spTree>
     <p:extLst>
       <p:ext uri="{BB962C8B-B14F-4D97-AF65-F5344CB8AC3E}">
-        <p14:creationId xmlns:p14="http://schemas.microsoft.com/office/powerpoint/2010/main" val="983797556"/>
+        <p14:creationId xmlns:p14="http://schemas.microsoft.com/office/powerpoint/2010/main" val="3346061757"/>
       </p:ext>
     </p:extLst>
   </p:cSld>
@@ -7866,7 +7645,7 @@
           <p:cNvPr id="2" name="Title 1">
             <a:extLst>
               <a:ext uri="{FF2B5EF4-FFF2-40B4-BE49-F238E27FC236}">
-                <a16:creationId xmlns:a16="http://schemas.microsoft.com/office/drawing/2014/main" id="{80CB100B-2EE4-4399-8616-0961B0212E00}"/>
+                <a16:creationId xmlns:a16="http://schemas.microsoft.com/office/drawing/2014/main" id="{865AF03B-353C-E5FB-B203-9E72882C9188}"/>
               </a:ext>
             </a:extLst>
           </p:cNvPr>
@@ -7895,7 +7674,7 @@
           <p:cNvPr id="3" name="Vertical Text Placeholder 2">
             <a:extLst>
               <a:ext uri="{FF2B5EF4-FFF2-40B4-BE49-F238E27FC236}">
-                <a16:creationId xmlns:a16="http://schemas.microsoft.com/office/drawing/2014/main" id="{0CD1507E-8AB5-4A7B-A570-5F56E61EE8A4}"/>
+                <a16:creationId xmlns:a16="http://schemas.microsoft.com/office/drawing/2014/main" id="{53572842-3044-02EB-414D-3F8A2FCB58A7}"/>
               </a:ext>
             </a:extLst>
           </p:cNvPr>
@@ -7953,7 +7732,7 @@
           <p:cNvPr id="4" name="Date Placeholder 3">
             <a:extLst>
               <a:ext uri="{FF2B5EF4-FFF2-40B4-BE49-F238E27FC236}">
-                <a16:creationId xmlns:a16="http://schemas.microsoft.com/office/drawing/2014/main" id="{E612B393-1AD2-4236-B733-BFD0C3DC233B}"/>
+                <a16:creationId xmlns:a16="http://schemas.microsoft.com/office/drawing/2014/main" id="{98522656-F255-DC28-237D-6A6185771506}"/>
               </a:ext>
             </a:extLst>
           </p:cNvPr>
@@ -7969,9 +7748,9 @@
           <a:bodyPr/>
           <a:lstStyle/>
           <a:p>
-            <a:fld id="{3277703B-A6CB-462E-B9F5-94471B8B1B1A}" type="datetimeFigureOut">
+            <a:fld id="{7AD79B96-C293-4C0B-9100-58C95BDC99F2}" type="datetimeFigureOut">
               <a:rPr lang="id-ID" smtClean="0"/>
-              <a:t>24/06/2026</a:t>
+              <a:t>03/07/2026</a:t>
             </a:fld>
             <a:endParaRPr lang="id-ID"/>
           </a:p>
@@ -7982,7 +7761,7 @@
           <p:cNvPr id="5" name="Footer Placeholder 4">
             <a:extLst>
               <a:ext uri="{FF2B5EF4-FFF2-40B4-BE49-F238E27FC236}">
-                <a16:creationId xmlns:a16="http://schemas.microsoft.com/office/drawing/2014/main" id="{A4EED1D8-0FCB-4FE1-ADFC-8FF0C3F747B8}"/>
+                <a16:creationId xmlns:a16="http://schemas.microsoft.com/office/drawing/2014/main" id="{53F1A0F3-4218-7D5A-D242-C124561BC4B0}"/>
               </a:ext>
             </a:extLst>
           </p:cNvPr>
@@ -8007,7 +7786,7 @@
           <p:cNvPr id="6" name="Slide Number Placeholder 5">
             <a:extLst>
               <a:ext uri="{FF2B5EF4-FFF2-40B4-BE49-F238E27FC236}">
-                <a16:creationId xmlns:a16="http://schemas.microsoft.com/office/drawing/2014/main" id="{C755F5C8-8493-49EF-A17A-40C26DAC88BD}"/>
+                <a16:creationId xmlns:a16="http://schemas.microsoft.com/office/drawing/2014/main" id="{4566292E-2157-7286-6E6E-746CBFAE5CEF}"/>
               </a:ext>
             </a:extLst>
           </p:cNvPr>
@@ -8023,7 +7802,7 @@
           <a:bodyPr/>
           <a:lstStyle/>
           <a:p>
-            <a:fld id="{165CB19E-0F4B-47BD-83A9-35E41AFF97AC}" type="slidenum">
+            <a:fld id="{547ACF67-7EFB-49F1-BF4C-5E8F78770FF5}" type="slidenum">
               <a:rPr lang="id-ID" smtClean="0"/>
               <a:t>‹#›</a:t>
             </a:fld>
@@ -8034,7 +7813,7 @@
     </p:spTree>
     <p:extLst>
       <p:ext uri="{BB962C8B-B14F-4D97-AF65-F5344CB8AC3E}">
-        <p14:creationId xmlns:p14="http://schemas.microsoft.com/office/powerpoint/2010/main" val="1802440168"/>
+        <p14:creationId xmlns:p14="http://schemas.microsoft.com/office/powerpoint/2010/main" val="3690432373"/>
       </p:ext>
     </p:extLst>
   </p:cSld>
@@ -8066,7 +7845,7 @@
           <p:cNvPr id="2" name="Vertical Title 1">
             <a:extLst>
               <a:ext uri="{FF2B5EF4-FFF2-40B4-BE49-F238E27FC236}">
-                <a16:creationId xmlns:a16="http://schemas.microsoft.com/office/drawing/2014/main" id="{F9B647F9-B301-4CB8-B79F-D2CC16CAB20E}"/>
+                <a16:creationId xmlns:a16="http://schemas.microsoft.com/office/drawing/2014/main" id="{C8C8D278-E949-7CA4-FBEA-226624241CE1}"/>
               </a:ext>
             </a:extLst>
           </p:cNvPr>
@@ -8100,7 +7879,7 @@
           <p:cNvPr id="3" name="Vertical Text Placeholder 2">
             <a:extLst>
               <a:ext uri="{FF2B5EF4-FFF2-40B4-BE49-F238E27FC236}">
-                <a16:creationId xmlns:a16="http://schemas.microsoft.com/office/drawing/2014/main" id="{CBE1EBD8-7E65-4578-9B17-9CCEF6594A95}"/>
+                <a16:creationId xmlns:a16="http://schemas.microsoft.com/office/drawing/2014/main" id="{EC4D9622-A84E-6EB5-1E10-3FF4FB7D0F45}"/>
               </a:ext>
             </a:extLst>
           </p:cNvPr>
@@ -8163,7 +7942,7 @@
           <p:cNvPr id="4" name="Date Placeholder 3">
             <a:extLst>
               <a:ext uri="{FF2B5EF4-FFF2-40B4-BE49-F238E27FC236}">
-                <a16:creationId xmlns:a16="http://schemas.microsoft.com/office/drawing/2014/main" id="{A252778B-BAF0-4639-9E9B-50299EBE0D80}"/>
+                <a16:creationId xmlns:a16="http://schemas.microsoft.com/office/drawing/2014/main" id="{72AA4A10-9145-B8ED-B8A7-E236E8B3B8B8}"/>
               </a:ext>
             </a:extLst>
           </p:cNvPr>
@@ -8179,9 +7958,9 @@
           <a:bodyPr/>
           <a:lstStyle/>
           <a:p>
-            <a:fld id="{3277703B-A6CB-462E-B9F5-94471B8B1B1A}" type="datetimeFigureOut">
+            <a:fld id="{7AD79B96-C293-4C0B-9100-58C95BDC99F2}" type="datetimeFigureOut">
               <a:rPr lang="id-ID" smtClean="0"/>
-              <a:t>24/06/2026</a:t>
+              <a:t>03/07/2026</a:t>
             </a:fld>
             <a:endParaRPr lang="id-ID"/>
           </a:p>
@@ -8192,7 +7971,7 @@
           <p:cNvPr id="5" name="Footer Placeholder 4">
             <a:extLst>
               <a:ext uri="{FF2B5EF4-FFF2-40B4-BE49-F238E27FC236}">
-                <a16:creationId xmlns:a16="http://schemas.microsoft.com/office/drawing/2014/main" id="{F2B7B610-0542-413A-A16F-B42931A52A55}"/>
+                <a16:creationId xmlns:a16="http://schemas.microsoft.com/office/drawing/2014/main" id="{82200432-43F1-88F9-EB92-328DCC3CF3D5}"/>
               </a:ext>
             </a:extLst>
           </p:cNvPr>
@@ -8217,7 +7996,7 @@
           <p:cNvPr id="6" name="Slide Number Placeholder 5">
             <a:extLst>
               <a:ext uri="{FF2B5EF4-FFF2-40B4-BE49-F238E27FC236}">
-                <a16:creationId xmlns:a16="http://schemas.microsoft.com/office/drawing/2014/main" id="{64154B90-635E-4608-82F3-1E41613D57A0}"/>
+                <a16:creationId xmlns:a16="http://schemas.microsoft.com/office/drawing/2014/main" id="{012B2601-CC07-4B67-8E66-E3B203E5981E}"/>
               </a:ext>
             </a:extLst>
           </p:cNvPr>
@@ -8233,7 +8012,7 @@
           <a:bodyPr/>
           <a:lstStyle/>
           <a:p>
-            <a:fld id="{165CB19E-0F4B-47BD-83A9-35E41AFF97AC}" type="slidenum">
+            <a:fld id="{547ACF67-7EFB-49F1-BF4C-5E8F78770FF5}" type="slidenum">
               <a:rPr lang="id-ID" smtClean="0"/>
               <a:t>‹#›</a:t>
             </a:fld>
@@ -8244,7 +8023,7 @@
     </p:spTree>
     <p:extLst>
       <p:ext uri="{BB962C8B-B14F-4D97-AF65-F5344CB8AC3E}">
-        <p14:creationId xmlns:p14="http://schemas.microsoft.com/office/powerpoint/2010/main" val="2707422851"/>
+        <p14:creationId xmlns:p14="http://schemas.microsoft.com/office/powerpoint/2010/main" val="1929880011"/>
       </p:ext>
     </p:extLst>
   </p:cSld>
@@ -8276,7 +8055,7 @@
           <p:cNvPr id="2" name="Title 1">
             <a:extLst>
               <a:ext uri="{FF2B5EF4-FFF2-40B4-BE49-F238E27FC236}">
-                <a16:creationId xmlns:a16="http://schemas.microsoft.com/office/drawing/2014/main" id="{73C10FA4-E594-4B13-8281-DFE456C10D81}"/>
+                <a16:creationId xmlns:a16="http://schemas.microsoft.com/office/drawing/2014/main" id="{524AD30B-97AD-DEA0-6F03-EB157680DCF9}"/>
               </a:ext>
             </a:extLst>
           </p:cNvPr>
@@ -8305,7 +8084,7 @@
           <p:cNvPr id="3" name="Content Placeholder 2">
             <a:extLst>
               <a:ext uri="{FF2B5EF4-FFF2-40B4-BE49-F238E27FC236}">
-                <a16:creationId xmlns:a16="http://schemas.microsoft.com/office/drawing/2014/main" id="{B1A7241A-9ABD-4E86-AFF1-02C6D5F1D3E1}"/>
+                <a16:creationId xmlns:a16="http://schemas.microsoft.com/office/drawing/2014/main" id="{BEAC4E2A-89EC-62C2-84DB-A30F8E4074E6}"/>
               </a:ext>
             </a:extLst>
           </p:cNvPr>
@@ -8363,7 +8142,7 @@
           <p:cNvPr id="4" name="Date Placeholder 3">
             <a:extLst>
               <a:ext uri="{FF2B5EF4-FFF2-40B4-BE49-F238E27FC236}">
-                <a16:creationId xmlns:a16="http://schemas.microsoft.com/office/drawing/2014/main" id="{E1785A2F-A0C3-4BCC-85FC-375BF54F1281}"/>
+                <a16:creationId xmlns:a16="http://schemas.microsoft.com/office/drawing/2014/main" id="{FF59DCA5-856F-7DDF-4AA1-F2B6DB1034A0}"/>
               </a:ext>
             </a:extLst>
           </p:cNvPr>
@@ -8379,9 +8158,9 @@
           <a:bodyPr/>
           <a:lstStyle/>
           <a:p>
-            <a:fld id="{3277703B-A6CB-462E-B9F5-94471B8B1B1A}" type="datetimeFigureOut">
+            <a:fld id="{7AD79B96-C293-4C0B-9100-58C95BDC99F2}" type="datetimeFigureOut">
               <a:rPr lang="id-ID" smtClean="0"/>
-              <a:t>24/06/2026</a:t>
+              <a:t>03/07/2026</a:t>
             </a:fld>
             <a:endParaRPr lang="id-ID"/>
           </a:p>
@@ -8392,7 +8171,7 @@
           <p:cNvPr id="5" name="Footer Placeholder 4">
             <a:extLst>
               <a:ext uri="{FF2B5EF4-FFF2-40B4-BE49-F238E27FC236}">
-                <a16:creationId xmlns:a16="http://schemas.microsoft.com/office/drawing/2014/main" id="{531F7552-9A76-4F1C-9865-BB5CCF6AFCFD}"/>
+                <a16:creationId xmlns:a16="http://schemas.microsoft.com/office/drawing/2014/main" id="{FB25B5EA-57FA-F5FD-BE01-2A6F8140A488}"/>
               </a:ext>
             </a:extLst>
           </p:cNvPr>
@@ -8417,7 +8196,7 @@
           <p:cNvPr id="6" name="Slide Number Placeholder 5">
             <a:extLst>
               <a:ext uri="{FF2B5EF4-FFF2-40B4-BE49-F238E27FC236}">
-                <a16:creationId xmlns:a16="http://schemas.microsoft.com/office/drawing/2014/main" id="{CBB473AA-CD26-45E4-94EA-A4900F3D747D}"/>
+                <a16:creationId xmlns:a16="http://schemas.microsoft.com/office/drawing/2014/main" id="{ED16A851-0EE3-1F44-CBC3-118E959CB83C}"/>
               </a:ext>
             </a:extLst>
           </p:cNvPr>
@@ -8433,7 +8212,7 @@
           <a:bodyPr/>
           <a:lstStyle/>
           <a:p>
-            <a:fld id="{165CB19E-0F4B-47BD-83A9-35E41AFF97AC}" type="slidenum">
+            <a:fld id="{547ACF67-7EFB-49F1-BF4C-5E8F78770FF5}" type="slidenum">
               <a:rPr lang="id-ID" smtClean="0"/>
               <a:t>‹#›</a:t>
             </a:fld>
@@ -8444,7 +8223,7 @@
     </p:spTree>
     <p:extLst>
       <p:ext uri="{BB962C8B-B14F-4D97-AF65-F5344CB8AC3E}">
-        <p14:creationId xmlns:p14="http://schemas.microsoft.com/office/powerpoint/2010/main" val="1195219683"/>
+        <p14:creationId xmlns:p14="http://schemas.microsoft.com/office/powerpoint/2010/main" val="2491129713"/>
       </p:ext>
     </p:extLst>
   </p:cSld>
@@ -8476,7 +8255,7 @@
           <p:cNvPr id="2" name="Title 1">
             <a:extLst>
               <a:ext uri="{FF2B5EF4-FFF2-40B4-BE49-F238E27FC236}">
-                <a16:creationId xmlns:a16="http://schemas.microsoft.com/office/drawing/2014/main" id="{CF3833FE-70A9-4D1C-A164-70504BBF56DC}"/>
+                <a16:creationId xmlns:a16="http://schemas.microsoft.com/office/drawing/2014/main" id="{1D06133B-6BD6-367D-581F-24186DB7A464}"/>
               </a:ext>
             </a:extLst>
           </p:cNvPr>
@@ -8514,7 +8293,7 @@
           <p:cNvPr id="3" name="Text Placeholder 2">
             <a:extLst>
               <a:ext uri="{FF2B5EF4-FFF2-40B4-BE49-F238E27FC236}">
-                <a16:creationId xmlns:a16="http://schemas.microsoft.com/office/drawing/2014/main" id="{765D76A4-7F8B-43CF-8250-C65D6D79D3E8}"/>
+                <a16:creationId xmlns:a16="http://schemas.microsoft.com/office/drawing/2014/main" id="{DEE844EB-0E62-8862-E974-331BE905F78C}"/>
               </a:ext>
             </a:extLst>
           </p:cNvPr>
@@ -8539,7 +8318,7 @@
               <a:defRPr sz="2400">
                 <a:solidFill>
                   <a:schemeClr val="tx1">
-                    <a:tint val="75000"/>
+                    <a:tint val="82000"/>
                   </a:schemeClr>
                 </a:solidFill>
               </a:defRPr>
@@ -8549,7 +8328,7 @@
               <a:defRPr sz="2000">
                 <a:solidFill>
                   <a:schemeClr val="tx1">
-                    <a:tint val="75000"/>
+                    <a:tint val="82000"/>
                   </a:schemeClr>
                 </a:solidFill>
               </a:defRPr>
@@ -8559,7 +8338,7 @@
               <a:defRPr sz="1800">
                 <a:solidFill>
                   <a:schemeClr val="tx1">
-                    <a:tint val="75000"/>
+                    <a:tint val="82000"/>
                   </a:schemeClr>
                 </a:solidFill>
               </a:defRPr>
@@ -8569,7 +8348,7 @@
               <a:defRPr sz="1600">
                 <a:solidFill>
                   <a:schemeClr val="tx1">
-                    <a:tint val="75000"/>
+                    <a:tint val="82000"/>
                   </a:schemeClr>
                 </a:solidFill>
               </a:defRPr>
@@ -8579,7 +8358,7 @@
               <a:defRPr sz="1600">
                 <a:solidFill>
                   <a:schemeClr val="tx1">
-                    <a:tint val="75000"/>
+                    <a:tint val="82000"/>
                   </a:schemeClr>
                 </a:solidFill>
               </a:defRPr>
@@ -8589,7 +8368,7 @@
               <a:defRPr sz="1600">
                 <a:solidFill>
                   <a:schemeClr val="tx1">
-                    <a:tint val="75000"/>
+                    <a:tint val="82000"/>
                   </a:schemeClr>
                 </a:solidFill>
               </a:defRPr>
@@ -8599,7 +8378,7 @@
               <a:defRPr sz="1600">
                 <a:solidFill>
                   <a:schemeClr val="tx1">
-                    <a:tint val="75000"/>
+                    <a:tint val="82000"/>
                   </a:schemeClr>
                 </a:solidFill>
               </a:defRPr>
@@ -8609,7 +8388,7 @@
               <a:defRPr sz="1600">
                 <a:solidFill>
                   <a:schemeClr val="tx1">
-                    <a:tint val="75000"/>
+                    <a:tint val="82000"/>
                   </a:schemeClr>
                 </a:solidFill>
               </a:defRPr>
@@ -8619,7 +8398,7 @@
               <a:defRPr sz="1600">
                 <a:solidFill>
                   <a:schemeClr val="tx1">
-                    <a:tint val="75000"/>
+                    <a:tint val="82000"/>
                   </a:schemeClr>
                 </a:solidFill>
               </a:defRPr>
@@ -8639,7 +8418,7 @@
           <p:cNvPr id="4" name="Date Placeholder 3">
             <a:extLst>
               <a:ext uri="{FF2B5EF4-FFF2-40B4-BE49-F238E27FC236}">
-                <a16:creationId xmlns:a16="http://schemas.microsoft.com/office/drawing/2014/main" id="{C32C4E2D-5B58-478F-864B-69781656A58B}"/>
+                <a16:creationId xmlns:a16="http://schemas.microsoft.com/office/drawing/2014/main" id="{E02F7618-0BB1-CA6E-D86B-7BB939CE1162}"/>
               </a:ext>
             </a:extLst>
           </p:cNvPr>
@@ -8655,9 +8434,9 @@
           <a:bodyPr/>
           <a:lstStyle/>
           <a:p>
-            <a:fld id="{3277703B-A6CB-462E-B9F5-94471B8B1B1A}" type="datetimeFigureOut">
+            <a:fld id="{7AD79B96-C293-4C0B-9100-58C95BDC99F2}" type="datetimeFigureOut">
               <a:rPr lang="id-ID" smtClean="0"/>
-              <a:t>24/06/2026</a:t>
+              <a:t>03/07/2026</a:t>
             </a:fld>
             <a:endParaRPr lang="id-ID"/>
           </a:p>
@@ -8668,7 +8447,7 @@
           <p:cNvPr id="5" name="Footer Placeholder 4">
             <a:extLst>
               <a:ext uri="{FF2B5EF4-FFF2-40B4-BE49-F238E27FC236}">
-                <a16:creationId xmlns:a16="http://schemas.microsoft.com/office/drawing/2014/main" id="{5B9E359C-8895-4476-8617-42AFFFD6967D}"/>
+                <a16:creationId xmlns:a16="http://schemas.microsoft.com/office/drawing/2014/main" id="{288B42D5-80E2-F06A-7045-A0E705642CCA}"/>
               </a:ext>
             </a:extLst>
           </p:cNvPr>
@@ -8693,7 +8472,7 @@
           <p:cNvPr id="6" name="Slide Number Placeholder 5">
             <a:extLst>
               <a:ext uri="{FF2B5EF4-FFF2-40B4-BE49-F238E27FC236}">
-                <a16:creationId xmlns:a16="http://schemas.microsoft.com/office/drawing/2014/main" id="{F300B052-82F6-43B9-9C79-588DC1C617F5}"/>
+                <a16:creationId xmlns:a16="http://schemas.microsoft.com/office/drawing/2014/main" id="{51DAEAA2-8244-280A-8715-97E412AC4948}"/>
               </a:ext>
             </a:extLst>
           </p:cNvPr>
@@ -8709,7 +8488,7 @@
           <a:bodyPr/>
           <a:lstStyle/>
           <a:p>
-            <a:fld id="{165CB19E-0F4B-47BD-83A9-35E41AFF97AC}" type="slidenum">
+            <a:fld id="{547ACF67-7EFB-49F1-BF4C-5E8F78770FF5}" type="slidenum">
               <a:rPr lang="id-ID" smtClean="0"/>
               <a:t>‹#›</a:t>
             </a:fld>
@@ -8720,7 +8499,7 @@
     </p:spTree>
     <p:extLst>
       <p:ext uri="{BB962C8B-B14F-4D97-AF65-F5344CB8AC3E}">
-        <p14:creationId xmlns:p14="http://schemas.microsoft.com/office/powerpoint/2010/main" val="1896529144"/>
+        <p14:creationId xmlns:p14="http://schemas.microsoft.com/office/powerpoint/2010/main" val="617143527"/>
       </p:ext>
     </p:extLst>
   </p:cSld>
@@ -8752,7 +8531,7 @@
           <p:cNvPr id="2" name="Title 1">
             <a:extLst>
               <a:ext uri="{FF2B5EF4-FFF2-40B4-BE49-F238E27FC236}">
-                <a16:creationId xmlns:a16="http://schemas.microsoft.com/office/drawing/2014/main" id="{738965FE-2856-417C-86D0-4E6D72586F99}"/>
+                <a16:creationId xmlns:a16="http://schemas.microsoft.com/office/drawing/2014/main" id="{D2CD3F5C-5EFC-FB44-9F13-7D6D0E5594FC}"/>
               </a:ext>
             </a:extLst>
           </p:cNvPr>
@@ -8781,7 +8560,7 @@
           <p:cNvPr id="3" name="Content Placeholder 2">
             <a:extLst>
               <a:ext uri="{FF2B5EF4-FFF2-40B4-BE49-F238E27FC236}">
-                <a16:creationId xmlns:a16="http://schemas.microsoft.com/office/drawing/2014/main" id="{36C3B484-DE78-452D-AC39-576F51337082}"/>
+                <a16:creationId xmlns:a16="http://schemas.microsoft.com/office/drawing/2014/main" id="{F0758CA3-4948-F265-E7E1-19FE6F27C832}"/>
               </a:ext>
             </a:extLst>
           </p:cNvPr>
@@ -8844,7 +8623,7 @@
           <p:cNvPr id="4" name="Content Placeholder 3">
             <a:extLst>
               <a:ext uri="{FF2B5EF4-FFF2-40B4-BE49-F238E27FC236}">
-                <a16:creationId xmlns:a16="http://schemas.microsoft.com/office/drawing/2014/main" id="{F4E248CA-A371-403C-B147-E0620178A882}"/>
+                <a16:creationId xmlns:a16="http://schemas.microsoft.com/office/drawing/2014/main" id="{C00D786F-CF6C-8573-949F-AA8AA4357B77}"/>
               </a:ext>
             </a:extLst>
           </p:cNvPr>
@@ -8907,7 +8686,7 @@
           <p:cNvPr id="5" name="Date Placeholder 4">
             <a:extLst>
               <a:ext uri="{FF2B5EF4-FFF2-40B4-BE49-F238E27FC236}">
-                <a16:creationId xmlns:a16="http://schemas.microsoft.com/office/drawing/2014/main" id="{4F0948B8-09FC-4458-9B11-838979C3759C}"/>
+                <a16:creationId xmlns:a16="http://schemas.microsoft.com/office/drawing/2014/main" id="{1C3335CA-0FD6-2EFB-E893-D3AD947D6ABA}"/>
               </a:ext>
             </a:extLst>
           </p:cNvPr>
@@ -8923,9 +8702,9 @@
           <a:bodyPr/>
           <a:lstStyle/>
           <a:p>
-            <a:fld id="{3277703B-A6CB-462E-B9F5-94471B8B1B1A}" type="datetimeFigureOut">
+            <a:fld id="{7AD79B96-C293-4C0B-9100-58C95BDC99F2}" type="datetimeFigureOut">
               <a:rPr lang="id-ID" smtClean="0"/>
-              <a:t>24/06/2026</a:t>
+              <a:t>03/07/2026</a:t>
             </a:fld>
             <a:endParaRPr lang="id-ID"/>
           </a:p>
@@ -8936,7 +8715,7 @@
           <p:cNvPr id="6" name="Footer Placeholder 5">
             <a:extLst>
               <a:ext uri="{FF2B5EF4-FFF2-40B4-BE49-F238E27FC236}">
-                <a16:creationId xmlns:a16="http://schemas.microsoft.com/office/drawing/2014/main" id="{0445B849-1EA5-4CDD-926D-D936C3DD2C8D}"/>
+                <a16:creationId xmlns:a16="http://schemas.microsoft.com/office/drawing/2014/main" id="{334B1A5F-58DF-69C1-6E8F-352AFE43C7B2}"/>
               </a:ext>
             </a:extLst>
           </p:cNvPr>
@@ -8961,7 +8740,7 @@
           <p:cNvPr id="7" name="Slide Number Placeholder 6">
             <a:extLst>
               <a:ext uri="{FF2B5EF4-FFF2-40B4-BE49-F238E27FC236}">
-                <a16:creationId xmlns:a16="http://schemas.microsoft.com/office/drawing/2014/main" id="{6A334B34-D469-4F33-95A8-41B1615EE7E6}"/>
+                <a16:creationId xmlns:a16="http://schemas.microsoft.com/office/drawing/2014/main" id="{CAC70819-D5D5-E018-770C-0DB65ED9B492}"/>
               </a:ext>
             </a:extLst>
           </p:cNvPr>
@@ -8977,7 +8756,7 @@
           <a:bodyPr/>
           <a:lstStyle/>
           <a:p>
-            <a:fld id="{165CB19E-0F4B-47BD-83A9-35E41AFF97AC}" type="slidenum">
+            <a:fld id="{547ACF67-7EFB-49F1-BF4C-5E8F78770FF5}" type="slidenum">
               <a:rPr lang="id-ID" smtClean="0"/>
               <a:t>‹#›</a:t>
             </a:fld>
@@ -8988,7 +8767,7 @@
     </p:spTree>
     <p:extLst>
       <p:ext uri="{BB962C8B-B14F-4D97-AF65-F5344CB8AC3E}">
-        <p14:creationId xmlns:p14="http://schemas.microsoft.com/office/powerpoint/2010/main" val="392983004"/>
+        <p14:creationId xmlns:p14="http://schemas.microsoft.com/office/powerpoint/2010/main" val="2646890508"/>
       </p:ext>
     </p:extLst>
   </p:cSld>
@@ -9020,7 +8799,7 @@
           <p:cNvPr id="2" name="Title 1">
             <a:extLst>
               <a:ext uri="{FF2B5EF4-FFF2-40B4-BE49-F238E27FC236}">
-                <a16:creationId xmlns:a16="http://schemas.microsoft.com/office/drawing/2014/main" id="{CD3A9EBB-EB2C-4D87-9D95-D4BEB86A1BA8}"/>
+                <a16:creationId xmlns:a16="http://schemas.microsoft.com/office/drawing/2014/main" id="{7A1035FE-3B8C-FF1D-4C5C-39773A573E0D}"/>
               </a:ext>
             </a:extLst>
           </p:cNvPr>
@@ -9054,7 +8833,7 @@
           <p:cNvPr id="3" name="Text Placeholder 2">
             <a:extLst>
               <a:ext uri="{FF2B5EF4-FFF2-40B4-BE49-F238E27FC236}">
-                <a16:creationId xmlns:a16="http://schemas.microsoft.com/office/drawing/2014/main" id="{B5F4DE5E-ECE3-4E92-B128-956C772AD1BA}"/>
+                <a16:creationId xmlns:a16="http://schemas.microsoft.com/office/drawing/2014/main" id="{4240E4D7-A953-FB2C-7908-987D646B84C6}"/>
               </a:ext>
             </a:extLst>
           </p:cNvPr>
@@ -9125,7 +8904,7 @@
           <p:cNvPr id="4" name="Content Placeholder 3">
             <a:extLst>
               <a:ext uri="{FF2B5EF4-FFF2-40B4-BE49-F238E27FC236}">
-                <a16:creationId xmlns:a16="http://schemas.microsoft.com/office/drawing/2014/main" id="{D6F36996-E69C-442B-BB4B-5546231A8B07}"/>
+                <a16:creationId xmlns:a16="http://schemas.microsoft.com/office/drawing/2014/main" id="{21A507A5-3632-9873-1EFC-2F442E39660D}"/>
               </a:ext>
             </a:extLst>
           </p:cNvPr>
@@ -9188,7 +8967,7 @@
           <p:cNvPr id="5" name="Text Placeholder 4">
             <a:extLst>
               <a:ext uri="{FF2B5EF4-FFF2-40B4-BE49-F238E27FC236}">
-                <a16:creationId xmlns:a16="http://schemas.microsoft.com/office/drawing/2014/main" id="{55C1B8A2-5456-481A-922B-D6971E547F1B}"/>
+                <a16:creationId xmlns:a16="http://schemas.microsoft.com/office/drawing/2014/main" id="{BDBAFCA7-72F4-167F-CBA1-802352665B08}"/>
               </a:ext>
             </a:extLst>
           </p:cNvPr>
@@ -9259,7 +9038,7 @@
           <p:cNvPr id="6" name="Content Placeholder 5">
             <a:extLst>
               <a:ext uri="{FF2B5EF4-FFF2-40B4-BE49-F238E27FC236}">
-                <a16:creationId xmlns:a16="http://schemas.microsoft.com/office/drawing/2014/main" id="{AE0C3E2B-792F-419C-AF37-7B1AA876DF9B}"/>
+                <a16:creationId xmlns:a16="http://schemas.microsoft.com/office/drawing/2014/main" id="{CC89CCC1-4CC5-1045-A997-E9B8F7176334}"/>
               </a:ext>
             </a:extLst>
           </p:cNvPr>
@@ -9322,7 +9101,7 @@
           <p:cNvPr id="7" name="Date Placeholder 6">
             <a:extLst>
               <a:ext uri="{FF2B5EF4-FFF2-40B4-BE49-F238E27FC236}">
-                <a16:creationId xmlns:a16="http://schemas.microsoft.com/office/drawing/2014/main" id="{F049DAC9-E98B-4634-B0A9-BA580672507C}"/>
+                <a16:creationId xmlns:a16="http://schemas.microsoft.com/office/drawing/2014/main" id="{A371A78D-3E0B-AFD3-B469-F6EF29832A08}"/>
               </a:ext>
             </a:extLst>
           </p:cNvPr>
@@ -9338,9 +9117,9 @@
           <a:bodyPr/>
           <a:lstStyle/>
           <a:p>
-            <a:fld id="{3277703B-A6CB-462E-B9F5-94471B8B1B1A}" type="datetimeFigureOut">
+            <a:fld id="{7AD79B96-C293-4C0B-9100-58C95BDC99F2}" type="datetimeFigureOut">
               <a:rPr lang="id-ID" smtClean="0"/>
-              <a:t>24/06/2026</a:t>
+              <a:t>03/07/2026</a:t>
             </a:fld>
             <a:endParaRPr lang="id-ID"/>
           </a:p>
@@ -9351,7 +9130,7 @@
           <p:cNvPr id="8" name="Footer Placeholder 7">
             <a:extLst>
               <a:ext uri="{FF2B5EF4-FFF2-40B4-BE49-F238E27FC236}">
-                <a16:creationId xmlns:a16="http://schemas.microsoft.com/office/drawing/2014/main" id="{5493E4C1-53B4-46A2-BF7F-652F64537580}"/>
+                <a16:creationId xmlns:a16="http://schemas.microsoft.com/office/drawing/2014/main" id="{4764CDDD-B8B6-21CB-DF87-C49872F1373F}"/>
               </a:ext>
             </a:extLst>
           </p:cNvPr>
@@ -9376,7 +9155,7 @@
           <p:cNvPr id="9" name="Slide Number Placeholder 8">
             <a:extLst>
               <a:ext uri="{FF2B5EF4-FFF2-40B4-BE49-F238E27FC236}">
-                <a16:creationId xmlns:a16="http://schemas.microsoft.com/office/drawing/2014/main" id="{06F1A6F2-C059-4DE4-A4CD-CD68309B9DD6}"/>
+                <a16:creationId xmlns:a16="http://schemas.microsoft.com/office/drawing/2014/main" id="{72D4EE95-0099-E4A3-7CAE-A5ACC1CEBCC4}"/>
               </a:ext>
             </a:extLst>
           </p:cNvPr>
@@ -9392,7 +9171,7 @@
           <a:bodyPr/>
           <a:lstStyle/>
           <a:p>
-            <a:fld id="{165CB19E-0F4B-47BD-83A9-35E41AFF97AC}" type="slidenum">
+            <a:fld id="{547ACF67-7EFB-49F1-BF4C-5E8F78770FF5}" type="slidenum">
               <a:rPr lang="id-ID" smtClean="0"/>
               <a:t>‹#›</a:t>
             </a:fld>
@@ -9403,7 +9182,7 @@
     </p:spTree>
     <p:extLst>
       <p:ext uri="{BB962C8B-B14F-4D97-AF65-F5344CB8AC3E}">
-        <p14:creationId xmlns:p14="http://schemas.microsoft.com/office/powerpoint/2010/main" val="2585476915"/>
+        <p14:creationId xmlns:p14="http://schemas.microsoft.com/office/powerpoint/2010/main" val="2252858275"/>
       </p:ext>
     </p:extLst>
   </p:cSld>
@@ -9435,7 +9214,7 @@
           <p:cNvPr id="2" name="Title 1">
             <a:extLst>
               <a:ext uri="{FF2B5EF4-FFF2-40B4-BE49-F238E27FC236}">
-                <a16:creationId xmlns:a16="http://schemas.microsoft.com/office/drawing/2014/main" id="{4A4F8E03-302E-4D46-AABE-08A00ECD5211}"/>
+                <a16:creationId xmlns:a16="http://schemas.microsoft.com/office/drawing/2014/main" id="{240EDE6F-7F8E-FC01-B0C6-9A92F7654293}"/>
               </a:ext>
             </a:extLst>
           </p:cNvPr>
@@ -9464,7 +9243,7 @@
           <p:cNvPr id="3" name="Date Placeholder 2">
             <a:extLst>
               <a:ext uri="{FF2B5EF4-FFF2-40B4-BE49-F238E27FC236}">
-                <a16:creationId xmlns:a16="http://schemas.microsoft.com/office/drawing/2014/main" id="{4A16096B-B9EC-41AD-9C0A-F9E4417C2CE2}"/>
+                <a16:creationId xmlns:a16="http://schemas.microsoft.com/office/drawing/2014/main" id="{95C205A0-2242-5297-AD6F-289007D6596D}"/>
               </a:ext>
             </a:extLst>
           </p:cNvPr>
@@ -9480,9 +9259,9 @@
           <a:bodyPr/>
           <a:lstStyle/>
           <a:p>
-            <a:fld id="{3277703B-A6CB-462E-B9F5-94471B8B1B1A}" type="datetimeFigureOut">
+            <a:fld id="{7AD79B96-C293-4C0B-9100-58C95BDC99F2}" type="datetimeFigureOut">
               <a:rPr lang="id-ID" smtClean="0"/>
-              <a:t>24/06/2026</a:t>
+              <a:t>03/07/2026</a:t>
             </a:fld>
             <a:endParaRPr lang="id-ID"/>
           </a:p>
@@ -9493,7 +9272,7 @@
           <p:cNvPr id="4" name="Footer Placeholder 3">
             <a:extLst>
               <a:ext uri="{FF2B5EF4-FFF2-40B4-BE49-F238E27FC236}">
-                <a16:creationId xmlns:a16="http://schemas.microsoft.com/office/drawing/2014/main" id="{F869296F-2BF1-42F0-BB18-E510820582C5}"/>
+                <a16:creationId xmlns:a16="http://schemas.microsoft.com/office/drawing/2014/main" id="{602E56B6-27F7-5B31-1643-B235F9ECD72A}"/>
               </a:ext>
             </a:extLst>
           </p:cNvPr>
@@ -9518,7 +9297,7 @@
           <p:cNvPr id="5" name="Slide Number Placeholder 4">
             <a:extLst>
               <a:ext uri="{FF2B5EF4-FFF2-40B4-BE49-F238E27FC236}">
-                <a16:creationId xmlns:a16="http://schemas.microsoft.com/office/drawing/2014/main" id="{5C629798-319D-434A-AB54-C6433EFB5BF7}"/>
+                <a16:creationId xmlns:a16="http://schemas.microsoft.com/office/drawing/2014/main" id="{DB2BB727-9DE3-0DDC-752D-99004956A3CE}"/>
               </a:ext>
             </a:extLst>
           </p:cNvPr>
@@ -9534,7 +9313,7 @@
           <a:bodyPr/>
           <a:lstStyle/>
           <a:p>
-            <a:fld id="{165CB19E-0F4B-47BD-83A9-35E41AFF97AC}" type="slidenum">
+            <a:fld id="{547ACF67-7EFB-49F1-BF4C-5E8F78770FF5}" type="slidenum">
               <a:rPr lang="id-ID" smtClean="0"/>
               <a:t>‹#›</a:t>
             </a:fld>
@@ -9545,7 +9324,7 @@
     </p:spTree>
     <p:extLst>
       <p:ext uri="{BB962C8B-B14F-4D97-AF65-F5344CB8AC3E}">
-        <p14:creationId xmlns:p14="http://schemas.microsoft.com/office/powerpoint/2010/main" val="1505030692"/>
+        <p14:creationId xmlns:p14="http://schemas.microsoft.com/office/powerpoint/2010/main" val="3821587460"/>
       </p:ext>
     </p:extLst>
   </p:cSld>
@@ -9577,7 +9356,7 @@
           <p:cNvPr id="2" name="Date Placeholder 1">
             <a:extLst>
               <a:ext uri="{FF2B5EF4-FFF2-40B4-BE49-F238E27FC236}">
-                <a16:creationId xmlns:a16="http://schemas.microsoft.com/office/drawing/2014/main" id="{73FC55ED-8133-4015-9B9A-01F697190D3F}"/>
+                <a16:creationId xmlns:a16="http://schemas.microsoft.com/office/drawing/2014/main" id="{689B6710-B187-9C42-A435-7F3D021B0599}"/>
               </a:ext>
             </a:extLst>
           </p:cNvPr>
@@ -9593,9 +9372,9 @@
           <a:bodyPr/>
           <a:lstStyle/>
           <a:p>
-            <a:fld id="{3277703B-A6CB-462E-B9F5-94471B8B1B1A}" type="datetimeFigureOut">
+            <a:fld id="{7AD79B96-C293-4C0B-9100-58C95BDC99F2}" type="datetimeFigureOut">
               <a:rPr lang="id-ID" smtClean="0"/>
-              <a:t>24/06/2026</a:t>
+              <a:t>03/07/2026</a:t>
             </a:fld>
             <a:endParaRPr lang="id-ID"/>
           </a:p>
@@ -9606,7 +9385,7 @@
           <p:cNvPr id="3" name="Footer Placeholder 2">
             <a:extLst>
               <a:ext uri="{FF2B5EF4-FFF2-40B4-BE49-F238E27FC236}">
-                <a16:creationId xmlns:a16="http://schemas.microsoft.com/office/drawing/2014/main" id="{5A2E7FAD-F721-4F44-8874-4458B3410151}"/>
+                <a16:creationId xmlns:a16="http://schemas.microsoft.com/office/drawing/2014/main" id="{63863EC1-9930-5F1A-CE0A-3B8E83442947}"/>
               </a:ext>
             </a:extLst>
           </p:cNvPr>
@@ -9631,7 +9410,7 @@
           <p:cNvPr id="4" name="Slide Number Placeholder 3">
             <a:extLst>
               <a:ext uri="{FF2B5EF4-FFF2-40B4-BE49-F238E27FC236}">
-                <a16:creationId xmlns:a16="http://schemas.microsoft.com/office/drawing/2014/main" id="{68C63FB0-C661-4AC0-BCA3-612CDD4C02A6}"/>
+                <a16:creationId xmlns:a16="http://schemas.microsoft.com/office/drawing/2014/main" id="{0C6BCD08-58DD-26E2-8FCD-DC8472FE0C05}"/>
               </a:ext>
             </a:extLst>
           </p:cNvPr>
@@ -9647,7 +9426,7 @@
           <a:bodyPr/>
           <a:lstStyle/>
           <a:p>
-            <a:fld id="{165CB19E-0F4B-47BD-83A9-35E41AFF97AC}" type="slidenum">
+            <a:fld id="{547ACF67-7EFB-49F1-BF4C-5E8F78770FF5}" type="slidenum">
               <a:rPr lang="id-ID" smtClean="0"/>
               <a:t>‹#›</a:t>
             </a:fld>
@@ -9658,7 +9437,7 @@
     </p:spTree>
     <p:extLst>
       <p:ext uri="{BB962C8B-B14F-4D97-AF65-F5344CB8AC3E}">
-        <p14:creationId xmlns:p14="http://schemas.microsoft.com/office/powerpoint/2010/main" val="2183664830"/>
+        <p14:creationId xmlns:p14="http://schemas.microsoft.com/office/powerpoint/2010/main" val="1557683030"/>
       </p:ext>
     </p:extLst>
   </p:cSld>
@@ -9690,7 +9469,7 @@
           <p:cNvPr id="2" name="Title 1">
             <a:extLst>
               <a:ext uri="{FF2B5EF4-FFF2-40B4-BE49-F238E27FC236}">
-                <a16:creationId xmlns:a16="http://schemas.microsoft.com/office/drawing/2014/main" id="{0ED3DBC4-1270-49F3-BB91-4133826E1854}"/>
+                <a16:creationId xmlns:a16="http://schemas.microsoft.com/office/drawing/2014/main" id="{B4EE3488-8570-9EF6-D656-9B74F97E76E9}"/>
               </a:ext>
             </a:extLst>
           </p:cNvPr>
@@ -9728,7 +9507,7 @@
           <p:cNvPr id="3" name="Content Placeholder 2">
             <a:extLst>
               <a:ext uri="{FF2B5EF4-FFF2-40B4-BE49-F238E27FC236}">
-                <a16:creationId xmlns:a16="http://schemas.microsoft.com/office/drawing/2014/main" id="{C57EAA23-A126-4BE4-9F6D-7AAD35218C27}"/>
+                <a16:creationId xmlns:a16="http://schemas.microsoft.com/office/drawing/2014/main" id="{D51D6E81-5108-C082-D5A3-035D23F4C65F}"/>
               </a:ext>
             </a:extLst>
           </p:cNvPr>
@@ -9819,7 +9598,7 @@
           <p:cNvPr id="4" name="Text Placeholder 3">
             <a:extLst>
               <a:ext uri="{FF2B5EF4-FFF2-40B4-BE49-F238E27FC236}">
-                <a16:creationId xmlns:a16="http://schemas.microsoft.com/office/drawing/2014/main" id="{835FB8ED-537C-4381-86E1-7176468B9ABB}"/>
+                <a16:creationId xmlns:a16="http://schemas.microsoft.com/office/drawing/2014/main" id="{DF8A1155-971D-F22B-C68B-0D4406E5DBE1}"/>
               </a:ext>
             </a:extLst>
           </p:cNvPr>
@@ -9890,7 +9669,7 @@
           <p:cNvPr id="5" name="Date Placeholder 4">
             <a:extLst>
               <a:ext uri="{FF2B5EF4-FFF2-40B4-BE49-F238E27FC236}">
-                <a16:creationId xmlns:a16="http://schemas.microsoft.com/office/drawing/2014/main" id="{F951BBDB-5144-476B-A802-7406D0FC5F15}"/>
+                <a16:creationId xmlns:a16="http://schemas.microsoft.com/office/drawing/2014/main" id="{3C2901E8-7451-45D6-5F50-7FB0CF5B50FE}"/>
               </a:ext>
             </a:extLst>
           </p:cNvPr>
@@ -9906,9 +9685,9 @@
           <a:bodyPr/>
           <a:lstStyle/>
           <a:p>
-            <a:fld id="{3277703B-A6CB-462E-B9F5-94471B8B1B1A}" type="datetimeFigureOut">
+            <a:fld id="{7AD79B96-C293-4C0B-9100-58C95BDC99F2}" type="datetimeFigureOut">
               <a:rPr lang="id-ID" smtClean="0"/>
-              <a:t>24/06/2026</a:t>
+              <a:t>03/07/2026</a:t>
             </a:fld>
             <a:endParaRPr lang="id-ID"/>
           </a:p>
@@ -9919,7 +9698,7 @@
           <p:cNvPr id="6" name="Footer Placeholder 5">
             <a:extLst>
               <a:ext uri="{FF2B5EF4-FFF2-40B4-BE49-F238E27FC236}">
-                <a16:creationId xmlns:a16="http://schemas.microsoft.com/office/drawing/2014/main" id="{E8AF73E4-7CDD-4C54-AB28-406CA2435FAD}"/>
+                <a16:creationId xmlns:a16="http://schemas.microsoft.com/office/drawing/2014/main" id="{CB1FAE82-A09B-FC2A-9649-C482E6FA5654}"/>
               </a:ext>
             </a:extLst>
           </p:cNvPr>
@@ -9944,7 +9723,7 @@
           <p:cNvPr id="7" name="Slide Number Placeholder 6">
             <a:extLst>
               <a:ext uri="{FF2B5EF4-FFF2-40B4-BE49-F238E27FC236}">
-                <a16:creationId xmlns:a16="http://schemas.microsoft.com/office/drawing/2014/main" id="{9962EE58-28DE-4869-832D-55A8452F5CE7}"/>
+                <a16:creationId xmlns:a16="http://schemas.microsoft.com/office/drawing/2014/main" id="{88A12642-C674-7825-7D3A-B4296CEBCAC2}"/>
               </a:ext>
             </a:extLst>
           </p:cNvPr>
@@ -9960,7 +9739,7 @@
           <a:bodyPr/>
           <a:lstStyle/>
           <a:p>
-            <a:fld id="{165CB19E-0F4B-47BD-83A9-35E41AFF97AC}" type="slidenum">
+            <a:fld id="{547ACF67-7EFB-49F1-BF4C-5E8F78770FF5}" type="slidenum">
               <a:rPr lang="id-ID" smtClean="0"/>
               <a:t>‹#›</a:t>
             </a:fld>
@@ -9971,7 +9750,7 @@
     </p:spTree>
     <p:extLst>
       <p:ext uri="{BB962C8B-B14F-4D97-AF65-F5344CB8AC3E}">
-        <p14:creationId xmlns:p14="http://schemas.microsoft.com/office/powerpoint/2010/main" val="1958335362"/>
+        <p14:creationId xmlns:p14="http://schemas.microsoft.com/office/powerpoint/2010/main" val="597478098"/>
       </p:ext>
     </p:extLst>
   </p:cSld>
@@ -10003,7 +9782,7 @@
           <p:cNvPr id="2" name="Title 1">
             <a:extLst>
               <a:ext uri="{FF2B5EF4-FFF2-40B4-BE49-F238E27FC236}">
-                <a16:creationId xmlns:a16="http://schemas.microsoft.com/office/drawing/2014/main" id="{2D6C513C-EDA6-44CB-879C-9FD56D288740}"/>
+                <a16:creationId xmlns:a16="http://schemas.microsoft.com/office/drawing/2014/main" id="{4D68244B-41F5-6773-72E3-A3CA642ABB4E}"/>
               </a:ext>
             </a:extLst>
           </p:cNvPr>
@@ -10041,7 +9820,7 @@
           <p:cNvPr id="3" name="Picture Placeholder 2">
             <a:extLst>
               <a:ext uri="{FF2B5EF4-FFF2-40B4-BE49-F238E27FC236}">
-                <a16:creationId xmlns:a16="http://schemas.microsoft.com/office/drawing/2014/main" id="{21E9683E-F8E3-4239-BB34-BEFB1DC82CAE}"/>
+                <a16:creationId xmlns:a16="http://schemas.microsoft.com/office/drawing/2014/main" id="{273B27D8-1D8A-4018-7B0B-969F866B3D17}"/>
               </a:ext>
             </a:extLst>
           </p:cNvPr>
@@ -10108,7 +9887,7 @@
           <p:cNvPr id="4" name="Text Placeholder 3">
             <a:extLst>
               <a:ext uri="{FF2B5EF4-FFF2-40B4-BE49-F238E27FC236}">
-                <a16:creationId xmlns:a16="http://schemas.microsoft.com/office/drawing/2014/main" id="{C9074CAC-2D28-491E-9C13-B87EF6566286}"/>
+                <a16:creationId xmlns:a16="http://schemas.microsoft.com/office/drawing/2014/main" id="{A36BCCD9-4E9F-587D-DF94-CB617EC78453}"/>
               </a:ext>
             </a:extLst>
           </p:cNvPr>
@@ -10179,7 +9958,7 @@
           <p:cNvPr id="5" name="Date Placeholder 4">
             <a:extLst>
               <a:ext uri="{FF2B5EF4-FFF2-40B4-BE49-F238E27FC236}">
-                <a16:creationId xmlns:a16="http://schemas.microsoft.com/office/drawing/2014/main" id="{46ECD352-BB12-4583-901C-3D7D6954ECB7}"/>
+                <a16:creationId xmlns:a16="http://schemas.microsoft.com/office/drawing/2014/main" id="{6A6AE26B-D1F8-1B3B-F901-194C570395DC}"/>
               </a:ext>
             </a:extLst>
           </p:cNvPr>
@@ -10195,9 +9974,9 @@
           <a:bodyPr/>
           <a:lstStyle/>
           <a:p>
-            <a:fld id="{3277703B-A6CB-462E-B9F5-94471B8B1B1A}" type="datetimeFigureOut">
+            <a:fld id="{7AD79B96-C293-4C0B-9100-58C95BDC99F2}" type="datetimeFigureOut">
               <a:rPr lang="id-ID" smtClean="0"/>
-              <a:t>24/06/2026</a:t>
+              <a:t>03/07/2026</a:t>
             </a:fld>
             <a:endParaRPr lang="id-ID"/>
           </a:p>
@@ -10208,7 +9987,7 @@
           <p:cNvPr id="6" name="Footer Placeholder 5">
             <a:extLst>
               <a:ext uri="{FF2B5EF4-FFF2-40B4-BE49-F238E27FC236}">
-                <a16:creationId xmlns:a16="http://schemas.microsoft.com/office/drawing/2014/main" id="{2329E1D0-CF2E-4868-9D04-39D3D46679EC}"/>
+                <a16:creationId xmlns:a16="http://schemas.microsoft.com/office/drawing/2014/main" id="{BFA8CBFA-C07E-0635-5F37-D5BF6CB5C8C6}"/>
               </a:ext>
             </a:extLst>
           </p:cNvPr>
@@ -10233,7 +10012,7 @@
           <p:cNvPr id="7" name="Slide Number Placeholder 6">
             <a:extLst>
               <a:ext uri="{FF2B5EF4-FFF2-40B4-BE49-F238E27FC236}">
-                <a16:creationId xmlns:a16="http://schemas.microsoft.com/office/drawing/2014/main" id="{C75061C9-B2C8-40F4-A398-08A2ADB50D06}"/>
+                <a16:creationId xmlns:a16="http://schemas.microsoft.com/office/drawing/2014/main" id="{2DAA0B8E-B146-2A51-37FB-4C448B8B540B}"/>
               </a:ext>
             </a:extLst>
           </p:cNvPr>
@@ -10249,7 +10028,7 @@
           <a:bodyPr/>
           <a:lstStyle/>
           <a:p>
-            <a:fld id="{165CB19E-0F4B-47BD-83A9-35E41AFF97AC}" type="slidenum">
+            <a:fld id="{547ACF67-7EFB-49F1-BF4C-5E8F78770FF5}" type="slidenum">
               <a:rPr lang="id-ID" smtClean="0"/>
               <a:t>‹#›</a:t>
             </a:fld>
@@ -10260,7 +10039,7 @@
     </p:spTree>
     <p:extLst>
       <p:ext uri="{BB962C8B-B14F-4D97-AF65-F5344CB8AC3E}">
-        <p14:creationId xmlns:p14="http://schemas.microsoft.com/office/powerpoint/2010/main" val="2255522841"/>
+        <p14:creationId xmlns:p14="http://schemas.microsoft.com/office/powerpoint/2010/main" val="823596847"/>
       </p:ext>
     </p:extLst>
   </p:cSld>
@@ -10297,7 +10076,7 @@
           <p:cNvPr id="2" name="Title Placeholder 1">
             <a:extLst>
               <a:ext uri="{FF2B5EF4-FFF2-40B4-BE49-F238E27FC236}">
-                <a16:creationId xmlns:a16="http://schemas.microsoft.com/office/drawing/2014/main" id="{BB9EC783-1261-4334-9BF5-4346AFD48292}"/>
+                <a16:creationId xmlns:a16="http://schemas.microsoft.com/office/drawing/2014/main" id="{1E1DCC66-F5F8-4793-2632-FD1A81EC363F}"/>
               </a:ext>
             </a:extLst>
           </p:cNvPr>
@@ -10336,7 +10115,7 @@
           <p:cNvPr id="3" name="Text Placeholder 2">
             <a:extLst>
               <a:ext uri="{FF2B5EF4-FFF2-40B4-BE49-F238E27FC236}">
-                <a16:creationId xmlns:a16="http://schemas.microsoft.com/office/drawing/2014/main" id="{C1CFC187-55D1-4E64-9EDB-AD1C6903E022}"/>
+                <a16:creationId xmlns:a16="http://schemas.microsoft.com/office/drawing/2014/main" id="{1DF1E74C-8C0C-34CB-1083-B1A5B8556013}"/>
               </a:ext>
             </a:extLst>
           </p:cNvPr>
@@ -10404,7 +10183,7 @@
           <p:cNvPr id="4" name="Date Placeholder 3">
             <a:extLst>
               <a:ext uri="{FF2B5EF4-FFF2-40B4-BE49-F238E27FC236}">
-                <a16:creationId xmlns:a16="http://schemas.microsoft.com/office/drawing/2014/main" id="{725FC8BC-518A-4C6D-9A6F-6751342F7B04}"/>
+                <a16:creationId xmlns:a16="http://schemas.microsoft.com/office/drawing/2014/main" id="{59509FD1-45A9-7EBE-6FB2-5FB45BFDBABE}"/>
               </a:ext>
             </a:extLst>
           </p:cNvPr>
@@ -10431,16 +10210,16 @@
               <a:defRPr sz="1200">
                 <a:solidFill>
                   <a:schemeClr val="tx1">
-                    <a:tint val="75000"/>
+                    <a:tint val="82000"/>
                   </a:schemeClr>
                 </a:solidFill>
               </a:defRPr>
             </a:lvl1pPr>
           </a:lstStyle>
           <a:p>
-            <a:fld id="{3277703B-A6CB-462E-B9F5-94471B8B1B1A}" type="datetimeFigureOut">
+            <a:fld id="{7AD79B96-C293-4C0B-9100-58C95BDC99F2}" type="datetimeFigureOut">
               <a:rPr lang="id-ID" smtClean="0"/>
-              <a:t>24/06/2026</a:t>
+              <a:t>03/07/2026</a:t>
             </a:fld>
             <a:endParaRPr lang="id-ID"/>
           </a:p>
@@ -10451,7 +10230,7 @@
           <p:cNvPr id="5" name="Footer Placeholder 4">
             <a:extLst>
               <a:ext uri="{FF2B5EF4-FFF2-40B4-BE49-F238E27FC236}">
-                <a16:creationId xmlns:a16="http://schemas.microsoft.com/office/drawing/2014/main" id="{07265090-3ADE-439F-A792-831ACEEEAB72}"/>
+                <a16:creationId xmlns:a16="http://schemas.microsoft.com/office/drawing/2014/main" id="{FA7E050D-9060-1808-BF0A-FA8AE22CF71B}"/>
               </a:ext>
             </a:extLst>
           </p:cNvPr>
@@ -10478,7 +10257,7 @@
               <a:defRPr sz="1200">
                 <a:solidFill>
                   <a:schemeClr val="tx1">
-                    <a:tint val="75000"/>
+                    <a:tint val="82000"/>
                   </a:schemeClr>
                 </a:solidFill>
               </a:defRPr>
@@ -10494,7 +10273,7 @@
           <p:cNvPr id="6" name="Slide Number Placeholder 5">
             <a:extLst>
               <a:ext uri="{FF2B5EF4-FFF2-40B4-BE49-F238E27FC236}">
-                <a16:creationId xmlns:a16="http://schemas.microsoft.com/office/drawing/2014/main" id="{BFB933ED-753F-4C4F-BD09-BF6B2CA7FAFC}"/>
+                <a16:creationId xmlns:a16="http://schemas.microsoft.com/office/drawing/2014/main" id="{9C438D89-EDA6-4A04-2C83-A4A05E4A764D}"/>
               </a:ext>
             </a:extLst>
           </p:cNvPr>
@@ -10521,14 +10300,14 @@
               <a:defRPr sz="1200">
                 <a:solidFill>
                   <a:schemeClr val="tx1">
-                    <a:tint val="75000"/>
+                    <a:tint val="82000"/>
                   </a:schemeClr>
                 </a:solidFill>
               </a:defRPr>
             </a:lvl1pPr>
           </a:lstStyle>
           <a:p>
-            <a:fld id="{165CB19E-0F4B-47BD-83A9-35E41AFF97AC}" type="slidenum">
+            <a:fld id="{547ACF67-7EFB-49F1-BF4C-5E8F78770FF5}" type="slidenum">
               <a:rPr lang="id-ID" smtClean="0"/>
               <a:t>‹#›</a:t>
             </a:fld>
@@ -10539,7 +10318,7 @@
     </p:spTree>
     <p:extLst>
       <p:ext uri="{BB962C8B-B14F-4D97-AF65-F5344CB8AC3E}">
-        <p14:creationId xmlns:p14="http://schemas.microsoft.com/office/powerpoint/2010/main" val="146841655"/>
+        <p14:creationId xmlns:p14="http://schemas.microsoft.com/office/powerpoint/2010/main" val="4038713708"/>
       </p:ext>
     </p:extLst>
   </p:cSld>
@@ -10862,7 +10641,7 @@
           <p:cNvPr id="4" name="Title 3">
             <a:extLst>
               <a:ext uri="{FF2B5EF4-FFF2-40B4-BE49-F238E27FC236}">
-                <a16:creationId xmlns:a16="http://schemas.microsoft.com/office/drawing/2014/main" id="{00D4DAE6-CA8D-4C9F-91DF-366F4C11D659}"/>
+                <a16:creationId xmlns:a16="http://schemas.microsoft.com/office/drawing/2014/main" id="{001F7C0D-C93B-D5FD-D421-DD1A01C18346}"/>
               </a:ext>
             </a:extLst>
           </p:cNvPr>
@@ -10880,7 +10659,7 @@
           <a:p>
             <a:pPr algn="ctr"/>
             <a:r>
-              <a:rPr lang="id-ID" i="0" dirty="0">
+              <a:rPr lang="id-ID" dirty="0">
                 <a:ln w="0"/>
                 <a:solidFill>
                   <a:schemeClr val="accent1"/>
@@ -10892,23 +10671,9 @@
                     </a:srgbClr>
                   </a:outerShdw>
                 </a:effectLst>
-                <a:latin typeface="Segoe UI" panose="020B0502040204020203" pitchFamily="34" charset="0"/>
               </a:rPr>
               <a:t>STRUKTUR ORGANISASI</a:t>
             </a:r>
-            <a:endParaRPr lang="id-ID" dirty="0">
-              <a:ln w="0"/>
-              <a:solidFill>
-                <a:schemeClr val="accent1"/>
-              </a:solidFill>
-              <a:effectLst>
-                <a:outerShdw blurRad="38100" dist="25400" dir="5400000" algn="ctr" rotWithShape="0">
-                  <a:srgbClr val="6E747A">
-                    <a:alpha val="43000"/>
-                  </a:srgbClr>
-                </a:outerShdw>
-              </a:effectLst>
-            </a:endParaRPr>
           </a:p>
         </p:txBody>
       </p:sp>
@@ -10917,7 +10682,7 @@
           <p:cNvPr id="5" name="Diagram 4">
             <a:extLst>
               <a:ext uri="{FF2B5EF4-FFF2-40B4-BE49-F238E27FC236}">
-                <a16:creationId xmlns:a16="http://schemas.microsoft.com/office/drawing/2014/main" id="{E8D4EE5E-2318-4EFE-B608-BB627CFC974C}"/>
+                <a16:creationId xmlns:a16="http://schemas.microsoft.com/office/drawing/2014/main" id="{312DA03B-2597-E2A9-31D6-01A3F04CC5CA}"/>
               </a:ext>
             </a:extLst>
           </p:cNvPr>
@@ -10925,14 +10690,14 @@
           <p:nvPr>
             <p:extLst>
               <p:ext uri="{D42A27DB-BD31-4B8C-83A1-F6EECF244321}">
-                <p14:modId xmlns:p14="http://schemas.microsoft.com/office/powerpoint/2010/main" val="574621300"/>
+                <p14:modId xmlns:p14="http://schemas.microsoft.com/office/powerpoint/2010/main" val="3255140658"/>
               </p:ext>
             </p:extLst>
           </p:nvPr>
         </p:nvGraphicFramePr>
         <p:xfrm>
-          <a:off x="2032000" y="1902758"/>
-          <a:ext cx="7878482" cy="4161865"/>
+          <a:off x="2032000" y="1690688"/>
+          <a:ext cx="8128000" cy="4447645"/>
         </p:xfrm>
         <a:graphic>
           <a:graphicData uri="http://schemas.openxmlformats.org/drawingml/2006/diagram">
@@ -10943,7 +10708,7 @@
     </p:spTree>
     <p:extLst>
       <p:ext uri="{BB962C8B-B14F-4D97-AF65-F5344CB8AC3E}">
-        <p14:creationId xmlns:p14="http://schemas.microsoft.com/office/powerpoint/2010/main" val="148181106"/>
+        <p14:creationId xmlns:p14="http://schemas.microsoft.com/office/powerpoint/2010/main" val="4151713403"/>
       </p:ext>
     </p:extLst>
   </p:cSld>
@@ -10975,7 +10740,7 @@
           <p:cNvPr id="2" name="Title 1">
             <a:extLst>
               <a:ext uri="{FF2B5EF4-FFF2-40B4-BE49-F238E27FC236}">
-                <a16:creationId xmlns:a16="http://schemas.microsoft.com/office/drawing/2014/main" id="{0B814670-E16A-4D2A-9BDB-B505587DE676}"/>
+                <a16:creationId xmlns:a16="http://schemas.microsoft.com/office/drawing/2014/main" id="{D6F1E89A-D70F-F24B-85E9-C1C1358D9D2F}"/>
               </a:ext>
             </a:extLst>
           </p:cNvPr>
@@ -10993,7 +10758,7 @@
           <a:p>
             <a:pPr algn="ctr"/>
             <a:r>
-              <a:rPr lang="id-ID" i="0" dirty="0">
+              <a:rPr lang="id-ID" dirty="0">
                 <a:ln w="0"/>
                 <a:solidFill>
                   <a:schemeClr val="accent1"/>
@@ -11005,32 +10770,18 @@
                     </a:srgbClr>
                   </a:outerShdw>
                 </a:effectLst>
-                <a:latin typeface="Segoe UI" panose="020B0502040204020203" pitchFamily="34" charset="0"/>
               </a:rPr>
               <a:t>PROSES BISNIS</a:t>
             </a:r>
-            <a:endParaRPr lang="id-ID" dirty="0">
-              <a:ln w="0"/>
-              <a:solidFill>
-                <a:schemeClr val="accent1"/>
-              </a:solidFill>
-              <a:effectLst>
-                <a:outerShdw blurRad="38100" dist="25400" dir="5400000" algn="ctr" rotWithShape="0">
-                  <a:srgbClr val="6E747A">
-                    <a:alpha val="43000"/>
-                  </a:srgbClr>
-                </a:outerShdw>
-              </a:effectLst>
-            </a:endParaRPr>
           </a:p>
         </p:txBody>
       </p:sp>
       <p:sp>
         <p:nvSpPr>
-          <p:cNvPr id="4" name="Rectangle: Rounded Corners 3">
+          <p:cNvPr id="3" name="Rectangle: Rounded Corners 2">
             <a:extLst>
               <a:ext uri="{FF2B5EF4-FFF2-40B4-BE49-F238E27FC236}">
-                <a16:creationId xmlns:a16="http://schemas.microsoft.com/office/drawing/2014/main" id="{489AC6C0-51F7-4E6E-9032-0E7278C97157}"/>
+                <a16:creationId xmlns:a16="http://schemas.microsoft.com/office/drawing/2014/main" id="{95B0F5F1-9D8F-FF6C-92FB-120BB3FFA85E}"/>
               </a:ext>
             </a:extLst>
           </p:cNvPr>
@@ -11039,41 +10790,17 @@
         </p:nvSpPr>
         <p:spPr>
           <a:xfrm>
-            <a:off x="838200" y="3429000"/>
-            <a:ext cx="1844842" cy="581526"/>
+            <a:off x="1617688" y="3449611"/>
+            <a:ext cx="1693889" cy="659567"/>
           </a:xfrm>
           <a:prstGeom prst="roundRect">
             <a:avLst/>
           </a:prstGeom>
-          <a:gradFill flip="none" rotWithShape="1">
-            <a:gsLst>
-              <a:gs pos="0">
-                <a:schemeClr val="accent1">
-                  <a:shade val="30000"/>
-                  <a:satMod val="115000"/>
-                </a:schemeClr>
-              </a:gs>
-              <a:gs pos="50000">
-                <a:schemeClr val="accent1">
-                  <a:shade val="67500"/>
-                  <a:satMod val="115000"/>
-                </a:schemeClr>
-              </a:gs>
-              <a:gs pos="100000">
-                <a:schemeClr val="accent1">
-                  <a:shade val="100000"/>
-                  <a:satMod val="115000"/>
-                </a:schemeClr>
-              </a:gs>
-            </a:gsLst>
-            <a:lin ang="2700000" scaled="1"/>
-            <a:tileRect/>
-          </a:gradFill>
         </p:spPr>
         <p:style>
           <a:lnRef idx="2">
             <a:schemeClr val="accent1">
-              <a:shade val="50000"/>
+              <a:shade val="15000"/>
             </a:schemeClr>
           </a:lnRef>
           <a:fillRef idx="1">
@@ -11092,18 +10819,19 @@
           <a:p>
             <a:pPr algn="ctr"/>
             <a:r>
-              <a:rPr lang="id-ID" dirty="0"/>
-              <a:t>Prospek</a:t>
+              <a:rPr lang="id-ID" b="1" dirty="0"/>
+              <a:t>PROSPEK</a:t>
             </a:r>
+            <a:endParaRPr lang="id-ID" dirty="0"/>
           </a:p>
         </p:txBody>
       </p:sp>
       <p:sp>
         <p:nvSpPr>
-          <p:cNvPr id="5" name="Rectangle: Rounded Corners 4">
+          <p:cNvPr id="7" name="Rectangle: Rounded Corners 6">
             <a:extLst>
               <a:ext uri="{FF2B5EF4-FFF2-40B4-BE49-F238E27FC236}">
-                <a16:creationId xmlns:a16="http://schemas.microsoft.com/office/drawing/2014/main" id="{4D813187-AF1A-408C-820D-A860F8A269E5}"/>
+                <a16:creationId xmlns:a16="http://schemas.microsoft.com/office/drawing/2014/main" id="{AAC516C9-9C1A-FD8C-1766-8B88CA494857}"/>
               </a:ext>
             </a:extLst>
           </p:cNvPr>
@@ -11112,41 +10840,17 @@
         </p:nvSpPr>
         <p:spPr>
           <a:xfrm>
-            <a:off x="3650915" y="3429000"/>
-            <a:ext cx="1844842" cy="581526"/>
+            <a:off x="4106055" y="3449611"/>
+            <a:ext cx="1693889" cy="659567"/>
           </a:xfrm>
           <a:prstGeom prst="roundRect">
             <a:avLst/>
           </a:prstGeom>
-          <a:gradFill flip="none" rotWithShape="1">
-            <a:gsLst>
-              <a:gs pos="0">
-                <a:schemeClr val="accent1">
-                  <a:shade val="30000"/>
-                  <a:satMod val="115000"/>
-                </a:schemeClr>
-              </a:gs>
-              <a:gs pos="50000">
-                <a:schemeClr val="accent1">
-                  <a:shade val="67500"/>
-                  <a:satMod val="115000"/>
-                </a:schemeClr>
-              </a:gs>
-              <a:gs pos="100000">
-                <a:schemeClr val="accent1">
-                  <a:shade val="100000"/>
-                  <a:satMod val="115000"/>
-                </a:schemeClr>
-              </a:gs>
-            </a:gsLst>
-            <a:lin ang="2700000" scaled="1"/>
-            <a:tileRect/>
-          </a:gradFill>
         </p:spPr>
         <p:style>
           <a:lnRef idx="2">
             <a:schemeClr val="accent1">
-              <a:shade val="50000"/>
+              <a:shade val="15000"/>
             </a:schemeClr>
           </a:lnRef>
           <a:fillRef idx="1">
@@ -11165,18 +10869,19 @@
           <a:p>
             <a:pPr algn="ctr"/>
             <a:r>
-              <a:rPr lang="id-ID" dirty="0"/>
-              <a:t>Penawaran</a:t>
+              <a:rPr lang="id-ID" b="1" dirty="0"/>
+              <a:t>PENAWARAN</a:t>
             </a:r>
+            <a:endParaRPr lang="id-ID" dirty="0"/>
           </a:p>
         </p:txBody>
       </p:sp>
       <p:sp>
         <p:nvSpPr>
-          <p:cNvPr id="6" name="Rectangle: Rounded Corners 5">
+          <p:cNvPr id="8" name="Rectangle: Rounded Corners 7">
             <a:extLst>
               <a:ext uri="{FF2B5EF4-FFF2-40B4-BE49-F238E27FC236}">
-                <a16:creationId xmlns:a16="http://schemas.microsoft.com/office/drawing/2014/main" id="{E69021D6-30E0-41B9-B67B-6EC946A751E5}"/>
+                <a16:creationId xmlns:a16="http://schemas.microsoft.com/office/drawing/2014/main" id="{96A7560E-C5C0-B06F-ADAD-54691F6A38D7}"/>
               </a:ext>
             </a:extLst>
           </p:cNvPr>
@@ -11185,41 +10890,17 @@
         </p:nvSpPr>
         <p:spPr>
           <a:xfrm>
-            <a:off x="6463630" y="3429000"/>
-            <a:ext cx="1844842" cy="581526"/>
+            <a:off x="6594422" y="3449611"/>
+            <a:ext cx="1693889" cy="659567"/>
           </a:xfrm>
           <a:prstGeom prst="roundRect">
             <a:avLst/>
           </a:prstGeom>
-          <a:gradFill flip="none" rotWithShape="1">
-            <a:gsLst>
-              <a:gs pos="0">
-                <a:schemeClr val="accent1">
-                  <a:shade val="30000"/>
-                  <a:satMod val="115000"/>
-                </a:schemeClr>
-              </a:gs>
-              <a:gs pos="50000">
-                <a:schemeClr val="accent1">
-                  <a:shade val="67500"/>
-                  <a:satMod val="115000"/>
-                </a:schemeClr>
-              </a:gs>
-              <a:gs pos="100000">
-                <a:schemeClr val="accent1">
-                  <a:shade val="100000"/>
-                  <a:satMod val="115000"/>
-                </a:schemeClr>
-              </a:gs>
-            </a:gsLst>
-            <a:lin ang="2700000" scaled="1"/>
-            <a:tileRect/>
-          </a:gradFill>
         </p:spPr>
         <p:style>
           <a:lnRef idx="2">
             <a:schemeClr val="accent1">
-              <a:shade val="50000"/>
+              <a:shade val="15000"/>
             </a:schemeClr>
           </a:lnRef>
           <a:fillRef idx="1">
@@ -11238,18 +10919,19 @@
           <a:p>
             <a:pPr algn="ctr"/>
             <a:r>
-              <a:rPr lang="id-ID" dirty="0"/>
-              <a:t>Negosiasi</a:t>
+              <a:rPr lang="id-ID" b="1" dirty="0"/>
+              <a:t>NEGOSIASI</a:t>
             </a:r>
+            <a:endParaRPr lang="id-ID" dirty="0"/>
           </a:p>
         </p:txBody>
       </p:sp>
       <p:sp>
         <p:nvSpPr>
-          <p:cNvPr id="7" name="Rectangle: Rounded Corners 6">
+          <p:cNvPr id="9" name="Rectangle: Rounded Corners 8">
             <a:extLst>
               <a:ext uri="{FF2B5EF4-FFF2-40B4-BE49-F238E27FC236}">
-                <a16:creationId xmlns:a16="http://schemas.microsoft.com/office/drawing/2014/main" id="{431310ED-7756-4492-9EB5-FFABB44613B3}"/>
+                <a16:creationId xmlns:a16="http://schemas.microsoft.com/office/drawing/2014/main" id="{E680FC72-DE6C-4AC7-ED41-B2895CDB7D90}"/>
               </a:ext>
             </a:extLst>
           </p:cNvPr>
@@ -11258,41 +10940,17 @@
         </p:nvSpPr>
         <p:spPr>
           <a:xfrm>
-            <a:off x="9276347" y="3429000"/>
-            <a:ext cx="1844842" cy="581526"/>
+            <a:off x="9082789" y="3449611"/>
+            <a:ext cx="1693889" cy="659567"/>
           </a:xfrm>
           <a:prstGeom prst="roundRect">
             <a:avLst/>
           </a:prstGeom>
-          <a:gradFill flip="none" rotWithShape="1">
-            <a:gsLst>
-              <a:gs pos="0">
-                <a:schemeClr val="accent1">
-                  <a:shade val="30000"/>
-                  <a:satMod val="115000"/>
-                </a:schemeClr>
-              </a:gs>
-              <a:gs pos="50000">
-                <a:schemeClr val="accent1">
-                  <a:shade val="67500"/>
-                  <a:satMod val="115000"/>
-                </a:schemeClr>
-              </a:gs>
-              <a:gs pos="100000">
-                <a:schemeClr val="accent1">
-                  <a:shade val="100000"/>
-                  <a:satMod val="115000"/>
-                </a:schemeClr>
-              </a:gs>
-            </a:gsLst>
-            <a:lin ang="2700000" scaled="1"/>
-            <a:tileRect/>
-          </a:gradFill>
         </p:spPr>
         <p:style>
           <a:lnRef idx="2">
             <a:schemeClr val="accent1">
-              <a:shade val="50000"/>
+              <a:shade val="15000"/>
             </a:schemeClr>
           </a:lnRef>
           <a:fillRef idx="1">
@@ -11311,18 +10969,19 @@
           <a:p>
             <a:pPr algn="ctr"/>
             <a:r>
-              <a:rPr lang="id-ID" dirty="0"/>
-              <a:t>Deal</a:t>
+              <a:rPr lang="id-ID" b="1" dirty="0"/>
+              <a:t>DEAL</a:t>
             </a:r>
+            <a:endParaRPr lang="id-ID" dirty="0"/>
           </a:p>
         </p:txBody>
       </p:sp>
       <p:sp>
         <p:nvSpPr>
-          <p:cNvPr id="13" name="Arrow: Right 12">
+          <p:cNvPr id="10" name="Arrow: Right 9">
             <a:extLst>
               <a:ext uri="{FF2B5EF4-FFF2-40B4-BE49-F238E27FC236}">
-                <a16:creationId xmlns:a16="http://schemas.microsoft.com/office/drawing/2014/main" id="{BD95F3C3-3A9C-421B-9B35-F05DAB6FF950}"/>
+                <a16:creationId xmlns:a16="http://schemas.microsoft.com/office/drawing/2014/main" id="{58453025-3D46-8D2F-3031-AE8FD3D59DE8}"/>
               </a:ext>
             </a:extLst>
           </p:cNvPr>
@@ -11331,41 +10990,17 @@
         </p:nvSpPr>
         <p:spPr>
           <a:xfrm>
-            <a:off x="2950410" y="3486150"/>
-            <a:ext cx="433137" cy="467226"/>
+            <a:off x="3447738" y="3541426"/>
+            <a:ext cx="509665" cy="475937"/>
           </a:xfrm>
           <a:prstGeom prst="rightArrow">
             <a:avLst/>
           </a:prstGeom>
-          <a:gradFill flip="none" rotWithShape="1">
-            <a:gsLst>
-              <a:gs pos="0">
-                <a:schemeClr val="accent1">
-                  <a:shade val="30000"/>
-                  <a:satMod val="115000"/>
-                </a:schemeClr>
-              </a:gs>
-              <a:gs pos="50000">
-                <a:schemeClr val="accent1">
-                  <a:shade val="67500"/>
-                  <a:satMod val="115000"/>
-                </a:schemeClr>
-              </a:gs>
-              <a:gs pos="100000">
-                <a:schemeClr val="accent1">
-                  <a:shade val="100000"/>
-                  <a:satMod val="115000"/>
-                </a:schemeClr>
-              </a:gs>
-            </a:gsLst>
-            <a:lin ang="2700000" scaled="1"/>
-            <a:tileRect/>
-          </a:gradFill>
         </p:spPr>
         <p:style>
           <a:lnRef idx="2">
             <a:schemeClr val="accent1">
-              <a:shade val="50000"/>
+              <a:shade val="15000"/>
             </a:schemeClr>
           </a:lnRef>
           <a:fillRef idx="1">
@@ -11389,10 +11024,10 @@
       </p:sp>
       <p:sp>
         <p:nvSpPr>
-          <p:cNvPr id="14" name="Arrow: Right 13">
+          <p:cNvPr id="11" name="Arrow: Right 10">
             <a:extLst>
               <a:ext uri="{FF2B5EF4-FFF2-40B4-BE49-F238E27FC236}">
-                <a16:creationId xmlns:a16="http://schemas.microsoft.com/office/drawing/2014/main" id="{ADEDE96B-CD0F-4157-96F1-26BD5DEE79CE}"/>
+                <a16:creationId xmlns:a16="http://schemas.microsoft.com/office/drawing/2014/main" id="{E59E5F7B-A496-2EBE-D605-EF3FDFE458CE}"/>
               </a:ext>
             </a:extLst>
           </p:cNvPr>
@@ -11401,41 +11036,17 @@
         </p:nvSpPr>
         <p:spPr>
           <a:xfrm>
-            <a:off x="5763125" y="3486150"/>
-            <a:ext cx="433137" cy="467226"/>
+            <a:off x="5957343" y="3541426"/>
+            <a:ext cx="509665" cy="475937"/>
           </a:xfrm>
           <a:prstGeom prst="rightArrow">
             <a:avLst/>
           </a:prstGeom>
-          <a:gradFill flip="none" rotWithShape="1">
-            <a:gsLst>
-              <a:gs pos="0">
-                <a:schemeClr val="accent1">
-                  <a:shade val="30000"/>
-                  <a:satMod val="115000"/>
-                </a:schemeClr>
-              </a:gs>
-              <a:gs pos="50000">
-                <a:schemeClr val="accent1">
-                  <a:shade val="67500"/>
-                  <a:satMod val="115000"/>
-                </a:schemeClr>
-              </a:gs>
-              <a:gs pos="100000">
-                <a:schemeClr val="accent1">
-                  <a:shade val="100000"/>
-                  <a:satMod val="115000"/>
-                </a:schemeClr>
-              </a:gs>
-            </a:gsLst>
-            <a:lin ang="2700000" scaled="1"/>
-            <a:tileRect/>
-          </a:gradFill>
         </p:spPr>
         <p:style>
           <a:lnRef idx="2">
             <a:schemeClr val="accent1">
-              <a:shade val="50000"/>
+              <a:shade val="15000"/>
             </a:schemeClr>
           </a:lnRef>
           <a:fillRef idx="1">
@@ -11459,10 +11070,10 @@
       </p:sp>
       <p:sp>
         <p:nvSpPr>
-          <p:cNvPr id="15" name="Arrow: Right 14">
+          <p:cNvPr id="12" name="Arrow: Right 11">
             <a:extLst>
               <a:ext uri="{FF2B5EF4-FFF2-40B4-BE49-F238E27FC236}">
-                <a16:creationId xmlns:a16="http://schemas.microsoft.com/office/drawing/2014/main" id="{1C48F979-F104-444C-A01C-6B1F66A16071}"/>
+                <a16:creationId xmlns:a16="http://schemas.microsoft.com/office/drawing/2014/main" id="{C0E8914B-7219-FA0E-894B-0551F3391C8B}"/>
               </a:ext>
             </a:extLst>
           </p:cNvPr>
@@ -11471,41 +11082,17 @@
         </p:nvSpPr>
         <p:spPr>
           <a:xfrm>
-            <a:off x="8575840" y="3486150"/>
-            <a:ext cx="433137" cy="467226"/>
+            <a:off x="8430717" y="3541426"/>
+            <a:ext cx="509665" cy="475937"/>
           </a:xfrm>
           <a:prstGeom prst="rightArrow">
             <a:avLst/>
           </a:prstGeom>
-          <a:gradFill flip="none" rotWithShape="1">
-            <a:gsLst>
-              <a:gs pos="0">
-                <a:schemeClr val="accent1">
-                  <a:shade val="30000"/>
-                  <a:satMod val="115000"/>
-                </a:schemeClr>
-              </a:gs>
-              <a:gs pos="50000">
-                <a:schemeClr val="accent1">
-                  <a:shade val="67500"/>
-                  <a:satMod val="115000"/>
-                </a:schemeClr>
-              </a:gs>
-              <a:gs pos="100000">
-                <a:schemeClr val="accent1">
-                  <a:shade val="100000"/>
-                  <a:satMod val="115000"/>
-                </a:schemeClr>
-              </a:gs>
-            </a:gsLst>
-            <a:lin ang="2700000" scaled="1"/>
-            <a:tileRect/>
-          </a:gradFill>
         </p:spPr>
         <p:style>
           <a:lnRef idx="2">
             <a:schemeClr val="accent1">
-              <a:shade val="50000"/>
+              <a:shade val="15000"/>
             </a:schemeClr>
           </a:lnRef>
           <a:fillRef idx="1">
@@ -11530,7 +11117,7 @@
     </p:spTree>
     <p:extLst>
       <p:ext uri="{BB962C8B-B14F-4D97-AF65-F5344CB8AC3E}">
-        <p14:creationId xmlns:p14="http://schemas.microsoft.com/office/powerpoint/2010/main" val="3060509123"/>
+        <p14:creationId xmlns:p14="http://schemas.microsoft.com/office/powerpoint/2010/main" val="4190883766"/>
       </p:ext>
     </p:extLst>
   </p:cSld>
@@ -11562,7 +11149,7 @@
           <p:cNvPr id="2" name="Title 1">
             <a:extLst>
               <a:ext uri="{FF2B5EF4-FFF2-40B4-BE49-F238E27FC236}">
-                <a16:creationId xmlns:a16="http://schemas.microsoft.com/office/drawing/2014/main" id="{66C17821-74B5-434F-B50E-A396C29DDBA7}"/>
+                <a16:creationId xmlns:a16="http://schemas.microsoft.com/office/drawing/2014/main" id="{3CA0A680-29BA-7F4D-C381-6EE0438EE7CA}"/>
               </a:ext>
             </a:extLst>
           </p:cNvPr>
@@ -11580,7 +11167,7 @@
           <a:p>
             <a:pPr algn="ctr"/>
             <a:r>
-              <a:rPr lang="id-ID" i="0" dirty="0">
+              <a:rPr lang="id-ID" dirty="0">
                 <a:ln w="0"/>
                 <a:solidFill>
                   <a:schemeClr val="accent1"/>
@@ -11592,23 +11179,9 @@
                     </a:srgbClr>
                   </a:outerShdw>
                 </a:effectLst>
-                <a:latin typeface="Segoe UI" panose="020B0502040204020203" pitchFamily="34" charset="0"/>
               </a:rPr>
               <a:t>SIKLUS PENJUALAN</a:t>
             </a:r>
-            <a:endParaRPr lang="id-ID" dirty="0">
-              <a:ln w="0"/>
-              <a:solidFill>
-                <a:schemeClr val="accent1"/>
-              </a:solidFill>
-              <a:effectLst>
-                <a:outerShdw blurRad="38100" dist="25400" dir="5400000" algn="ctr" rotWithShape="0">
-                  <a:srgbClr val="6E747A">
-                    <a:alpha val="43000"/>
-                  </a:srgbClr>
-                </a:outerShdw>
-              </a:effectLst>
-            </a:endParaRPr>
           </a:p>
         </p:txBody>
       </p:sp>
@@ -11617,7 +11190,7 @@
           <p:cNvPr id="3" name="Diagram 2">
             <a:extLst>
               <a:ext uri="{FF2B5EF4-FFF2-40B4-BE49-F238E27FC236}">
-                <a16:creationId xmlns:a16="http://schemas.microsoft.com/office/drawing/2014/main" id="{B1B428F0-0F08-4093-8089-107821F0B6FF}"/>
+                <a16:creationId xmlns:a16="http://schemas.microsoft.com/office/drawing/2014/main" id="{B31D2B4A-91A2-1DCE-DDA7-2F295685853A}"/>
               </a:ext>
             </a:extLst>
           </p:cNvPr>
@@ -11625,14 +11198,14 @@
           <p:nvPr>
             <p:extLst>
               <p:ext uri="{D42A27DB-BD31-4B8C-83A1-F6EECF244321}">
-                <p14:modId xmlns:p14="http://schemas.microsoft.com/office/powerpoint/2010/main" val="3081755273"/>
+                <p14:modId xmlns:p14="http://schemas.microsoft.com/office/powerpoint/2010/main" val="314169438"/>
               </p:ext>
             </p:extLst>
           </p:nvPr>
         </p:nvGraphicFramePr>
         <p:xfrm>
-          <a:off x="2716463" y="1680913"/>
-          <a:ext cx="6759074" cy="4447645"/>
+          <a:off x="2736329" y="970613"/>
+          <a:ext cx="6719341" cy="4916774"/>
         </p:xfrm>
         <a:graphic>
           <a:graphicData uri="http://schemas.openxmlformats.org/drawingml/2006/diagram">
@@ -11643,7 +11216,7 @@
     </p:spTree>
     <p:extLst>
       <p:ext uri="{BB962C8B-B14F-4D97-AF65-F5344CB8AC3E}">
-        <p14:creationId xmlns:p14="http://schemas.microsoft.com/office/powerpoint/2010/main" val="1328651626"/>
+        <p14:creationId xmlns:p14="http://schemas.microsoft.com/office/powerpoint/2010/main" val="1410775516"/>
       </p:ext>
     </p:extLst>
   </p:cSld>
@@ -11664,39 +11237,39 @@
         <a:sysClr val="window" lastClr="FFFFFF"/>
       </a:lt1>
       <a:dk2>
-        <a:srgbClr val="44546A"/>
+        <a:srgbClr val="0E2841"/>
       </a:dk2>
       <a:lt2>
-        <a:srgbClr val="E7E6E6"/>
+        <a:srgbClr val="E8E8E8"/>
       </a:lt2>
       <a:accent1>
-        <a:srgbClr val="4472C4"/>
+        <a:srgbClr val="156082"/>
       </a:accent1>
       <a:accent2>
-        <a:srgbClr val="ED7D31"/>
+        <a:srgbClr val="E97132"/>
       </a:accent2>
       <a:accent3>
-        <a:srgbClr val="A5A5A5"/>
+        <a:srgbClr val="196B24"/>
       </a:accent3>
       <a:accent4>
-        <a:srgbClr val="FFC000"/>
+        <a:srgbClr val="0F9ED5"/>
       </a:accent4>
       <a:accent5>
-        <a:srgbClr val="5B9BD5"/>
+        <a:srgbClr val="A02B93"/>
       </a:accent5>
       <a:accent6>
-        <a:srgbClr val="70AD47"/>
+        <a:srgbClr val="4EA72E"/>
       </a:accent6>
       <a:hlink>
-        <a:srgbClr val="0563C1"/>
+        <a:srgbClr val="467886"/>
       </a:hlink>
       <a:folHlink>
-        <a:srgbClr val="954F72"/>
+        <a:srgbClr val="96607D"/>
       </a:folHlink>
     </a:clrScheme>
     <a:fontScheme name="Office">
       <a:majorFont>
-        <a:latin typeface="Calibri Light" panose="020F0302020204030204"/>
+        <a:latin typeface="Aptos Display" panose="02110004020202020204"/>
         <a:ea typeface=""/>
         <a:cs typeface=""/>
         <a:font script="Jpan" typeface="游ゴシック Light"/>
@@ -11748,7 +11321,7 @@
         <a:font script="Tfng" typeface="Ebrima"/>
       </a:majorFont>
       <a:minorFont>
-        <a:latin typeface="Calibri" panose="020F0502020204030204"/>
+        <a:latin typeface="Aptos" panose="02110004020202020204"/>
         <a:ea typeface=""/>
         <a:cs typeface=""/>
         <a:font script="Jpan" typeface="游ゴシック"/>
@@ -11859,13 +11432,6 @@
         </a:gradFill>
       </a:fillStyleLst>
       <a:lnStyleLst>
-        <a:ln w="6350" cap="flat" cmpd="sng" algn="ctr">
-          <a:solidFill>
-            <a:schemeClr val="phClr"/>
-          </a:solidFill>
-          <a:prstDash val="solid"/>
-          <a:miter lim="800000"/>
-        </a:ln>
         <a:ln w="12700" cap="flat" cmpd="sng" algn="ctr">
           <a:solidFill>
             <a:schemeClr val="phClr"/>
@@ -11874,6 +11440,13 @@
           <a:miter lim="800000"/>
         </a:ln>
         <a:ln w="19050" cap="flat" cmpd="sng" algn="ctr">
+          <a:solidFill>
+            <a:schemeClr val="phClr"/>
+          </a:solidFill>
+          <a:prstDash val="solid"/>
+          <a:miter lim="800000"/>
+        </a:ln>
+        <a:ln w="25400" cap="flat" cmpd="sng" algn="ctr">
           <a:solidFill>
             <a:schemeClr val="phClr"/>
           </a:solidFill>
@@ -11938,11 +11511,31 @@
       </a:bgFillStyleLst>
     </a:fmtScheme>
   </a:themeElements>
-  <a:objectDefaults/>
+  <a:objectDefaults>
+    <a:lnDef>
+      <a:spPr/>
+      <a:bodyPr/>
+      <a:lstStyle/>
+      <a:style>
+        <a:lnRef idx="2">
+          <a:schemeClr val="accent1"/>
+        </a:lnRef>
+        <a:fillRef idx="0">
+          <a:schemeClr val="accent1"/>
+        </a:fillRef>
+        <a:effectRef idx="1">
+          <a:schemeClr val="accent1"/>
+        </a:effectRef>
+        <a:fontRef idx="minor">
+          <a:schemeClr val="tx1"/>
+        </a:fontRef>
+      </a:style>
+    </a:lnDef>
+  </a:objectDefaults>
   <a:extraClrSchemeLst/>
   <a:extLst>
     <a:ext uri="{05A4C25C-085E-4340-85A3-A5531E510DB2}">
-      <thm15:themeFamily xmlns:thm15="http://schemas.microsoft.com/office/thememl/2012/main" name="Office Theme" id="{62F939B6-93AF-4DB8-9C6B-D6C7DFDC589F}" vid="{4A3C46E8-61CC-4603-A589-7422A47A8E4A}"/>
+      <thm15:themeFamily xmlns:thm15="http://schemas.microsoft.com/office/thememl/2012/main" name="Office Theme" id="{2E142A2C-CD16-42D6-873A-C26D2A0506FA}" vid="{1BDDFF52-6CD6-40A5-AB3C-68EB2F1E4D0A}"/>
     </a:ext>
   </a:extLst>
 </a:theme>

--- a/assets/files/Struktur-Organisasi.pptx
+++ b/assets/files/Struktur-Organisasi.pptx
@@ -106,6 +106,11 @@
       </a:defRPr>
     </a:lvl9pPr>
   </p:defaultTextStyle>
+  <p:extLst>
+    <p:ext uri="{EFAFB233-063F-42B5-8137-9DF3F51BA10A}">
+      <p15:sldGuideLst xmlns:p15="http://schemas.microsoft.com/office/powerpoint/2012/main"/>
+    </p:ext>
+  </p:extLst>
 </p:presentation>
 </file>
 
@@ -1778,7 +1783,7 @@
 <file path=ppt/diagrams/data1.xml><?xml version="1.0" encoding="utf-8"?>
 <dgm:dataModel xmlns:dgm="http://schemas.openxmlformats.org/drawingml/2006/diagram" xmlns:a="http://schemas.openxmlformats.org/drawingml/2006/main">
   <dgm:ptLst>
-    <dgm:pt modelId="{EA41A2E5-88E2-4D29-A39A-96D0D39F74BD}" type="doc">
+    <dgm:pt modelId="{AC9898F2-45CC-476A-AD4C-296C3A7036F3}" type="doc">
       <dgm:prSet loTypeId="urn:microsoft.com/office/officeart/2005/8/layout/orgChart1" loCatId="hierarchy" qsTypeId="urn:microsoft.com/office/officeart/2005/8/quickstyle/simple5" qsCatId="simple" csTypeId="urn:microsoft.com/office/officeart/2005/8/colors/colorful1" csCatId="colorful" phldr="1"/>
       <dgm:spPr/>
       <dgm:t>
@@ -1789,7 +1794,7 @@
         </a:p>
       </dgm:t>
     </dgm:pt>
-    <dgm:pt modelId="{2DA4F466-EE9C-4963-9539-C29C96763B8F}">
+    <dgm:pt modelId="{AF5EEB3C-EC9E-4DD7-BB05-DE9AAB3A7EC9}">
       <dgm:prSet phldrT="[Text]" custT="1"/>
       <dgm:spPr/>
       <dgm:t>
@@ -1800,36 +1805,36 @@
             <a:buNone/>
           </a:pPr>
           <a:r>
-            <a:rPr lang="id-ID" sz="3600" b="1" i="0" dirty="0"/>
+            <a:rPr lang="id-ID" sz="2400" b="1" i="0" dirty="0"/>
             <a:t>Direktur</a:t>
           </a:r>
-          <a:endParaRPr lang="id-ID" sz="3600" dirty="0"/>
+          <a:endParaRPr lang="id-ID" sz="2400" dirty="0"/>
         </a:p>
       </dgm:t>
     </dgm:pt>
-    <dgm:pt modelId="{AB4E8FAE-BDAC-437F-BBE6-D59931791227}" type="parTrans" cxnId="{6F3D938E-3AF4-4774-83C8-CB13725B47FC}">
+    <dgm:pt modelId="{0C0E5A4F-134F-4C8E-9492-EDBE2C765597}" type="parTrans" cxnId="{189115C8-59AE-4716-BA00-51FE92E69CCB}">
       <dgm:prSet/>
       <dgm:spPr/>
       <dgm:t>
         <a:bodyPr/>
         <a:lstStyle/>
         <a:p>
-          <a:endParaRPr lang="id-ID" sz="1200"/>
+          <a:endParaRPr lang="id-ID" sz="1400"/>
         </a:p>
       </dgm:t>
     </dgm:pt>
-    <dgm:pt modelId="{D1CC015D-55A8-468D-A5D4-DF56DFDBFCBF}" type="sibTrans" cxnId="{6F3D938E-3AF4-4774-83C8-CB13725B47FC}">
+    <dgm:pt modelId="{D4E6A4EE-B5FA-48D0-BC2C-0B65D33619FA}" type="sibTrans" cxnId="{189115C8-59AE-4716-BA00-51FE92E69CCB}">
       <dgm:prSet/>
       <dgm:spPr/>
       <dgm:t>
         <a:bodyPr/>
         <a:lstStyle/>
         <a:p>
-          <a:endParaRPr lang="id-ID" sz="1200"/>
+          <a:endParaRPr lang="id-ID" sz="1400"/>
         </a:p>
       </dgm:t>
     </dgm:pt>
-    <dgm:pt modelId="{D3AEF5B0-9774-4F00-BB04-72C3611DFE76}" type="asst">
+    <dgm:pt modelId="{6A3E31BC-BAD6-460A-8FFA-6F8CF4660740}" type="asst">
       <dgm:prSet phldrT="[Text]" custT="1"/>
       <dgm:spPr/>
       <dgm:t>
@@ -1840,36 +1845,36 @@
             <a:buNone/>
           </a:pPr>
           <a:r>
-            <a:rPr lang="id-ID" sz="3600" b="1" i="0" dirty="0"/>
+            <a:rPr lang="id-ID" sz="2400" b="1" i="0" dirty="0"/>
             <a:t>Manager</a:t>
           </a:r>
-          <a:endParaRPr lang="id-ID" sz="3600" dirty="0"/>
+          <a:endParaRPr lang="id-ID" sz="2400" dirty="0"/>
         </a:p>
       </dgm:t>
     </dgm:pt>
-    <dgm:pt modelId="{B17EFD54-07EA-4E37-9DEA-79C5DAADAA51}" type="parTrans" cxnId="{024934BE-515D-4F31-A946-D576536BCF64}">
+    <dgm:pt modelId="{34951579-206E-428E-810F-2B5365B9B1A5}" type="parTrans" cxnId="{DF73629B-0193-4CB4-A7C2-4BCBDC5C1F4D}">
       <dgm:prSet/>
       <dgm:spPr/>
       <dgm:t>
         <a:bodyPr/>
         <a:lstStyle/>
         <a:p>
-          <a:endParaRPr lang="id-ID" sz="1200"/>
+          <a:endParaRPr lang="id-ID" sz="1400"/>
         </a:p>
       </dgm:t>
     </dgm:pt>
-    <dgm:pt modelId="{80D9523B-9757-4FF8-80E3-955B340892EA}" type="sibTrans" cxnId="{024934BE-515D-4F31-A946-D576536BCF64}">
+    <dgm:pt modelId="{B6585105-BD67-4FBA-9B07-E7D8E426B776}" type="sibTrans" cxnId="{DF73629B-0193-4CB4-A7C2-4BCBDC5C1F4D}">
       <dgm:prSet/>
       <dgm:spPr/>
       <dgm:t>
         <a:bodyPr/>
         <a:lstStyle/>
         <a:p>
-          <a:endParaRPr lang="id-ID" sz="1200"/>
+          <a:endParaRPr lang="id-ID" sz="1400"/>
         </a:p>
       </dgm:t>
     </dgm:pt>
-    <dgm:pt modelId="{32C335E0-B88A-45A4-BC05-91EBAB9FD28C}">
+    <dgm:pt modelId="{8A4C2F96-2844-484A-993C-383254337803}">
       <dgm:prSet phldrT="[Text]" custT="1"/>
       <dgm:spPr/>
       <dgm:t>
@@ -1880,40 +1885,40 @@
             <a:buNone/>
           </a:pPr>
           <a:r>
-            <a:rPr lang="id-ID" sz="3600" b="1" i="0" dirty="0"/>
+            <a:rPr lang="id-ID" sz="2400" b="1" i="0" dirty="0"/>
             <a:t>Staff</a:t>
           </a:r>
           <a:r>
-            <a:rPr lang="id-ID" sz="3600" b="0" i="0" dirty="0"/>
+            <a:rPr lang="id-ID" sz="2400" b="0" i="0" dirty="0"/>
             <a:t> </a:t>
           </a:r>
-          <a:endParaRPr lang="id-ID" sz="3600" dirty="0"/>
+          <a:endParaRPr lang="id-ID" sz="2400" dirty="0"/>
         </a:p>
       </dgm:t>
     </dgm:pt>
-    <dgm:pt modelId="{667CE224-6671-41BF-9859-8297E611F61A}" type="parTrans" cxnId="{EC102111-B768-474D-B952-68FEA8F09C97}">
+    <dgm:pt modelId="{4C9AFFC5-3F40-4AAD-9BDD-53D61C88B300}" type="parTrans" cxnId="{8C7BE856-8137-46F7-8CB8-F0E2DA603924}">
       <dgm:prSet/>
       <dgm:spPr/>
       <dgm:t>
         <a:bodyPr/>
         <a:lstStyle/>
         <a:p>
-          <a:endParaRPr lang="id-ID" sz="1200"/>
+          <a:endParaRPr lang="id-ID" sz="1400"/>
         </a:p>
       </dgm:t>
     </dgm:pt>
-    <dgm:pt modelId="{019A3D74-062F-4721-BCC1-07C8CDDEB7A7}" type="sibTrans" cxnId="{EC102111-B768-474D-B952-68FEA8F09C97}">
+    <dgm:pt modelId="{4D78E541-222B-4EE2-96DB-2D2987D51634}" type="sibTrans" cxnId="{8C7BE856-8137-46F7-8CB8-F0E2DA603924}">
       <dgm:prSet/>
       <dgm:spPr/>
       <dgm:t>
         <a:bodyPr/>
         <a:lstStyle/>
         <a:p>
-          <a:endParaRPr lang="id-ID" sz="1200"/>
+          <a:endParaRPr lang="id-ID" sz="1400"/>
         </a:p>
       </dgm:t>
     </dgm:pt>
-    <dgm:pt modelId="{83B8869F-1752-4F06-AC7E-AA2559AAF9CF}">
+    <dgm:pt modelId="{F50719F5-C6EE-4EA1-8E56-E1801FF5DA57}">
       <dgm:prSet phldrT="[Text]" custT="1"/>
       <dgm:spPr/>
       <dgm:t>
@@ -1924,40 +1929,40 @@
             <a:buNone/>
           </a:pPr>
           <a:r>
-            <a:rPr lang="id-ID" sz="3600" b="1" i="0" dirty="0"/>
+            <a:rPr lang="id-ID" sz="2400" b="1" i="0" dirty="0"/>
             <a:t>Staff</a:t>
           </a:r>
           <a:r>
-            <a:rPr lang="id-ID" sz="3600" b="0" i="0" dirty="0"/>
+            <a:rPr lang="id-ID" sz="2400" b="0" i="0" dirty="0"/>
             <a:t> </a:t>
           </a:r>
-          <a:endParaRPr lang="id-ID" sz="3600" dirty="0"/>
+          <a:endParaRPr lang="id-ID" sz="2400" dirty="0"/>
         </a:p>
       </dgm:t>
     </dgm:pt>
-    <dgm:pt modelId="{8A8BCA98-1470-4E49-84B4-1AEA587248F2}" type="parTrans" cxnId="{B24C933F-36EA-44BF-B838-A91705A2A7A7}">
+    <dgm:pt modelId="{EBD99AF5-3020-4DB7-AFCE-BDFDBD3E65BF}" type="parTrans" cxnId="{1F2D7B51-7B6D-406C-B28E-3D82886DE75E}">
       <dgm:prSet/>
       <dgm:spPr/>
       <dgm:t>
         <a:bodyPr/>
         <a:lstStyle/>
         <a:p>
-          <a:endParaRPr lang="id-ID" sz="1200"/>
+          <a:endParaRPr lang="id-ID" sz="1400"/>
         </a:p>
       </dgm:t>
     </dgm:pt>
-    <dgm:pt modelId="{30330D62-B51F-4B47-9343-DD7ACF4354CB}" type="sibTrans" cxnId="{B24C933F-36EA-44BF-B838-A91705A2A7A7}">
+    <dgm:pt modelId="{42B031C1-D490-4371-8C52-A58DA7072540}" type="sibTrans" cxnId="{1F2D7B51-7B6D-406C-B28E-3D82886DE75E}">
       <dgm:prSet/>
       <dgm:spPr/>
       <dgm:t>
         <a:bodyPr/>
         <a:lstStyle/>
         <a:p>
-          <a:endParaRPr lang="id-ID" sz="1200"/>
+          <a:endParaRPr lang="id-ID" sz="1400"/>
         </a:p>
       </dgm:t>
     </dgm:pt>
-    <dgm:pt modelId="{CB1F19A7-D312-40FF-9CF7-6BCA7B60554C}">
+    <dgm:pt modelId="{CD007B0F-AA36-49B1-8BA5-14121908521B}">
       <dgm:prSet phldrT="[Text]" custT="1"/>
       <dgm:spPr/>
       <dgm:t>
@@ -1968,41 +1973,78 @@
             <a:buNone/>
           </a:pPr>
           <a:r>
-            <a:rPr lang="id-ID" sz="3600" b="1" i="0" dirty="0"/>
+            <a:rPr lang="id-ID" sz="2400" b="1" i="0" dirty="0"/>
             <a:t>Staff</a:t>
           </a:r>
           <a:r>
-            <a:rPr lang="id-ID" sz="3600" b="0" i="0" dirty="0"/>
+            <a:rPr lang="id-ID" sz="2400" b="0" i="0" dirty="0"/>
             <a:t> </a:t>
           </a:r>
-          <a:endParaRPr lang="id-ID" sz="3600" dirty="0"/>
+          <a:endParaRPr lang="id-ID" sz="2400" dirty="0"/>
         </a:p>
       </dgm:t>
     </dgm:pt>
-    <dgm:pt modelId="{60508447-050E-47BB-8A3A-55E2E6BEC482}" type="parTrans" cxnId="{DAAD2CD8-0D38-4CDD-A424-5FAEA66BDC1A}">
+    <dgm:pt modelId="{41DA8E88-B8C6-42B5-B9DF-D21C80879A1B}" type="parTrans" cxnId="{5AD46D2B-6B7E-4CB8-969E-B1276E5BEAE4}">
       <dgm:prSet/>
       <dgm:spPr/>
       <dgm:t>
         <a:bodyPr/>
         <a:lstStyle/>
         <a:p>
-          <a:endParaRPr lang="id-ID" sz="1200"/>
+          <a:endParaRPr lang="id-ID" sz="1400"/>
         </a:p>
       </dgm:t>
     </dgm:pt>
-    <dgm:pt modelId="{DFD8A7F3-D0BF-4BD0-8EC5-3344B9A1917F}" type="sibTrans" cxnId="{DAAD2CD8-0D38-4CDD-A424-5FAEA66BDC1A}">
+    <dgm:pt modelId="{5E0DA399-DA21-4F18-9199-53B26B5A9A43}" type="sibTrans" cxnId="{5AD46D2B-6B7E-4CB8-969E-B1276E5BEAE4}">
       <dgm:prSet/>
       <dgm:spPr/>
       <dgm:t>
         <a:bodyPr/>
         <a:lstStyle/>
         <a:p>
-          <a:endParaRPr lang="id-ID" sz="1200"/>
+          <a:endParaRPr lang="id-ID" sz="1400"/>
         </a:p>
       </dgm:t>
     </dgm:pt>
-    <dgm:pt modelId="{4D17D909-039C-43C7-BB7E-AF66DD07EDD5}" type="pres">
-      <dgm:prSet presAssocID="{EA41A2E5-88E2-4D29-A39A-96D0D39F74BD}" presName="hierChild1" presStyleCnt="0">
+    <dgm:pt modelId="{83BB7BDF-28B5-4E01-8B67-F045C85748A0}" type="asst">
+      <dgm:prSet phldrT="[Text]" phldr="0" custT="1"/>
+      <dgm:spPr/>
+      <dgm:t>
+        <a:bodyPr/>
+        <a:lstStyle/>
+        <a:p>
+          <a:r>
+            <a:rPr lang="en-US" sz="2400" dirty="0" err="1"/>
+            <a:t>SubStaff</a:t>
+          </a:r>
+          <a:endParaRPr lang="id-ID" sz="2800" dirty="0"/>
+        </a:p>
+      </dgm:t>
+    </dgm:pt>
+    <dgm:pt modelId="{C8582AAD-20C4-451C-A958-E34A4CE53788}" type="parTrans" cxnId="{C2D90C3E-A0F1-4307-875D-846748858DCB}">
+      <dgm:prSet/>
+      <dgm:spPr/>
+      <dgm:t>
+        <a:bodyPr/>
+        <a:lstStyle/>
+        <a:p>
+          <a:endParaRPr lang="id-ID"/>
+        </a:p>
+      </dgm:t>
+    </dgm:pt>
+    <dgm:pt modelId="{DCEEF8F8-5CB8-432E-A0B6-33A88E074B10}" type="sibTrans" cxnId="{C2D90C3E-A0F1-4307-875D-846748858DCB}">
+      <dgm:prSet/>
+      <dgm:spPr/>
+      <dgm:t>
+        <a:bodyPr/>
+        <a:lstStyle/>
+        <a:p>
+          <a:endParaRPr lang="id-ID"/>
+        </a:p>
+      </dgm:t>
+    </dgm:pt>
+    <dgm:pt modelId="{D092CFFF-841F-4A6C-82F8-7E3A72A7A4FA}" type="pres">
+      <dgm:prSet presAssocID="{AC9898F2-45CC-476A-AD4C-296C3A7036F3}" presName="hierChild1" presStyleCnt="0">
         <dgm:presLayoutVars>
           <dgm:orgChart val="1"/>
           <dgm:chPref val="1"/>
@@ -2014,238 +2056,285 @@
       </dgm:prSet>
       <dgm:spPr/>
     </dgm:pt>
-    <dgm:pt modelId="{6B65A61B-22C0-4CB7-845E-F8ECC936BF2C}" type="pres">
-      <dgm:prSet presAssocID="{2DA4F466-EE9C-4963-9539-C29C96763B8F}" presName="hierRoot1" presStyleCnt="0">
+    <dgm:pt modelId="{52C3FC9D-CFB6-456B-B98C-DFB73578D852}" type="pres">
+      <dgm:prSet presAssocID="{AF5EEB3C-EC9E-4DD7-BB05-DE9AAB3A7EC9}" presName="hierRoot1" presStyleCnt="0">
         <dgm:presLayoutVars>
           <dgm:hierBranch val="init"/>
         </dgm:presLayoutVars>
       </dgm:prSet>
       <dgm:spPr/>
     </dgm:pt>
-    <dgm:pt modelId="{5E07C6C5-A29E-4AE3-B9C8-836B1958E350}" type="pres">
-      <dgm:prSet presAssocID="{2DA4F466-EE9C-4963-9539-C29C96763B8F}" presName="rootComposite1" presStyleCnt="0"/>
+    <dgm:pt modelId="{CED8AFD7-4E2C-450A-BB6B-CEEAAEF0A638}" type="pres">
+      <dgm:prSet presAssocID="{AF5EEB3C-EC9E-4DD7-BB05-DE9AAB3A7EC9}" presName="rootComposite1" presStyleCnt="0"/>
       <dgm:spPr/>
     </dgm:pt>
-    <dgm:pt modelId="{4B1F0272-BF1A-4779-88BA-492E13DACC51}" type="pres">
-      <dgm:prSet presAssocID="{2DA4F466-EE9C-4963-9539-C29C96763B8F}" presName="rootText1" presStyleLbl="node0" presStyleIdx="0" presStyleCnt="1">
+    <dgm:pt modelId="{C1D4043B-660F-4D82-B918-537AEE2442F4}" type="pres">
+      <dgm:prSet presAssocID="{AF5EEB3C-EC9E-4DD7-BB05-DE9AAB3A7EC9}" presName="rootText1" presStyleLbl="node0" presStyleIdx="0" presStyleCnt="1">
         <dgm:presLayoutVars>
           <dgm:chPref val="3"/>
         </dgm:presLayoutVars>
       </dgm:prSet>
       <dgm:spPr/>
     </dgm:pt>
-    <dgm:pt modelId="{84ACC0DD-1880-419C-8313-BD7DBD061486}" type="pres">
-      <dgm:prSet presAssocID="{2DA4F466-EE9C-4963-9539-C29C96763B8F}" presName="rootConnector1" presStyleLbl="node1" presStyleIdx="0" presStyleCnt="0"/>
+    <dgm:pt modelId="{B7E0667B-8656-48CF-B8EC-93A18332F465}" type="pres">
+      <dgm:prSet presAssocID="{AF5EEB3C-EC9E-4DD7-BB05-DE9AAB3A7EC9}" presName="rootConnector1" presStyleLbl="node1" presStyleIdx="0" presStyleCnt="0"/>
       <dgm:spPr/>
     </dgm:pt>
-    <dgm:pt modelId="{DD0A2324-4247-4CEE-A099-99F6F2941D0F}" type="pres">
-      <dgm:prSet presAssocID="{2DA4F466-EE9C-4963-9539-C29C96763B8F}" presName="hierChild2" presStyleCnt="0"/>
+    <dgm:pt modelId="{2D4441C4-4CD2-42A8-BA3B-1BD2D8CA4E54}" type="pres">
+      <dgm:prSet presAssocID="{AF5EEB3C-EC9E-4DD7-BB05-DE9AAB3A7EC9}" presName="hierChild2" presStyleCnt="0"/>
       <dgm:spPr/>
     </dgm:pt>
-    <dgm:pt modelId="{4E350251-E89F-4B92-BEF0-97957B57F1A6}" type="pres">
-      <dgm:prSet presAssocID="{667CE224-6671-41BF-9859-8297E611F61A}" presName="Name37" presStyleLbl="parChTrans1D2" presStyleIdx="0" presStyleCnt="4"/>
+    <dgm:pt modelId="{9BB12E16-BA76-49C4-BD20-929E7D7E2D67}" type="pres">
+      <dgm:prSet presAssocID="{4C9AFFC5-3F40-4AAD-9BDD-53D61C88B300}" presName="Name37" presStyleLbl="parChTrans1D2" presStyleIdx="0" presStyleCnt="4"/>
       <dgm:spPr/>
     </dgm:pt>
-    <dgm:pt modelId="{3F9F4CFD-D540-4C8C-B9CF-02B9D6C90312}" type="pres">
-      <dgm:prSet presAssocID="{32C335E0-B88A-45A4-BC05-91EBAB9FD28C}" presName="hierRoot2" presStyleCnt="0">
+    <dgm:pt modelId="{C18F4337-DFD1-4A65-8533-1A8C088528C2}" type="pres">
+      <dgm:prSet presAssocID="{8A4C2F96-2844-484A-993C-383254337803}" presName="hierRoot2" presStyleCnt="0">
         <dgm:presLayoutVars>
           <dgm:hierBranch val="init"/>
         </dgm:presLayoutVars>
       </dgm:prSet>
       <dgm:spPr/>
     </dgm:pt>
-    <dgm:pt modelId="{377D238A-9714-4EBE-88CB-E5CD7359CFCA}" type="pres">
-      <dgm:prSet presAssocID="{32C335E0-B88A-45A4-BC05-91EBAB9FD28C}" presName="rootComposite" presStyleCnt="0"/>
+    <dgm:pt modelId="{E5547AE3-F21E-4285-8794-F2A04EC30FE9}" type="pres">
+      <dgm:prSet presAssocID="{8A4C2F96-2844-484A-993C-383254337803}" presName="rootComposite" presStyleCnt="0"/>
       <dgm:spPr/>
     </dgm:pt>
-    <dgm:pt modelId="{E02CE35F-D62C-4755-B29E-7616747C1F83}" type="pres">
-      <dgm:prSet presAssocID="{32C335E0-B88A-45A4-BC05-91EBAB9FD28C}" presName="rootText" presStyleLbl="node2" presStyleIdx="0" presStyleCnt="3">
+    <dgm:pt modelId="{062BD152-9F56-4789-A253-D16EA6A9BCD3}" type="pres">
+      <dgm:prSet presAssocID="{8A4C2F96-2844-484A-993C-383254337803}" presName="rootText" presStyleLbl="node2" presStyleIdx="0" presStyleCnt="3">
         <dgm:presLayoutVars>
           <dgm:chPref val="3"/>
         </dgm:presLayoutVars>
       </dgm:prSet>
       <dgm:spPr/>
     </dgm:pt>
-    <dgm:pt modelId="{B26B9216-49FD-4A2A-BB31-A206CD82B124}" type="pres">
-      <dgm:prSet presAssocID="{32C335E0-B88A-45A4-BC05-91EBAB9FD28C}" presName="rootConnector" presStyleLbl="node2" presStyleIdx="0" presStyleCnt="3"/>
+    <dgm:pt modelId="{1149A84D-C2FF-4417-B983-79B6CC61F76C}" type="pres">
+      <dgm:prSet presAssocID="{8A4C2F96-2844-484A-993C-383254337803}" presName="rootConnector" presStyleLbl="node2" presStyleIdx="0" presStyleCnt="3"/>
       <dgm:spPr/>
     </dgm:pt>
-    <dgm:pt modelId="{C3F9498F-93B9-4DEC-AE76-1CD3E1286CB8}" type="pres">
-      <dgm:prSet presAssocID="{32C335E0-B88A-45A4-BC05-91EBAB9FD28C}" presName="hierChild4" presStyleCnt="0"/>
+    <dgm:pt modelId="{E0239B7A-2E12-4BFB-9D75-3353EFAAE2DF}" type="pres">
+      <dgm:prSet presAssocID="{8A4C2F96-2844-484A-993C-383254337803}" presName="hierChild4" presStyleCnt="0"/>
       <dgm:spPr/>
     </dgm:pt>
-    <dgm:pt modelId="{8FDB5328-2B9D-41DA-BE2C-0A30BAF2A0E2}" type="pres">
-      <dgm:prSet presAssocID="{32C335E0-B88A-45A4-BC05-91EBAB9FD28C}" presName="hierChild5" presStyleCnt="0"/>
+    <dgm:pt modelId="{3B98B544-2FA9-43B5-A638-3719B8FC89FF}" type="pres">
+      <dgm:prSet presAssocID="{8A4C2F96-2844-484A-993C-383254337803}" presName="hierChild5" presStyleCnt="0"/>
       <dgm:spPr/>
     </dgm:pt>
-    <dgm:pt modelId="{23B445D1-403E-401C-849E-DA7E490462F7}" type="pres">
-      <dgm:prSet presAssocID="{8A8BCA98-1470-4E49-84B4-1AEA587248F2}" presName="Name37" presStyleLbl="parChTrans1D2" presStyleIdx="1" presStyleCnt="4"/>
+    <dgm:pt modelId="{1C9CBE24-F502-4E37-8D80-9E7CBEA70780}" type="pres">
+      <dgm:prSet presAssocID="{EBD99AF5-3020-4DB7-AFCE-BDFDBD3E65BF}" presName="Name37" presStyleLbl="parChTrans1D2" presStyleIdx="1" presStyleCnt="4"/>
       <dgm:spPr/>
     </dgm:pt>
-    <dgm:pt modelId="{A687A36C-8D76-490E-9915-B45EA02A226F}" type="pres">
-      <dgm:prSet presAssocID="{83B8869F-1752-4F06-AC7E-AA2559AAF9CF}" presName="hierRoot2" presStyleCnt="0">
+    <dgm:pt modelId="{926BCE36-4A39-4D62-A09B-86B1CA14CFE3}" type="pres">
+      <dgm:prSet presAssocID="{F50719F5-C6EE-4EA1-8E56-E1801FF5DA57}" presName="hierRoot2" presStyleCnt="0">
         <dgm:presLayoutVars>
           <dgm:hierBranch val="init"/>
         </dgm:presLayoutVars>
       </dgm:prSet>
       <dgm:spPr/>
     </dgm:pt>
-    <dgm:pt modelId="{5B70F29F-7374-4E1C-8D3B-581E8E7CC45C}" type="pres">
-      <dgm:prSet presAssocID="{83B8869F-1752-4F06-AC7E-AA2559AAF9CF}" presName="rootComposite" presStyleCnt="0"/>
+    <dgm:pt modelId="{E99E34BC-55FD-49E4-B80C-69BAA378CBE8}" type="pres">
+      <dgm:prSet presAssocID="{F50719F5-C6EE-4EA1-8E56-E1801FF5DA57}" presName="rootComposite" presStyleCnt="0"/>
       <dgm:spPr/>
     </dgm:pt>
-    <dgm:pt modelId="{44C7A7C0-95D0-4BFF-A1FB-EA3FAC629288}" type="pres">
-      <dgm:prSet presAssocID="{83B8869F-1752-4F06-AC7E-AA2559AAF9CF}" presName="rootText" presStyleLbl="node2" presStyleIdx="1" presStyleCnt="3">
+    <dgm:pt modelId="{08E155AF-8F71-462F-84F3-A8A8BFDF98CE}" type="pres">
+      <dgm:prSet presAssocID="{F50719F5-C6EE-4EA1-8E56-E1801FF5DA57}" presName="rootText" presStyleLbl="node2" presStyleIdx="1" presStyleCnt="3">
         <dgm:presLayoutVars>
           <dgm:chPref val="3"/>
         </dgm:presLayoutVars>
       </dgm:prSet>
       <dgm:spPr/>
     </dgm:pt>
-    <dgm:pt modelId="{7149AEEA-A3E1-4709-9979-5BBC76EB4A6C}" type="pres">
-      <dgm:prSet presAssocID="{83B8869F-1752-4F06-AC7E-AA2559AAF9CF}" presName="rootConnector" presStyleLbl="node2" presStyleIdx="1" presStyleCnt="3"/>
+    <dgm:pt modelId="{7C5A45A3-81D0-4E8C-B438-50B6E3FFA278}" type="pres">
+      <dgm:prSet presAssocID="{F50719F5-C6EE-4EA1-8E56-E1801FF5DA57}" presName="rootConnector" presStyleLbl="node2" presStyleIdx="1" presStyleCnt="3"/>
       <dgm:spPr/>
     </dgm:pt>
-    <dgm:pt modelId="{3F61A6AA-DA64-4F1C-8605-555148801F2B}" type="pres">
-      <dgm:prSet presAssocID="{83B8869F-1752-4F06-AC7E-AA2559AAF9CF}" presName="hierChild4" presStyleCnt="0"/>
+    <dgm:pt modelId="{54AAF19A-6890-4E03-8B80-DAD8DC7C6257}" type="pres">
+      <dgm:prSet presAssocID="{F50719F5-C6EE-4EA1-8E56-E1801FF5DA57}" presName="hierChild4" presStyleCnt="0"/>
       <dgm:spPr/>
     </dgm:pt>
-    <dgm:pt modelId="{16539471-95C6-4E9B-BA19-63BF6B36DD3C}" type="pres">
-      <dgm:prSet presAssocID="{83B8869F-1752-4F06-AC7E-AA2559AAF9CF}" presName="hierChild5" presStyleCnt="0"/>
+    <dgm:pt modelId="{999ECD36-07E1-45BC-A255-A9FC5780FA7F}" type="pres">
+      <dgm:prSet presAssocID="{F50719F5-C6EE-4EA1-8E56-E1801FF5DA57}" presName="hierChild5" presStyleCnt="0"/>
       <dgm:spPr/>
     </dgm:pt>
-    <dgm:pt modelId="{25F1C600-4FF4-4426-8463-065F19B92D09}" type="pres">
-      <dgm:prSet presAssocID="{60508447-050E-47BB-8A3A-55E2E6BEC482}" presName="Name37" presStyleLbl="parChTrans1D2" presStyleIdx="2" presStyleCnt="4"/>
+    <dgm:pt modelId="{E9315C65-5AD9-4BF9-96C1-1578D815F1D1}" type="pres">
+      <dgm:prSet presAssocID="{41DA8E88-B8C6-42B5-B9DF-D21C80879A1B}" presName="Name37" presStyleLbl="parChTrans1D2" presStyleIdx="2" presStyleCnt="4"/>
       <dgm:spPr/>
     </dgm:pt>
-    <dgm:pt modelId="{3B33800A-E0A8-4913-A6A1-EB3EAF658AC6}" type="pres">
-      <dgm:prSet presAssocID="{CB1F19A7-D312-40FF-9CF7-6BCA7B60554C}" presName="hierRoot2" presStyleCnt="0">
+    <dgm:pt modelId="{1297FEAA-3AAE-40C0-94FE-C9AEF6482180}" type="pres">
+      <dgm:prSet presAssocID="{CD007B0F-AA36-49B1-8BA5-14121908521B}" presName="hierRoot2" presStyleCnt="0">
         <dgm:presLayoutVars>
           <dgm:hierBranch val="init"/>
         </dgm:presLayoutVars>
       </dgm:prSet>
       <dgm:spPr/>
     </dgm:pt>
-    <dgm:pt modelId="{8B056BE7-9954-4602-8BCF-35A9278B7C18}" type="pres">
-      <dgm:prSet presAssocID="{CB1F19A7-D312-40FF-9CF7-6BCA7B60554C}" presName="rootComposite" presStyleCnt="0"/>
+    <dgm:pt modelId="{108FE41D-0106-4082-AC40-CE97B9DCD770}" type="pres">
+      <dgm:prSet presAssocID="{CD007B0F-AA36-49B1-8BA5-14121908521B}" presName="rootComposite" presStyleCnt="0"/>
       <dgm:spPr/>
     </dgm:pt>
-    <dgm:pt modelId="{91E08EDF-18BB-4F4C-A6CA-E9878E099671}" type="pres">
-      <dgm:prSet presAssocID="{CB1F19A7-D312-40FF-9CF7-6BCA7B60554C}" presName="rootText" presStyleLbl="node2" presStyleIdx="2" presStyleCnt="3">
+    <dgm:pt modelId="{7CD488D0-6009-4A29-B90C-C15742A5FD24}" type="pres">
+      <dgm:prSet presAssocID="{CD007B0F-AA36-49B1-8BA5-14121908521B}" presName="rootText" presStyleLbl="node2" presStyleIdx="2" presStyleCnt="3">
         <dgm:presLayoutVars>
           <dgm:chPref val="3"/>
         </dgm:presLayoutVars>
       </dgm:prSet>
       <dgm:spPr/>
     </dgm:pt>
-    <dgm:pt modelId="{B636EEA4-76C2-41E5-99FB-5C8F608B0226}" type="pres">
-      <dgm:prSet presAssocID="{CB1F19A7-D312-40FF-9CF7-6BCA7B60554C}" presName="rootConnector" presStyleLbl="node2" presStyleIdx="2" presStyleCnt="3"/>
+    <dgm:pt modelId="{4DC57FC4-6ACA-4038-8098-8461347EB8B3}" type="pres">
+      <dgm:prSet presAssocID="{CD007B0F-AA36-49B1-8BA5-14121908521B}" presName="rootConnector" presStyleLbl="node2" presStyleIdx="2" presStyleCnt="3"/>
       <dgm:spPr/>
     </dgm:pt>
-    <dgm:pt modelId="{1A81D720-FC8E-452C-804B-C3386D6AF657}" type="pres">
-      <dgm:prSet presAssocID="{CB1F19A7-D312-40FF-9CF7-6BCA7B60554C}" presName="hierChild4" presStyleCnt="0"/>
+    <dgm:pt modelId="{6A872D1F-8F70-4D26-8743-B9C3B91DCA3B}" type="pres">
+      <dgm:prSet presAssocID="{CD007B0F-AA36-49B1-8BA5-14121908521B}" presName="hierChild4" presStyleCnt="0"/>
       <dgm:spPr/>
     </dgm:pt>
-    <dgm:pt modelId="{CA89DF1B-127D-4FC9-BC57-B37F70C76D2E}" type="pres">
-      <dgm:prSet presAssocID="{CB1F19A7-D312-40FF-9CF7-6BCA7B60554C}" presName="hierChild5" presStyleCnt="0"/>
+    <dgm:pt modelId="{E7C5E54F-7D76-45B4-8CA1-C97088867EAB}" type="pres">
+      <dgm:prSet presAssocID="{CD007B0F-AA36-49B1-8BA5-14121908521B}" presName="hierChild5" presStyleCnt="0"/>
       <dgm:spPr/>
     </dgm:pt>
-    <dgm:pt modelId="{5804E76D-0C51-4F8A-91B1-036257C65DC2}" type="pres">
-      <dgm:prSet presAssocID="{2DA4F466-EE9C-4963-9539-C29C96763B8F}" presName="hierChild3" presStyleCnt="0"/>
+    <dgm:pt modelId="{3DBEC4FD-3248-446C-952C-755B7F955E9E}" type="pres">
+      <dgm:prSet presAssocID="{C8582AAD-20C4-451C-A958-E34A4CE53788}" presName="Name111" presStyleLbl="parChTrans1D3" presStyleIdx="0" presStyleCnt="1"/>
       <dgm:spPr/>
     </dgm:pt>
-    <dgm:pt modelId="{5556880F-3F88-416B-8FCA-71244B74F3D3}" type="pres">
-      <dgm:prSet presAssocID="{B17EFD54-07EA-4E37-9DEA-79C5DAADAA51}" presName="Name111" presStyleLbl="parChTrans1D2" presStyleIdx="3" presStyleCnt="4"/>
-      <dgm:spPr/>
-    </dgm:pt>
-    <dgm:pt modelId="{D35F20FD-BB29-4F66-B97F-CBA74F393E93}" type="pres">
-      <dgm:prSet presAssocID="{D3AEF5B0-9774-4F00-BB04-72C3611DFE76}" presName="hierRoot3" presStyleCnt="0">
+    <dgm:pt modelId="{E3604A37-9936-4BAD-8FBE-F315A67977DB}" type="pres">
+      <dgm:prSet presAssocID="{83BB7BDF-28B5-4E01-8B67-F045C85748A0}" presName="hierRoot3" presStyleCnt="0">
         <dgm:presLayoutVars>
           <dgm:hierBranch val="init"/>
         </dgm:presLayoutVars>
       </dgm:prSet>
       <dgm:spPr/>
     </dgm:pt>
-    <dgm:pt modelId="{7C430DB2-4CF8-4495-B28F-CD3B97802989}" type="pres">
-      <dgm:prSet presAssocID="{D3AEF5B0-9774-4F00-BB04-72C3611DFE76}" presName="rootComposite3" presStyleCnt="0"/>
+    <dgm:pt modelId="{A99940D4-6BB4-45DF-923D-E57E3776815D}" type="pres">
+      <dgm:prSet presAssocID="{83BB7BDF-28B5-4E01-8B67-F045C85748A0}" presName="rootComposite3" presStyleCnt="0"/>
       <dgm:spPr/>
     </dgm:pt>
-    <dgm:pt modelId="{4AB33A37-8968-451F-BDAF-6191A394821C}" type="pres">
-      <dgm:prSet presAssocID="{D3AEF5B0-9774-4F00-BB04-72C3611DFE76}" presName="rootText3" presStyleLbl="asst1" presStyleIdx="0" presStyleCnt="1">
+    <dgm:pt modelId="{12EB8A7C-C5E3-41B1-AF2B-D3081296A567}" type="pres">
+      <dgm:prSet presAssocID="{83BB7BDF-28B5-4E01-8B67-F045C85748A0}" presName="rootText3" presStyleLbl="asst2" presStyleIdx="0" presStyleCnt="1">
         <dgm:presLayoutVars>
           <dgm:chPref val="3"/>
         </dgm:presLayoutVars>
       </dgm:prSet>
       <dgm:spPr/>
     </dgm:pt>
-    <dgm:pt modelId="{B91E63A5-0A30-4048-A83E-1C7852006C79}" type="pres">
-      <dgm:prSet presAssocID="{D3AEF5B0-9774-4F00-BB04-72C3611DFE76}" presName="rootConnector3" presStyleLbl="asst1" presStyleIdx="0" presStyleCnt="1"/>
+    <dgm:pt modelId="{3BD2F0A0-7E52-4A17-88A7-95DEC1F4E8D8}" type="pres">
+      <dgm:prSet presAssocID="{83BB7BDF-28B5-4E01-8B67-F045C85748A0}" presName="rootConnector3" presStyleLbl="asst2" presStyleIdx="0" presStyleCnt="1"/>
       <dgm:spPr/>
     </dgm:pt>
-    <dgm:pt modelId="{C7F059E7-D6E3-4FA9-A516-866CCF92243D}" type="pres">
-      <dgm:prSet presAssocID="{D3AEF5B0-9774-4F00-BB04-72C3611DFE76}" presName="hierChild6" presStyleCnt="0"/>
+    <dgm:pt modelId="{A12A9BCF-C5A3-4043-8C0B-DDA7739964A2}" type="pres">
+      <dgm:prSet presAssocID="{83BB7BDF-28B5-4E01-8B67-F045C85748A0}" presName="hierChild6" presStyleCnt="0"/>
       <dgm:spPr/>
     </dgm:pt>
-    <dgm:pt modelId="{2FFC3E57-F9D1-47D4-9494-A8B155DE7FF6}" type="pres">
-      <dgm:prSet presAssocID="{D3AEF5B0-9774-4F00-BB04-72C3611DFE76}" presName="hierChild7" presStyleCnt="0"/>
+    <dgm:pt modelId="{1CBF513A-BA9A-4178-8D55-18917423B4B1}" type="pres">
+      <dgm:prSet presAssocID="{83BB7BDF-28B5-4E01-8B67-F045C85748A0}" presName="hierChild7" presStyleCnt="0"/>
+      <dgm:spPr/>
+    </dgm:pt>
+    <dgm:pt modelId="{A46C049E-62F5-44E7-B840-C3150319CB13}" type="pres">
+      <dgm:prSet presAssocID="{AF5EEB3C-EC9E-4DD7-BB05-DE9AAB3A7EC9}" presName="hierChild3" presStyleCnt="0"/>
+      <dgm:spPr/>
+    </dgm:pt>
+    <dgm:pt modelId="{F9F340BA-46F4-41D1-B7D7-D4FE325907CD}" type="pres">
+      <dgm:prSet presAssocID="{34951579-206E-428E-810F-2B5365B9B1A5}" presName="Name111" presStyleLbl="parChTrans1D2" presStyleIdx="3" presStyleCnt="4"/>
+      <dgm:spPr/>
+    </dgm:pt>
+    <dgm:pt modelId="{00BA4B18-A809-479E-9011-0A44C52211A2}" type="pres">
+      <dgm:prSet presAssocID="{6A3E31BC-BAD6-460A-8FFA-6F8CF4660740}" presName="hierRoot3" presStyleCnt="0">
+        <dgm:presLayoutVars>
+          <dgm:hierBranch val="init"/>
+        </dgm:presLayoutVars>
+      </dgm:prSet>
+      <dgm:spPr/>
+    </dgm:pt>
+    <dgm:pt modelId="{164EDCAB-8805-4A39-808C-88ADD6F668F1}" type="pres">
+      <dgm:prSet presAssocID="{6A3E31BC-BAD6-460A-8FFA-6F8CF4660740}" presName="rootComposite3" presStyleCnt="0"/>
+      <dgm:spPr/>
+    </dgm:pt>
+    <dgm:pt modelId="{3CD4C761-1F5D-49B9-A43D-03E8FA074AE1}" type="pres">
+      <dgm:prSet presAssocID="{6A3E31BC-BAD6-460A-8FFA-6F8CF4660740}" presName="rootText3" presStyleLbl="asst1" presStyleIdx="0" presStyleCnt="1">
+        <dgm:presLayoutVars>
+          <dgm:chPref val="3"/>
+        </dgm:presLayoutVars>
+      </dgm:prSet>
+      <dgm:spPr/>
+    </dgm:pt>
+    <dgm:pt modelId="{0C50EF04-A17A-44CB-BF2B-A746468136C4}" type="pres">
+      <dgm:prSet presAssocID="{6A3E31BC-BAD6-460A-8FFA-6F8CF4660740}" presName="rootConnector3" presStyleLbl="asst1" presStyleIdx="0" presStyleCnt="1"/>
+      <dgm:spPr/>
+    </dgm:pt>
+    <dgm:pt modelId="{2348A08E-80C3-46B6-A15C-9354EDB72A1C}" type="pres">
+      <dgm:prSet presAssocID="{6A3E31BC-BAD6-460A-8FFA-6F8CF4660740}" presName="hierChild6" presStyleCnt="0"/>
+      <dgm:spPr/>
+    </dgm:pt>
+    <dgm:pt modelId="{3EBB08CA-A3F0-452E-875E-3BCA298EE3DE}" type="pres">
+      <dgm:prSet presAssocID="{6A3E31BC-BAD6-460A-8FFA-6F8CF4660740}" presName="hierChild7" presStyleCnt="0"/>
       <dgm:spPr/>
     </dgm:pt>
   </dgm:ptLst>
   <dgm:cxnLst>
-    <dgm:cxn modelId="{EC102111-B768-474D-B952-68FEA8F09C97}" srcId="{2DA4F466-EE9C-4963-9539-C29C96763B8F}" destId="{32C335E0-B88A-45A4-BC05-91EBAB9FD28C}" srcOrd="1" destOrd="0" parTransId="{667CE224-6671-41BF-9859-8297E611F61A}" sibTransId="{019A3D74-062F-4721-BCC1-07C8CDDEB7A7}"/>
-    <dgm:cxn modelId="{BBA5151C-84B3-4FA4-8226-1A26C6DFFD95}" type="presOf" srcId="{83B8869F-1752-4F06-AC7E-AA2559AAF9CF}" destId="{7149AEEA-A3E1-4709-9979-5BBC76EB4A6C}" srcOrd="1" destOrd="0" presId="urn:microsoft.com/office/officeart/2005/8/layout/orgChart1"/>
-    <dgm:cxn modelId="{F0F01824-0EA2-494F-AB1C-0374F6625AAD}" type="presOf" srcId="{D3AEF5B0-9774-4F00-BB04-72C3611DFE76}" destId="{B91E63A5-0A30-4048-A83E-1C7852006C79}" srcOrd="1" destOrd="0" presId="urn:microsoft.com/office/officeart/2005/8/layout/orgChart1"/>
-    <dgm:cxn modelId="{A8AA4429-A62B-4E3A-9656-6A45E9603122}" type="presOf" srcId="{CB1F19A7-D312-40FF-9CF7-6BCA7B60554C}" destId="{91E08EDF-18BB-4F4C-A6CA-E9878E099671}" srcOrd="0" destOrd="0" presId="urn:microsoft.com/office/officeart/2005/8/layout/orgChart1"/>
-    <dgm:cxn modelId="{E7A3D02D-59A3-4A3F-9E78-17332673E5DC}" type="presOf" srcId="{2DA4F466-EE9C-4963-9539-C29C96763B8F}" destId="{4B1F0272-BF1A-4779-88BA-492E13DACC51}" srcOrd="0" destOrd="0" presId="urn:microsoft.com/office/officeart/2005/8/layout/orgChart1"/>
-    <dgm:cxn modelId="{76C86E35-6E02-402D-AD2F-840DBA787475}" type="presOf" srcId="{60508447-050E-47BB-8A3A-55E2E6BEC482}" destId="{25F1C600-4FF4-4426-8463-065F19B92D09}" srcOrd="0" destOrd="0" presId="urn:microsoft.com/office/officeart/2005/8/layout/orgChart1"/>
-    <dgm:cxn modelId="{63E0B337-A653-4373-B63B-CDC975C1E7CE}" type="presOf" srcId="{EA41A2E5-88E2-4D29-A39A-96D0D39F74BD}" destId="{4D17D909-039C-43C7-BB7E-AF66DD07EDD5}" srcOrd="0" destOrd="0" presId="urn:microsoft.com/office/officeart/2005/8/layout/orgChart1"/>
-    <dgm:cxn modelId="{9F649838-F637-4C3B-AC11-78F79DF1E990}" type="presOf" srcId="{2DA4F466-EE9C-4963-9539-C29C96763B8F}" destId="{84ACC0DD-1880-419C-8313-BD7DBD061486}" srcOrd="1" destOrd="0" presId="urn:microsoft.com/office/officeart/2005/8/layout/orgChart1"/>
-    <dgm:cxn modelId="{B24C933F-36EA-44BF-B838-A91705A2A7A7}" srcId="{2DA4F466-EE9C-4963-9539-C29C96763B8F}" destId="{83B8869F-1752-4F06-AC7E-AA2559AAF9CF}" srcOrd="2" destOrd="0" parTransId="{8A8BCA98-1470-4E49-84B4-1AEA587248F2}" sibTransId="{30330D62-B51F-4B47-9343-DD7ACF4354CB}"/>
-    <dgm:cxn modelId="{AC50CB64-30EF-41D1-8770-FA33C5F6F45F}" type="presOf" srcId="{667CE224-6671-41BF-9859-8297E611F61A}" destId="{4E350251-E89F-4B92-BEF0-97957B57F1A6}" srcOrd="0" destOrd="0" presId="urn:microsoft.com/office/officeart/2005/8/layout/orgChart1"/>
-    <dgm:cxn modelId="{7D92674F-2C6B-4AEA-8095-E8A7134AF822}" type="presOf" srcId="{83B8869F-1752-4F06-AC7E-AA2559AAF9CF}" destId="{44C7A7C0-95D0-4BFF-A1FB-EA3FAC629288}" srcOrd="0" destOrd="0" presId="urn:microsoft.com/office/officeart/2005/8/layout/orgChart1"/>
-    <dgm:cxn modelId="{35749D7B-E944-4610-B838-623FC0BE7640}" type="presOf" srcId="{32C335E0-B88A-45A4-BC05-91EBAB9FD28C}" destId="{E02CE35F-D62C-4755-B29E-7616747C1F83}" srcOrd="0" destOrd="0" presId="urn:microsoft.com/office/officeart/2005/8/layout/orgChart1"/>
-    <dgm:cxn modelId="{7C71B87B-8D8F-435A-A851-3D2153411D2D}" type="presOf" srcId="{32C335E0-B88A-45A4-BC05-91EBAB9FD28C}" destId="{B26B9216-49FD-4A2A-BB31-A206CD82B124}" srcOrd="1" destOrd="0" presId="urn:microsoft.com/office/officeart/2005/8/layout/orgChart1"/>
-    <dgm:cxn modelId="{6F3D938E-3AF4-4774-83C8-CB13725B47FC}" srcId="{EA41A2E5-88E2-4D29-A39A-96D0D39F74BD}" destId="{2DA4F466-EE9C-4963-9539-C29C96763B8F}" srcOrd="0" destOrd="0" parTransId="{AB4E8FAE-BDAC-437F-BBE6-D59931791227}" sibTransId="{D1CC015D-55A8-468D-A5D4-DF56DFDBFCBF}"/>
-    <dgm:cxn modelId="{D9ECF492-0C2F-482A-B78C-ACA3FC0D4F49}" type="presOf" srcId="{CB1F19A7-D312-40FF-9CF7-6BCA7B60554C}" destId="{B636EEA4-76C2-41E5-99FB-5C8F608B0226}" srcOrd="1" destOrd="0" presId="urn:microsoft.com/office/officeart/2005/8/layout/orgChart1"/>
-    <dgm:cxn modelId="{E8DB5BB1-FC5D-4B49-A88D-58C6451D71F7}" type="presOf" srcId="{8A8BCA98-1470-4E49-84B4-1AEA587248F2}" destId="{23B445D1-403E-401C-849E-DA7E490462F7}" srcOrd="0" destOrd="0" presId="urn:microsoft.com/office/officeart/2005/8/layout/orgChart1"/>
-    <dgm:cxn modelId="{024934BE-515D-4F31-A946-D576536BCF64}" srcId="{2DA4F466-EE9C-4963-9539-C29C96763B8F}" destId="{D3AEF5B0-9774-4F00-BB04-72C3611DFE76}" srcOrd="0" destOrd="0" parTransId="{B17EFD54-07EA-4E37-9DEA-79C5DAADAA51}" sibTransId="{80D9523B-9757-4FF8-80E3-955B340892EA}"/>
-    <dgm:cxn modelId="{07B005C0-D6D7-4D80-93FF-532ADAF3FBB1}" type="presOf" srcId="{B17EFD54-07EA-4E37-9DEA-79C5DAADAA51}" destId="{5556880F-3F88-416B-8FCA-71244B74F3D3}" srcOrd="0" destOrd="0" presId="urn:microsoft.com/office/officeart/2005/8/layout/orgChart1"/>
-    <dgm:cxn modelId="{DAAD2CD8-0D38-4CDD-A424-5FAEA66BDC1A}" srcId="{2DA4F466-EE9C-4963-9539-C29C96763B8F}" destId="{CB1F19A7-D312-40FF-9CF7-6BCA7B60554C}" srcOrd="3" destOrd="0" parTransId="{60508447-050E-47BB-8A3A-55E2E6BEC482}" sibTransId="{DFD8A7F3-D0BF-4BD0-8EC5-3344B9A1917F}"/>
-    <dgm:cxn modelId="{698737DC-4E96-4CF2-A8E0-79B8927CEDA7}" type="presOf" srcId="{D3AEF5B0-9774-4F00-BB04-72C3611DFE76}" destId="{4AB33A37-8968-451F-BDAF-6191A394821C}" srcOrd="0" destOrd="0" presId="urn:microsoft.com/office/officeart/2005/8/layout/orgChart1"/>
-    <dgm:cxn modelId="{F9F77DA9-6593-453C-8AB8-AF6CD1F303B1}" type="presParOf" srcId="{4D17D909-039C-43C7-BB7E-AF66DD07EDD5}" destId="{6B65A61B-22C0-4CB7-845E-F8ECC936BF2C}" srcOrd="0" destOrd="0" presId="urn:microsoft.com/office/officeart/2005/8/layout/orgChart1"/>
-    <dgm:cxn modelId="{89DF04FD-E040-4AB8-BD0E-F12BEBA938E3}" type="presParOf" srcId="{6B65A61B-22C0-4CB7-845E-F8ECC936BF2C}" destId="{5E07C6C5-A29E-4AE3-B9C8-836B1958E350}" srcOrd="0" destOrd="0" presId="urn:microsoft.com/office/officeart/2005/8/layout/orgChart1"/>
-    <dgm:cxn modelId="{764288BF-70E8-45B8-8C03-1562F25100F0}" type="presParOf" srcId="{5E07C6C5-A29E-4AE3-B9C8-836B1958E350}" destId="{4B1F0272-BF1A-4779-88BA-492E13DACC51}" srcOrd="0" destOrd="0" presId="urn:microsoft.com/office/officeart/2005/8/layout/orgChart1"/>
-    <dgm:cxn modelId="{7D706B7A-32F5-47A5-9AEA-AA594320B260}" type="presParOf" srcId="{5E07C6C5-A29E-4AE3-B9C8-836B1958E350}" destId="{84ACC0DD-1880-419C-8313-BD7DBD061486}" srcOrd="1" destOrd="0" presId="urn:microsoft.com/office/officeart/2005/8/layout/orgChart1"/>
-    <dgm:cxn modelId="{5666B44B-243F-4C0E-8CB6-5559BDDB9957}" type="presParOf" srcId="{6B65A61B-22C0-4CB7-845E-F8ECC936BF2C}" destId="{DD0A2324-4247-4CEE-A099-99F6F2941D0F}" srcOrd="1" destOrd="0" presId="urn:microsoft.com/office/officeart/2005/8/layout/orgChart1"/>
-    <dgm:cxn modelId="{EA651A5A-DB0A-49E5-A2AF-0D219BC55E04}" type="presParOf" srcId="{DD0A2324-4247-4CEE-A099-99F6F2941D0F}" destId="{4E350251-E89F-4B92-BEF0-97957B57F1A6}" srcOrd="0" destOrd="0" presId="urn:microsoft.com/office/officeart/2005/8/layout/orgChart1"/>
-    <dgm:cxn modelId="{E8FDBE5A-BC68-4D13-96D3-89B63C60F0DA}" type="presParOf" srcId="{DD0A2324-4247-4CEE-A099-99F6F2941D0F}" destId="{3F9F4CFD-D540-4C8C-B9CF-02B9D6C90312}" srcOrd="1" destOrd="0" presId="urn:microsoft.com/office/officeart/2005/8/layout/orgChart1"/>
-    <dgm:cxn modelId="{33DD10EF-41EB-4557-93AE-945AA51DCB67}" type="presParOf" srcId="{3F9F4CFD-D540-4C8C-B9CF-02B9D6C90312}" destId="{377D238A-9714-4EBE-88CB-E5CD7359CFCA}" srcOrd="0" destOrd="0" presId="urn:microsoft.com/office/officeart/2005/8/layout/orgChart1"/>
-    <dgm:cxn modelId="{D57D0E38-4749-4213-ACF0-9DBEFD84D2F3}" type="presParOf" srcId="{377D238A-9714-4EBE-88CB-E5CD7359CFCA}" destId="{E02CE35F-D62C-4755-B29E-7616747C1F83}" srcOrd="0" destOrd="0" presId="urn:microsoft.com/office/officeart/2005/8/layout/orgChart1"/>
-    <dgm:cxn modelId="{3BE62474-8C38-4D92-BF36-7DCF941871BE}" type="presParOf" srcId="{377D238A-9714-4EBE-88CB-E5CD7359CFCA}" destId="{B26B9216-49FD-4A2A-BB31-A206CD82B124}" srcOrd="1" destOrd="0" presId="urn:microsoft.com/office/officeart/2005/8/layout/orgChart1"/>
-    <dgm:cxn modelId="{D0E4B33E-398F-4ACE-8762-A61C3AEDBAB1}" type="presParOf" srcId="{3F9F4CFD-D540-4C8C-B9CF-02B9D6C90312}" destId="{C3F9498F-93B9-4DEC-AE76-1CD3E1286CB8}" srcOrd="1" destOrd="0" presId="urn:microsoft.com/office/officeart/2005/8/layout/orgChart1"/>
-    <dgm:cxn modelId="{B77507A4-39F2-4868-AD5B-82B12DEF6E0E}" type="presParOf" srcId="{3F9F4CFD-D540-4C8C-B9CF-02B9D6C90312}" destId="{8FDB5328-2B9D-41DA-BE2C-0A30BAF2A0E2}" srcOrd="2" destOrd="0" presId="urn:microsoft.com/office/officeart/2005/8/layout/orgChart1"/>
-    <dgm:cxn modelId="{012BEA51-197E-45C7-97D1-6C110E55AE05}" type="presParOf" srcId="{DD0A2324-4247-4CEE-A099-99F6F2941D0F}" destId="{23B445D1-403E-401C-849E-DA7E490462F7}" srcOrd="2" destOrd="0" presId="urn:microsoft.com/office/officeart/2005/8/layout/orgChart1"/>
-    <dgm:cxn modelId="{2EC1C811-4AA7-4417-99F5-65E6DEB3D9C8}" type="presParOf" srcId="{DD0A2324-4247-4CEE-A099-99F6F2941D0F}" destId="{A687A36C-8D76-490E-9915-B45EA02A226F}" srcOrd="3" destOrd="0" presId="urn:microsoft.com/office/officeart/2005/8/layout/orgChart1"/>
-    <dgm:cxn modelId="{E138761A-11E9-428D-95D8-F55F156AFB95}" type="presParOf" srcId="{A687A36C-8D76-490E-9915-B45EA02A226F}" destId="{5B70F29F-7374-4E1C-8D3B-581E8E7CC45C}" srcOrd="0" destOrd="0" presId="urn:microsoft.com/office/officeart/2005/8/layout/orgChart1"/>
-    <dgm:cxn modelId="{6DF74E53-BA88-41FF-AA60-FDBE1B585956}" type="presParOf" srcId="{5B70F29F-7374-4E1C-8D3B-581E8E7CC45C}" destId="{44C7A7C0-95D0-4BFF-A1FB-EA3FAC629288}" srcOrd="0" destOrd="0" presId="urn:microsoft.com/office/officeart/2005/8/layout/orgChart1"/>
-    <dgm:cxn modelId="{ED19EC84-8011-49D0-AACA-18ABAC351937}" type="presParOf" srcId="{5B70F29F-7374-4E1C-8D3B-581E8E7CC45C}" destId="{7149AEEA-A3E1-4709-9979-5BBC76EB4A6C}" srcOrd="1" destOrd="0" presId="urn:microsoft.com/office/officeart/2005/8/layout/orgChart1"/>
-    <dgm:cxn modelId="{6307CBD1-58F0-49A1-86AC-A6C841C6B68A}" type="presParOf" srcId="{A687A36C-8D76-490E-9915-B45EA02A226F}" destId="{3F61A6AA-DA64-4F1C-8605-555148801F2B}" srcOrd="1" destOrd="0" presId="urn:microsoft.com/office/officeart/2005/8/layout/orgChart1"/>
-    <dgm:cxn modelId="{5D26C87F-A2ED-4DFF-8A82-BB14FE4EC35A}" type="presParOf" srcId="{A687A36C-8D76-490E-9915-B45EA02A226F}" destId="{16539471-95C6-4E9B-BA19-63BF6B36DD3C}" srcOrd="2" destOrd="0" presId="urn:microsoft.com/office/officeart/2005/8/layout/orgChart1"/>
-    <dgm:cxn modelId="{DD55C747-B25A-4890-B1F1-6512E63DD2B1}" type="presParOf" srcId="{DD0A2324-4247-4CEE-A099-99F6F2941D0F}" destId="{25F1C600-4FF4-4426-8463-065F19B92D09}" srcOrd="4" destOrd="0" presId="urn:microsoft.com/office/officeart/2005/8/layout/orgChart1"/>
-    <dgm:cxn modelId="{6A582B93-13D9-4659-AAD3-D90D2731925C}" type="presParOf" srcId="{DD0A2324-4247-4CEE-A099-99F6F2941D0F}" destId="{3B33800A-E0A8-4913-A6A1-EB3EAF658AC6}" srcOrd="5" destOrd="0" presId="urn:microsoft.com/office/officeart/2005/8/layout/orgChart1"/>
-    <dgm:cxn modelId="{1FE182EE-00FE-4C2C-BB83-5BBF8556B1CC}" type="presParOf" srcId="{3B33800A-E0A8-4913-A6A1-EB3EAF658AC6}" destId="{8B056BE7-9954-4602-8BCF-35A9278B7C18}" srcOrd="0" destOrd="0" presId="urn:microsoft.com/office/officeart/2005/8/layout/orgChart1"/>
-    <dgm:cxn modelId="{C58F06BF-C7DA-4D69-AAAC-FEC582B4CF44}" type="presParOf" srcId="{8B056BE7-9954-4602-8BCF-35A9278B7C18}" destId="{91E08EDF-18BB-4F4C-A6CA-E9878E099671}" srcOrd="0" destOrd="0" presId="urn:microsoft.com/office/officeart/2005/8/layout/orgChart1"/>
-    <dgm:cxn modelId="{F08416E4-8754-4D15-AF7B-897516440FF2}" type="presParOf" srcId="{8B056BE7-9954-4602-8BCF-35A9278B7C18}" destId="{B636EEA4-76C2-41E5-99FB-5C8F608B0226}" srcOrd="1" destOrd="0" presId="urn:microsoft.com/office/officeart/2005/8/layout/orgChart1"/>
-    <dgm:cxn modelId="{D99D239F-E6DF-4996-B497-3BFD70656EB5}" type="presParOf" srcId="{3B33800A-E0A8-4913-A6A1-EB3EAF658AC6}" destId="{1A81D720-FC8E-452C-804B-C3386D6AF657}" srcOrd="1" destOrd="0" presId="urn:microsoft.com/office/officeart/2005/8/layout/orgChart1"/>
-    <dgm:cxn modelId="{0A9FC0B9-CBB1-4262-9C74-0F52212B8011}" type="presParOf" srcId="{3B33800A-E0A8-4913-A6A1-EB3EAF658AC6}" destId="{CA89DF1B-127D-4FC9-BC57-B37F70C76D2E}" srcOrd="2" destOrd="0" presId="urn:microsoft.com/office/officeart/2005/8/layout/orgChart1"/>
-    <dgm:cxn modelId="{F1D8A251-C958-49CC-9F06-4F8F4A88DF23}" type="presParOf" srcId="{6B65A61B-22C0-4CB7-845E-F8ECC936BF2C}" destId="{5804E76D-0C51-4F8A-91B1-036257C65DC2}" srcOrd="2" destOrd="0" presId="urn:microsoft.com/office/officeart/2005/8/layout/orgChart1"/>
-    <dgm:cxn modelId="{35A99BAA-1057-4EAA-86FE-9B52C6AF1C4D}" type="presParOf" srcId="{5804E76D-0C51-4F8A-91B1-036257C65DC2}" destId="{5556880F-3F88-416B-8FCA-71244B74F3D3}" srcOrd="0" destOrd="0" presId="urn:microsoft.com/office/officeart/2005/8/layout/orgChart1"/>
-    <dgm:cxn modelId="{B03DC0A0-BFE4-4492-8CB6-1A2384D18168}" type="presParOf" srcId="{5804E76D-0C51-4F8A-91B1-036257C65DC2}" destId="{D35F20FD-BB29-4F66-B97F-CBA74F393E93}" srcOrd="1" destOrd="0" presId="urn:microsoft.com/office/officeart/2005/8/layout/orgChart1"/>
-    <dgm:cxn modelId="{1295826D-F1F1-4BA2-801B-4B870FBF5CE9}" type="presParOf" srcId="{D35F20FD-BB29-4F66-B97F-CBA74F393E93}" destId="{7C430DB2-4CF8-4495-B28F-CD3B97802989}" srcOrd="0" destOrd="0" presId="urn:microsoft.com/office/officeart/2005/8/layout/orgChart1"/>
-    <dgm:cxn modelId="{9C06F7F5-5B35-4BA8-A3A9-84CA05294FD4}" type="presParOf" srcId="{7C430DB2-4CF8-4495-B28F-CD3B97802989}" destId="{4AB33A37-8968-451F-BDAF-6191A394821C}" srcOrd="0" destOrd="0" presId="urn:microsoft.com/office/officeart/2005/8/layout/orgChart1"/>
-    <dgm:cxn modelId="{97243748-C503-4262-B842-2C35BBD4E943}" type="presParOf" srcId="{7C430DB2-4CF8-4495-B28F-CD3B97802989}" destId="{B91E63A5-0A30-4048-A83E-1C7852006C79}" srcOrd="1" destOrd="0" presId="urn:microsoft.com/office/officeart/2005/8/layout/orgChart1"/>
-    <dgm:cxn modelId="{6F1E9DA8-6733-4042-BAB7-9BE63BD2A7E8}" type="presParOf" srcId="{D35F20FD-BB29-4F66-B97F-CBA74F393E93}" destId="{C7F059E7-D6E3-4FA9-A516-866CCF92243D}" srcOrd="1" destOrd="0" presId="urn:microsoft.com/office/officeart/2005/8/layout/orgChart1"/>
-    <dgm:cxn modelId="{C04CC9F0-1234-46FD-9D14-17A30634255A}" type="presParOf" srcId="{D35F20FD-BB29-4F66-B97F-CBA74F393E93}" destId="{2FFC3E57-F9D1-47D4-9494-A8B155DE7FF6}" srcOrd="2" destOrd="0" presId="urn:microsoft.com/office/officeart/2005/8/layout/orgChart1"/>
+    <dgm:cxn modelId="{46CB800D-E5B1-4F92-8C15-F59608CE447F}" type="presOf" srcId="{83BB7BDF-28B5-4E01-8B67-F045C85748A0}" destId="{12EB8A7C-C5E3-41B1-AF2B-D3081296A567}" srcOrd="0" destOrd="0" presId="urn:microsoft.com/office/officeart/2005/8/layout/orgChart1"/>
+    <dgm:cxn modelId="{3B7E6110-957B-476E-A13D-0A8E78BF47C2}" type="presOf" srcId="{8A4C2F96-2844-484A-993C-383254337803}" destId="{062BD152-9F56-4789-A253-D16EA6A9BCD3}" srcOrd="0" destOrd="0" presId="urn:microsoft.com/office/officeart/2005/8/layout/orgChart1"/>
+    <dgm:cxn modelId="{8C2CBA11-C6BC-4184-B7CF-F4F3B6161144}" type="presOf" srcId="{6A3E31BC-BAD6-460A-8FFA-6F8CF4660740}" destId="{3CD4C761-1F5D-49B9-A43D-03E8FA074AE1}" srcOrd="0" destOrd="0" presId="urn:microsoft.com/office/officeart/2005/8/layout/orgChart1"/>
+    <dgm:cxn modelId="{5AD46D2B-6B7E-4CB8-969E-B1276E5BEAE4}" srcId="{AF5EEB3C-EC9E-4DD7-BB05-DE9AAB3A7EC9}" destId="{CD007B0F-AA36-49B1-8BA5-14121908521B}" srcOrd="3" destOrd="0" parTransId="{41DA8E88-B8C6-42B5-B9DF-D21C80879A1B}" sibTransId="{5E0DA399-DA21-4F18-9199-53B26B5A9A43}"/>
+    <dgm:cxn modelId="{24730A33-4D1C-403D-A632-39C5820983A7}" type="presOf" srcId="{F50719F5-C6EE-4EA1-8E56-E1801FF5DA57}" destId="{08E155AF-8F71-462F-84F3-A8A8BFDF98CE}" srcOrd="0" destOrd="0" presId="urn:microsoft.com/office/officeart/2005/8/layout/orgChart1"/>
+    <dgm:cxn modelId="{78C3FD34-8E29-401C-ADE3-CEDC07A193F5}" type="presOf" srcId="{83BB7BDF-28B5-4E01-8B67-F045C85748A0}" destId="{3BD2F0A0-7E52-4A17-88A7-95DEC1F4E8D8}" srcOrd="1" destOrd="0" presId="urn:microsoft.com/office/officeart/2005/8/layout/orgChart1"/>
+    <dgm:cxn modelId="{C2D90C3E-A0F1-4307-875D-846748858DCB}" srcId="{CD007B0F-AA36-49B1-8BA5-14121908521B}" destId="{83BB7BDF-28B5-4E01-8B67-F045C85748A0}" srcOrd="0" destOrd="0" parTransId="{C8582AAD-20C4-451C-A958-E34A4CE53788}" sibTransId="{DCEEF8F8-5CB8-432E-A0B6-33A88E074B10}"/>
+    <dgm:cxn modelId="{C955586F-3027-46A1-8284-AEEB6C6D5565}" type="presOf" srcId="{8A4C2F96-2844-484A-993C-383254337803}" destId="{1149A84D-C2FF-4417-B983-79B6CC61F76C}" srcOrd="1" destOrd="0" presId="urn:microsoft.com/office/officeart/2005/8/layout/orgChart1"/>
+    <dgm:cxn modelId="{2DF5844F-C833-4BBC-BF39-6DA09BC3F725}" type="presOf" srcId="{AF5EEB3C-EC9E-4DD7-BB05-DE9AAB3A7EC9}" destId="{C1D4043B-660F-4D82-B918-537AEE2442F4}" srcOrd="0" destOrd="0" presId="urn:microsoft.com/office/officeart/2005/8/layout/orgChart1"/>
+    <dgm:cxn modelId="{1F2D7B51-7B6D-406C-B28E-3D82886DE75E}" srcId="{AF5EEB3C-EC9E-4DD7-BB05-DE9AAB3A7EC9}" destId="{F50719F5-C6EE-4EA1-8E56-E1801FF5DA57}" srcOrd="2" destOrd="0" parTransId="{EBD99AF5-3020-4DB7-AFCE-BDFDBD3E65BF}" sibTransId="{42B031C1-D490-4371-8C52-A58DA7072540}"/>
+    <dgm:cxn modelId="{8AFE8952-BC17-4DD7-9F80-DD302E92E452}" type="presOf" srcId="{41DA8E88-B8C6-42B5-B9DF-D21C80879A1B}" destId="{E9315C65-5AD9-4BF9-96C1-1578D815F1D1}" srcOrd="0" destOrd="0" presId="urn:microsoft.com/office/officeart/2005/8/layout/orgChart1"/>
+    <dgm:cxn modelId="{8C7BE856-8137-46F7-8CB8-F0E2DA603924}" srcId="{AF5EEB3C-EC9E-4DD7-BB05-DE9AAB3A7EC9}" destId="{8A4C2F96-2844-484A-993C-383254337803}" srcOrd="1" destOrd="0" parTransId="{4C9AFFC5-3F40-4AAD-9BDD-53D61C88B300}" sibTransId="{4D78E541-222B-4EE2-96DB-2D2987D51634}"/>
+    <dgm:cxn modelId="{BC7F2389-E5E4-48A2-A244-A83A30A7A3C2}" type="presOf" srcId="{4C9AFFC5-3F40-4AAD-9BDD-53D61C88B300}" destId="{9BB12E16-BA76-49C4-BD20-929E7D7E2D67}" srcOrd="0" destOrd="0" presId="urn:microsoft.com/office/officeart/2005/8/layout/orgChart1"/>
+    <dgm:cxn modelId="{EA5B998A-F559-4098-BF67-58562552B71D}" type="presOf" srcId="{F50719F5-C6EE-4EA1-8E56-E1801FF5DA57}" destId="{7C5A45A3-81D0-4E8C-B438-50B6E3FFA278}" srcOrd="1" destOrd="0" presId="urn:microsoft.com/office/officeart/2005/8/layout/orgChart1"/>
+    <dgm:cxn modelId="{E61E3594-5415-4FCA-9739-9CF8180795F5}" type="presOf" srcId="{CD007B0F-AA36-49B1-8BA5-14121908521B}" destId="{4DC57FC4-6ACA-4038-8098-8461347EB8B3}" srcOrd="1" destOrd="0" presId="urn:microsoft.com/office/officeart/2005/8/layout/orgChart1"/>
+    <dgm:cxn modelId="{131A9A94-552B-4022-91A5-1DDBBC2879A8}" type="presOf" srcId="{EBD99AF5-3020-4DB7-AFCE-BDFDBD3E65BF}" destId="{1C9CBE24-F502-4E37-8D80-9E7CBEA70780}" srcOrd="0" destOrd="0" presId="urn:microsoft.com/office/officeart/2005/8/layout/orgChart1"/>
+    <dgm:cxn modelId="{EB32BC99-12E6-49AC-A7A9-26896AE0A081}" type="presOf" srcId="{CD007B0F-AA36-49B1-8BA5-14121908521B}" destId="{7CD488D0-6009-4A29-B90C-C15742A5FD24}" srcOrd="0" destOrd="0" presId="urn:microsoft.com/office/officeart/2005/8/layout/orgChart1"/>
+    <dgm:cxn modelId="{DF73629B-0193-4CB4-A7C2-4BCBDC5C1F4D}" srcId="{AF5EEB3C-EC9E-4DD7-BB05-DE9AAB3A7EC9}" destId="{6A3E31BC-BAD6-460A-8FFA-6F8CF4660740}" srcOrd="0" destOrd="0" parTransId="{34951579-206E-428E-810F-2B5365B9B1A5}" sibTransId="{B6585105-BD67-4FBA-9B07-E7D8E426B776}"/>
+    <dgm:cxn modelId="{BE8B20B0-5D53-4271-97BC-48223D133BFA}" type="presOf" srcId="{AF5EEB3C-EC9E-4DD7-BB05-DE9AAB3A7EC9}" destId="{B7E0667B-8656-48CF-B8EC-93A18332F465}" srcOrd="1" destOrd="0" presId="urn:microsoft.com/office/officeart/2005/8/layout/orgChart1"/>
+    <dgm:cxn modelId="{003872C1-7173-4111-841A-4789DA784343}" type="presOf" srcId="{6A3E31BC-BAD6-460A-8FFA-6F8CF4660740}" destId="{0C50EF04-A17A-44CB-BF2B-A746468136C4}" srcOrd="1" destOrd="0" presId="urn:microsoft.com/office/officeart/2005/8/layout/orgChart1"/>
+    <dgm:cxn modelId="{189115C8-59AE-4716-BA00-51FE92E69CCB}" srcId="{AC9898F2-45CC-476A-AD4C-296C3A7036F3}" destId="{AF5EEB3C-EC9E-4DD7-BB05-DE9AAB3A7EC9}" srcOrd="0" destOrd="0" parTransId="{0C0E5A4F-134F-4C8E-9492-EDBE2C765597}" sibTransId="{D4E6A4EE-B5FA-48D0-BC2C-0B65D33619FA}"/>
+    <dgm:cxn modelId="{7C0D31D7-F7D1-454A-81A1-0A5BC38384D4}" type="presOf" srcId="{C8582AAD-20C4-451C-A958-E34A4CE53788}" destId="{3DBEC4FD-3248-446C-952C-755B7F955E9E}" srcOrd="0" destOrd="0" presId="urn:microsoft.com/office/officeart/2005/8/layout/orgChart1"/>
+    <dgm:cxn modelId="{C46E09DC-9B20-4DF7-9385-0F75E17D4E46}" type="presOf" srcId="{AC9898F2-45CC-476A-AD4C-296C3A7036F3}" destId="{D092CFFF-841F-4A6C-82F8-7E3A72A7A4FA}" srcOrd="0" destOrd="0" presId="urn:microsoft.com/office/officeart/2005/8/layout/orgChart1"/>
+    <dgm:cxn modelId="{387AACE6-F51E-4159-9494-17E079C790C3}" type="presOf" srcId="{34951579-206E-428E-810F-2B5365B9B1A5}" destId="{F9F340BA-46F4-41D1-B7D7-D4FE325907CD}" srcOrd="0" destOrd="0" presId="urn:microsoft.com/office/officeart/2005/8/layout/orgChart1"/>
+    <dgm:cxn modelId="{58059640-082E-4E07-A5F1-8392EB5EA575}" type="presParOf" srcId="{D092CFFF-841F-4A6C-82F8-7E3A72A7A4FA}" destId="{52C3FC9D-CFB6-456B-B98C-DFB73578D852}" srcOrd="0" destOrd="0" presId="urn:microsoft.com/office/officeart/2005/8/layout/orgChart1"/>
+    <dgm:cxn modelId="{8F1B916D-F7BF-47A1-A3CE-5CE56D7F3E8C}" type="presParOf" srcId="{52C3FC9D-CFB6-456B-B98C-DFB73578D852}" destId="{CED8AFD7-4E2C-450A-BB6B-CEEAAEF0A638}" srcOrd="0" destOrd="0" presId="urn:microsoft.com/office/officeart/2005/8/layout/orgChart1"/>
+    <dgm:cxn modelId="{FEBC4449-A2F5-44E7-874F-84E1FE0F3F04}" type="presParOf" srcId="{CED8AFD7-4E2C-450A-BB6B-CEEAAEF0A638}" destId="{C1D4043B-660F-4D82-B918-537AEE2442F4}" srcOrd="0" destOrd="0" presId="urn:microsoft.com/office/officeart/2005/8/layout/orgChart1"/>
+    <dgm:cxn modelId="{A7C6B9C0-B596-498B-A18C-C27409E6FED8}" type="presParOf" srcId="{CED8AFD7-4E2C-450A-BB6B-CEEAAEF0A638}" destId="{B7E0667B-8656-48CF-B8EC-93A18332F465}" srcOrd="1" destOrd="0" presId="urn:microsoft.com/office/officeart/2005/8/layout/orgChart1"/>
+    <dgm:cxn modelId="{0D735167-D203-48F9-920B-3F6BA4DD6681}" type="presParOf" srcId="{52C3FC9D-CFB6-456B-B98C-DFB73578D852}" destId="{2D4441C4-4CD2-42A8-BA3B-1BD2D8CA4E54}" srcOrd="1" destOrd="0" presId="urn:microsoft.com/office/officeart/2005/8/layout/orgChart1"/>
+    <dgm:cxn modelId="{22289A1C-28C1-47CE-A5D8-38AD34915DEE}" type="presParOf" srcId="{2D4441C4-4CD2-42A8-BA3B-1BD2D8CA4E54}" destId="{9BB12E16-BA76-49C4-BD20-929E7D7E2D67}" srcOrd="0" destOrd="0" presId="urn:microsoft.com/office/officeart/2005/8/layout/orgChart1"/>
+    <dgm:cxn modelId="{621C96C7-D98A-4273-B157-90661D433DF7}" type="presParOf" srcId="{2D4441C4-4CD2-42A8-BA3B-1BD2D8CA4E54}" destId="{C18F4337-DFD1-4A65-8533-1A8C088528C2}" srcOrd="1" destOrd="0" presId="urn:microsoft.com/office/officeart/2005/8/layout/orgChart1"/>
+    <dgm:cxn modelId="{B4F7F542-14BE-4BBA-8CF3-C300E823A4D4}" type="presParOf" srcId="{C18F4337-DFD1-4A65-8533-1A8C088528C2}" destId="{E5547AE3-F21E-4285-8794-F2A04EC30FE9}" srcOrd="0" destOrd="0" presId="urn:microsoft.com/office/officeart/2005/8/layout/orgChart1"/>
+    <dgm:cxn modelId="{3663AF54-11D4-4117-AF35-3A56D36FB368}" type="presParOf" srcId="{E5547AE3-F21E-4285-8794-F2A04EC30FE9}" destId="{062BD152-9F56-4789-A253-D16EA6A9BCD3}" srcOrd="0" destOrd="0" presId="urn:microsoft.com/office/officeart/2005/8/layout/orgChart1"/>
+    <dgm:cxn modelId="{B6D715EA-0212-4F6D-B7CC-DFA6ECC94CB0}" type="presParOf" srcId="{E5547AE3-F21E-4285-8794-F2A04EC30FE9}" destId="{1149A84D-C2FF-4417-B983-79B6CC61F76C}" srcOrd="1" destOrd="0" presId="urn:microsoft.com/office/officeart/2005/8/layout/orgChart1"/>
+    <dgm:cxn modelId="{DBEB54D0-9A62-4374-B6B3-E3E41C1F7D16}" type="presParOf" srcId="{C18F4337-DFD1-4A65-8533-1A8C088528C2}" destId="{E0239B7A-2E12-4BFB-9D75-3353EFAAE2DF}" srcOrd="1" destOrd="0" presId="urn:microsoft.com/office/officeart/2005/8/layout/orgChart1"/>
+    <dgm:cxn modelId="{CFE1BBF6-3A3D-4BD2-BB6E-669BEABD822E}" type="presParOf" srcId="{C18F4337-DFD1-4A65-8533-1A8C088528C2}" destId="{3B98B544-2FA9-43B5-A638-3719B8FC89FF}" srcOrd="2" destOrd="0" presId="urn:microsoft.com/office/officeart/2005/8/layout/orgChart1"/>
+    <dgm:cxn modelId="{214B5EF8-FC3F-4803-A9A9-E3258E2A5CD6}" type="presParOf" srcId="{2D4441C4-4CD2-42A8-BA3B-1BD2D8CA4E54}" destId="{1C9CBE24-F502-4E37-8D80-9E7CBEA70780}" srcOrd="2" destOrd="0" presId="urn:microsoft.com/office/officeart/2005/8/layout/orgChart1"/>
+    <dgm:cxn modelId="{FD9340DE-C8B2-4D84-93B9-59DCEF3D1178}" type="presParOf" srcId="{2D4441C4-4CD2-42A8-BA3B-1BD2D8CA4E54}" destId="{926BCE36-4A39-4D62-A09B-86B1CA14CFE3}" srcOrd="3" destOrd="0" presId="urn:microsoft.com/office/officeart/2005/8/layout/orgChart1"/>
+    <dgm:cxn modelId="{36AD10F2-EBE3-45BE-885E-53E4657CCDE7}" type="presParOf" srcId="{926BCE36-4A39-4D62-A09B-86B1CA14CFE3}" destId="{E99E34BC-55FD-49E4-B80C-69BAA378CBE8}" srcOrd="0" destOrd="0" presId="urn:microsoft.com/office/officeart/2005/8/layout/orgChart1"/>
+    <dgm:cxn modelId="{AC0ABDEE-3914-4C1F-B489-4C53D16117A0}" type="presParOf" srcId="{E99E34BC-55FD-49E4-B80C-69BAA378CBE8}" destId="{08E155AF-8F71-462F-84F3-A8A8BFDF98CE}" srcOrd="0" destOrd="0" presId="urn:microsoft.com/office/officeart/2005/8/layout/orgChart1"/>
+    <dgm:cxn modelId="{B042523A-5DC3-409F-9931-B578263CF7F9}" type="presParOf" srcId="{E99E34BC-55FD-49E4-B80C-69BAA378CBE8}" destId="{7C5A45A3-81D0-4E8C-B438-50B6E3FFA278}" srcOrd="1" destOrd="0" presId="urn:microsoft.com/office/officeart/2005/8/layout/orgChart1"/>
+    <dgm:cxn modelId="{59B5E740-56FB-4ECC-9F55-922E933EE412}" type="presParOf" srcId="{926BCE36-4A39-4D62-A09B-86B1CA14CFE3}" destId="{54AAF19A-6890-4E03-8B80-DAD8DC7C6257}" srcOrd="1" destOrd="0" presId="urn:microsoft.com/office/officeart/2005/8/layout/orgChart1"/>
+    <dgm:cxn modelId="{5CBB8E97-208E-41B4-A75B-66574F5F131B}" type="presParOf" srcId="{926BCE36-4A39-4D62-A09B-86B1CA14CFE3}" destId="{999ECD36-07E1-45BC-A255-A9FC5780FA7F}" srcOrd="2" destOrd="0" presId="urn:microsoft.com/office/officeart/2005/8/layout/orgChart1"/>
+    <dgm:cxn modelId="{0BAD91E3-7903-4CE0-9070-D60BE595528F}" type="presParOf" srcId="{2D4441C4-4CD2-42A8-BA3B-1BD2D8CA4E54}" destId="{E9315C65-5AD9-4BF9-96C1-1578D815F1D1}" srcOrd="4" destOrd="0" presId="urn:microsoft.com/office/officeart/2005/8/layout/orgChart1"/>
+    <dgm:cxn modelId="{ACAE5B65-E3F0-4690-9B70-E98572CF34C4}" type="presParOf" srcId="{2D4441C4-4CD2-42A8-BA3B-1BD2D8CA4E54}" destId="{1297FEAA-3AAE-40C0-94FE-C9AEF6482180}" srcOrd="5" destOrd="0" presId="urn:microsoft.com/office/officeart/2005/8/layout/orgChart1"/>
+    <dgm:cxn modelId="{C04E1E51-11A3-4F32-B52D-471D15F62286}" type="presParOf" srcId="{1297FEAA-3AAE-40C0-94FE-C9AEF6482180}" destId="{108FE41D-0106-4082-AC40-CE97B9DCD770}" srcOrd="0" destOrd="0" presId="urn:microsoft.com/office/officeart/2005/8/layout/orgChart1"/>
+    <dgm:cxn modelId="{2EA1BDF2-37AC-4FE3-9D1D-673597A81AF1}" type="presParOf" srcId="{108FE41D-0106-4082-AC40-CE97B9DCD770}" destId="{7CD488D0-6009-4A29-B90C-C15742A5FD24}" srcOrd="0" destOrd="0" presId="urn:microsoft.com/office/officeart/2005/8/layout/orgChart1"/>
+    <dgm:cxn modelId="{056319B2-9193-4FEB-8BBE-40B11C0060EF}" type="presParOf" srcId="{108FE41D-0106-4082-AC40-CE97B9DCD770}" destId="{4DC57FC4-6ACA-4038-8098-8461347EB8B3}" srcOrd="1" destOrd="0" presId="urn:microsoft.com/office/officeart/2005/8/layout/orgChart1"/>
+    <dgm:cxn modelId="{CA7937BC-187E-4117-AF99-B800A9340A03}" type="presParOf" srcId="{1297FEAA-3AAE-40C0-94FE-C9AEF6482180}" destId="{6A872D1F-8F70-4D26-8743-B9C3B91DCA3B}" srcOrd="1" destOrd="0" presId="urn:microsoft.com/office/officeart/2005/8/layout/orgChart1"/>
+    <dgm:cxn modelId="{E62D324B-D7A8-4148-B2A0-474C38B52B76}" type="presParOf" srcId="{1297FEAA-3AAE-40C0-94FE-C9AEF6482180}" destId="{E7C5E54F-7D76-45B4-8CA1-C97088867EAB}" srcOrd="2" destOrd="0" presId="urn:microsoft.com/office/officeart/2005/8/layout/orgChart1"/>
+    <dgm:cxn modelId="{F9BE850D-D562-406A-AFED-15AB45B987BF}" type="presParOf" srcId="{E7C5E54F-7D76-45B4-8CA1-C97088867EAB}" destId="{3DBEC4FD-3248-446C-952C-755B7F955E9E}" srcOrd="0" destOrd="0" presId="urn:microsoft.com/office/officeart/2005/8/layout/orgChart1"/>
+    <dgm:cxn modelId="{0A3ACC04-5D8B-4A77-A071-05876B0D7539}" type="presParOf" srcId="{E7C5E54F-7D76-45B4-8CA1-C97088867EAB}" destId="{E3604A37-9936-4BAD-8FBE-F315A67977DB}" srcOrd="1" destOrd="0" presId="urn:microsoft.com/office/officeart/2005/8/layout/orgChart1"/>
+    <dgm:cxn modelId="{0A468685-87BB-4AE3-8A9D-41A7685DA459}" type="presParOf" srcId="{E3604A37-9936-4BAD-8FBE-F315A67977DB}" destId="{A99940D4-6BB4-45DF-923D-E57E3776815D}" srcOrd="0" destOrd="0" presId="urn:microsoft.com/office/officeart/2005/8/layout/orgChart1"/>
+    <dgm:cxn modelId="{B97F8F0B-3F95-4CF0-B5B4-4A796B1E7A3C}" type="presParOf" srcId="{A99940D4-6BB4-45DF-923D-E57E3776815D}" destId="{12EB8A7C-C5E3-41B1-AF2B-D3081296A567}" srcOrd="0" destOrd="0" presId="urn:microsoft.com/office/officeart/2005/8/layout/orgChart1"/>
+    <dgm:cxn modelId="{F7460E1B-3552-445A-91F2-570BA67BBB87}" type="presParOf" srcId="{A99940D4-6BB4-45DF-923D-E57E3776815D}" destId="{3BD2F0A0-7E52-4A17-88A7-95DEC1F4E8D8}" srcOrd="1" destOrd="0" presId="urn:microsoft.com/office/officeart/2005/8/layout/orgChart1"/>
+    <dgm:cxn modelId="{BDDD770E-CD7A-4D53-B83E-8F451F7785FB}" type="presParOf" srcId="{E3604A37-9936-4BAD-8FBE-F315A67977DB}" destId="{A12A9BCF-C5A3-4043-8C0B-DDA7739964A2}" srcOrd="1" destOrd="0" presId="urn:microsoft.com/office/officeart/2005/8/layout/orgChart1"/>
+    <dgm:cxn modelId="{4D4DA7C8-FFAE-46F4-AC26-2FFDE9B34513}" type="presParOf" srcId="{E3604A37-9936-4BAD-8FBE-F315A67977DB}" destId="{1CBF513A-BA9A-4178-8D55-18917423B4B1}" srcOrd="2" destOrd="0" presId="urn:microsoft.com/office/officeart/2005/8/layout/orgChart1"/>
+    <dgm:cxn modelId="{F433FEC7-3D8F-4550-B85D-E85F1B897D5C}" type="presParOf" srcId="{52C3FC9D-CFB6-456B-B98C-DFB73578D852}" destId="{A46C049E-62F5-44E7-B840-C3150319CB13}" srcOrd="2" destOrd="0" presId="urn:microsoft.com/office/officeart/2005/8/layout/orgChart1"/>
+    <dgm:cxn modelId="{902073C7-7FE1-49D6-9BF8-6A4249BFA3B0}" type="presParOf" srcId="{A46C049E-62F5-44E7-B840-C3150319CB13}" destId="{F9F340BA-46F4-41D1-B7D7-D4FE325907CD}" srcOrd="0" destOrd="0" presId="urn:microsoft.com/office/officeart/2005/8/layout/orgChart1"/>
+    <dgm:cxn modelId="{86CA0FD0-91D3-497A-8FF9-5B75C119A1D6}" type="presParOf" srcId="{A46C049E-62F5-44E7-B840-C3150319CB13}" destId="{00BA4B18-A809-479E-9011-0A44C52211A2}" srcOrd="1" destOrd="0" presId="urn:microsoft.com/office/officeart/2005/8/layout/orgChart1"/>
+    <dgm:cxn modelId="{58CC06F1-FE8B-49D8-B0EC-F16BB98D2879}" type="presParOf" srcId="{00BA4B18-A809-479E-9011-0A44C52211A2}" destId="{164EDCAB-8805-4A39-808C-88ADD6F668F1}" srcOrd="0" destOrd="0" presId="urn:microsoft.com/office/officeart/2005/8/layout/orgChart1"/>
+    <dgm:cxn modelId="{79F62E5A-EECB-40F5-99A8-02086D1C2CAA}" type="presParOf" srcId="{164EDCAB-8805-4A39-808C-88ADD6F668F1}" destId="{3CD4C761-1F5D-49B9-A43D-03E8FA074AE1}" srcOrd="0" destOrd="0" presId="urn:microsoft.com/office/officeart/2005/8/layout/orgChart1"/>
+    <dgm:cxn modelId="{1F66F718-76A2-442E-ADF2-D23D95C1F156}" type="presParOf" srcId="{164EDCAB-8805-4A39-808C-88ADD6F668F1}" destId="{0C50EF04-A17A-44CB-BF2B-A746468136C4}" srcOrd="1" destOrd="0" presId="urn:microsoft.com/office/officeart/2005/8/layout/orgChart1"/>
+    <dgm:cxn modelId="{90FABD7D-AE60-40E7-A656-3692316490B4}" type="presParOf" srcId="{00BA4B18-A809-479E-9011-0A44C52211A2}" destId="{2348A08E-80C3-46B6-A15C-9354EDB72A1C}" srcOrd="1" destOrd="0" presId="urn:microsoft.com/office/officeart/2005/8/layout/orgChart1"/>
+    <dgm:cxn modelId="{11D747A7-7798-45FD-94C6-9C234C4F31AE}" type="presParOf" srcId="{00BA4B18-A809-479E-9011-0A44C52211A2}" destId="{3EBB08CA-A3F0-452E-875E-3BCA298EE3DE}" srcOrd="2" destOrd="0" presId="urn:microsoft.com/office/officeart/2005/8/layout/orgChart1"/>
   </dgm:cxnLst>
   <dgm:bg/>
   <dgm:whole/>
@@ -2554,15 +2643,15 @@
       <dsp:cNvGrpSpPr/>
     </dsp:nvGrpSpPr>
     <dsp:grpSpPr/>
-    <dsp:sp modelId="{5556880F-3F88-416B-8FCA-71244B74F3D3}">
+    <dsp:sp modelId="{F9F340BA-46F4-41D1-B7D7-D4FE325907CD}">
       <dsp:nvSpPr>
         <dsp:cNvPr id="0" name=""/>
         <dsp:cNvSpPr/>
       </dsp:nvSpPr>
       <dsp:spPr>
         <a:xfrm>
-          <a:off x="3821000" y="1159254"/>
-          <a:ext cx="242999" cy="1064567"/>
+          <a:off x="2622932" y="811010"/>
+          <a:ext cx="170234" cy="745787"/>
         </a:xfrm>
         <a:custGeom>
           <a:avLst/>
@@ -2573,13 +2662,13 @@
           <a:pathLst>
             <a:path>
               <a:moveTo>
-                <a:pt x="242999" y="0"/>
+                <a:pt x="170234" y="0"/>
               </a:moveTo>
               <a:lnTo>
-                <a:pt x="242999" y="1064567"/>
+                <a:pt x="170234" y="745787"/>
               </a:lnTo>
               <a:lnTo>
-                <a:pt x="0" y="1064567"/>
+                <a:pt x="0" y="745787"/>
               </a:lnTo>
             </a:path>
           </a:pathLst>
@@ -2612,15 +2701,73 @@
         <a:fontRef idx="minor"/>
       </dsp:style>
     </dsp:sp>
-    <dsp:sp modelId="{25F1C600-4FF4-4426-8463-065F19B92D09}">
+    <dsp:sp modelId="{3DBEC4FD-3248-446C-952C-755B7F955E9E}">
       <dsp:nvSpPr>
         <dsp:cNvPr id="0" name=""/>
         <dsp:cNvSpPr/>
       </dsp:nvSpPr>
       <dsp:spPr>
         <a:xfrm>
-          <a:off x="4064000" y="1159254"/>
-          <a:ext cx="2800275" cy="2129135"/>
+          <a:off x="4584679" y="3113225"/>
+          <a:ext cx="170234" cy="745787"/>
+        </a:xfrm>
+        <a:custGeom>
+          <a:avLst/>
+          <a:gdLst/>
+          <a:ahLst/>
+          <a:cxnLst/>
+          <a:rect l="0" t="0" r="0" b="0"/>
+          <a:pathLst>
+            <a:path>
+              <a:moveTo>
+                <a:pt x="170234" y="0"/>
+              </a:moveTo>
+              <a:lnTo>
+                <a:pt x="170234" y="745787"/>
+              </a:lnTo>
+              <a:lnTo>
+                <a:pt x="0" y="745787"/>
+              </a:lnTo>
+            </a:path>
+          </a:pathLst>
+        </a:custGeom>
+        <a:noFill/>
+        <a:ln w="19050" cap="flat" cmpd="sng" algn="ctr">
+          <a:solidFill>
+            <a:schemeClr val="accent3">
+              <a:hueOff val="0"/>
+              <a:satOff val="0"/>
+              <a:lumOff val="0"/>
+              <a:alphaOff val="0"/>
+            </a:schemeClr>
+          </a:solidFill>
+          <a:prstDash val="solid"/>
+          <a:miter lim="800000"/>
+        </a:ln>
+        <a:effectLst/>
+      </dsp:spPr>
+      <dsp:style>
+        <a:lnRef idx="2">
+          <a:scrgbClr r="0" g="0" b="0"/>
+        </a:lnRef>
+        <a:fillRef idx="0">
+          <a:scrgbClr r="0" g="0" b="0"/>
+        </a:fillRef>
+        <a:effectRef idx="0">
+          <a:scrgbClr r="0" g="0" b="0"/>
+        </a:effectRef>
+        <a:fontRef idx="minor"/>
+      </dsp:style>
+    </dsp:sp>
+    <dsp:sp modelId="{E9315C65-5AD9-4BF9-96C1-1578D815F1D1}">
+      <dsp:nvSpPr>
+        <dsp:cNvPr id="0" name=""/>
+        <dsp:cNvSpPr/>
+      </dsp:nvSpPr>
+      <dsp:spPr>
+        <a:xfrm>
+          <a:off x="2793167" y="811010"/>
+          <a:ext cx="1961746" cy="1491575"/>
         </a:xfrm>
         <a:custGeom>
           <a:avLst/>
@@ -2634,13 +2781,13 @@
                 <a:pt x="0" y="0"/>
               </a:moveTo>
               <a:lnTo>
-                <a:pt x="0" y="1886136"/>
+                <a:pt x="0" y="1321341"/>
               </a:lnTo>
               <a:lnTo>
-                <a:pt x="2800275" y="1886136"/>
+                <a:pt x="1961746" y="1321341"/>
               </a:lnTo>
               <a:lnTo>
-                <a:pt x="2800275" y="2129135"/>
+                <a:pt x="1961746" y="1491575"/>
               </a:lnTo>
             </a:path>
           </a:pathLst>
@@ -2673,15 +2820,15 @@
         <a:fontRef idx="minor"/>
       </dsp:style>
     </dsp:sp>
-    <dsp:sp modelId="{23B445D1-403E-401C-849E-DA7E490462F7}">
+    <dsp:sp modelId="{1C9CBE24-F502-4E37-8D80-9E7CBEA70780}">
       <dsp:nvSpPr>
         <dsp:cNvPr id="0" name=""/>
         <dsp:cNvSpPr/>
       </dsp:nvSpPr>
       <dsp:spPr>
         <a:xfrm>
-          <a:off x="4018280" y="1159254"/>
-          <a:ext cx="91440" cy="2129135"/>
+          <a:off x="2747447" y="811010"/>
+          <a:ext cx="91440" cy="1491575"/>
         </a:xfrm>
         <a:custGeom>
           <a:avLst/>
@@ -2695,7 +2842,7 @@
                 <a:pt x="45720" y="0"/>
               </a:moveTo>
               <a:lnTo>
-                <a:pt x="45720" y="2129135"/>
+                <a:pt x="45720" y="1491575"/>
               </a:lnTo>
             </a:path>
           </a:pathLst>
@@ -2728,15 +2875,15 @@
         <a:fontRef idx="minor"/>
       </dsp:style>
     </dsp:sp>
-    <dsp:sp modelId="{4E350251-E89F-4B92-BEF0-97957B57F1A6}">
+    <dsp:sp modelId="{9BB12E16-BA76-49C4-BD20-929E7D7E2D67}">
       <dsp:nvSpPr>
         <dsp:cNvPr id="0" name=""/>
         <dsp:cNvSpPr/>
       </dsp:nvSpPr>
       <dsp:spPr>
         <a:xfrm>
-          <a:off x="1263724" y="1159254"/>
-          <a:ext cx="2800275" cy="2129135"/>
+          <a:off x="831420" y="811010"/>
+          <a:ext cx="1961746" cy="1491575"/>
         </a:xfrm>
         <a:custGeom>
           <a:avLst/>
@@ -2747,16 +2894,16 @@
           <a:pathLst>
             <a:path>
               <a:moveTo>
-                <a:pt x="2800275" y="0"/>
+                <a:pt x="1961746" y="0"/>
               </a:moveTo>
               <a:lnTo>
-                <a:pt x="2800275" y="1886136"/>
+                <a:pt x="1961746" y="1321341"/>
               </a:lnTo>
               <a:lnTo>
-                <a:pt x="0" y="1886136"/>
+                <a:pt x="0" y="1321341"/>
               </a:lnTo>
               <a:lnTo>
-                <a:pt x="0" y="2129135"/>
+                <a:pt x="0" y="1491575"/>
               </a:lnTo>
             </a:path>
           </a:pathLst>
@@ -2789,15 +2936,15 @@
         <a:fontRef idx="minor"/>
       </dsp:style>
     </dsp:sp>
-    <dsp:sp modelId="{4B1F0272-BF1A-4779-88BA-492E13DACC51}">
+    <dsp:sp modelId="{C1D4043B-660F-4D82-B918-537AEE2442F4}">
       <dsp:nvSpPr>
         <dsp:cNvPr id="0" name=""/>
         <dsp:cNvSpPr/>
       </dsp:nvSpPr>
       <dsp:spPr>
         <a:xfrm>
-          <a:off x="2906861" y="2116"/>
-          <a:ext cx="2314277" cy="1157138"/>
+          <a:off x="1982528" y="371"/>
+          <a:ext cx="1621277" cy="810638"/>
         </a:xfrm>
         <a:prstGeom prst="rect">
           <a:avLst/>
@@ -2866,12 +3013,12 @@
         </a:fontRef>
       </dsp:style>
       <dsp:txBody>
-        <a:bodyPr spcFirstLastPara="0" vert="horz" wrap="square" lIns="22860" tIns="22860" rIns="22860" bIns="22860" numCol="1" spcCol="1270" anchor="ctr" anchorCtr="0">
+        <a:bodyPr spcFirstLastPara="0" vert="horz" wrap="square" lIns="15240" tIns="15240" rIns="15240" bIns="15240" numCol="1" spcCol="1270" anchor="ctr" anchorCtr="0">
           <a:noAutofit/>
         </a:bodyPr>
         <a:lstStyle/>
         <a:p>
-          <a:pPr marL="0" lvl="0" indent="0" algn="ctr" defTabSz="1600200">
+          <a:pPr marL="0" lvl="0" indent="0" algn="ctr" defTabSz="1066800">
             <a:lnSpc>
               <a:spcPct val="90000"/>
             </a:lnSpc>
@@ -2884,26 +3031,26 @@
             <a:buNone/>
           </a:pPr>
           <a:r>
-            <a:rPr lang="id-ID" sz="3600" b="1" i="0" kern="1200" dirty="0"/>
+            <a:rPr lang="id-ID" sz="2400" b="1" i="0" kern="1200" dirty="0"/>
             <a:t>Direktur</a:t>
           </a:r>
-          <a:endParaRPr lang="id-ID" sz="3600" kern="1200" dirty="0"/>
+          <a:endParaRPr lang="id-ID" sz="2400" kern="1200" dirty="0"/>
         </a:p>
       </dsp:txBody>
       <dsp:txXfrm>
-        <a:off x="2906861" y="2116"/>
-        <a:ext cx="2314277" cy="1157138"/>
+        <a:off x="1982528" y="371"/>
+        <a:ext cx="1621277" cy="810638"/>
       </dsp:txXfrm>
     </dsp:sp>
-    <dsp:sp modelId="{E02CE35F-D62C-4755-B29E-7616747C1F83}">
+    <dsp:sp modelId="{062BD152-9F56-4789-A253-D16EA6A9BCD3}">
       <dsp:nvSpPr>
         <dsp:cNvPr id="0" name=""/>
         <dsp:cNvSpPr/>
       </dsp:nvSpPr>
       <dsp:spPr>
         <a:xfrm>
-          <a:off x="106585" y="3288390"/>
-          <a:ext cx="2314277" cy="1157138"/>
+          <a:off x="20781" y="2302586"/>
+          <a:ext cx="1621277" cy="810638"/>
         </a:xfrm>
         <a:prstGeom prst="rect">
           <a:avLst/>
@@ -2972,12 +3119,12 @@
         </a:fontRef>
       </dsp:style>
       <dsp:txBody>
-        <a:bodyPr spcFirstLastPara="0" vert="horz" wrap="square" lIns="22860" tIns="22860" rIns="22860" bIns="22860" numCol="1" spcCol="1270" anchor="ctr" anchorCtr="0">
+        <a:bodyPr spcFirstLastPara="0" vert="horz" wrap="square" lIns="15240" tIns="15240" rIns="15240" bIns="15240" numCol="1" spcCol="1270" anchor="ctr" anchorCtr="0">
           <a:noAutofit/>
         </a:bodyPr>
         <a:lstStyle/>
         <a:p>
-          <a:pPr marL="0" lvl="0" indent="0" algn="ctr" defTabSz="1600200">
+          <a:pPr marL="0" lvl="0" indent="0" algn="ctr" defTabSz="1066800">
             <a:lnSpc>
               <a:spcPct val="90000"/>
             </a:lnSpc>
@@ -2990,30 +3137,30 @@
             <a:buNone/>
           </a:pPr>
           <a:r>
-            <a:rPr lang="id-ID" sz="3600" b="1" i="0" kern="1200" dirty="0"/>
+            <a:rPr lang="id-ID" sz="2400" b="1" i="0" kern="1200" dirty="0"/>
             <a:t>Staff</a:t>
           </a:r>
           <a:r>
-            <a:rPr lang="id-ID" sz="3600" b="0" i="0" kern="1200" dirty="0"/>
+            <a:rPr lang="id-ID" sz="2400" b="0" i="0" kern="1200" dirty="0"/>
             <a:t> </a:t>
           </a:r>
-          <a:endParaRPr lang="id-ID" sz="3600" kern="1200" dirty="0"/>
+          <a:endParaRPr lang="id-ID" sz="2400" kern="1200" dirty="0"/>
         </a:p>
       </dsp:txBody>
       <dsp:txXfrm>
-        <a:off x="106585" y="3288390"/>
-        <a:ext cx="2314277" cy="1157138"/>
+        <a:off x="20781" y="2302586"/>
+        <a:ext cx="1621277" cy="810638"/>
       </dsp:txXfrm>
     </dsp:sp>
-    <dsp:sp modelId="{44C7A7C0-95D0-4BFF-A1FB-EA3FAC629288}">
+    <dsp:sp modelId="{08E155AF-8F71-462F-84F3-A8A8BFDF98CE}">
       <dsp:nvSpPr>
         <dsp:cNvPr id="0" name=""/>
         <dsp:cNvSpPr/>
       </dsp:nvSpPr>
       <dsp:spPr>
         <a:xfrm>
-          <a:off x="2906861" y="3288390"/>
-          <a:ext cx="2314277" cy="1157138"/>
+          <a:off x="1982528" y="2302586"/>
+          <a:ext cx="1621277" cy="810638"/>
         </a:xfrm>
         <a:prstGeom prst="rect">
           <a:avLst/>
@@ -3082,12 +3229,12 @@
         </a:fontRef>
       </dsp:style>
       <dsp:txBody>
-        <a:bodyPr spcFirstLastPara="0" vert="horz" wrap="square" lIns="22860" tIns="22860" rIns="22860" bIns="22860" numCol="1" spcCol="1270" anchor="ctr" anchorCtr="0">
+        <a:bodyPr spcFirstLastPara="0" vert="horz" wrap="square" lIns="15240" tIns="15240" rIns="15240" bIns="15240" numCol="1" spcCol="1270" anchor="ctr" anchorCtr="0">
           <a:noAutofit/>
         </a:bodyPr>
         <a:lstStyle/>
         <a:p>
-          <a:pPr marL="0" lvl="0" indent="0" algn="ctr" defTabSz="1600200">
+          <a:pPr marL="0" lvl="0" indent="0" algn="ctr" defTabSz="1066800">
             <a:lnSpc>
               <a:spcPct val="90000"/>
             </a:lnSpc>
@@ -3100,30 +3247,30 @@
             <a:buNone/>
           </a:pPr>
           <a:r>
-            <a:rPr lang="id-ID" sz="3600" b="1" i="0" kern="1200" dirty="0"/>
+            <a:rPr lang="id-ID" sz="2400" b="1" i="0" kern="1200" dirty="0"/>
             <a:t>Staff</a:t>
           </a:r>
           <a:r>
-            <a:rPr lang="id-ID" sz="3600" b="0" i="0" kern="1200" dirty="0"/>
+            <a:rPr lang="id-ID" sz="2400" b="0" i="0" kern="1200" dirty="0"/>
             <a:t> </a:t>
           </a:r>
-          <a:endParaRPr lang="id-ID" sz="3600" kern="1200" dirty="0"/>
+          <a:endParaRPr lang="id-ID" sz="2400" kern="1200" dirty="0"/>
         </a:p>
       </dsp:txBody>
       <dsp:txXfrm>
-        <a:off x="2906861" y="3288390"/>
-        <a:ext cx="2314277" cy="1157138"/>
+        <a:off x="1982528" y="2302586"/>
+        <a:ext cx="1621277" cy="810638"/>
       </dsp:txXfrm>
     </dsp:sp>
-    <dsp:sp modelId="{91E08EDF-18BB-4F4C-A6CA-E9878E099671}">
+    <dsp:sp modelId="{7CD488D0-6009-4A29-B90C-C15742A5FD24}">
       <dsp:nvSpPr>
         <dsp:cNvPr id="0" name=""/>
         <dsp:cNvSpPr/>
       </dsp:nvSpPr>
       <dsp:spPr>
         <a:xfrm>
-          <a:off x="5707136" y="3288390"/>
-          <a:ext cx="2314277" cy="1157138"/>
+          <a:off x="3944274" y="2302586"/>
+          <a:ext cx="1621277" cy="810638"/>
         </a:xfrm>
         <a:prstGeom prst="rect">
           <a:avLst/>
@@ -3192,12 +3339,12 @@
         </a:fontRef>
       </dsp:style>
       <dsp:txBody>
-        <a:bodyPr spcFirstLastPara="0" vert="horz" wrap="square" lIns="22860" tIns="22860" rIns="22860" bIns="22860" numCol="1" spcCol="1270" anchor="ctr" anchorCtr="0">
+        <a:bodyPr spcFirstLastPara="0" vert="horz" wrap="square" lIns="15240" tIns="15240" rIns="15240" bIns="15240" numCol="1" spcCol="1270" anchor="ctr" anchorCtr="0">
           <a:noAutofit/>
         </a:bodyPr>
         <a:lstStyle/>
         <a:p>
-          <a:pPr marL="0" lvl="0" indent="0" algn="ctr" defTabSz="1600200">
+          <a:pPr marL="0" lvl="0" indent="0" algn="ctr" defTabSz="1066800">
             <a:lnSpc>
               <a:spcPct val="90000"/>
             </a:lnSpc>
@@ -3210,30 +3357,136 @@
             <a:buNone/>
           </a:pPr>
           <a:r>
-            <a:rPr lang="id-ID" sz="3600" b="1" i="0" kern="1200" dirty="0"/>
+            <a:rPr lang="id-ID" sz="2400" b="1" i="0" kern="1200" dirty="0"/>
             <a:t>Staff</a:t>
           </a:r>
           <a:r>
-            <a:rPr lang="id-ID" sz="3600" b="0" i="0" kern="1200" dirty="0"/>
+            <a:rPr lang="id-ID" sz="2400" b="0" i="0" kern="1200" dirty="0"/>
             <a:t> </a:t>
           </a:r>
-          <a:endParaRPr lang="id-ID" sz="3600" kern="1200" dirty="0"/>
+          <a:endParaRPr lang="id-ID" sz="2400" kern="1200" dirty="0"/>
         </a:p>
       </dsp:txBody>
       <dsp:txXfrm>
-        <a:off x="5707136" y="3288390"/>
-        <a:ext cx="2314277" cy="1157138"/>
+        <a:off x="3944274" y="2302586"/>
+        <a:ext cx="1621277" cy="810638"/>
       </dsp:txXfrm>
     </dsp:sp>
-    <dsp:sp modelId="{4AB33A37-8968-451F-BDAF-6191A394821C}">
+    <dsp:sp modelId="{12EB8A7C-C5E3-41B1-AF2B-D3081296A567}">
       <dsp:nvSpPr>
         <dsp:cNvPr id="0" name=""/>
         <dsp:cNvSpPr/>
       </dsp:nvSpPr>
       <dsp:spPr>
         <a:xfrm>
-          <a:off x="1506723" y="1645253"/>
-          <a:ext cx="2314277" cy="1157138"/>
+          <a:off x="2963401" y="3453693"/>
+          <a:ext cx="1621277" cy="810638"/>
+        </a:xfrm>
+        <a:prstGeom prst="rect">
+          <a:avLst/>
+        </a:prstGeom>
+        <a:gradFill rotWithShape="0">
+          <a:gsLst>
+            <a:gs pos="0">
+              <a:schemeClr val="accent3">
+                <a:hueOff val="0"/>
+                <a:satOff val="0"/>
+                <a:lumOff val="0"/>
+                <a:alphaOff val="0"/>
+                <a:satMod val="103000"/>
+                <a:lumMod val="102000"/>
+                <a:tint val="94000"/>
+              </a:schemeClr>
+            </a:gs>
+            <a:gs pos="50000">
+              <a:schemeClr val="accent3">
+                <a:hueOff val="0"/>
+                <a:satOff val="0"/>
+                <a:lumOff val="0"/>
+                <a:alphaOff val="0"/>
+                <a:satMod val="110000"/>
+                <a:lumMod val="100000"/>
+                <a:shade val="100000"/>
+              </a:schemeClr>
+            </a:gs>
+            <a:gs pos="100000">
+              <a:schemeClr val="accent3">
+                <a:hueOff val="0"/>
+                <a:satOff val="0"/>
+                <a:lumOff val="0"/>
+                <a:alphaOff val="0"/>
+                <a:lumMod val="99000"/>
+                <a:satMod val="120000"/>
+                <a:shade val="78000"/>
+              </a:schemeClr>
+            </a:gs>
+          </a:gsLst>
+          <a:lin ang="5400000" scaled="0"/>
+        </a:gradFill>
+        <a:ln>
+          <a:noFill/>
+        </a:ln>
+        <a:effectLst>
+          <a:outerShdw blurRad="57150" dist="19050" dir="5400000" algn="ctr" rotWithShape="0">
+            <a:srgbClr val="000000">
+              <a:alpha val="63000"/>
+            </a:srgbClr>
+          </a:outerShdw>
+        </a:effectLst>
+      </dsp:spPr>
+      <dsp:style>
+        <a:lnRef idx="0">
+          <a:scrgbClr r="0" g="0" b="0"/>
+        </a:lnRef>
+        <a:fillRef idx="3">
+          <a:scrgbClr r="0" g="0" b="0"/>
+        </a:fillRef>
+        <a:effectRef idx="3">
+          <a:scrgbClr r="0" g="0" b="0"/>
+        </a:effectRef>
+        <a:fontRef idx="minor">
+          <a:schemeClr val="lt1"/>
+        </a:fontRef>
+      </dsp:style>
+      <dsp:txBody>
+        <a:bodyPr spcFirstLastPara="0" vert="horz" wrap="square" lIns="15240" tIns="15240" rIns="15240" bIns="15240" numCol="1" spcCol="1270" anchor="ctr" anchorCtr="0">
+          <a:noAutofit/>
+        </a:bodyPr>
+        <a:lstStyle/>
+        <a:p>
+          <a:pPr marL="0" lvl="0" indent="0" algn="ctr" defTabSz="1066800">
+            <a:lnSpc>
+              <a:spcPct val="90000"/>
+            </a:lnSpc>
+            <a:spcBef>
+              <a:spcPct val="0"/>
+            </a:spcBef>
+            <a:spcAft>
+              <a:spcPct val="35000"/>
+            </a:spcAft>
+            <a:buNone/>
+          </a:pPr>
+          <a:r>
+            <a:rPr lang="en-US" sz="2400" kern="1200" dirty="0" err="1"/>
+            <a:t>SubStaff</a:t>
+          </a:r>
+          <a:endParaRPr lang="id-ID" sz="2800" kern="1200" dirty="0"/>
+        </a:p>
+      </dsp:txBody>
+      <dsp:txXfrm>
+        <a:off x="2963401" y="3453693"/>
+        <a:ext cx="1621277" cy="810638"/>
+      </dsp:txXfrm>
+    </dsp:sp>
+    <dsp:sp modelId="{3CD4C761-1F5D-49B9-A43D-03E8FA074AE1}">
+      <dsp:nvSpPr>
+        <dsp:cNvPr id="0" name=""/>
+        <dsp:cNvSpPr/>
+      </dsp:nvSpPr>
+      <dsp:spPr>
+        <a:xfrm>
+          <a:off x="1001654" y="1151478"/>
+          <a:ext cx="1621277" cy="810638"/>
         </a:xfrm>
         <a:prstGeom prst="rect">
           <a:avLst/>
@@ -3302,12 +3555,12 @@
         </a:fontRef>
       </dsp:style>
       <dsp:txBody>
-        <a:bodyPr spcFirstLastPara="0" vert="horz" wrap="square" lIns="22860" tIns="22860" rIns="22860" bIns="22860" numCol="1" spcCol="1270" anchor="ctr" anchorCtr="0">
+        <a:bodyPr spcFirstLastPara="0" vert="horz" wrap="square" lIns="15240" tIns="15240" rIns="15240" bIns="15240" numCol="1" spcCol="1270" anchor="ctr" anchorCtr="0">
           <a:noAutofit/>
         </a:bodyPr>
         <a:lstStyle/>
         <a:p>
-          <a:pPr marL="0" lvl="0" indent="0" algn="ctr" defTabSz="1600200">
+          <a:pPr marL="0" lvl="0" indent="0" algn="ctr" defTabSz="1066800">
             <a:lnSpc>
               <a:spcPct val="90000"/>
             </a:lnSpc>
@@ -3320,15 +3573,15 @@
             <a:buNone/>
           </a:pPr>
           <a:r>
-            <a:rPr lang="id-ID" sz="3600" b="1" i="0" kern="1200" dirty="0"/>
+            <a:rPr lang="id-ID" sz="2400" b="1" i="0" kern="1200" dirty="0"/>
             <a:t>Manager</a:t>
           </a:r>
-          <a:endParaRPr lang="id-ID" sz="3600" kern="1200" dirty="0"/>
+          <a:endParaRPr lang="id-ID" sz="2400" kern="1200" dirty="0"/>
         </a:p>
       </dsp:txBody>
       <dsp:txXfrm>
-        <a:off x="1506723" y="1645253"/>
-        <a:ext cx="2314277" cy="1157138"/>
+        <a:off x="1001654" y="1151478"/>
+        <a:ext cx="1621277" cy="810638"/>
       </dsp:txXfrm>
     </dsp:sp>
   </dsp:spTree>
@@ -7550,7 +7803,7 @@
           <a:p>
             <a:fld id="{7AD79B96-C293-4C0B-9100-58C95BDC99F2}" type="datetimeFigureOut">
               <a:rPr lang="id-ID" smtClean="0"/>
-              <a:t>03/07/2026</a:t>
+              <a:t>13/07/2026</a:t>
             </a:fld>
             <a:endParaRPr lang="id-ID"/>
           </a:p>
@@ -7750,7 +8003,7 @@
           <a:p>
             <a:fld id="{7AD79B96-C293-4C0B-9100-58C95BDC99F2}" type="datetimeFigureOut">
               <a:rPr lang="id-ID" smtClean="0"/>
-              <a:t>03/07/2026</a:t>
+              <a:t>13/07/2026</a:t>
             </a:fld>
             <a:endParaRPr lang="id-ID"/>
           </a:p>
@@ -7960,7 +8213,7 @@
           <a:p>
             <a:fld id="{7AD79B96-C293-4C0B-9100-58C95BDC99F2}" type="datetimeFigureOut">
               <a:rPr lang="id-ID" smtClean="0"/>
-              <a:t>03/07/2026</a:t>
+              <a:t>13/07/2026</a:t>
             </a:fld>
             <a:endParaRPr lang="id-ID"/>
           </a:p>
@@ -8160,7 +8413,7 @@
           <a:p>
             <a:fld id="{7AD79B96-C293-4C0B-9100-58C95BDC99F2}" type="datetimeFigureOut">
               <a:rPr lang="id-ID" smtClean="0"/>
-              <a:t>03/07/2026</a:t>
+              <a:t>13/07/2026</a:t>
             </a:fld>
             <a:endParaRPr lang="id-ID"/>
           </a:p>
@@ -8436,7 +8689,7 @@
           <a:p>
             <a:fld id="{7AD79B96-C293-4C0B-9100-58C95BDC99F2}" type="datetimeFigureOut">
               <a:rPr lang="id-ID" smtClean="0"/>
-              <a:t>03/07/2026</a:t>
+              <a:t>13/07/2026</a:t>
             </a:fld>
             <a:endParaRPr lang="id-ID"/>
           </a:p>
@@ -8704,7 +8957,7 @@
           <a:p>
             <a:fld id="{7AD79B96-C293-4C0B-9100-58C95BDC99F2}" type="datetimeFigureOut">
               <a:rPr lang="id-ID" smtClean="0"/>
-              <a:t>03/07/2026</a:t>
+              <a:t>13/07/2026</a:t>
             </a:fld>
             <a:endParaRPr lang="id-ID"/>
           </a:p>
@@ -9119,7 +9372,7 @@
           <a:p>
             <a:fld id="{7AD79B96-C293-4C0B-9100-58C95BDC99F2}" type="datetimeFigureOut">
               <a:rPr lang="id-ID" smtClean="0"/>
-              <a:t>03/07/2026</a:t>
+              <a:t>13/07/2026</a:t>
             </a:fld>
             <a:endParaRPr lang="id-ID"/>
           </a:p>
@@ -9261,7 +9514,7 @@
           <a:p>
             <a:fld id="{7AD79B96-C293-4C0B-9100-58C95BDC99F2}" type="datetimeFigureOut">
               <a:rPr lang="id-ID" smtClean="0"/>
-              <a:t>03/07/2026</a:t>
+              <a:t>13/07/2026</a:t>
             </a:fld>
             <a:endParaRPr lang="id-ID"/>
           </a:p>
@@ -9374,7 +9627,7 @@
           <a:p>
             <a:fld id="{7AD79B96-C293-4C0B-9100-58C95BDC99F2}" type="datetimeFigureOut">
               <a:rPr lang="id-ID" smtClean="0"/>
-              <a:t>03/07/2026</a:t>
+              <a:t>13/07/2026</a:t>
             </a:fld>
             <a:endParaRPr lang="id-ID"/>
           </a:p>
@@ -9687,7 +9940,7 @@
           <a:p>
             <a:fld id="{7AD79B96-C293-4C0B-9100-58C95BDC99F2}" type="datetimeFigureOut">
               <a:rPr lang="id-ID" smtClean="0"/>
-              <a:t>03/07/2026</a:t>
+              <a:t>13/07/2026</a:t>
             </a:fld>
             <a:endParaRPr lang="id-ID"/>
           </a:p>
@@ -9976,7 +10229,7 @@
           <a:p>
             <a:fld id="{7AD79B96-C293-4C0B-9100-58C95BDC99F2}" type="datetimeFigureOut">
               <a:rPr lang="id-ID" smtClean="0"/>
-              <a:t>03/07/2026</a:t>
+              <a:t>13/07/2026</a:t>
             </a:fld>
             <a:endParaRPr lang="id-ID"/>
           </a:p>
@@ -10219,7 +10472,7 @@
           <a:p>
             <a:fld id="{7AD79B96-C293-4C0B-9100-58C95BDC99F2}" type="datetimeFigureOut">
               <a:rPr lang="id-ID" smtClean="0"/>
-              <a:t>03/07/2026</a:t>
+              <a:t>13/07/2026</a:t>
             </a:fld>
             <a:endParaRPr lang="id-ID"/>
           </a:p>
@@ -10679,10 +10932,10 @@
       </p:sp>
       <p:graphicFrame>
         <p:nvGraphicFramePr>
-          <p:cNvPr id="5" name="Diagram 4">
+          <p:cNvPr id="2" name="Diagram 1">
             <a:extLst>
               <a:ext uri="{FF2B5EF4-FFF2-40B4-BE49-F238E27FC236}">
-                <a16:creationId xmlns:a16="http://schemas.microsoft.com/office/drawing/2014/main" id="{312DA03B-2597-E2A9-31D6-01A3F04CC5CA}"/>
+                <a16:creationId xmlns:a16="http://schemas.microsoft.com/office/drawing/2014/main" id="{9BF66870-1EF9-3066-6A8F-37AA6D65D13A}"/>
               </a:ext>
             </a:extLst>
           </p:cNvPr>
@@ -10690,14 +10943,14 @@
           <p:nvPr>
             <p:extLst>
               <p:ext uri="{D42A27DB-BD31-4B8C-83A1-F6EECF244321}">
-                <p14:modId xmlns:p14="http://schemas.microsoft.com/office/powerpoint/2010/main" val="3255140658"/>
+                <p14:modId xmlns:p14="http://schemas.microsoft.com/office/powerpoint/2010/main" val="2511213864"/>
               </p:ext>
             </p:extLst>
           </p:nvPr>
         </p:nvGraphicFramePr>
         <p:xfrm>
-          <a:off x="2032000" y="1690688"/>
-          <a:ext cx="8128000" cy="4447645"/>
+          <a:off x="3302833" y="1690688"/>
+          <a:ext cx="5586334" cy="4264704"/>
         </p:xfrm>
         <a:graphic>
           <a:graphicData uri="http://schemas.openxmlformats.org/drawingml/2006/diagram">
